--- a/soutenance/support_eckert.pptx
+++ b/soutenance/support_eckert.pptx
@@ -25,34 +25,6 @@
     <p:sldId id="273" r:id="rId25"/>
     <p:sldId id="274" r:id="rId26"/>
     <p:sldId id="275" r:id="rId27"/>
-    <p:sldId id="276" r:id="rId28"/>
-    <p:sldId id="277" r:id="rId29"/>
-    <p:sldId id="278" r:id="rId30"/>
-    <p:sldId id="279" r:id="rId31"/>
-    <p:sldId id="280" r:id="rId32"/>
-    <p:sldId id="281" r:id="rId33"/>
-    <p:sldId id="282" r:id="rId34"/>
-    <p:sldId id="283" r:id="rId35"/>
-    <p:sldId id="284" r:id="rId36"/>
-    <p:sldId id="285" r:id="rId37"/>
-    <p:sldId id="286" r:id="rId38"/>
-    <p:sldId id="287" r:id="rId39"/>
-    <p:sldId id="288" r:id="rId40"/>
-    <p:sldId id="289" r:id="rId41"/>
-    <p:sldId id="290" r:id="rId42"/>
-    <p:sldId id="291" r:id="rId43"/>
-    <p:sldId id="292" r:id="rId44"/>
-    <p:sldId id="293" r:id="rId45"/>
-    <p:sldId id="294" r:id="rId46"/>
-    <p:sldId id="295" r:id="rId47"/>
-    <p:sldId id="296" r:id="rId48"/>
-    <p:sldId id="297" r:id="rId49"/>
-    <p:sldId id="298" r:id="rId50"/>
-    <p:sldId id="299" r:id="rId51"/>
-    <p:sldId id="300" r:id="rId52"/>
-    <p:sldId id="301" r:id="rId53"/>
-    <p:sldId id="302" r:id="rId54"/>
-    <p:sldId id="303" r:id="rId55"/>
   </p:sldIdLst>
   <p:sldSz cx="12192000" cy="6858000" type="screen4x3"/>
   <p:notesSz cx="6858000" cy="9144000"/>
@@ -549,7 +521,7 @@
           <a:lstStyle/>
           <a:p>
             <a:r>
-              <a:t>Se présenter en 20 s. Annoncer : obligation Eckert, plateforme data conçue et opérée, périmètre honnête. 45 min + 15 min de questions.</a:t>
+              <a:t>Bonjour. En 30 minutes, je vous présente une plateforme data que j'ai conçue et opérée pour répondre à l'obligation loi Eckert, puis je réponds à vos questions.</a:t>
             </a:r>
           </a:p>
         </p:txBody>
@@ -619,7 +591,7 @@
           <a:lstStyle/>
           <a:p>
             <a:r>
-              <a:t>Montrer le schéma d'architecture. Chaque brique répond à un besoin de C4.1.1.</a:t>
+              <a:t>Le rapprochement tourne sur un cluster Spark et gradue la confiance en trois niveaux, faute d'identifiant national. Résultat : 4 162 contrats potentiellement en déshérence, dont 88 millions d'euros en niveau certain. Sur le seul volume mensuel, un Postgres indexé suffirait — je l'assume ; Spark se justifie par la volumétrie cumulée et la trajectoire de croissance.</a:t>
             </a:r>
           </a:p>
         </p:txBody>
@@ -689,7 +661,7 @@
           <a:lstStyle/>
           <a:p>
             <a:r>
-              <a:t>Ne pas survendre : chaque avantage a sa contrepartie, assumée.</a:t>
+              <a:t>La CI/CD, construite de zéro, enchaîne cinq contrôles à chaque push : qualité, tests, scan de sécurité, validation des DAG, et déploiement. Le déploiement est réel : l'image est publiée sur le registre GitHub, puis re-téléchargée et testée. Détail assumé : mon premier run était rouge — la preuve que les garde-fous mordent.</a:t>
             </a:r>
           </a:p>
         </p:txBody>
@@ -759,7 +731,7 @@
           <a:lstStyle/>
           <a:p>
             <a:r>
-              <a:t>Résultat d'un choix délibéré, pas d'un hasard.</a:t>
+              <a:t>La supervision surveille le statut, les SLA et surtout le taux de rejet. Chaque étape est journalisée. Sur échec, une alerte part vraiment : j'ai capturé la notification reçue par le destinataire, avec le lien vers le journal. Un dépassement de délai escalade par courriel.</a:t>
             </a:r>
           </a:p>
         </p:txBody>
@@ -829,7 +801,7 @@
           <a:lstStyle/>
           <a:p>
             <a:r>
-              <a:t>Le jury attend une méthode + des hypothèses, pas un devis exact. Le lock-in se traite ici.</a:t>
+              <a:t>Une feuille de route calendaire cadre la maintenance : rotation des secrets au trimestre, certificats au semestre. Et une documentation avec runbook permet à un successeur de reprendre sans moi — d'ailleurs c'est cette procédure qui a servi à monter la plateforme.</a:t>
             </a:r>
           </a:p>
         </p:txBody>
@@ -899,7 +871,7 @@
           <a:lstStyle/>
           <a:p>
             <a:r>
-              <a:t>Matériau direct de la question de jury sur le lock-in et le non-retenu.</a:t>
+              <a:t>La recette est automatisée : dix-neuf tests fonctionnels, structurels et de sécurité — les droits, les secrets, les dépendances. Elle est rejouée à chaque push. Ce n'est pas un instantané, c'est un filet permanent. Je peux la lancer en direct : elle passe en moins d'une seconde.</a:t>
             </a:r>
           </a:p>
         </p:txBody>
@@ -969,7 +941,7 @@
           <a:lstStyle/>
           <a:p>
             <a:r>
-              <a:t>La séparation des couches = colonne vertébrale de la sécurité et de la qualité.</a:t>
+              <a:t>Voici l'incident, vécu en production. Le contrôle d'entrée validait le fichier sur ses métadonnées déclarées : taille et empreinte annoncées. Après deux mois nominaux, le producteur a cessé de les publier. Résultat : rejet systématique, traitement en erreur chaque jour — alors que les fichiers étaient parfaitement exploitables. La cause n'est pas triviale : le contrat de données change sans préavis, côté producteur.</a:t>
             </a:r>
           </a:p>
         </p:txBody>
@@ -1039,7 +1011,7 @@
           <a:lstStyle/>
           <a:p>
             <a:r>
-              <a:t>Point de conception sensible : sans cette cohérence, le rapprochement rate les noms accentués.</a:t>
+              <a:t>Le correctif inverse la logique : les métadonnées ne font qu'alerter, la vérité c'est le contenu — structure, volumétrie, taux de rejet. Un fichier sain sans métadonnées passe désormais ; un fichier corrompu reste bloqué. Un test de non-régression verrouille le cas. Je peux rejouer l'avant/après en direct, en moins d'une seconde. La leçon : une source externe n'est jamais un contrat.</a:t>
             </a:r>
           </a:p>
         </p:txBody>
@@ -1109,7 +1081,7 @@
           <a:lstStyle/>
           <a:p>
             <a:r>
-              <a:t>Point fort réel : la sécurité est prouvée par des tests, pas seulement affirmée.</a:t>
+              <a:t>En bilan : la chaîne complète tourne et est prouvée, la sécurité est testée, la CI est verte, l'incident est rejoué. J'assume mes limites : une seule instance Postgres, le job Spark lancé manuellement, pas de supervision d'infrastructure. Si je continuais, j'outillerais le déclenchement Spark par Airflow et une supervision infra. Merci — je suis prêt pour vos questions.</a:t>
             </a:r>
           </a:p>
         </p:txBody>
@@ -1179,7 +1151,7 @@
           <a:lstStyle/>
           <a:p>
             <a:r>
-              <a:t>Montrer la capture de la vue lue par elt_reader.</a:t>
+              <a:t>Annexe ouverte si le jury creuse l'entrepôt.</a:t>
             </a:r>
           </a:p>
         </p:txBody>
@@ -1249,7 +1221,7 @@
           <a:lstStyle/>
           <a:p>
             <a:r>
-              <a:t>Annoncer les trois. La grille exige les trois, dont le distribué.</a:t>
+              <a:t>Annexe ouverte sur une question de coût ou de lock-in.</a:t>
             </a:r>
           </a:p>
         </p:txBody>
@@ -1319,7 +1291,7 @@
           <a:lstStyle/>
           <a:p>
             <a:r>
-              <a:t>Poser l'enjeu réglementaire en 30 s : une mutuelle doit rechercher ses assurés décédés et reverser les capitaux non réclamés, sous peine de sanction.</a:t>
+              <a:t>Une mutuelle doit repérer ses adhérents décédés pour verser les capitaux des contrats en déshérence. C'est une obligation légale — la loi Eckert — sous risque de sanction. La source de vérité, c'est le fichier des décès de l'INSEE.</a:t>
             </a:r>
           </a:p>
         </p:txBody>
@@ -1389,637 +1361,7 @@
           <a:lstStyle/>
           <a:p>
             <a:r>
-              <a:t>Nommage assumé : à l'arrivée d'un fichier, pas de Kafka (source mensuelle).</a:t>
-            </a:r>
-          </a:p>
-        </p:txBody>
-      </p:sp>
-      <p:sp>
-        <p:nvSpPr>
-          <p:cNvPr id="4" name="Slide Number Placeholder 3"/>
-          <p:cNvSpPr>
-            <a:spLocks noGrp="1"/>
-          </p:cNvSpPr>
-          <p:nvPr>
-            <p:ph type="sldNum" idx="5" sz="quarter"/>
-          </p:nvPr>
-        </p:nvSpPr>
-        <p:spPr/>
-      </p:sp>
-    </p:spTree>
-  </p:cSld>
-  <p:clrMapOvr>
-    <a:masterClrMapping/>
-  </p:clrMapOvr>
-</p:notes>
-</file>
-
-<file path=ppt/notesSlides/notesSlide21.xml><?xml version="1.0" encoding="utf-8"?>
-<p:notes xmlns:a="http://schemas.openxmlformats.org/drawingml/2006/main" xmlns:p="http://schemas.openxmlformats.org/presentationml/2006/main" xmlns:r="http://schemas.openxmlformats.org/officeDocument/2006/relationships">
-  <p:cSld>
-    <p:spTree>
-      <p:nvGrpSpPr>
-        <p:cNvPr id="1" name=""/>
-        <p:cNvGrpSpPr/>
-        <p:nvPr/>
-      </p:nvGrpSpPr>
-      <p:grpSpPr>
-        <a:xfrm>
-          <a:off x="0" y="0"/>
-          <a:ext cx="0" cy="0"/>
-          <a:chOff x="0" y="0"/>
-          <a:chExt cx="0" cy="0"/>
-        </a:xfrm>
-      </p:grpSpPr>
-      <p:sp>
-        <p:nvSpPr>
-          <p:cNvPr id="2" name="Slide Image Placeholder 1"/>
-          <p:cNvSpPr>
-            <a:spLocks noGrp="1"/>
-          </p:cNvSpPr>
-          <p:nvPr>
-            <p:ph type="sldImg" idx="2"/>
-          </p:nvPr>
-        </p:nvSpPr>
-        <p:spPr/>
-      </p:sp>
-      <p:sp>
-        <p:nvSpPr>
-          <p:cNvPr id="3" name="Notes Placeholder 2"/>
-          <p:cNvSpPr>
-            <a:spLocks noGrp="1"/>
-          </p:cNvSpPr>
-          <p:nvPr>
-            <p:ph type="body" idx="3" sz="quarter"/>
-          </p:nvPr>
-        </p:nvSpPr>
-        <p:spPr/>
-        <p:txBody>
-          <a:bodyPr/>
-          <a:lstStyle/>
-          <a:p>
-            <a:r>
-              <a:t>Montrer la capture du DAG vert. Brique héritée du vécu, reconstruite proprement.</a:t>
-            </a:r>
-          </a:p>
-        </p:txBody>
-      </p:sp>
-      <p:sp>
-        <p:nvSpPr>
-          <p:cNvPr id="4" name="Slide Number Placeholder 3"/>
-          <p:cNvSpPr>
-            <a:spLocks noGrp="1"/>
-          </p:cNvSpPr>
-          <p:nvPr>
-            <p:ph type="sldNum" idx="5" sz="quarter"/>
-          </p:nvPr>
-        </p:nvSpPr>
-        <p:spPr/>
-      </p:sp>
-    </p:spTree>
-  </p:cSld>
-  <p:clrMapOvr>
-    <a:masterClrMapping/>
-  </p:clrMapOvr>
-</p:notes>
-</file>
-
-<file path=ppt/notesSlides/notesSlide22.xml><?xml version="1.0" encoding="utf-8"?>
-<p:notes xmlns:a="http://schemas.openxmlformats.org/drawingml/2006/main" xmlns:p="http://schemas.openxmlformats.org/presentationml/2006/main" xmlns:r="http://schemas.openxmlformats.org/officeDocument/2006/relationships">
-  <p:cSld>
-    <p:spTree>
-      <p:nvGrpSpPr>
-        <p:cNvPr id="1" name=""/>
-        <p:cNvGrpSpPr/>
-        <p:nvPr/>
-      </p:nvGrpSpPr>
-      <p:grpSpPr>
-        <a:xfrm>
-          <a:off x="0" y="0"/>
-          <a:ext cx="0" cy="0"/>
-          <a:chOff x="0" y="0"/>
-          <a:chExt cx="0" cy="0"/>
-        </a:xfrm>
-      </p:grpSpPr>
-      <p:sp>
-        <p:nvSpPr>
-          <p:cNvPr id="2" name="Slide Image Placeholder 1"/>
-          <p:cNvSpPr>
-            <a:spLocks noGrp="1"/>
-          </p:cNvSpPr>
-          <p:nvPr>
-            <p:ph type="sldImg" idx="2"/>
-          </p:nvPr>
-        </p:nvSpPr>
-        <p:spPr/>
-      </p:sp>
-      <p:sp>
-        <p:nvSpPr>
-          <p:cNvPr id="3" name="Notes Placeholder 2"/>
-          <p:cNvSpPr>
-            <a:spLocks noGrp="1"/>
-          </p:cNvSpPr>
-          <p:nvPr>
-            <p:ph type="body" idx="3" sz="quarter"/>
-          </p:nvPr>
-        </p:nvSpPr>
-        <p:spPr/>
-        <p:txBody>
-          <a:bodyPr/>
-          <a:lstStyle/>
-          <a:p>
-            <a:r>
-              <a:t>Question piège anticipée : reconnaître que Postgres suffirait au mois, justifier par la trajectoire.</a:t>
-            </a:r>
-          </a:p>
-        </p:txBody>
-      </p:sp>
-      <p:sp>
-        <p:nvSpPr>
-          <p:cNvPr id="4" name="Slide Number Placeholder 3"/>
-          <p:cNvSpPr>
-            <a:spLocks noGrp="1"/>
-          </p:cNvSpPr>
-          <p:nvPr>
-            <p:ph type="sldNum" idx="5" sz="quarter"/>
-          </p:nvPr>
-        </p:nvSpPr>
-        <p:spPr/>
-      </p:sp>
-    </p:spTree>
-  </p:cSld>
-  <p:clrMapOvr>
-    <a:masterClrMapping/>
-  </p:clrMapOvr>
-</p:notes>
-</file>
-
-<file path=ppt/notesSlides/notesSlide23.xml><?xml version="1.0" encoding="utf-8"?>
-<p:notes xmlns:a="http://schemas.openxmlformats.org/drawingml/2006/main" xmlns:p="http://schemas.openxmlformats.org/presentationml/2006/main" xmlns:r="http://schemas.openxmlformats.org/officeDocument/2006/relationships">
-  <p:cSld>
-    <p:spTree>
-      <p:nvGrpSpPr>
-        <p:cNvPr id="1" name=""/>
-        <p:cNvGrpSpPr/>
-        <p:nvPr/>
-      </p:nvGrpSpPr>
-      <p:grpSpPr>
-        <a:xfrm>
-          <a:off x="0" y="0"/>
-          <a:ext cx="0" cy="0"/>
-          <a:chOff x="0" y="0"/>
-          <a:chExt cx="0" cy="0"/>
-        </a:xfrm>
-      </p:grpSpPr>
-      <p:sp>
-        <p:nvSpPr>
-          <p:cNvPr id="2" name="Slide Image Placeholder 1"/>
-          <p:cNvSpPr>
-            <a:spLocks noGrp="1"/>
-          </p:cNvSpPr>
-          <p:nvPr>
-            <p:ph type="sldImg" idx="2"/>
-          </p:nvPr>
-        </p:nvSpPr>
-        <p:spPr/>
-      </p:sp>
-      <p:sp>
-        <p:nvSpPr>
-          <p:cNvPr id="3" name="Notes Placeholder 2"/>
-          <p:cNvSpPr>
-            <a:spLocks noGrp="1"/>
-          </p:cNvSpPr>
-          <p:nvPr>
-            <p:ph type="body" idx="3" sz="quarter"/>
-          </p:nvPr>
-        </p:nvSpPr>
-        <p:spPr/>
-        <p:txBody>
-          <a:bodyPr/>
-          <a:lstStyle/>
-          <a:p>
-            <a:r>
-              <a:t>Pas d'identifiant national → rapprochement probabiliste → graduation nécessaire.</a:t>
-            </a:r>
-          </a:p>
-        </p:txBody>
-      </p:sp>
-      <p:sp>
-        <p:nvSpPr>
-          <p:cNvPr id="4" name="Slide Number Placeholder 3"/>
-          <p:cNvSpPr>
-            <a:spLocks noGrp="1"/>
-          </p:cNvSpPr>
-          <p:nvPr>
-            <p:ph type="sldNum" idx="5" sz="quarter"/>
-          </p:nvPr>
-        </p:nvSpPr>
-        <p:spPr/>
-      </p:sp>
-    </p:spTree>
-  </p:cSld>
-  <p:clrMapOvr>
-    <a:masterClrMapping/>
-  </p:clrMapOvr>
-</p:notes>
-</file>
-
-<file path=ppt/notesSlides/notesSlide24.xml><?xml version="1.0" encoding="utf-8"?>
-<p:notes xmlns:a="http://schemas.openxmlformats.org/drawingml/2006/main" xmlns:p="http://schemas.openxmlformats.org/presentationml/2006/main" xmlns:r="http://schemas.openxmlformats.org/officeDocument/2006/relationships">
-  <p:cSld>
-    <p:spTree>
-      <p:nvGrpSpPr>
-        <p:cNvPr id="1" name=""/>
-        <p:cNvGrpSpPr/>
-        <p:nvPr/>
-      </p:nvGrpSpPr>
-      <p:grpSpPr>
-        <a:xfrm>
-          <a:off x="0" y="0"/>
-          <a:ext cx="0" cy="0"/>
-          <a:chOff x="0" y="0"/>
-          <a:chExt cx="0" cy="0"/>
-        </a:xfrm>
-      </p:grpSpPr>
-      <p:sp>
-        <p:nvSpPr>
-          <p:cNvPr id="2" name="Slide Image Placeholder 1"/>
-          <p:cNvSpPr>
-            <a:spLocks noGrp="1"/>
-          </p:cNvSpPr>
-          <p:nvPr>
-            <p:ph type="sldImg" idx="2"/>
-          </p:nvPr>
-        </p:nvSpPr>
-        <p:spPr/>
-      </p:sp>
-      <p:sp>
-        <p:nvSpPr>
-          <p:cNvPr id="3" name="Notes Placeholder 2"/>
-          <p:cNvSpPr>
-            <a:spLocks noGrp="1"/>
-          </p:cNvSpPr>
-          <p:nvPr>
-            <p:ph type="body" idx="3" sz="quarter"/>
-          </p:nvPr>
-        </p:nvSpPr>
-        <p:spPr/>
-        <p:txBody>
-          <a:bodyPr/>
-          <a:lstStyle/>
-          <a:p>
-            <a:r>
-              <a:t>Montrer la Spark UI (application FINISHED) et les chiffres gold.</a:t>
-            </a:r>
-          </a:p>
-        </p:txBody>
-      </p:sp>
-      <p:sp>
-        <p:nvSpPr>
-          <p:cNvPr id="4" name="Slide Number Placeholder 3"/>
-          <p:cNvSpPr>
-            <a:spLocks noGrp="1"/>
-          </p:cNvSpPr>
-          <p:nvPr>
-            <p:ph type="sldNum" idx="5" sz="quarter"/>
-          </p:nvPr>
-        </p:nvSpPr>
-        <p:spPr/>
-      </p:sp>
-    </p:spTree>
-  </p:cSld>
-  <p:clrMapOvr>
-    <a:masterClrMapping/>
-  </p:clrMapOvr>
-</p:notes>
-</file>
-
-<file path=ppt/notesSlides/notesSlide25.xml><?xml version="1.0" encoding="utf-8"?>
-<p:notes xmlns:a="http://schemas.openxmlformats.org/drawingml/2006/main" xmlns:p="http://schemas.openxmlformats.org/presentationml/2006/main" xmlns:r="http://schemas.openxmlformats.org/officeDocument/2006/relationships">
-  <p:cSld>
-    <p:spTree>
-      <p:nvGrpSpPr>
-        <p:cNvPr id="1" name=""/>
-        <p:cNvGrpSpPr/>
-        <p:nvPr/>
-      </p:nvGrpSpPr>
-      <p:grpSpPr>
-        <a:xfrm>
-          <a:off x="0" y="0"/>
-          <a:ext cx="0" cy="0"/>
-          <a:chOff x="0" y="0"/>
-          <a:chExt cx="0" cy="0"/>
-        </a:xfrm>
-      </p:grpSpPr>
-      <p:sp>
-        <p:nvSpPr>
-          <p:cNvPr id="2" name="Slide Image Placeholder 1"/>
-          <p:cNvSpPr>
-            <a:spLocks noGrp="1"/>
-          </p:cNvSpPr>
-          <p:nvPr>
-            <p:ph type="sldImg" idx="2"/>
-          </p:nvPr>
-        </p:nvSpPr>
-        <p:spPr/>
-      </p:sp>
-      <p:sp>
-        <p:nvSpPr>
-          <p:cNvPr id="3" name="Notes Placeholder 2"/>
-          <p:cNvSpPr>
-            <a:spLocks noGrp="1"/>
-          </p:cNvSpPr>
-          <p:nvPr>
-            <p:ph type="body" idx="3" sz="quarter"/>
-          </p:nvPr>
-        </p:nvSpPr>
-        <p:spPr/>
-        <p:txBody>
-          <a:bodyPr/>
-          <a:lstStyle/>
-          <a:p>
-            <a:r>
-              <a:t>Déploiement 100 % manuel à l'origine : ce pipeline est neuf.</a:t>
-            </a:r>
-          </a:p>
-        </p:txBody>
-      </p:sp>
-      <p:sp>
-        <p:nvSpPr>
-          <p:cNvPr id="4" name="Slide Number Placeholder 3"/>
-          <p:cNvSpPr>
-            <a:spLocks noGrp="1"/>
-          </p:cNvSpPr>
-          <p:nvPr>
-            <p:ph type="sldNum" idx="5" sz="quarter"/>
-          </p:nvPr>
-        </p:nvSpPr>
-        <p:spPr/>
-      </p:sp>
-    </p:spTree>
-  </p:cSld>
-  <p:clrMapOvr>
-    <a:masterClrMapping/>
-  </p:clrMapOvr>
-</p:notes>
-</file>
-
-<file path=ppt/notesSlides/notesSlide26.xml><?xml version="1.0" encoding="utf-8"?>
-<p:notes xmlns:a="http://schemas.openxmlformats.org/drawingml/2006/main" xmlns:p="http://schemas.openxmlformats.org/presentationml/2006/main" xmlns:r="http://schemas.openxmlformats.org/officeDocument/2006/relationships">
-  <p:cSld>
-    <p:spTree>
-      <p:nvGrpSpPr>
-        <p:cNvPr id="1" name=""/>
-        <p:cNvGrpSpPr/>
-        <p:nvPr/>
-      </p:nvGrpSpPr>
-      <p:grpSpPr>
-        <a:xfrm>
-          <a:off x="0" y="0"/>
-          <a:ext cx="0" cy="0"/>
-          <a:chOff x="0" y="0"/>
-          <a:chExt cx="0" cy="0"/>
-        </a:xfrm>
-      </p:grpSpPr>
-      <p:sp>
-        <p:nvSpPr>
-          <p:cNvPr id="2" name="Slide Image Placeholder 1"/>
-          <p:cNvSpPr>
-            <a:spLocks noGrp="1"/>
-          </p:cNvSpPr>
-          <p:nvPr>
-            <p:ph type="sldImg" idx="2"/>
-          </p:nvPr>
-        </p:nvSpPr>
-        <p:spPr/>
-      </p:sp>
-      <p:sp>
-        <p:nvSpPr>
-          <p:cNvPr id="3" name="Notes Placeholder 2"/>
-          <p:cNvSpPr>
-            <a:spLocks noGrp="1"/>
-          </p:cNvSpPr>
-          <p:nvPr>
-            <p:ph type="body" idx="3" sz="quarter"/>
-          </p:nvPr>
-        </p:nvSpPr>
-        <p:spPr/>
-        <p:txBody>
-          <a:bodyPr/>
-          <a:lstStyle/>
-          <a:p>
-            <a:r>
-              <a:t>Montrer l'onglet Actions. Assumer : le 1er run rouge (garde-fous qui mordent).</a:t>
-            </a:r>
-          </a:p>
-        </p:txBody>
-      </p:sp>
-      <p:sp>
-        <p:nvSpPr>
-          <p:cNvPr id="4" name="Slide Number Placeholder 3"/>
-          <p:cNvSpPr>
-            <a:spLocks noGrp="1"/>
-          </p:cNvSpPr>
-          <p:nvPr>
-            <p:ph type="sldNum" idx="5" sz="quarter"/>
-          </p:nvPr>
-        </p:nvSpPr>
-        <p:spPr/>
-      </p:sp>
-    </p:spTree>
-  </p:cSld>
-  <p:clrMapOvr>
-    <a:masterClrMapping/>
-  </p:clrMapOvr>
-</p:notes>
-</file>
-
-<file path=ppt/notesSlides/notesSlide27.xml><?xml version="1.0" encoding="utf-8"?>
-<p:notes xmlns:a="http://schemas.openxmlformats.org/drawingml/2006/main" xmlns:p="http://schemas.openxmlformats.org/presentationml/2006/main" xmlns:r="http://schemas.openxmlformats.org/officeDocument/2006/relationships">
-  <p:cSld>
-    <p:spTree>
-      <p:nvGrpSpPr>
-        <p:cNvPr id="1" name=""/>
-        <p:cNvGrpSpPr/>
-        <p:nvPr/>
-      </p:nvGrpSpPr>
-      <p:grpSpPr>
-        <a:xfrm>
-          <a:off x="0" y="0"/>
-          <a:ext cx="0" cy="0"/>
-          <a:chOff x="0" y="0"/>
-          <a:chExt cx="0" cy="0"/>
-        </a:xfrm>
-      </p:grpSpPr>
-      <p:sp>
-        <p:nvSpPr>
-          <p:cNvPr id="2" name="Slide Image Placeholder 1"/>
-          <p:cNvSpPr>
-            <a:spLocks noGrp="1"/>
-          </p:cNvSpPr>
-          <p:nvPr>
-            <p:ph type="sldImg" idx="2"/>
-          </p:nvPr>
-        </p:nvSpPr>
-        <p:spPr/>
-      </p:sp>
-      <p:sp>
-        <p:nvSpPr>
-          <p:cNvPr id="3" name="Notes Placeholder 2"/>
-          <p:cNvSpPr>
-            <a:spLocks noGrp="1"/>
-          </p:cNvSpPr>
-          <p:nvPr>
-            <p:ph type="body" idx="3" sz="quarter"/>
-          </p:nvPr>
-        </p:nvSpPr>
-        <p:spPr/>
-        <p:txBody>
-          <a:bodyPr/>
-          <a:lstStyle/>
-          <a:p>
-            <a:r>
-              <a:t>Déploiement d'artefact au sens propre. Limite honnête : pas de mise en service auto sur cluster cible.</a:t>
-            </a:r>
-          </a:p>
-        </p:txBody>
-      </p:sp>
-      <p:sp>
-        <p:nvSpPr>
-          <p:cNvPr id="4" name="Slide Number Placeholder 3"/>
-          <p:cNvSpPr>
-            <a:spLocks noGrp="1"/>
-          </p:cNvSpPr>
-          <p:nvPr>
-            <p:ph type="sldNum" idx="5" sz="quarter"/>
-          </p:nvPr>
-        </p:nvSpPr>
-        <p:spPr/>
-      </p:sp>
-    </p:spTree>
-  </p:cSld>
-  <p:clrMapOvr>
-    <a:masterClrMapping/>
-  </p:clrMapOvr>
-</p:notes>
-</file>
-
-<file path=ppt/notesSlides/notesSlide28.xml><?xml version="1.0" encoding="utf-8"?>
-<p:notes xmlns:a="http://schemas.openxmlformats.org/drawingml/2006/main" xmlns:p="http://schemas.openxmlformats.org/presentationml/2006/main" xmlns:r="http://schemas.openxmlformats.org/officeDocument/2006/relationships">
-  <p:cSld>
-    <p:spTree>
-      <p:nvGrpSpPr>
-        <p:cNvPr id="1" name=""/>
-        <p:cNvGrpSpPr/>
-        <p:nvPr/>
-      </p:nvGrpSpPr>
-      <p:grpSpPr>
-        <a:xfrm>
-          <a:off x="0" y="0"/>
-          <a:ext cx="0" cy="0"/>
-          <a:chOff x="0" y="0"/>
-          <a:chExt cx="0" cy="0"/>
-        </a:xfrm>
-      </p:grpSpPr>
-      <p:sp>
-        <p:nvSpPr>
-          <p:cNvPr id="2" name="Slide Image Placeholder 1"/>
-          <p:cNvSpPr>
-            <a:spLocks noGrp="1"/>
-          </p:cNvSpPr>
-          <p:nvPr>
-            <p:ph type="sldImg" idx="2"/>
-          </p:nvPr>
-        </p:nvSpPr>
-        <p:spPr/>
-      </p:sp>
-      <p:sp>
-        <p:nvSpPr>
-          <p:cNvPr id="3" name="Notes Placeholder 2"/>
-          <p:cNvSpPr>
-            <a:spLocks noGrp="1"/>
-          </p:cNvSpPr>
-          <p:nvPr>
-            <p:ph type="body" idx="3" sz="quarter"/>
-          </p:nvPr>
-        </p:nvSpPr>
-        <p:spPr/>
-        <p:txBody>
-          <a:bodyPr/>
-          <a:lstStyle/>
-          <a:p>
-            <a:r>
-              <a:t>La supervision réutilise l'orchestrateur (choix de légèreté assumé).</a:t>
-            </a:r>
-          </a:p>
-        </p:txBody>
-      </p:sp>
-      <p:sp>
-        <p:nvSpPr>
-          <p:cNvPr id="4" name="Slide Number Placeholder 3"/>
-          <p:cNvSpPr>
-            <a:spLocks noGrp="1"/>
-          </p:cNvSpPr>
-          <p:nvPr>
-            <p:ph type="sldNum" idx="5" sz="quarter"/>
-          </p:nvPr>
-        </p:nvSpPr>
-        <p:spPr/>
-      </p:sp>
-    </p:spTree>
-  </p:cSld>
-  <p:clrMapOvr>
-    <a:masterClrMapping/>
-  </p:clrMapOvr>
-</p:notes>
-</file>
-
-<file path=ppt/notesSlides/notesSlide29.xml><?xml version="1.0" encoding="utf-8"?>
-<p:notes xmlns:a="http://schemas.openxmlformats.org/drawingml/2006/main" xmlns:p="http://schemas.openxmlformats.org/presentationml/2006/main" xmlns:r="http://schemas.openxmlformats.org/officeDocument/2006/relationships">
-  <p:cSld>
-    <p:spTree>
-      <p:nvGrpSpPr>
-        <p:cNvPr id="1" name=""/>
-        <p:cNvGrpSpPr/>
-        <p:nvPr/>
-      </p:nvGrpSpPr>
-      <p:grpSpPr>
-        <a:xfrm>
-          <a:off x="0" y="0"/>
-          <a:ext cx="0" cy="0"/>
-          <a:chOff x="0" y="0"/>
-          <a:chExt cx="0" cy="0"/>
-        </a:xfrm>
-      </p:grpSpPr>
-      <p:sp>
-        <p:nvSpPr>
-          <p:cNvPr id="2" name="Slide Image Placeholder 1"/>
-          <p:cNvSpPr>
-            <a:spLocks noGrp="1"/>
-          </p:cNvSpPr>
-          <p:nvPr>
-            <p:ph type="sldImg" idx="2"/>
-          </p:nvPr>
-        </p:nvSpPr>
-        <p:spPr/>
-      </p:sp>
-      <p:sp>
-        <p:nvSpPr>
-          <p:cNvPr id="3" name="Notes Placeholder 2"/>
-          <p:cNvSpPr>
-            <a:spLocks noGrp="1"/>
-          </p:cNvSpPr>
-          <p:nvPr>
-            <p:ph type="body" idx="3" sz="quarter"/>
-          </p:nvPr>
-        </p:nvSpPr>
-        <p:spPr/>
-        <p:txBody>
-          <a:bodyPr/>
-          <a:lstStyle/>
-          <a:p>
-            <a:r>
-              <a:t>Montrer l'Event Log (retry visible) + la preuve d'alerte délivrée.</a:t>
+              <a:t>Annexe ouverte sur une question CI/CD ou déploiement.</a:t>
             </a:r>
           </a:p>
         </p:txBody>
@@ -2089,707 +1431,7 @@
           <a:lstStyle/>
           <a:p>
             <a:r>
-              <a:t>LA diapo d'honnêteté, à dire clairement : ce n'est pas le SI de l'entreprise. Le fichier décès est la vraie donnée publique, le référentiel est synthétique.</a:t>
-            </a:r>
-          </a:p>
-        </p:txBody>
-      </p:sp>
-      <p:sp>
-        <p:nvSpPr>
-          <p:cNvPr id="4" name="Slide Number Placeholder 3"/>
-          <p:cNvSpPr>
-            <a:spLocks noGrp="1"/>
-          </p:cNvSpPr>
-          <p:nvPr>
-            <p:ph type="sldNum" idx="5" sz="quarter"/>
-          </p:nvPr>
-        </p:nvSpPr>
-        <p:spPr/>
-      </p:sp>
-    </p:spTree>
-  </p:cSld>
-  <p:clrMapOvr>
-    <a:masterClrMapping/>
-  </p:clrMapOvr>
-</p:notes>
-</file>
-
-<file path=ppt/notesSlides/notesSlide30.xml><?xml version="1.0" encoding="utf-8"?>
-<p:notes xmlns:a="http://schemas.openxmlformats.org/drawingml/2006/main" xmlns:p="http://schemas.openxmlformats.org/presentationml/2006/main" xmlns:r="http://schemas.openxmlformats.org/officeDocument/2006/relationships">
-  <p:cSld>
-    <p:spTree>
-      <p:nvGrpSpPr>
-        <p:cNvPr id="1" name=""/>
-        <p:cNvGrpSpPr/>
-        <p:nvPr/>
-      </p:nvGrpSpPr>
-      <p:grpSpPr>
-        <a:xfrm>
-          <a:off x="0" y="0"/>
-          <a:ext cx="0" cy="0"/>
-          <a:chOff x="0" y="0"/>
-          <a:chExt cx="0" cy="0"/>
-        </a:xfrm>
-      </p:grpSpPr>
-      <p:sp>
-        <p:nvSpPr>
-          <p:cNvPr id="2" name="Slide Image Placeholder 1"/>
-          <p:cNvSpPr>
-            <a:spLocks noGrp="1"/>
-          </p:cNvSpPr>
-          <p:nvPr>
-            <p:ph type="sldImg" idx="2"/>
-          </p:nvPr>
-        </p:nvSpPr>
-        <p:spPr/>
-      </p:sp>
-      <p:sp>
-        <p:nvSpPr>
-          <p:cNvPr id="3" name="Notes Placeholder 2"/>
-          <p:cNvSpPr>
-            <a:spLocks noGrp="1"/>
-          </p:cNvSpPr>
-          <p:nvPr>
-            <p:ph type="body" idx="3" sz="quarter"/>
-          </p:nvPr>
-        </p:nvSpPr>
-        <p:spPr/>
-        <p:txBody>
-          <a:bodyPr/>
-          <a:lstStyle/>
-          <a:p>
-            <a:r>
-              <a:t>Format calendaire. La dérive du taux de rejet = signal précoce d'un changement de format.</a:t>
-            </a:r>
-          </a:p>
-        </p:txBody>
-      </p:sp>
-      <p:sp>
-        <p:nvSpPr>
-          <p:cNvPr id="4" name="Slide Number Placeholder 3"/>
-          <p:cNvSpPr>
-            <a:spLocks noGrp="1"/>
-          </p:cNvSpPr>
-          <p:nvPr>
-            <p:ph type="sldNum" idx="5" sz="quarter"/>
-          </p:nvPr>
-        </p:nvSpPr>
-        <p:spPr/>
-      </p:sp>
-    </p:spTree>
-  </p:cSld>
-  <p:clrMapOvr>
-    <a:masterClrMapping/>
-  </p:clrMapOvr>
-</p:notes>
-</file>
-
-<file path=ppt/notesSlides/notesSlide31.xml><?xml version="1.0" encoding="utf-8"?>
-<p:notes xmlns:a="http://schemas.openxmlformats.org/drawingml/2006/main" xmlns:p="http://schemas.openxmlformats.org/presentationml/2006/main" xmlns:r="http://schemas.openxmlformats.org/officeDocument/2006/relationships">
-  <p:cSld>
-    <p:spTree>
-      <p:nvGrpSpPr>
-        <p:cNvPr id="1" name=""/>
-        <p:cNvGrpSpPr/>
-        <p:nvPr/>
-      </p:nvGrpSpPr>
-      <p:grpSpPr>
-        <a:xfrm>
-          <a:off x="0" y="0"/>
-          <a:ext cx="0" cy="0"/>
-          <a:chOff x="0" y="0"/>
-          <a:chExt cx="0" cy="0"/>
-        </a:xfrm>
-      </p:grpSpPr>
-      <p:sp>
-        <p:nvSpPr>
-          <p:cNvPr id="2" name="Slide Image Placeholder 1"/>
-          <p:cNvSpPr>
-            <a:spLocks noGrp="1"/>
-          </p:cNvSpPr>
-          <p:nvPr>
-            <p:ph type="sldImg" idx="2"/>
-          </p:nvPr>
-        </p:nvSpPr>
-        <p:spPr/>
-      </p:sp>
-      <p:sp>
-        <p:nvSpPr>
-          <p:cNvPr id="3" name="Notes Placeholder 2"/>
-          <p:cNvSpPr>
-            <a:spLocks noGrp="1"/>
-          </p:cNvSpPr>
-          <p:nvPr>
-            <p:ph type="body" idx="3" sz="quarter"/>
-          </p:nvPr>
-        </p:nvSpPr>
-        <p:spPr/>
-        <p:txBody>
-          <a:bodyPr/>
-          <a:lstStyle/>
-          <a:p>
-            <a:r>
-              <a:t>La procédure a été validée dans les faits : c'est ainsi que la plateforme a été montée.</a:t>
-            </a:r>
-          </a:p>
-        </p:txBody>
-      </p:sp>
-      <p:sp>
-        <p:nvSpPr>
-          <p:cNvPr id="4" name="Slide Number Placeholder 3"/>
-          <p:cNvSpPr>
-            <a:spLocks noGrp="1"/>
-          </p:cNvSpPr>
-          <p:nvPr>
-            <p:ph type="sldNum" idx="5" sz="quarter"/>
-          </p:nvPr>
-        </p:nvSpPr>
-        <p:spPr/>
-      </p:sp>
-    </p:spTree>
-  </p:cSld>
-  <p:clrMapOvr>
-    <a:masterClrMapping/>
-  </p:clrMapOvr>
-</p:notes>
-</file>
-
-<file path=ppt/notesSlides/notesSlide32.xml><?xml version="1.0" encoding="utf-8"?>
-<p:notes xmlns:a="http://schemas.openxmlformats.org/drawingml/2006/main" xmlns:p="http://schemas.openxmlformats.org/presentationml/2006/main" xmlns:r="http://schemas.openxmlformats.org/officeDocument/2006/relationships">
-  <p:cSld>
-    <p:spTree>
-      <p:nvGrpSpPr>
-        <p:cNvPr id="1" name=""/>
-        <p:cNvGrpSpPr/>
-        <p:nvPr/>
-      </p:nvGrpSpPr>
-      <p:grpSpPr>
-        <a:xfrm>
-          <a:off x="0" y="0"/>
-          <a:ext cx="0" cy="0"/>
-          <a:chOff x="0" y="0"/>
-          <a:chExt cx="0" cy="0"/>
-        </a:xfrm>
-      </p:grpSpPr>
-      <p:sp>
-        <p:nvSpPr>
-          <p:cNvPr id="2" name="Slide Image Placeholder 1"/>
-          <p:cNvSpPr>
-            <a:spLocks noGrp="1"/>
-          </p:cNvSpPr>
-          <p:nvPr>
-            <p:ph type="sldImg" idx="2"/>
-          </p:nvPr>
-        </p:nvSpPr>
-        <p:spPr/>
-      </p:sp>
-      <p:sp>
-        <p:nvSpPr>
-          <p:cNvPr id="3" name="Notes Placeholder 2"/>
-          <p:cNvSpPr>
-            <a:spLocks noGrp="1"/>
-          </p:cNvSpPr>
-          <p:nvPr>
-            <p:ph type="body" idx="3" sz="quarter"/>
-          </p:nvPr>
-        </p:nvSpPr>
-        <p:spPr/>
-        <p:txBody>
-          <a:bodyPr/>
-          <a:lstStyle/>
-          <a:p>
-            <a:r>
-              <a:t>Démo live possible : lancer pytest (&lt; 1 s, 19 verts). La sécurité testée est souvent le trou des dossiers.</a:t>
-            </a:r>
-          </a:p>
-        </p:txBody>
-      </p:sp>
-      <p:sp>
-        <p:nvSpPr>
-          <p:cNvPr id="4" name="Slide Number Placeholder 3"/>
-          <p:cNvSpPr>
-            <a:spLocks noGrp="1"/>
-          </p:cNvSpPr>
-          <p:nvPr>
-            <p:ph type="sldNum" idx="5" sz="quarter"/>
-          </p:nvPr>
-        </p:nvSpPr>
-        <p:spPr/>
-      </p:sp>
-    </p:spTree>
-  </p:cSld>
-  <p:clrMapOvr>
-    <a:masterClrMapping/>
-  </p:clrMapOvr>
-</p:notes>
-</file>
-
-<file path=ppt/notesSlides/notesSlide33.xml><?xml version="1.0" encoding="utf-8"?>
-<p:notes xmlns:a="http://schemas.openxmlformats.org/drawingml/2006/main" xmlns:p="http://schemas.openxmlformats.org/presentationml/2006/main" xmlns:r="http://schemas.openxmlformats.org/officeDocument/2006/relationships">
-  <p:cSld>
-    <p:spTree>
-      <p:nvGrpSpPr>
-        <p:cNvPr id="1" name=""/>
-        <p:cNvGrpSpPr/>
-        <p:nvPr/>
-      </p:nvGrpSpPr>
-      <p:grpSpPr>
-        <a:xfrm>
-          <a:off x="0" y="0"/>
-          <a:ext cx="0" cy="0"/>
-          <a:chOff x="0" y="0"/>
-          <a:chExt cx="0" cy="0"/>
-        </a:xfrm>
-      </p:grpSpPr>
-      <p:sp>
-        <p:nvSpPr>
-          <p:cNvPr id="2" name="Slide Image Placeholder 1"/>
-          <p:cNvSpPr>
-            <a:spLocks noGrp="1"/>
-          </p:cNvSpPr>
-          <p:nvPr>
-            <p:ph type="sldImg" idx="2"/>
-          </p:nvPr>
-        </p:nvSpPr>
-        <p:spPr/>
-      </p:sp>
-      <p:sp>
-        <p:nvSpPr>
-          <p:cNvPr id="3" name="Notes Placeholder 2"/>
-          <p:cNvSpPr>
-            <a:spLocks noGrp="1"/>
-          </p:cNvSpPr>
-          <p:nvPr>
-            <p:ph type="body" idx="3" sz="quarter"/>
-          </p:nvPr>
-        </p:nvSpPr>
-        <p:spPr/>
-        <p:txBody>
-          <a:bodyPr/>
-          <a:lstStyle/>
-          <a:p>
-            <a:r>
-              <a:t>LE MOMENT FORT. Raconter : 2 mois nominal, puis échec quotidien, cause non triviale.</a:t>
-            </a:r>
-          </a:p>
-        </p:txBody>
-      </p:sp>
-      <p:sp>
-        <p:nvSpPr>
-          <p:cNvPr id="4" name="Slide Number Placeholder 3"/>
-          <p:cNvSpPr>
-            <a:spLocks noGrp="1"/>
-          </p:cNvSpPr>
-          <p:nvPr>
-            <p:ph type="sldNum" idx="5" sz="quarter"/>
-          </p:nvPr>
-        </p:nvSpPr>
-        <p:spPr/>
-      </p:sp>
-    </p:spTree>
-  </p:cSld>
-  <p:clrMapOvr>
-    <a:masterClrMapping/>
-  </p:clrMapOvr>
-</p:notes>
-</file>
-
-<file path=ppt/notesSlides/notesSlide34.xml><?xml version="1.0" encoding="utf-8"?>
-<p:notes xmlns:a="http://schemas.openxmlformats.org/drawingml/2006/main" xmlns:p="http://schemas.openxmlformats.org/presentationml/2006/main" xmlns:r="http://schemas.openxmlformats.org/officeDocument/2006/relationships">
-  <p:cSld>
-    <p:spTree>
-      <p:nvGrpSpPr>
-        <p:cNvPr id="1" name=""/>
-        <p:cNvGrpSpPr/>
-        <p:nvPr/>
-      </p:nvGrpSpPr>
-      <p:grpSpPr>
-        <a:xfrm>
-          <a:off x="0" y="0"/>
-          <a:ext cx="0" cy="0"/>
-          <a:chOff x="0" y="0"/>
-          <a:chExt cx="0" cy="0"/>
-        </a:xfrm>
-      </p:grpSpPr>
-      <p:sp>
-        <p:nvSpPr>
-          <p:cNvPr id="2" name="Slide Image Placeholder 1"/>
-          <p:cNvSpPr>
-            <a:spLocks noGrp="1"/>
-          </p:cNvSpPr>
-          <p:nvPr>
-            <p:ph type="sldImg" idx="2"/>
-          </p:nvPr>
-        </p:nvSpPr>
-        <p:spPr/>
-      </p:sp>
-      <p:sp>
-        <p:nvSpPr>
-          <p:cNvPr id="3" name="Notes Placeholder 2"/>
-          <p:cNvSpPr>
-            <a:spLocks noGrp="1"/>
-          </p:cNvSpPr>
-          <p:nvPr>
-            <p:ph type="body" idx="3" sz="quarter"/>
-          </p:nvPr>
-        </p:nvSpPr>
-        <p:spPr/>
-        <p:txBody>
-          <a:bodyPr/>
-          <a:lstStyle/>
-          <a:p>
-            <a:r>
-              <a:t>Démo live possible : le rejeu avant/après en &lt; 1 s. Une ligne de code change tout.</a:t>
-            </a:r>
-          </a:p>
-        </p:txBody>
-      </p:sp>
-      <p:sp>
-        <p:nvSpPr>
-          <p:cNvPr id="4" name="Slide Number Placeholder 3"/>
-          <p:cNvSpPr>
-            <a:spLocks noGrp="1"/>
-          </p:cNvSpPr>
-          <p:nvPr>
-            <p:ph type="sldNum" idx="5" sz="quarter"/>
-          </p:nvPr>
-        </p:nvSpPr>
-        <p:spPr/>
-      </p:sp>
-    </p:spTree>
-  </p:cSld>
-  <p:clrMapOvr>
-    <a:masterClrMapping/>
-  </p:clrMapOvr>
-</p:notes>
-</file>
-
-<file path=ppt/notesSlides/notesSlide35.xml><?xml version="1.0" encoding="utf-8"?>
-<p:notes xmlns:a="http://schemas.openxmlformats.org/drawingml/2006/main" xmlns:p="http://schemas.openxmlformats.org/presentationml/2006/main" xmlns:r="http://schemas.openxmlformats.org/officeDocument/2006/relationships">
-  <p:cSld>
-    <p:spTree>
-      <p:nvGrpSpPr>
-        <p:cNvPr id="1" name=""/>
-        <p:cNvGrpSpPr/>
-        <p:nvPr/>
-      </p:nvGrpSpPr>
-      <p:grpSpPr>
-        <a:xfrm>
-          <a:off x="0" y="0"/>
-          <a:ext cx="0" cy="0"/>
-          <a:chOff x="0" y="0"/>
-          <a:chExt cx="0" cy="0"/>
-        </a:xfrm>
-      </p:grpSpPr>
-      <p:sp>
-        <p:nvSpPr>
-          <p:cNvPr id="2" name="Slide Image Placeholder 1"/>
-          <p:cNvSpPr>
-            <a:spLocks noGrp="1"/>
-          </p:cNvSpPr>
-          <p:nvPr>
-            <p:ph type="sldImg" idx="2"/>
-          </p:nvPr>
-        </p:nvSpPr>
-        <p:spPr/>
-      </p:sp>
-      <p:sp>
-        <p:nvSpPr>
-          <p:cNvPr id="3" name="Notes Placeholder 2"/>
-          <p:cNvSpPr>
-            <a:spLocks noGrp="1"/>
-          </p:cNvSpPr>
-          <p:nvPr>
-            <p:ph type="body" idx="3" sz="quarter"/>
-          </p:nvPr>
-        </p:nvSpPr>
-        <p:spPr/>
-        <p:txBody>
-          <a:bodyPr/>
-          <a:lstStyle/>
-          <a:p>
-            <a:r>
-              <a:t>Assumer les limites plutôt que les masquer : marque de maturité d'ingénieur.</a:t>
-            </a:r>
-          </a:p>
-        </p:txBody>
-      </p:sp>
-      <p:sp>
-        <p:nvSpPr>
-          <p:cNvPr id="4" name="Slide Number Placeholder 3"/>
-          <p:cNvSpPr>
-            <a:spLocks noGrp="1"/>
-          </p:cNvSpPr>
-          <p:nvPr>
-            <p:ph type="sldNum" idx="5" sz="quarter"/>
-          </p:nvPr>
-        </p:nvSpPr>
-        <p:spPr/>
-      </p:sp>
-    </p:spTree>
-  </p:cSld>
-  <p:clrMapOvr>
-    <a:masterClrMapping/>
-  </p:clrMapOvr>
-</p:notes>
-</file>
-
-<file path=ppt/notesSlides/notesSlide36.xml><?xml version="1.0" encoding="utf-8"?>
-<p:notes xmlns:a="http://schemas.openxmlformats.org/drawingml/2006/main" xmlns:p="http://schemas.openxmlformats.org/presentationml/2006/main" xmlns:r="http://schemas.openxmlformats.org/officeDocument/2006/relationships">
-  <p:cSld>
-    <p:spTree>
-      <p:nvGrpSpPr>
-        <p:cNvPr id="1" name=""/>
-        <p:cNvGrpSpPr/>
-        <p:nvPr/>
-      </p:nvGrpSpPr>
-      <p:grpSpPr>
-        <a:xfrm>
-          <a:off x="0" y="0"/>
-          <a:ext cx="0" cy="0"/>
-          <a:chOff x="0" y="0"/>
-          <a:chExt cx="0" cy="0"/>
-        </a:xfrm>
-      </p:grpSpPr>
-      <p:sp>
-        <p:nvSpPr>
-          <p:cNvPr id="2" name="Slide Image Placeholder 1"/>
-          <p:cNvSpPr>
-            <a:spLocks noGrp="1"/>
-          </p:cNvSpPr>
-          <p:nvPr>
-            <p:ph type="sldImg" idx="2"/>
-          </p:nvPr>
-        </p:nvSpPr>
-        <p:spPr/>
-      </p:sp>
-      <p:sp>
-        <p:nvSpPr>
-          <p:cNvPr id="3" name="Notes Placeholder 2"/>
-          <p:cNvSpPr>
-            <a:spLocks noGrp="1"/>
-          </p:cNvSpPr>
-          <p:nvPr>
-            <p:ph type="body" idx="3" sz="quarter"/>
-          </p:nvPr>
-        </p:nvSpPr>
-        <p:spPr/>
-        <p:txBody>
-          <a:bodyPr/>
-          <a:lstStyle/>
-          <a:p>
-            <a:r>
-              <a:t>Terminer sur une note d'ingénieur : lucidité sur les prochaines étapes.</a:t>
-            </a:r>
-          </a:p>
-        </p:txBody>
-      </p:sp>
-      <p:sp>
-        <p:nvSpPr>
-          <p:cNvPr id="4" name="Slide Number Placeholder 3"/>
-          <p:cNvSpPr>
-            <a:spLocks noGrp="1"/>
-          </p:cNvSpPr>
-          <p:nvPr>
-            <p:ph type="sldNum" idx="5" sz="quarter"/>
-          </p:nvPr>
-        </p:nvSpPr>
-        <p:spPr/>
-      </p:sp>
-    </p:spTree>
-  </p:cSld>
-  <p:clrMapOvr>
-    <a:masterClrMapping/>
-  </p:clrMapOvr>
-</p:notes>
-</file>
-
-<file path=ppt/notesSlides/notesSlide37.xml><?xml version="1.0" encoding="utf-8"?>
-<p:notes xmlns:a="http://schemas.openxmlformats.org/drawingml/2006/main" xmlns:p="http://schemas.openxmlformats.org/presentationml/2006/main" xmlns:r="http://schemas.openxmlformats.org/officeDocument/2006/relationships">
-  <p:cSld>
-    <p:spTree>
-      <p:nvGrpSpPr>
-        <p:cNvPr id="1" name=""/>
-        <p:cNvGrpSpPr/>
-        <p:nvPr/>
-      </p:nvGrpSpPr>
-      <p:grpSpPr>
-        <a:xfrm>
-          <a:off x="0" y="0"/>
-          <a:ext cx="0" cy="0"/>
-          <a:chOff x="0" y="0"/>
-          <a:chExt cx="0" cy="0"/>
-        </a:xfrm>
-      </p:grpSpPr>
-      <p:sp>
-        <p:nvSpPr>
-          <p:cNvPr id="2" name="Slide Image Placeholder 1"/>
-          <p:cNvSpPr>
-            <a:spLocks noGrp="1"/>
-          </p:cNvSpPr>
-          <p:nvPr>
-            <p:ph type="sldImg" idx="2"/>
-          </p:nvPr>
-        </p:nvSpPr>
-        <p:spPr/>
-      </p:sp>
-      <p:sp>
-        <p:nvSpPr>
-          <p:cNvPr id="3" name="Notes Placeholder 2"/>
-          <p:cNvSpPr>
-            <a:spLocks noGrp="1"/>
-          </p:cNvSpPr>
-          <p:nvPr>
-            <p:ph type="body" idx="3" sz="quarter"/>
-          </p:nvPr>
-        </p:nvSpPr>
-        <p:spPr/>
-        <p:txBody>
-          <a:bodyPr/>
-          <a:lstStyle/>
-          <a:p>
-            <a:r>
-              <a:t>Ouvrir si le jury creuse l'entrepôt.</a:t>
-            </a:r>
-          </a:p>
-        </p:txBody>
-      </p:sp>
-      <p:sp>
-        <p:nvSpPr>
-          <p:cNvPr id="4" name="Slide Number Placeholder 3"/>
-          <p:cNvSpPr>
-            <a:spLocks noGrp="1"/>
-          </p:cNvSpPr>
-          <p:nvPr>
-            <p:ph type="sldNum" idx="5" sz="quarter"/>
-          </p:nvPr>
-        </p:nvSpPr>
-        <p:spPr/>
-      </p:sp>
-    </p:spTree>
-  </p:cSld>
-  <p:clrMapOvr>
-    <a:masterClrMapping/>
-  </p:clrMapOvr>
-</p:notes>
-</file>
-
-<file path=ppt/notesSlides/notesSlide38.xml><?xml version="1.0" encoding="utf-8"?>
-<p:notes xmlns:a="http://schemas.openxmlformats.org/drawingml/2006/main" xmlns:p="http://schemas.openxmlformats.org/presentationml/2006/main" xmlns:r="http://schemas.openxmlformats.org/officeDocument/2006/relationships">
-  <p:cSld>
-    <p:spTree>
-      <p:nvGrpSpPr>
-        <p:cNvPr id="1" name=""/>
-        <p:cNvGrpSpPr/>
-        <p:nvPr/>
-      </p:nvGrpSpPr>
-      <p:grpSpPr>
-        <a:xfrm>
-          <a:off x="0" y="0"/>
-          <a:ext cx="0" cy="0"/>
-          <a:chOff x="0" y="0"/>
-          <a:chExt cx="0" cy="0"/>
-        </a:xfrm>
-      </p:grpSpPr>
-      <p:sp>
-        <p:nvSpPr>
-          <p:cNvPr id="2" name="Slide Image Placeholder 1"/>
-          <p:cNvSpPr>
-            <a:spLocks noGrp="1"/>
-          </p:cNvSpPr>
-          <p:nvPr>
-            <p:ph type="sldImg" idx="2"/>
-          </p:nvPr>
-        </p:nvSpPr>
-        <p:spPr/>
-      </p:sp>
-      <p:sp>
-        <p:nvSpPr>
-          <p:cNvPr id="3" name="Notes Placeholder 2"/>
-          <p:cNvSpPr>
-            <a:spLocks noGrp="1"/>
-          </p:cNvSpPr>
-          <p:nvPr>
-            <p:ph type="body" idx="3" sz="quarter"/>
-          </p:nvPr>
-        </p:nvSpPr>
-        <p:spPr/>
-        <p:txBody>
-          <a:bodyPr/>
-          <a:lstStyle/>
-          <a:p>
-            <a:r>
-              <a:t>Ouvrir sur une question de coût ou de lock-in.</a:t>
-            </a:r>
-          </a:p>
-        </p:txBody>
-      </p:sp>
-      <p:sp>
-        <p:nvSpPr>
-          <p:cNvPr id="4" name="Slide Number Placeholder 3"/>
-          <p:cNvSpPr>
-            <a:spLocks noGrp="1"/>
-          </p:cNvSpPr>
-          <p:nvPr>
-            <p:ph type="sldNum" idx="5" sz="quarter"/>
-          </p:nvPr>
-        </p:nvSpPr>
-        <p:spPr/>
-      </p:sp>
-    </p:spTree>
-  </p:cSld>
-  <p:clrMapOvr>
-    <a:masterClrMapping/>
-  </p:clrMapOvr>
-</p:notes>
-</file>
-
-<file path=ppt/notesSlides/notesSlide39.xml><?xml version="1.0" encoding="utf-8"?>
-<p:notes xmlns:a="http://schemas.openxmlformats.org/drawingml/2006/main" xmlns:p="http://schemas.openxmlformats.org/presentationml/2006/main" xmlns:r="http://schemas.openxmlformats.org/officeDocument/2006/relationships">
-  <p:cSld>
-    <p:spTree>
-      <p:nvGrpSpPr>
-        <p:cNvPr id="1" name=""/>
-        <p:cNvGrpSpPr/>
-        <p:nvPr/>
-      </p:nvGrpSpPr>
-      <p:grpSpPr>
-        <a:xfrm>
-          <a:off x="0" y="0"/>
-          <a:ext cx="0" cy="0"/>
-          <a:chOff x="0" y="0"/>
-          <a:chExt cx="0" cy="0"/>
-        </a:xfrm>
-      </p:grpSpPr>
-      <p:sp>
-        <p:nvSpPr>
-          <p:cNvPr id="2" name="Slide Image Placeholder 1"/>
-          <p:cNvSpPr>
-            <a:spLocks noGrp="1"/>
-          </p:cNvSpPr>
-          <p:nvPr>
-            <p:ph type="sldImg" idx="2"/>
-          </p:nvPr>
-        </p:nvSpPr>
-        <p:spPr/>
-      </p:sp>
-      <p:sp>
-        <p:nvSpPr>
-          <p:cNvPr id="3" name="Notes Placeholder 2"/>
-          <p:cNvSpPr>
-            <a:spLocks noGrp="1"/>
-          </p:cNvSpPr>
-          <p:nvPr>
-            <p:ph type="body" idx="3" sz="quarter"/>
-          </p:nvPr>
-        </p:nvSpPr>
-        <p:spPr/>
-        <p:txBody>
-          <a:bodyPr/>
-          <a:lstStyle/>
-          <a:p>
-            <a:r>
-              <a:t>Ouvrir sur une question CI/CD ou déploiement.</a:t>
+              <a:t>Point d'honnêteté important : j'ai reconstruit entièrement cette plateforme, sur un contexte réel. Ce n'est pas le SI de l'entreprise. Le fichier décès est la vraie donnée publique, mais le référentiel adhérents est synthétique, généré avec Faker : aucune donnée personnelle réelle. J'ai vécu l'ingestion Eckert en production, et l'incident que je rejouerai à la fin.</a:t>
             </a:r>
           </a:p>
         </p:txBody>
@@ -2859,7 +1501,7 @@
           <a:lstStyle/>
           <a:p>
             <a:r>
-              <a:t>Ancrer la légitimité : j'ai vécu l'ingestion Eckert et l'incident que je rejouerai.</a:t>
+              <a:t>Trois contraintes cadrent tout : coût nul, donc tout en local ; délai court, donc chaque brique démontrable en cinq minutes ; et une forte volumétrie. L'existant couvrait SQL Server et un Airflow. Mais quatre compétences n'avaient aucun matériau : le distribué, la CI/CD, l'alerting et les tests de sécurité. Ce sont mes priorités.</a:t>
             </a:r>
           </a:p>
         </p:txBody>
@@ -2929,7 +1571,7 @@
           <a:lstStyle/>
           <a:p>
             <a:r>
-              <a:t>Cette volumétrie annoncée ici servira à justifier Spark plus tard.</a:t>
+              <a:t>J'ai retenu cinq briques open source. Toutes exposent des interfaces standard — S3, SQL, PySpark — ce qui traite le vendor lock-in par conception : je peux basculer vers le cloud sans réécriture majeure.</a:t>
             </a:r>
           </a:p>
         </p:txBody>
@@ -2999,7 +1641,7 @@
           <a:lstStyle/>
           <a:p>
             <a:r>
-              <a:t>Traduire loi → besoin technique (B1 à B6 du livrable).</a:t>
+              <a:t>Sur le coût, j'ai chiffré trois scénarios avec des hypothèses assumées. Le local coûte surtout du temps humain ; Azure, 50 à 145 € par mois ; le SaaS, 80 à 250. Dans le contexte réel, le SaaS a été écarté pour son coût récurrent et la souveraineté des données de santé. Le jury attend une méthode de chiffrage, pas un devis exact.</a:t>
             </a:r>
           </a:p>
         </p:txBody>
@@ -3069,7 +1711,7 @@
           <a:lstStyle/>
           <a:p>
             <a:r>
-              <a:t>L'enjeu n°3 (résilience) a provoqué l'incident réel et justifie l'architecture de validation.</a:t>
+              <a:t>L'entrepôt est en quatre couches : le brut, le nettoyé, le métier, le journal. Deux rôles appliquent le moindre privilège. Et je le prouve par des tests : le rôle lecture ne peut ni écrire, ni lire le brut. Le métier consomme une vue déjà priorisée par niveau de confiance.</a:t>
             </a:r>
           </a:p>
         </p:txBody>
@@ -3139,7 +1781,7 @@
           <a:lstStyle/>
           <a:p>
             <a:r>
-              <a:t>Ces contraintes expliquent les choix techniques du livrable suivant.</a:t>
+              <a:t>La compétence pipelines exige trois méthodes. Le fil de l'eau, en SQL, nettoie et dédoublonne au plus près de la donnée. L'orchestration Airflow enchaîne et fiabilise. Et le distribué, avec Spark, absorbe le volume du rapprochement. Les trois tournent.</a:t>
             </a:r>
           </a:p>
         </p:txBody>
@@ -3209,7 +1851,7 @@
           <a:lstStyle/>
           <a:p>
             <a:r>
-              <a:t>Distinguer étudié / maquetté / en production. Les 4 trous sont la feuille de route.</a:t>
+              <a:t>Voici le DAG réel : quatre tâches, de la récupération du catalogue à la promotion silver, avec retries, SLA et callbacks. Il tourne au vert sur le vrai fichier INSEE téléchargé depuis data.gouv.</a:t>
             </a:r>
           </a:p>
         </p:txBody>
@@ -6274,7 +4916,7 @@
                 </a:solidFill>
                 <a:latin typeface="Calibri"/>
               </a:rPr>
-              <a:t>Plateforme ELT Eckert — détection des contrats en déshérence</a:t>
+              <a:t>Plateforme ELT Eckert — détecter les contrats en déshérence</a:t>
             </a:r>
           </a:p>
         </p:txBody>
@@ -6296,7 +4938,7 @@
           <a:noFill/>
         </p:spPr>
         <p:txBody>
-          <a:bodyPr wrap="none">
+          <a:bodyPr wrap="square">
             <a:spAutoFit/>
           </a:bodyPr>
           <a:lstStyle/>
@@ -6309,7 +4951,7 @@
                 </a:solidFill>
                 <a:latin typeface="Calibri"/>
               </a:rPr>
-              <a:t>Bloc 4 — Spécialité Data Engineer — RNCP 39586</a:t>
+              <a:t>Bloc 4 · Spécialité Data Engineer · RNCP 39586</a:t>
             </a:r>
           </a:p>
         </p:txBody>
@@ -6341,7 +4983,7 @@
         <p:spPr>
           <a:xfrm>
             <a:off x="500000" y="300000"/>
-            <a:ext cx="9200000" cy="1100000"/>
+            <a:ext cx="9200000" cy="1150000"/>
           </a:xfrm>
           <a:prstGeom prst="rect">
             <a:avLst/>
@@ -6356,13 +4998,13 @@
           <a:p>
             <a:pPr algn="l"/>
             <a:r>
-              <a:rPr sz="3000" b="1">
+              <a:rPr sz="2900" b="1">
                 <a:solidFill>
                   <a:srgbClr val="0B3D66"/>
                 </a:solidFill>
                 <a:latin typeface="Calibri"/>
               </a:rPr>
-              <a:t>L'existant et les quatre trous à combler en priorité</a:t>
+              <a:t>Distribué : Spark détecte 4 162 contrats, 88 M€ en CERTAIN</a:t>
             </a:r>
           </a:p>
         </p:txBody>
@@ -6376,7 +5018,7 @@
         <p:spPr>
           <a:xfrm>
             <a:off x="10000000" y="180000"/>
-            <a:ext cx="1900000" cy="500000"/>
+            <a:ext cx="1950000" cy="520000"/>
           </a:xfrm>
           <a:prstGeom prst="rect">
             <a:avLst/>
@@ -6384,6 +5026,9 @@
           <a:solidFill>
             <a:srgbClr val="C0392B"/>
           </a:solidFill>
+          <a:ln>
+            <a:noFill/>
+          </a:ln>
         </p:spPr>
         <p:txBody>
           <a:bodyPr wrap="square" anchor="ctr">
@@ -6399,7 +5044,7 @@
                 </a:solidFill>
                 <a:latin typeface="Calibri"/>
               </a:rPr>
-              <a:t>C4.1.1</a:t>
+              <a:t>C4.2.2</a:t>
             </a:r>
           </a:p>
         </p:txBody>
@@ -6412,8 +5057,8 @@
         </p:nvSpPr>
         <p:spPr>
           <a:xfrm>
-            <a:off x="600000" y="1600000"/>
-            <a:ext cx="11000000" cy="4600000"/>
+            <a:off x="600000" y="1500000"/>
+            <a:ext cx="11000000" cy="1250000"/>
           </a:xfrm>
           <a:prstGeom prst="rect">
             <a:avLst/>
@@ -6432,49 +5077,41 @@
               </a:spcAft>
             </a:pPr>
             <a:r>
-              <a:rPr sz="2000">
-                <a:solidFill>
-                  <a:srgbClr val="5A5A5A"/>
-                </a:solidFill>
-                <a:latin typeface="Calibri"/>
-              </a:rPr>
-              <a:t>•  Existant : SQL Server, SSRS, un traitement Eckert sous Airflow</a:t>
-            </a:r>
-          </a:p>
-          <a:p>
-            <a:pPr>
-              <a:spcAft>
-                <a:spcPts val="1000"/>
-              </a:spcAft>
-            </a:pPr>
-            <a:r>
-              <a:rPr sz="2000">
-                <a:solidFill>
-                  <a:srgbClr val="5A5A5A"/>
-                </a:solidFill>
-                <a:latin typeface="Calibri"/>
-              </a:rPr>
-              <a:t>•  Trous sans matériau : Spark, CI/CD, alerting, tests de sécurité</a:t>
-            </a:r>
-          </a:p>
-          <a:p>
-            <a:pPr>
-              <a:spcAft>
-                <a:spcPts val="1000"/>
-              </a:spcAft>
-            </a:pPr>
-            <a:r>
-              <a:rPr sz="2000">
-                <a:solidFill>
-                  <a:srgbClr val="5A5A5A"/>
-                </a:solidFill>
-                <a:latin typeface="Calibri"/>
-              </a:rPr>
-              <a:t>•  C'est précisément ce que le Bloc 4 demande de produire</a:t>
-            </a:r>
-          </a:p>
-        </p:txBody>
-      </p:sp>
+              <a:rPr sz="1700">
+                <a:solidFill>
+                  <a:srgbClr val="404040"/>
+                </a:solidFill>
+                <a:latin typeface="Calibri"/>
+              </a:rPr>
+              <a:t>•  Rapprochement sur cluster · 3 niveaux CERTAIN / PROBABLE / A_VERIFIER · app FINISHED</a:t>
+            </a:r>
+          </a:p>
+        </p:txBody>
+      </p:sp>
+      <p:pic>
+        <p:nvPicPr>
+          <p:cNvPr id="5" name="Picture 4" descr="C4-2-2_spark_ui.png"/>
+          <p:cNvPicPr>
+            <a:picLocks noChangeAspect="1"/>
+          </p:cNvPicPr>
+          <p:nvPr/>
+        </p:nvPicPr>
+        <p:blipFill>
+          <a:blip r:embed="rId2"/>
+          <a:stretch>
+            <a:fillRect/>
+          </a:stretch>
+        </p:blipFill>
+        <p:spPr>
+          <a:xfrm>
+            <a:off x="1400000" y="2850000"/>
+            <a:ext cx="9400000" cy="3896246"/>
+          </a:xfrm>
+          <a:prstGeom prst="rect">
+            <a:avLst/>
+          </a:prstGeom>
+        </p:spPr>
+      </p:pic>
     </p:spTree>
   </p:cSld>
   <p:clrMapOvr>
@@ -6501,37 +5138,83 @@
         </p:nvSpPr>
         <p:spPr>
           <a:xfrm>
-            <a:off x="0" y="0"/>
-            <a:ext cx="12192000" cy="6858000"/>
+            <a:off x="500000" y="300000"/>
+            <a:ext cx="9200000" cy="1150000"/>
+          </a:xfrm>
+          <a:prstGeom prst="rect">
+            <a:avLst/>
+          </a:prstGeom>
+          <a:noFill/>
+        </p:spPr>
+        <p:txBody>
+          <a:bodyPr wrap="square">
+            <a:spAutoFit/>
+          </a:bodyPr>
+          <a:lstStyle/>
+          <a:p>
+            <a:pPr algn="l"/>
+            <a:r>
+              <a:rPr sz="2900" b="1">
+                <a:solidFill>
+                  <a:srgbClr val="0B3D66"/>
+                </a:solidFill>
+                <a:latin typeface="Calibri"/>
+              </a:rPr>
+              <a:t>CI/CD : cinq jobs verts et un déploiement réel sur registre</a:t>
+            </a:r>
+          </a:p>
+        </p:txBody>
+      </p:sp>
+      <p:sp>
+        <p:nvSpPr>
+          <p:cNvPr id="3" name="TextBox 2"/>
+          <p:cNvSpPr txBox="1"/>
+          <p:nvPr/>
+        </p:nvSpPr>
+        <p:spPr>
+          <a:xfrm>
+            <a:off x="10000000" y="180000"/>
+            <a:ext cx="1950000" cy="520000"/>
           </a:xfrm>
           <a:prstGeom prst="rect">
             <a:avLst/>
           </a:prstGeom>
           <a:solidFill>
-            <a:srgbClr val="0B3D66"/>
+            <a:srgbClr val="C0392B"/>
           </a:solidFill>
           <a:ln>
             <a:noFill/>
           </a:ln>
         </p:spPr>
         <p:txBody>
-          <a:bodyPr wrap="none">
+          <a:bodyPr wrap="square" anchor="ctr">
             <a:spAutoFit/>
           </a:bodyPr>
           <a:lstStyle/>
-          <a:p/>
-        </p:txBody>
-      </p:sp>
-      <p:sp>
-        <p:nvSpPr>
-          <p:cNvPr id="3" name="TextBox 2"/>
+          <a:p>
+            <a:pPr algn="ctr"/>
+            <a:r>
+              <a:rPr sz="1600" b="1">
+                <a:solidFill>
+                  <a:srgbClr val="FFFFFF"/>
+                </a:solidFill>
+                <a:latin typeface="Calibri"/>
+              </a:rPr>
+              <a:t>C4.2.3</a:t>
+            </a:r>
+          </a:p>
+        </p:txBody>
+      </p:sp>
+      <p:sp>
+        <p:nvSpPr>
+          <p:cNvPr id="4" name="TextBox 3"/>
           <p:cNvSpPr txBox="1"/>
           <p:nvPr/>
         </p:nvSpPr>
         <p:spPr>
           <a:xfrm>
-            <a:off x="700000" y="2600000"/>
-            <a:ext cx="10800000" cy="1200000"/>
+            <a:off x="600000" y="1500000"/>
+            <a:ext cx="11000000" cy="1250000"/>
           </a:xfrm>
           <a:prstGeom prst="rect">
             <a:avLst/>
@@ -6544,54 +5227,47 @@
           </a:bodyPr>
           <a:lstStyle/>
           <a:p>
-            <a:pPr algn="l"/>
-            <a:r>
-              <a:rPr sz="4000" b="1">
-                <a:solidFill>
-                  <a:srgbClr val="FFFFFF"/>
-                </a:solidFill>
-                <a:latin typeface="Calibri"/>
-              </a:rPr>
-              <a:t>Sélectionner les composants et chiffrer</a:t>
-            </a:r>
-          </a:p>
-        </p:txBody>
-      </p:sp>
-      <p:sp>
-        <p:nvSpPr>
-          <p:cNvPr id="4" name="TextBox 3"/>
-          <p:cNvSpPr txBox="1"/>
+            <a:pPr>
+              <a:spcAft>
+                <a:spcPts val="1000"/>
+              </a:spcAft>
+            </a:pPr>
+            <a:r>
+              <a:rPr sz="1700">
+                <a:solidFill>
+                  <a:srgbClr val="404040"/>
+                </a:solidFill>
+                <a:latin typeface="Calibri"/>
+              </a:rPr>
+              <a:t>•  Qualité · tests · sécurité · validation DAG · déploiement (image sur GHCR)</a:t>
+            </a:r>
+          </a:p>
+        </p:txBody>
+      </p:sp>
+      <p:pic>
+        <p:nvPicPr>
+          <p:cNvPr id="5" name="Picture 4" descr="C4-2-3_ci_run_vert.png"/>
+          <p:cNvPicPr>
+            <a:picLocks noChangeAspect="1"/>
+          </p:cNvPicPr>
           <p:nvPr/>
-        </p:nvSpPr>
-        <p:spPr>
-          <a:xfrm>
-            <a:off x="700000" y="3900000"/>
-            <a:ext cx="10800000" cy="800000"/>
+        </p:nvPicPr>
+        <p:blipFill>
+          <a:blip r:embed="rId2"/>
+          <a:stretch>
+            <a:fillRect/>
+          </a:stretch>
+        </p:blipFill>
+        <p:spPr>
+          <a:xfrm>
+            <a:off x="1400000" y="2850000"/>
+            <a:ext cx="9400000" cy="4249114"/>
           </a:xfrm>
           <a:prstGeom prst="rect">
             <a:avLst/>
           </a:prstGeom>
-          <a:noFill/>
-        </p:spPr>
-        <p:txBody>
-          <a:bodyPr wrap="square">
-            <a:spAutoFit/>
-          </a:bodyPr>
-          <a:lstStyle/>
-          <a:p>
-            <a:pPr algn="l"/>
-            <a:r>
-              <a:rPr sz="2200" b="0">
-                <a:solidFill>
-                  <a:srgbClr val="E8ECF0"/>
-                </a:solidFill>
-                <a:latin typeface="Calibri"/>
-              </a:rPr>
-              <a:t>C4.1.2</a:t>
-            </a:r>
-          </a:p>
-        </p:txBody>
-      </p:sp>
+        </p:spPr>
+      </p:pic>
     </p:spTree>
   </p:cSld>
   <p:clrMapOvr>
@@ -6619,7 +5295,7 @@
         <p:spPr>
           <a:xfrm>
             <a:off x="500000" y="300000"/>
-            <a:ext cx="9200000" cy="1100000"/>
+            <a:ext cx="9200000" cy="1150000"/>
           </a:xfrm>
           <a:prstGeom prst="rect">
             <a:avLst/>
@@ -6634,13 +5310,13 @@
           <a:p>
             <a:pPr algn="l"/>
             <a:r>
-              <a:rPr sz="3000" b="1">
+              <a:rPr sz="2900" b="1">
                 <a:solidFill>
                   <a:srgbClr val="0B3D66"/>
                 </a:solidFill>
                 <a:latin typeface="Calibri"/>
               </a:rPr>
-              <a:t>Une architecture locale, portable, sans réécriture pour le cloud</a:t>
+              <a:t>Supervision : indicateurs, seuils, et une alerte réellement délivrée</a:t>
             </a:r>
           </a:p>
         </p:txBody>
@@ -6654,7 +5330,7 @@
         <p:spPr>
           <a:xfrm>
             <a:off x="10000000" y="180000"/>
-            <a:ext cx="1900000" cy="500000"/>
+            <a:ext cx="1950000" cy="520000"/>
           </a:xfrm>
           <a:prstGeom prst="rect">
             <a:avLst/>
@@ -6662,6 +5338,9 @@
           <a:solidFill>
             <a:srgbClr val="C0392B"/>
           </a:solidFill>
+          <a:ln>
+            <a:noFill/>
+          </a:ln>
         </p:spPr>
         <p:txBody>
           <a:bodyPr wrap="square" anchor="ctr">
@@ -6677,7 +5356,7 @@
                 </a:solidFill>
                 <a:latin typeface="Calibri"/>
               </a:rPr>
-              <a:t>C4.1.2</a:t>
+              <a:t>C4.3.1</a:t>
             </a:r>
           </a:p>
         </p:txBody>
@@ -6690,8 +5369,8 @@
         </p:nvSpPr>
         <p:spPr>
           <a:xfrm>
-            <a:off x="600000" y="1600000"/>
-            <a:ext cx="11000000" cy="4600000"/>
+            <a:off x="600000" y="1500000"/>
+            <a:ext cx="11000000" cy="1250000"/>
           </a:xfrm>
           <a:prstGeom prst="rect">
             <a:avLst/>
@@ -6710,49 +5389,41 @@
               </a:spcAft>
             </a:pPr>
             <a:r>
-              <a:rPr sz="2000">
-                <a:solidFill>
-                  <a:srgbClr val="5A5A5A"/>
-                </a:solidFill>
-                <a:latin typeface="Calibri"/>
-              </a:rPr>
-              <a:t>•  Airflow · PostgreSQL · MinIO (S3) · Spark · GitHub Actions</a:t>
-            </a:r>
-          </a:p>
-          <a:p>
-            <a:pPr>
-              <a:spcAft>
-                <a:spcPts val="1000"/>
-              </a:spcAft>
-            </a:pPr>
-            <a:r>
-              <a:rPr sz="2000">
-                <a:solidFill>
-                  <a:srgbClr val="5A5A5A"/>
-                </a:solidFill>
-                <a:latin typeface="Calibri"/>
-              </a:rPr>
-              <a:t>•  Principe : interfaces standard (S3, SQL, PySpark)</a:t>
-            </a:r>
-          </a:p>
-          <a:p>
-            <a:pPr>
-              <a:spcAft>
-                <a:spcPts val="1000"/>
-              </a:spcAft>
-            </a:pPr>
-            <a:r>
-              <a:rPr sz="2000">
-                <a:solidFill>
-                  <a:srgbClr val="5A5A5A"/>
-                </a:solidFill>
-                <a:latin typeface="Calibri"/>
-              </a:rPr>
-              <a:t>•  Open source, local, démontrable</a:t>
-            </a:r>
-          </a:p>
-        </p:txBody>
-      </p:sp>
+              <a:rPr sz="1700">
+                <a:solidFill>
+                  <a:srgbClr val="404040"/>
+                </a:solidFill>
+                <a:latin typeface="Calibri"/>
+              </a:rPr>
+              <a:t>•  Statut · SLA · taux de rejet · journal ops · webhook reçu · escalade courriel</a:t>
+            </a:r>
+          </a:p>
+        </p:txBody>
+      </p:sp>
+      <p:pic>
+        <p:nvPicPr>
+          <p:cNvPr id="5" name="Picture 4" descr="C4-3-1_airflow_eventlog.png"/>
+          <p:cNvPicPr>
+            <a:picLocks noChangeAspect="1"/>
+          </p:cNvPicPr>
+          <p:nvPr/>
+        </p:nvPicPr>
+        <p:blipFill>
+          <a:blip r:embed="rId2"/>
+          <a:stretch>
+            <a:fillRect/>
+          </a:stretch>
+        </p:blipFill>
+        <p:spPr>
+          <a:xfrm>
+            <a:off x="1400000" y="2850000"/>
+            <a:ext cx="9400000" cy="2984672"/>
+          </a:xfrm>
+          <a:prstGeom prst="rect">
+            <a:avLst/>
+          </a:prstGeom>
+        </p:spPr>
+      </p:pic>
     </p:spTree>
   </p:cSld>
   <p:clrMapOvr>
@@ -6780,7 +5451,7 @@
         <p:spPr>
           <a:xfrm>
             <a:off x="500000" y="300000"/>
-            <a:ext cx="9200000" cy="1100000"/>
+            <a:ext cx="9200000" cy="1150000"/>
           </a:xfrm>
           <a:prstGeom prst="rect">
             <a:avLst/>
@@ -6795,13 +5466,13 @@
           <a:p>
             <a:pPr algn="l"/>
             <a:r>
-              <a:rPr sz="3000" b="1">
+              <a:rPr sz="2900" b="1">
                 <a:solidFill>
                   <a:srgbClr val="0B3D66"/>
                 </a:solidFill>
                 <a:latin typeface="Calibri"/>
               </a:rPr>
-              <a:t>Chaque composant : un avantage attendu, un point de vigilance</a:t>
+              <a:t>Exploitation : un calendrier de MCO et une doc réutilisable</a:t>
             </a:r>
           </a:p>
         </p:txBody>
@@ -6815,7 +5486,7 @@
         <p:spPr>
           <a:xfrm>
             <a:off x="10000000" y="180000"/>
-            <a:ext cx="1900000" cy="500000"/>
+            <a:ext cx="1950000" cy="520000"/>
           </a:xfrm>
           <a:prstGeom prst="rect">
             <a:avLst/>
@@ -6823,6 +5494,9 @@
           <a:solidFill>
             <a:srgbClr val="C0392B"/>
           </a:solidFill>
+          <a:ln>
+            <a:noFill/>
+          </a:ln>
         </p:spPr>
         <p:txBody>
           <a:bodyPr wrap="square" anchor="ctr">
@@ -6838,7 +5512,7 @@
                 </a:solidFill>
                 <a:latin typeface="Calibri"/>
               </a:rPr>
-              <a:t>C4.1.2</a:t>
+              <a:t>C4.3.2 · C4.3.3</a:t>
             </a:r>
           </a:p>
         </p:txBody>
@@ -6851,7 +5525,7 @@
         </p:nvSpPr>
         <p:spPr>
           <a:xfrm>
-            <a:off x="600000" y="1600000"/>
+            <a:off x="600000" y="1650000"/>
             <a:ext cx="11000000" cy="4600000"/>
           </a:xfrm>
           <a:prstGeom prst="rect">
@@ -6871,13 +5545,13 @@
               </a:spcAft>
             </a:pPr>
             <a:r>
-              <a:rPr sz="2000">
-                <a:solidFill>
-                  <a:srgbClr val="5A5A5A"/>
-                </a:solidFill>
-                <a:latin typeface="Calibri"/>
-              </a:rPr>
-              <a:t>•  Postgres : rôles + index + schémas par couche</a:t>
+              <a:rPr sz="2100">
+                <a:solidFill>
+                  <a:srgbClr val="404040"/>
+                </a:solidFill>
+                <a:latin typeface="Calibri"/>
+              </a:rPr>
+              <a:t>•  Cycles mensuel → annuel · rotation des secrets et des certificats</a:t>
             </a:r>
           </a:p>
           <a:p>
@@ -6887,13 +5561,13 @@
               </a:spcAft>
             </a:pPr>
             <a:r>
-              <a:rPr sz="2000">
-                <a:solidFill>
-                  <a:srgbClr val="5A5A5A"/>
-                </a:solidFill>
-                <a:latin typeface="Calibri"/>
-              </a:rPr>
-              <a:t>•  MinIO : versionne le brut, prépare le cloud</a:t>
+              <a:rPr sz="2100">
+                <a:solidFill>
+                  <a:srgbClr val="404040"/>
+                </a:solidFill>
+                <a:latin typeface="Calibri"/>
+              </a:rPr>
+              <a:t>•  Runbook des incidents courants (DAG, Spark, reset)</a:t>
             </a:r>
           </a:p>
           <a:p>
@@ -6903,29 +5577,13 @@
               </a:spcAft>
             </a:pPr>
             <a:r>
-              <a:rPr sz="2000">
-                <a:solidFill>
-                  <a:srgbClr val="5A5A5A"/>
-                </a:solidFill>
-                <a:latin typeface="Calibri"/>
-              </a:rPr>
-              <a:t>•  Spark : distribué justifié par la donnée</a:t>
-            </a:r>
-          </a:p>
-          <a:p>
-            <a:pPr>
-              <a:spcAft>
-                <a:spcPts val="1000"/>
-              </a:spcAft>
-            </a:pPr>
-            <a:r>
-              <a:rPr sz="2000">
-                <a:solidFill>
-                  <a:srgbClr val="5A5A5A"/>
-                </a:solidFill>
-                <a:latin typeface="Calibri"/>
-              </a:rPr>
-              <a:t>•  Vigilance : mémoire du Compose, scale horizontal de Postgres</a:t>
+              <a:rPr sz="2100">
+                <a:solidFill>
+                  <a:srgbClr val="404040"/>
+                </a:solidFill>
+                <a:latin typeface="Calibri"/>
+              </a:rPr>
+              <a:t>•  Un successeur reprend sans moi</a:t>
             </a:r>
           </a:p>
         </p:txBody>
@@ -6957,7 +5615,7 @@
         <p:spPr>
           <a:xfrm>
             <a:off x="500000" y="300000"/>
-            <a:ext cx="9200000" cy="1100000"/>
+            <a:ext cx="9200000" cy="1150000"/>
           </a:xfrm>
           <a:prstGeom prst="rect">
             <a:avLst/>
@@ -6972,13 +5630,13 @@
           <a:p>
             <a:pPr algn="l"/>
             <a:r>
-              <a:rPr sz="3000" b="1">
+              <a:rPr sz="2900" b="1">
                 <a:solidFill>
                   <a:srgbClr val="0B3D66"/>
                 </a:solidFill>
                 <a:latin typeface="Calibri"/>
               </a:rPr>
-              <a:t>Le vendor lock-in est traité par des interfaces standard</a:t>
+              <a:t>Une recette automatisée : 19 tests, dont la sécurité</a:t>
             </a:r>
           </a:p>
         </p:txBody>
@@ -6992,7 +5650,7 @@
         <p:spPr>
           <a:xfrm>
             <a:off x="10000000" y="180000"/>
-            <a:ext cx="1900000" cy="500000"/>
+            <a:ext cx="1950000" cy="520000"/>
           </a:xfrm>
           <a:prstGeom prst="rect">
             <a:avLst/>
@@ -7000,6 +5658,9 @@
           <a:solidFill>
             <a:srgbClr val="C0392B"/>
           </a:solidFill>
+          <a:ln>
+            <a:noFill/>
+          </a:ln>
         </p:spPr>
         <p:txBody>
           <a:bodyPr wrap="square" anchor="ctr">
@@ -7015,7 +5676,7 @@
                 </a:solidFill>
                 <a:latin typeface="Calibri"/>
               </a:rPr>
-              <a:t>C4.1.2</a:t>
+              <a:t>C4.4.1</a:t>
             </a:r>
           </a:p>
         </p:txBody>
@@ -7028,7 +5689,7 @@
         </p:nvSpPr>
         <p:spPr>
           <a:xfrm>
-            <a:off x="600000" y="1600000"/>
+            <a:off x="600000" y="1650000"/>
             <a:ext cx="11000000" cy="4600000"/>
           </a:xfrm>
           <a:prstGeom prst="rect">
@@ -7048,13 +5709,13 @@
               </a:spcAft>
             </a:pPr>
             <a:r>
-              <a:rPr sz="2000">
-                <a:solidFill>
-                  <a:srgbClr val="5A5A5A"/>
-                </a:solidFill>
-                <a:latin typeface="Calibri"/>
-              </a:rPr>
-              <a:t>•  S3 → AWS/Azure/GCS ; SQL → Azure SQL/Aurora ; PySpark → Databricks/EMR</a:t>
+              <a:rPr sz="2100">
+                <a:solidFill>
+                  <a:srgbClr val="404040"/>
+                </a:solidFill>
+                <a:latin typeface="Calibri"/>
+              </a:rPr>
+              <a:t>•  Tests fonctionnels, structurels ET de sécurité</a:t>
             </a:r>
           </a:p>
           <a:p>
@@ -7064,13 +5725,13 @@
               </a:spcAft>
             </a:pPr>
             <a:r>
-              <a:rPr sz="2000">
-                <a:solidFill>
-                  <a:srgbClr val="5A5A5A"/>
-                </a:solidFill>
-                <a:latin typeface="Calibri"/>
-              </a:rPr>
-              <a:t>•  Point le plus propriétaire : le YAML GitHub Actions (réécriture marginale)</a:t>
+              <a:rPr sz="2100">
+                <a:solidFill>
+                  <a:srgbClr val="404040"/>
+                </a:solidFill>
+                <a:latin typeface="Calibri"/>
+              </a:rPr>
+              <a:t>•  Droits · non-exposition des secrets · scan de dépendances</a:t>
             </a:r>
           </a:p>
           <a:p>
@@ -7080,13 +5741,13 @@
               </a:spcAft>
             </a:pPr>
             <a:r>
-              <a:rPr sz="2000">
-                <a:solidFill>
-                  <a:srgbClr val="5A5A5A"/>
-                </a:solidFill>
-                <a:latin typeface="Calibri"/>
-              </a:rPr>
-              <a:t>•  Réversibilité voulue par conception</a:t>
+              <a:rPr sz="2100">
+                <a:solidFill>
+                  <a:srgbClr val="404040"/>
+                </a:solidFill>
+                <a:latin typeface="Calibri"/>
+              </a:rPr>
+              <a:t>•  Rejouée à chaque push : un filet permanent, pas un instantané</a:t>
             </a:r>
           </a:p>
         </p:txBody>
@@ -7118,7 +5779,7 @@
         <p:spPr>
           <a:xfrm>
             <a:off x="500000" y="300000"/>
-            <a:ext cx="9200000" cy="1100000"/>
+            <a:ext cx="9200000" cy="1150000"/>
           </a:xfrm>
           <a:prstGeom prst="rect">
             <a:avLst/>
@@ -7133,13 +5794,13 @@
           <a:p>
             <a:pPr algn="l"/>
             <a:r>
-              <a:rPr sz="3000" b="1">
+              <a:rPr sz="2900" b="1">
                 <a:solidFill>
                   <a:srgbClr val="0B3D66"/>
                 </a:solidFill>
                 <a:latin typeface="Calibri"/>
               </a:rPr>
-              <a:t>Trois scénarios de coût, avec hypothèses explicites</a:t>
+              <a:t>L'incident : la confiance aveugle dans les métadonnées déclarées</a:t>
             </a:r>
           </a:p>
         </p:txBody>
@@ -7153,7 +5814,7 @@
         <p:spPr>
           <a:xfrm>
             <a:off x="10000000" y="180000"/>
-            <a:ext cx="1900000" cy="500000"/>
+            <a:ext cx="1950000" cy="520000"/>
           </a:xfrm>
           <a:prstGeom prst="rect">
             <a:avLst/>
@@ -7161,6 +5822,9 @@
           <a:solidFill>
             <a:srgbClr val="C0392B"/>
           </a:solidFill>
+          <a:ln>
+            <a:noFill/>
+          </a:ln>
         </p:spPr>
         <p:txBody>
           <a:bodyPr wrap="square" anchor="ctr">
@@ -7176,7 +5840,7 @@
                 </a:solidFill>
                 <a:latin typeface="Calibri"/>
               </a:rPr>
-              <a:t>C4.1.2</a:t>
+              <a:t>C4.4.2</a:t>
             </a:r>
           </a:p>
         </p:txBody>
@@ -7189,7 +5853,7 @@
         </p:nvSpPr>
         <p:spPr>
           <a:xfrm>
-            <a:off x="600000" y="1600000"/>
+            <a:off x="600000" y="1650000"/>
             <a:ext cx="11000000" cy="4600000"/>
           </a:xfrm>
           <a:prstGeom prst="rect">
@@ -7209,13 +5873,13 @@
               </a:spcAft>
             </a:pPr>
             <a:r>
-              <a:rPr sz="2000">
-                <a:solidFill>
-                  <a:srgbClr val="5A5A5A"/>
-                </a:solidFill>
-                <a:latin typeface="Calibri"/>
-              </a:rPr>
-              <a:t>•  Local (retenu) : ~ coût du temps humain seul</a:t>
+              <a:rPr sz="2100">
+                <a:solidFill>
+                  <a:srgbClr val="404040"/>
+                </a:solidFill>
+                <a:latin typeface="Calibri"/>
+              </a:rPr>
+              <a:t>•  La V1 validait le fichier sur la taille et l'empreinte ANNONCÉES</a:t>
             </a:r>
           </a:p>
           <a:p>
@@ -7225,13 +5889,13 @@
               </a:spcAft>
             </a:pPr>
             <a:r>
-              <a:rPr sz="2000">
-                <a:solidFill>
-                  <a:srgbClr val="5A5A5A"/>
-                </a:solidFill>
-                <a:latin typeface="Calibri"/>
-              </a:rPr>
-              <a:t>•  Cloud Azure : ~ 50 à 145 € / mois</a:t>
+              <a:rPr sz="2100">
+                <a:solidFill>
+                  <a:srgbClr val="404040"/>
+                </a:solidFill>
+                <a:latin typeface="Calibri"/>
+              </a:rPr>
+              <a:t>•  Le producteur cesse de les publier → rejet systématique</a:t>
             </a:r>
           </a:p>
           <a:p>
@@ -7241,29 +5905,13 @@
               </a:spcAft>
             </a:pPr>
             <a:r>
-              <a:rPr sz="2000">
-                <a:solidFill>
-                  <a:srgbClr val="5A5A5A"/>
-                </a:solidFill>
-                <a:latin typeface="Calibri"/>
-              </a:rPr>
-              <a:t>•  SaaS Snowflake/Fabric : ~ 80 à 250 € / mois</a:t>
-            </a:r>
-          </a:p>
-          <a:p>
-            <a:pPr>
-              <a:spcAft>
-                <a:spcPts val="1000"/>
-              </a:spcAft>
-            </a:pPr>
-            <a:r>
-              <a:rPr sz="2000">
-                <a:solidFill>
-                  <a:srgbClr val="5A5A5A"/>
-                </a:solidFill>
-                <a:latin typeface="Calibri"/>
-              </a:rPr>
-              <a:t>•  Hypothèses : ~60k décès/mois, ~25 M cumulés, 1 run/mois</a:t>
+              <a:rPr sz="2100">
+                <a:solidFill>
+                  <a:srgbClr val="404040"/>
+                </a:solidFill>
+                <a:latin typeface="Calibri"/>
+              </a:rPr>
+              <a:t>•  Fichiers pourtant parfaitement exploitables · échec quotidien</a:t>
             </a:r>
           </a:p>
         </p:txBody>
@@ -7295,7 +5943,7 @@
         <p:spPr>
           <a:xfrm>
             <a:off x="500000" y="300000"/>
-            <a:ext cx="9200000" cy="1100000"/>
+            <a:ext cx="9200000" cy="1150000"/>
           </a:xfrm>
           <a:prstGeom prst="rect">
             <a:avLst/>
@@ -7310,13 +5958,13 @@
           <a:p>
             <a:pPr algn="l"/>
             <a:r>
-              <a:rPr sz="3000" b="1">
+              <a:rPr sz="2900" b="1">
                 <a:solidFill>
                   <a:srgbClr val="0B3D66"/>
                 </a:solidFill>
                 <a:latin typeface="Calibri"/>
               </a:rPr>
-              <a:t>Pourquoi le SaaS n'a pas été retenu (décision réelle, année 2)</a:t>
+              <a:t>Le correctif : valider le contenu, pas la promesse — rejeu vert</a:t>
             </a:r>
           </a:p>
         </p:txBody>
@@ -7330,7 +5978,7 @@
         <p:spPr>
           <a:xfrm>
             <a:off x="10000000" y="180000"/>
-            <a:ext cx="1900000" cy="500000"/>
+            <a:ext cx="1950000" cy="520000"/>
           </a:xfrm>
           <a:prstGeom prst="rect">
             <a:avLst/>
@@ -7338,6 +5986,9 @@
           <a:solidFill>
             <a:srgbClr val="C0392B"/>
           </a:solidFill>
+          <a:ln>
+            <a:noFill/>
+          </a:ln>
         </p:spPr>
         <p:txBody>
           <a:bodyPr wrap="square" anchor="ctr">
@@ -7353,7 +6004,7 @@
                 </a:solidFill>
                 <a:latin typeface="Calibri"/>
               </a:rPr>
-              <a:t>C4.1.2</a:t>
+              <a:t>C4.4.2</a:t>
             </a:r>
           </a:p>
         </p:txBody>
@@ -7366,7 +6017,7 @@
         </p:nvSpPr>
         <p:spPr>
           <a:xfrm>
-            <a:off x="600000" y="1600000"/>
+            <a:off x="600000" y="1650000"/>
             <a:ext cx="11000000" cy="4600000"/>
           </a:xfrm>
           <a:prstGeom prst="rect">
@@ -7386,13 +6037,13 @@
               </a:spcAft>
             </a:pPr>
             <a:r>
-              <a:rPr sz="2000">
-                <a:solidFill>
-                  <a:srgbClr val="5A5A5A"/>
-                </a:solidFill>
-                <a:latin typeface="Calibri"/>
-              </a:rPr>
-              <a:t>•  Coût récurrent injustifié sur un besoin mensuel faible</a:t>
+              <a:rPr sz="2100">
+                <a:solidFill>
+                  <a:srgbClr val="404040"/>
+                </a:solidFill>
+                <a:latin typeface="Calibri"/>
+              </a:rPr>
+              <a:t>•  Métadonnées → simple alerte ; le CONTENU devient la seule vérité</a:t>
             </a:r>
           </a:p>
           <a:p>
@@ -7402,13 +6053,13 @@
               </a:spcAft>
             </a:pPr>
             <a:r>
-              <a:rPr sz="2000">
-                <a:solidFill>
-                  <a:srgbClr val="5A5A5A"/>
-                </a:solidFill>
-                <a:latin typeface="Calibri"/>
-              </a:rPr>
-              <a:t>•  Souveraineté des données de santé/identité</a:t>
+              <a:rPr sz="2100">
+                <a:solidFill>
+                  <a:srgbClr val="404040"/>
+                </a:solidFill>
+                <a:latin typeface="Calibri"/>
+              </a:rPr>
+              <a:t>•  Fichier sain sans métadonnées : CONFORME · corrompu : bloqué</a:t>
             </a:r>
           </a:p>
           <a:p>
@@ -7418,29 +6069,13 @@
               </a:spcAft>
             </a:pPr>
             <a:r>
-              <a:rPr sz="2000">
-                <a:solidFill>
-                  <a:srgbClr val="5A5A5A"/>
-                </a:solidFill>
-                <a:latin typeface="Calibri"/>
-              </a:rPr>
-              <a:t>•  Maturité des équipes sur l'existant + pas de gain décisif</a:t>
-            </a:r>
-          </a:p>
-          <a:p>
-            <a:pPr>
-              <a:spcAft>
-                <a:spcPts val="1000"/>
-              </a:spcAft>
-            </a:pPr>
-            <a:r>
-              <a:rPr sz="2000">
-                <a:solidFill>
-                  <a:srgbClr val="5A5A5A"/>
-                </a:solidFill>
-                <a:latin typeface="Calibri"/>
-              </a:rPr>
-              <a:t>•  Décision collégiale (équipe data + DBA)</a:t>
+              <a:rPr sz="2100">
+                <a:solidFill>
+                  <a:srgbClr val="404040"/>
+                </a:solidFill>
+                <a:latin typeface="Calibri"/>
+              </a:rPr>
+              <a:t>•  Test de non-régression : l'incident ne peut plus revenir en silence</a:t>
             </a:r>
           </a:p>
         </p:txBody>
@@ -7471,37 +6106,83 @@
         </p:nvSpPr>
         <p:spPr>
           <a:xfrm>
-            <a:off x="0" y="0"/>
-            <a:ext cx="12192000" cy="6858000"/>
+            <a:off x="500000" y="300000"/>
+            <a:ext cx="9200000" cy="1150000"/>
+          </a:xfrm>
+          <a:prstGeom prst="rect">
+            <a:avLst/>
+          </a:prstGeom>
+          <a:noFill/>
+        </p:spPr>
+        <p:txBody>
+          <a:bodyPr wrap="square">
+            <a:spAutoFit/>
+          </a:bodyPr>
+          <a:lstStyle/>
+          <a:p>
+            <a:pPr algn="l"/>
+            <a:r>
+              <a:rPr sz="2900" b="1">
+                <a:solidFill>
+                  <a:srgbClr val="0B3D66"/>
+                </a:solidFill>
+                <a:latin typeface="Calibri"/>
+              </a:rPr>
+              <a:t>Bilan : ce qui tourne, les limites assumées</a:t>
+            </a:r>
+          </a:p>
+        </p:txBody>
+      </p:sp>
+      <p:sp>
+        <p:nvSpPr>
+          <p:cNvPr id="3" name="TextBox 2"/>
+          <p:cNvSpPr txBox="1"/>
+          <p:nvPr/>
+        </p:nvSpPr>
+        <p:spPr>
+          <a:xfrm>
+            <a:off x="10000000" y="180000"/>
+            <a:ext cx="1950000" cy="520000"/>
           </a:xfrm>
           <a:prstGeom prst="rect">
             <a:avLst/>
           </a:prstGeom>
           <a:solidFill>
-            <a:srgbClr val="0B3D66"/>
+            <a:srgbClr val="C0392B"/>
           </a:solidFill>
           <a:ln>
             <a:noFill/>
           </a:ln>
         </p:spPr>
         <p:txBody>
-          <a:bodyPr wrap="none">
+          <a:bodyPr wrap="square" anchor="ctr">
             <a:spAutoFit/>
           </a:bodyPr>
           <a:lstStyle/>
-          <a:p/>
-        </p:txBody>
-      </p:sp>
-      <p:sp>
-        <p:nvSpPr>
-          <p:cNvPr id="3" name="TextBox 2"/>
+          <a:p>
+            <a:pPr algn="ctr"/>
+            <a:r>
+              <a:rPr sz="1600" b="1">
+                <a:solidFill>
+                  <a:srgbClr val="FFFFFF"/>
+                </a:solidFill>
+                <a:latin typeface="Calibri"/>
+              </a:rPr>
+              <a:t>Bilan</a:t>
+            </a:r>
+          </a:p>
+        </p:txBody>
+      </p:sp>
+      <p:sp>
+        <p:nvSpPr>
+          <p:cNvPr id="4" name="TextBox 3"/>
           <p:cNvSpPr txBox="1"/>
           <p:nvPr/>
         </p:nvSpPr>
         <p:spPr>
           <a:xfrm>
-            <a:off x="700000" y="2600000"/>
-            <a:ext cx="10800000" cy="1200000"/>
+            <a:off x="600000" y="1650000"/>
+            <a:ext cx="11000000" cy="4600000"/>
           </a:xfrm>
           <a:prstGeom prst="rect">
             <a:avLst/>
@@ -7514,50 +6195,67 @@
           </a:bodyPr>
           <a:lstStyle/>
           <a:p>
-            <a:pPr algn="l"/>
-            <a:r>
-              <a:rPr sz="4000" b="1">
-                <a:solidFill>
-                  <a:srgbClr val="FFFFFF"/>
-                </a:solidFill>
-                <a:latin typeface="Calibri"/>
-              </a:rPr>
-              <a:t>Concevoir l'entrepôt</a:t>
-            </a:r>
-          </a:p>
-        </p:txBody>
-      </p:sp>
-      <p:sp>
-        <p:nvSpPr>
-          <p:cNvPr id="4" name="TextBox 3"/>
-          <p:cNvSpPr txBox="1"/>
-          <p:nvPr/>
-        </p:nvSpPr>
-        <p:spPr>
-          <a:xfrm>
-            <a:off x="700000" y="3900000"/>
-            <a:ext cx="10800000" cy="800000"/>
-          </a:xfrm>
-          <a:prstGeom prst="rect">
-            <a:avLst/>
-          </a:prstGeom>
-          <a:noFill/>
-        </p:spPr>
-        <p:txBody>
-          <a:bodyPr wrap="square">
-            <a:spAutoFit/>
-          </a:bodyPr>
-          <a:lstStyle/>
-          <a:p>
-            <a:pPr algn="l"/>
-            <a:r>
-              <a:rPr sz="2200" b="0">
-                <a:solidFill>
-                  <a:srgbClr val="E8ECF0"/>
-                </a:solidFill>
-                <a:latin typeface="Calibri"/>
-              </a:rPr>
-              <a:t>C4.2.1</a:t>
+            <a:pPr>
+              <a:spcAft>
+                <a:spcPts val="1000"/>
+              </a:spcAft>
+            </a:pPr>
+            <a:r>
+              <a:rPr sz="2100">
+                <a:solidFill>
+                  <a:srgbClr val="404040"/>
+                </a:solidFill>
+                <a:latin typeface="Calibri"/>
+              </a:rPr>
+              <a:t>•  Chaîne complète prouvée : ingestion → Spark → gold → restitution</a:t>
+            </a:r>
+          </a:p>
+          <a:p>
+            <a:pPr>
+              <a:spcAft>
+                <a:spcPts val="1000"/>
+              </a:spcAft>
+            </a:pPr>
+            <a:r>
+              <a:rPr sz="2100">
+                <a:solidFill>
+                  <a:srgbClr val="404040"/>
+                </a:solidFill>
+                <a:latin typeface="Calibri"/>
+              </a:rPr>
+              <a:t>•  Sécurité testée · CI verte · incident rejoué</a:t>
+            </a:r>
+          </a:p>
+          <a:p>
+            <a:pPr>
+              <a:spcAft>
+                <a:spcPts val="1000"/>
+              </a:spcAft>
+            </a:pPr>
+            <a:r>
+              <a:rPr sz="2100">
+                <a:solidFill>
+                  <a:srgbClr val="404040"/>
+                </a:solidFill>
+                <a:latin typeface="Calibri"/>
+              </a:rPr>
+              <a:t>•  Limites : Postgres unique · Spark lancé manuellement · pas de supervision infra</a:t>
+            </a:r>
+          </a:p>
+          <a:p>
+            <a:pPr>
+              <a:spcAft>
+                <a:spcPts val="1000"/>
+              </a:spcAft>
+            </a:pPr>
+            <a:r>
+              <a:rPr sz="2100">
+                <a:solidFill>
+                  <a:srgbClr val="404040"/>
+                </a:solidFill>
+                <a:latin typeface="Calibri"/>
+              </a:rPr>
+              <a:t>•  À poursuivre : déclenchement Spark par Airflow, supervision d'infra</a:t>
             </a:r>
           </a:p>
         </p:txBody>
@@ -7571,7 +6269,7 @@
 </file>
 
 <file path=ppt/slides/slide18.xml><?xml version="1.0" encoding="utf-8"?>
-<p:sld xmlns:a="http://schemas.openxmlformats.org/drawingml/2006/main" xmlns:p="http://schemas.openxmlformats.org/presentationml/2006/main" xmlns:r="http://schemas.openxmlformats.org/officeDocument/2006/relationships">
+<p:sld xmlns:a="http://schemas.openxmlformats.org/drawingml/2006/main" xmlns:p="http://schemas.openxmlformats.org/presentationml/2006/main" xmlns:r="http://schemas.openxmlformats.org/officeDocument/2006/relationships" show="0">
   <p:cSld>
     <p:spTree>
       <p:nvGrpSpPr>
@@ -7589,7 +6287,7 @@
         <p:spPr>
           <a:xfrm>
             <a:off x="500000" y="300000"/>
-            <a:ext cx="9200000" cy="1100000"/>
+            <a:ext cx="9200000" cy="1150000"/>
           </a:xfrm>
           <a:prstGeom prst="rect">
             <a:avLst/>
@@ -7604,13 +6302,13 @@
           <a:p>
             <a:pPr algn="l"/>
             <a:r>
-              <a:rPr sz="3000" b="1">
+              <a:rPr sz="2900" b="1">
                 <a:solidFill>
                   <a:srgbClr val="0B3D66"/>
                 </a:solidFill>
                 <a:latin typeface="Calibri"/>
               </a:rPr>
-              <a:t>Quatre couches, une responsabilité et un niveau d'accès chacune</a:t>
+              <a:t>A1 — Schéma de l'entrepôt : couches, tables, rôles</a:t>
             </a:r>
           </a:p>
         </p:txBody>
@@ -7624,7 +6322,7 @@
         <p:spPr>
           <a:xfrm>
             <a:off x="10000000" y="180000"/>
-            <a:ext cx="1900000" cy="500000"/>
+            <a:ext cx="1950000" cy="520000"/>
           </a:xfrm>
           <a:prstGeom prst="rect">
             <a:avLst/>
@@ -7632,6 +6330,9 @@
           <a:solidFill>
             <a:srgbClr val="C0392B"/>
           </a:solidFill>
+          <a:ln>
+            <a:noFill/>
+          </a:ln>
         </p:spPr>
         <p:txBody>
           <a:bodyPr wrap="square" anchor="ctr">
@@ -7647,7 +6348,7 @@
                 </a:solidFill>
                 <a:latin typeface="Calibri"/>
               </a:rPr>
-              <a:t>C4.2.1</a:t>
+              <a:t>Annexe</a:t>
             </a:r>
           </a:p>
         </p:txBody>
@@ -7660,7 +6361,7 @@
         </p:nvSpPr>
         <p:spPr>
           <a:xfrm>
-            <a:off x="600000" y="1600000"/>
+            <a:off x="600000" y="1650000"/>
             <a:ext cx="11000000" cy="4600000"/>
           </a:xfrm>
           <a:prstGeom prst="rect">
@@ -7680,13 +6381,13 @@
               </a:spcAft>
             </a:pPr>
             <a:r>
-              <a:rPr sz="2000">
-                <a:solidFill>
-                  <a:srgbClr val="5A5A5A"/>
-                </a:solidFill>
-                <a:latin typeface="Calibri"/>
-              </a:rPr>
-              <a:t>•  bronze : source brute tracée ; silver : typé, dédoublonné</a:t>
+              <a:rPr sz="2100">
+                <a:solidFill>
+                  <a:srgbClr val="404040"/>
+                </a:solidFill>
+                <a:latin typeface="Calibri"/>
+              </a:rPr>
+              <a:t>•  4 schémas · 6 tables · 2 rôles · 1 vue</a:t>
             </a:r>
           </a:p>
           <a:p>
@@ -7696,29 +6397,13 @@
               </a:spcAft>
             </a:pPr>
             <a:r>
-              <a:rPr sz="2000">
-                <a:solidFill>
-                  <a:srgbClr val="5A5A5A"/>
-                </a:solidFill>
-                <a:latin typeface="Calibri"/>
-              </a:rPr>
-              <a:t>•  gold : résultat métier ; ops : journal &amp; qualité</a:t>
-            </a:r>
-          </a:p>
-          <a:p>
-            <a:pPr>
-              <a:spcAft>
-                <a:spcPts val="1000"/>
-              </a:spcAft>
-            </a:pPr>
-            <a:r>
-              <a:rPr sz="2000">
-                <a:solidFill>
-                  <a:srgbClr val="5A5A5A"/>
-                </a:solidFill>
-                <a:latin typeface="Calibri"/>
-              </a:rPr>
-              <a:t>•  Le métier ne voit jamais le brut</a:t>
+              <a:rPr sz="2100">
+                <a:solidFill>
+                  <a:srgbClr val="404040"/>
+                </a:solidFill>
+                <a:latin typeface="Calibri"/>
+              </a:rPr>
+              <a:t>•  Preuve : C4-2-1_schema_postgres.txt</a:t>
             </a:r>
           </a:p>
         </p:txBody>
@@ -7732,7 +6417,7 @@
 </file>
 
 <file path=ppt/slides/slide19.xml><?xml version="1.0" encoding="utf-8"?>
-<p:sld xmlns:a="http://schemas.openxmlformats.org/drawingml/2006/main" xmlns:p="http://schemas.openxmlformats.org/presentationml/2006/main" xmlns:r="http://schemas.openxmlformats.org/officeDocument/2006/relationships">
+<p:sld xmlns:a="http://schemas.openxmlformats.org/drawingml/2006/main" xmlns:p="http://schemas.openxmlformats.org/presentationml/2006/main" xmlns:r="http://schemas.openxmlformats.org/officeDocument/2006/relationships" show="0">
   <p:cSld>
     <p:spTree>
       <p:nvGrpSpPr>
@@ -7750,7 +6435,7 @@
         <p:spPr>
           <a:xfrm>
             <a:off x="500000" y="300000"/>
-            <a:ext cx="9200000" cy="1100000"/>
+            <a:ext cx="9200000" cy="1150000"/>
           </a:xfrm>
           <a:prstGeom prst="rect">
             <a:avLst/>
@@ -7765,13 +6450,13 @@
           <a:p>
             <a:pPr algn="l"/>
             <a:r>
-              <a:rPr sz="3000" b="1">
+              <a:rPr sz="2900" b="1">
                 <a:solidFill>
                   <a:srgbClr val="0B3D66"/>
                 </a:solidFill>
                 <a:latin typeface="Calibri"/>
               </a:rPr>
-              <a:t>La clé de rapprochement, normalisée à l'identique SQL et Python</a:t>
+              <a:t>A2 — Estimation des coûts détaillée (3 scénarios)</a:t>
             </a:r>
           </a:p>
         </p:txBody>
@@ -7785,7 +6470,7 @@
         <p:spPr>
           <a:xfrm>
             <a:off x="10000000" y="180000"/>
-            <a:ext cx="1900000" cy="500000"/>
+            <a:ext cx="1950000" cy="520000"/>
           </a:xfrm>
           <a:prstGeom prst="rect">
             <a:avLst/>
@@ -7793,6 +6478,9 @@
           <a:solidFill>
             <a:srgbClr val="C0392B"/>
           </a:solidFill>
+          <a:ln>
+            <a:noFill/>
+          </a:ln>
         </p:spPr>
         <p:txBody>
           <a:bodyPr wrap="square" anchor="ctr">
@@ -7808,7 +6496,7 @@
                 </a:solidFill>
                 <a:latin typeface="Calibri"/>
               </a:rPr>
-              <a:t>C4.2.1</a:t>
+              <a:t>Annexe</a:t>
             </a:r>
           </a:p>
         </p:txBody>
@@ -7821,7 +6509,7 @@
         </p:nvSpPr>
         <p:spPr>
           <a:xfrm>
-            <a:off x="600000" y="1600000"/>
+            <a:off x="600000" y="1650000"/>
             <a:ext cx="11000000" cy="4600000"/>
           </a:xfrm>
           <a:prstGeom prst="rect">
@@ -7841,13 +6529,13 @@
               </a:spcAft>
             </a:pPr>
             <a:r>
-              <a:rPr sz="2000">
-                <a:solidFill>
-                  <a:srgbClr val="5A5A5A"/>
-                </a:solidFill>
-                <a:latin typeface="Calibri"/>
-              </a:rPr>
-              <a:t>•  Clé : nom | premier prénom | date de naissance</a:t>
+              <a:rPr sz="2100">
+                <a:solidFill>
+                  <a:srgbClr val="404040"/>
+                </a:solidFill>
+                <a:latin typeface="Calibri"/>
+              </a:rPr>
+              <a:t>•  Hypothèses de volumétrie explicites</a:t>
             </a:r>
           </a:p>
           <a:p>
@@ -7857,29 +6545,13 @@
               </a:spcAft>
             </a:pPr>
             <a:r>
-              <a:rPr sz="2000">
-                <a:solidFill>
-                  <a:srgbClr val="5A5A5A"/>
-                </a:solidFill>
-                <a:latin typeface="Calibri"/>
-              </a:rPr>
-              <a:t>•  Normalisation identique des deux côtés (accents, casse, non-alpha)</a:t>
-            </a:r>
-          </a:p>
-          <a:p>
-            <a:pPr>
-              <a:spcAft>
-                <a:spcPts val="1000"/>
-              </a:spcAft>
-            </a:pPr>
-            <a:r>
-              <a:rPr sz="2000">
-                <a:solidFill>
-                  <a:srgbClr val="5A5A5A"/>
-                </a:solidFill>
-                <a:latin typeface="Calibri"/>
-              </a:rPr>
-              <a:t>•  C'est ce qui fait fonctionner le rapprochement sur noms composés</a:t>
+              <a:rPr sz="2100">
+                <a:solidFill>
+                  <a:srgbClr val="404040"/>
+                </a:solidFill>
+                <a:latin typeface="Calibri"/>
+              </a:rPr>
+              <a:t>•  Comparatif local / Azure / SaaS</a:t>
             </a:r>
           </a:p>
         </p:txBody>
@@ -7911,7 +6583,7 @@
         <p:spPr>
           <a:xfrm>
             <a:off x="500000" y="300000"/>
-            <a:ext cx="9200000" cy="1100000"/>
+            <a:ext cx="9200000" cy="1150000"/>
           </a:xfrm>
           <a:prstGeom prst="rect">
             <a:avLst/>
@@ -7926,7 +6598,7 @@
           <a:p>
             <a:pPr algn="l"/>
             <a:r>
-              <a:rPr sz="3000" b="1">
+              <a:rPr sz="2900" b="1">
                 <a:solidFill>
                   <a:srgbClr val="0B3D66"/>
                 </a:solidFill>
@@ -7946,7 +6618,7 @@
         <p:spPr>
           <a:xfrm>
             <a:off x="10000000" y="180000"/>
-            <a:ext cx="1900000" cy="500000"/>
+            <a:ext cx="1950000" cy="520000"/>
           </a:xfrm>
           <a:prstGeom prst="rect">
             <a:avLst/>
@@ -7954,6 +6626,9 @@
           <a:solidFill>
             <a:srgbClr val="C0392B"/>
           </a:solidFill>
+          <a:ln>
+            <a:noFill/>
+          </a:ln>
         </p:spPr>
         <p:txBody>
           <a:bodyPr wrap="square" anchor="ctr">
@@ -7982,7 +6657,7 @@
         </p:nvSpPr>
         <p:spPr>
           <a:xfrm>
-            <a:off x="600000" y="1600000"/>
+            <a:off x="600000" y="1650000"/>
             <a:ext cx="11000000" cy="4600000"/>
           </a:xfrm>
           <a:prstGeom prst="rect">
@@ -8002,13 +6677,13 @@
               </a:spcAft>
             </a:pPr>
             <a:r>
-              <a:rPr sz="2000">
-                <a:solidFill>
-                  <a:srgbClr val="5A5A5A"/>
-                </a:solidFill>
-                <a:latin typeface="Calibri"/>
-              </a:rPr>
-              <a:t>•  Loi Eckert : contrats non réglés au décès du souscripteur</a:t>
+              <a:rPr sz="2100">
+                <a:solidFill>
+                  <a:srgbClr val="404040"/>
+                </a:solidFill>
+                <a:latin typeface="Calibri"/>
+              </a:rPr>
+              <a:t>•  Loi Eckert : traiter les contrats non réglés au décès</a:t>
             </a:r>
           </a:p>
           <a:p>
@@ -8018,13 +6693,13 @@
               </a:spcAft>
             </a:pPr>
             <a:r>
-              <a:rPr sz="2000">
-                <a:solidFill>
-                  <a:srgbClr val="5A5A5A"/>
-                </a:solidFill>
-                <a:latin typeface="Calibri"/>
-              </a:rPr>
-              <a:t>•  Risque de sanction ACPR + enjeu de restitution aux ayants droit</a:t>
+              <a:rPr sz="2100">
+                <a:solidFill>
+                  <a:srgbClr val="404040"/>
+                </a:solidFill>
+                <a:latin typeface="Calibri"/>
+              </a:rPr>
+              <a:t>•  Risque de sanction ACPR + restitution aux ayants droit</a:t>
             </a:r>
           </a:p>
           <a:p>
@@ -8034,9 +6709,9 @@
               </a:spcAft>
             </a:pPr>
             <a:r>
-              <a:rPr sz="2000">
-                <a:solidFill>
-                  <a:srgbClr val="5A5A5A"/>
+              <a:rPr sz="2100">
+                <a:solidFill>
+                  <a:srgbClr val="404040"/>
                 </a:solidFill>
                 <a:latin typeface="Calibri"/>
               </a:rPr>
@@ -8054,7 +6729,7 @@
 </file>
 
 <file path=ppt/slides/slide20.xml><?xml version="1.0" encoding="utf-8"?>
-<p:sld xmlns:a="http://schemas.openxmlformats.org/drawingml/2006/main" xmlns:p="http://schemas.openxmlformats.org/presentationml/2006/main" xmlns:r="http://schemas.openxmlformats.org/officeDocument/2006/relationships">
+<p:sld xmlns:a="http://schemas.openxmlformats.org/drawingml/2006/main" xmlns:p="http://schemas.openxmlformats.org/presentationml/2006/main" xmlns:r="http://schemas.openxmlformats.org/officeDocument/2006/relationships" show="0">
   <p:cSld>
     <p:spTree>
       <p:nvGrpSpPr>
@@ -8072,7 +6747,7 @@
         <p:spPr>
           <a:xfrm>
             <a:off x="500000" y="300000"/>
-            <a:ext cx="9200000" cy="1100000"/>
+            <a:ext cx="9200000" cy="1150000"/>
           </a:xfrm>
           <a:prstGeom prst="rect">
             <a:avLst/>
@@ -8087,13 +6762,13 @@
           <a:p>
             <a:pPr algn="l"/>
             <a:r>
-              <a:rPr sz="3000" b="1">
+              <a:rPr sz="2900" b="1">
                 <a:solidFill>
                   <a:srgbClr val="0B3D66"/>
                 </a:solidFill>
                 <a:latin typeface="Calibri"/>
               </a:rPr>
-              <a:t>Deux rôles, moindre privilège — et c'est TESTÉ, pas déclaré</a:t>
+              <a:t>A3 — Workflow CI/CD complet (5 jobs)</a:t>
             </a:r>
           </a:p>
         </p:txBody>
@@ -8107,7 +6782,7 @@
         <p:spPr>
           <a:xfrm>
             <a:off x="10000000" y="180000"/>
-            <a:ext cx="1900000" cy="500000"/>
+            <a:ext cx="1950000" cy="520000"/>
           </a:xfrm>
           <a:prstGeom prst="rect">
             <a:avLst/>
@@ -8115,6 +6790,9 @@
           <a:solidFill>
             <a:srgbClr val="C0392B"/>
           </a:solidFill>
+          <a:ln>
+            <a:noFill/>
+          </a:ln>
         </p:spPr>
         <p:txBody>
           <a:bodyPr wrap="square" anchor="ctr">
@@ -8130,7 +6808,7 @@
                 </a:solidFill>
                 <a:latin typeface="Calibri"/>
               </a:rPr>
-              <a:t>C4.2.1</a:t>
+              <a:t>Annexe</a:t>
             </a:r>
           </a:p>
         </p:txBody>
@@ -8143,7 +6821,7 @@
         </p:nvSpPr>
         <p:spPr>
           <a:xfrm>
-            <a:off x="600000" y="1600000"/>
+            <a:off x="600000" y="1650000"/>
             <a:ext cx="11000000" cy="4600000"/>
           </a:xfrm>
           <a:prstGeom prst="rect">
@@ -8163,13 +6841,13 @@
               </a:spcAft>
             </a:pPr>
             <a:r>
-              <a:rPr sz="2000">
-                <a:solidFill>
-                  <a:srgbClr val="5A5A5A"/>
-                </a:solidFill>
-                <a:latin typeface="Calibri"/>
-              </a:rPr>
-              <a:t>•  elt_writer écrit ; elt_reader lit gold seulement</a:t>
+              <a:rPr sz="2100">
+                <a:solidFill>
+                  <a:srgbClr val="404040"/>
+                </a:solidFill>
+                <a:latin typeface="Calibri"/>
+              </a:rPr>
+              <a:t>•  .github/workflows/ci.yml</a:t>
             </a:r>
           </a:p>
           <a:p>
@@ -8179,1438 +6857,13 @@
               </a:spcAft>
             </a:pPr>
             <a:r>
-              <a:rPr sz="2000">
-                <a:solidFill>
-                  <a:srgbClr val="5A5A5A"/>
-                </a:solidFill>
-                <a:latin typeface="Calibri"/>
-              </a:rPr>
-              <a:t>•  reader → INSERT gold = refusé ; reader → SELECT bronze = refusé</a:t>
-            </a:r>
-          </a:p>
-          <a:p>
-            <a:pPr>
-              <a:spcAft>
-                <a:spcPts val="1000"/>
-              </a:spcAft>
-            </a:pPr>
-            <a:r>
-              <a:rPr sz="2000">
-                <a:solidFill>
-                  <a:srgbClr val="5A5A5A"/>
-                </a:solidFill>
-                <a:latin typeface="Calibri"/>
-              </a:rPr>
-              <a:t>•  Tests SEC-02/03 verts contre la base réelle</a:t>
-            </a:r>
-          </a:p>
-        </p:txBody>
-      </p:sp>
-    </p:spTree>
-  </p:cSld>
-  <p:clrMapOvr>
-    <a:masterClrMapping/>
-  </p:clrMapOvr>
-</p:sld>
-</file>
-
-<file path=ppt/slides/slide21.xml><?xml version="1.0" encoding="utf-8"?>
-<p:sld xmlns:a="http://schemas.openxmlformats.org/drawingml/2006/main" xmlns:p="http://schemas.openxmlformats.org/presentationml/2006/main" xmlns:r="http://schemas.openxmlformats.org/officeDocument/2006/relationships">
-  <p:cSld>
-    <p:spTree>
-      <p:nvGrpSpPr>
-        <p:cNvPr id="1" name=""/>
-        <p:cNvGrpSpPr/>
-        <p:nvPr/>
-      </p:nvGrpSpPr>
-      <p:grpSpPr/>
-      <p:sp>
-        <p:nvSpPr>
-          <p:cNvPr id="2" name="TextBox 1"/>
-          <p:cNvSpPr txBox="1"/>
-          <p:nvPr/>
-        </p:nvSpPr>
-        <p:spPr>
-          <a:xfrm>
-            <a:off x="500000" y="300000"/>
-            <a:ext cx="9200000" cy="1100000"/>
-          </a:xfrm>
-          <a:prstGeom prst="rect">
-            <a:avLst/>
-          </a:prstGeom>
-          <a:noFill/>
-        </p:spPr>
-        <p:txBody>
-          <a:bodyPr wrap="square">
-            <a:spAutoFit/>
-          </a:bodyPr>
-          <a:lstStyle/>
-          <a:p>
-            <a:pPr algn="l"/>
-            <a:r>
-              <a:rPr sz="3000" b="1">
-                <a:solidFill>
-                  <a:srgbClr val="0B3D66"/>
-                </a:solidFill>
-                <a:latin typeface="Calibri"/>
-              </a:rPr>
-              <a:t>Le métier consomme une vue priorisée, en lecture seule</a:t>
-            </a:r>
-          </a:p>
-        </p:txBody>
-      </p:sp>
-      <p:sp>
-        <p:nvSpPr>
-          <p:cNvPr id="3" name="TextBox 2"/>
-          <p:cNvSpPr txBox="1"/>
-          <p:nvPr/>
-        </p:nvSpPr>
-        <p:spPr>
-          <a:xfrm>
-            <a:off x="10000000" y="180000"/>
-            <a:ext cx="1900000" cy="500000"/>
-          </a:xfrm>
-          <a:prstGeom prst="rect">
-            <a:avLst/>
-          </a:prstGeom>
-          <a:solidFill>
-            <a:srgbClr val="C0392B"/>
-          </a:solidFill>
-        </p:spPr>
-        <p:txBody>
-          <a:bodyPr wrap="square" anchor="ctr">
-            <a:spAutoFit/>
-          </a:bodyPr>
-          <a:lstStyle/>
-          <a:p>
-            <a:pPr algn="ctr"/>
-            <a:r>
-              <a:rPr sz="1600" b="1">
-                <a:solidFill>
-                  <a:srgbClr val="FFFFFF"/>
-                </a:solidFill>
-                <a:latin typeface="Calibri"/>
-              </a:rPr>
-              <a:t>C4.2.1</a:t>
-            </a:r>
-          </a:p>
-        </p:txBody>
-      </p:sp>
-      <p:sp>
-        <p:nvSpPr>
-          <p:cNvPr id="4" name="TextBox 3"/>
-          <p:cNvSpPr txBox="1"/>
-          <p:nvPr/>
-        </p:nvSpPr>
-        <p:spPr>
-          <a:xfrm>
-            <a:off x="600000" y="1600000"/>
-            <a:ext cx="11000000" cy="4600000"/>
-          </a:xfrm>
-          <a:prstGeom prst="rect">
-            <a:avLst/>
-          </a:prstGeom>
-          <a:noFill/>
-        </p:spPr>
-        <p:txBody>
-          <a:bodyPr wrap="square">
-            <a:spAutoFit/>
-          </a:bodyPr>
-          <a:lstStyle/>
-          <a:p>
-            <a:pPr>
-              <a:spcAft>
-                <a:spcPts val="1000"/>
-              </a:spcAft>
-            </a:pPr>
-            <a:r>
-              <a:rPr sz="2000">
-                <a:solidFill>
-                  <a:srgbClr val="5A5A5A"/>
-                </a:solidFill>
-                <a:latin typeface="Calibri"/>
-              </a:rPr>
-              <a:t>•  gold.v_contrats_a_instruire : colonne priorité prête à l'emploi</a:t>
-            </a:r>
-          </a:p>
-          <a:p>
-            <a:pPr>
-              <a:spcAft>
-                <a:spcPts val="1000"/>
-              </a:spcAft>
-            </a:pPr>
-            <a:r>
-              <a:rPr sz="2000">
-                <a:solidFill>
-                  <a:srgbClr val="5A5A5A"/>
-                </a:solidFill>
-                <a:latin typeface="Calibri"/>
-              </a:rPr>
-              <a:t>•  CERTAIN d'abord, puis décès anciens, puis gros capitaux</a:t>
-            </a:r>
-          </a:p>
-          <a:p>
-            <a:pPr>
-              <a:spcAft>
-                <a:spcPts val="1000"/>
-              </a:spcAft>
-            </a:pPr>
-            <a:r>
-              <a:rPr sz="2000">
-                <a:solidFill>
-                  <a:srgbClr val="5A5A5A"/>
-                </a:solidFill>
-                <a:latin typeface="Calibri"/>
-              </a:rPr>
-              <a:t>•  Même point de branchement pour un outil BI (Metabase)</a:t>
-            </a:r>
-          </a:p>
-        </p:txBody>
-      </p:sp>
-    </p:spTree>
-  </p:cSld>
-  <p:clrMapOvr>
-    <a:masterClrMapping/>
-  </p:clrMapOvr>
-</p:sld>
-</file>
-
-<file path=ppt/slides/slide22.xml><?xml version="1.0" encoding="utf-8"?>
-<p:sld xmlns:a="http://schemas.openxmlformats.org/drawingml/2006/main" xmlns:p="http://schemas.openxmlformats.org/presentationml/2006/main" xmlns:r="http://schemas.openxmlformats.org/officeDocument/2006/relationships">
-  <p:cSld>
-    <p:spTree>
-      <p:nvGrpSpPr>
-        <p:cNvPr id="1" name=""/>
-        <p:cNvGrpSpPr/>
-        <p:nvPr/>
-      </p:nvGrpSpPr>
-      <p:grpSpPr/>
-      <p:sp>
-        <p:nvSpPr>
-          <p:cNvPr id="2" name="TextBox 1"/>
-          <p:cNvSpPr txBox="1"/>
-          <p:nvPr/>
-        </p:nvSpPr>
-        <p:spPr>
-          <a:xfrm>
-            <a:off x="0" y="0"/>
-            <a:ext cx="12192000" cy="6858000"/>
-          </a:xfrm>
-          <a:prstGeom prst="rect">
-            <a:avLst/>
-          </a:prstGeom>
-          <a:solidFill>
-            <a:srgbClr val="0B3D66"/>
-          </a:solidFill>
-          <a:ln>
-            <a:noFill/>
-          </a:ln>
-        </p:spPr>
-        <p:txBody>
-          <a:bodyPr wrap="none">
-            <a:spAutoFit/>
-          </a:bodyPr>
-          <a:lstStyle/>
-          <a:p/>
-        </p:txBody>
-      </p:sp>
-      <p:sp>
-        <p:nvSpPr>
-          <p:cNvPr id="3" name="TextBox 2"/>
-          <p:cNvSpPr txBox="1"/>
-          <p:nvPr/>
-        </p:nvSpPr>
-        <p:spPr>
-          <a:xfrm>
-            <a:off x="700000" y="2600000"/>
-            <a:ext cx="10800000" cy="1200000"/>
-          </a:xfrm>
-          <a:prstGeom prst="rect">
-            <a:avLst/>
-          </a:prstGeom>
-          <a:noFill/>
-        </p:spPr>
-        <p:txBody>
-          <a:bodyPr wrap="square">
-            <a:spAutoFit/>
-          </a:bodyPr>
-          <a:lstStyle/>
-          <a:p>
-            <a:pPr algn="l"/>
-            <a:r>
-              <a:rPr sz="4000" b="1">
-                <a:solidFill>
-                  <a:srgbClr val="FFFFFF"/>
-                </a:solidFill>
-                <a:latin typeface="Calibri"/>
-              </a:rPr>
-              <a:t>Les trois pipelines, dont le distribué</a:t>
-            </a:r>
-          </a:p>
-        </p:txBody>
-      </p:sp>
-      <p:sp>
-        <p:nvSpPr>
-          <p:cNvPr id="4" name="TextBox 3"/>
-          <p:cNvSpPr txBox="1"/>
-          <p:nvPr/>
-        </p:nvSpPr>
-        <p:spPr>
-          <a:xfrm>
-            <a:off x="700000" y="3900000"/>
-            <a:ext cx="10800000" cy="800000"/>
-          </a:xfrm>
-          <a:prstGeom prst="rect">
-            <a:avLst/>
-          </a:prstGeom>
-          <a:noFill/>
-        </p:spPr>
-        <p:txBody>
-          <a:bodyPr wrap="square">
-            <a:spAutoFit/>
-          </a:bodyPr>
-          <a:lstStyle/>
-          <a:p>
-            <a:pPr algn="l"/>
-            <a:r>
-              <a:rPr sz="2200" b="0">
-                <a:solidFill>
-                  <a:srgbClr val="E8ECF0"/>
-                </a:solidFill>
-                <a:latin typeface="Calibri"/>
-              </a:rPr>
-              <a:t>C4.2.2</a:t>
-            </a:r>
-          </a:p>
-        </p:txBody>
-      </p:sp>
-    </p:spTree>
-  </p:cSld>
-  <p:clrMapOvr>
-    <a:masterClrMapping/>
-  </p:clrMapOvr>
-</p:sld>
-</file>
-
-<file path=ppt/slides/slide23.xml><?xml version="1.0" encoding="utf-8"?>
-<p:sld xmlns:a="http://schemas.openxmlformats.org/drawingml/2006/main" xmlns:p="http://schemas.openxmlformats.org/presentationml/2006/main" xmlns:r="http://schemas.openxmlformats.org/officeDocument/2006/relationships">
-  <p:cSld>
-    <p:spTree>
-      <p:nvGrpSpPr>
-        <p:cNvPr id="1" name=""/>
-        <p:cNvGrpSpPr/>
-        <p:nvPr/>
-      </p:nvGrpSpPr>
-      <p:grpSpPr/>
-      <p:sp>
-        <p:nvSpPr>
-          <p:cNvPr id="2" name="TextBox 1"/>
-          <p:cNvSpPr txBox="1"/>
-          <p:nvPr/>
-        </p:nvSpPr>
-        <p:spPr>
-          <a:xfrm>
-            <a:off x="500000" y="300000"/>
-            <a:ext cx="9200000" cy="1100000"/>
-          </a:xfrm>
-          <a:prstGeom prst="rect">
-            <a:avLst/>
-          </a:prstGeom>
-          <a:noFill/>
-        </p:spPr>
-        <p:txBody>
-          <a:bodyPr wrap="square">
-            <a:spAutoFit/>
-          </a:bodyPr>
-          <a:lstStyle/>
-          <a:p>
-            <a:pPr algn="l"/>
-            <a:r>
-              <a:rPr sz="3000" b="1">
-                <a:solidFill>
-                  <a:srgbClr val="0B3D66"/>
-                </a:solidFill>
-                <a:latin typeface="Calibri"/>
-              </a:rPr>
-              <a:t>Trois méthodes, trois régimes de traitement</a:t>
-            </a:r>
-          </a:p>
-        </p:txBody>
-      </p:sp>
-      <p:sp>
-        <p:nvSpPr>
-          <p:cNvPr id="3" name="TextBox 2"/>
-          <p:cNvSpPr txBox="1"/>
-          <p:nvPr/>
-        </p:nvSpPr>
-        <p:spPr>
-          <a:xfrm>
-            <a:off x="10000000" y="180000"/>
-            <a:ext cx="1900000" cy="500000"/>
-          </a:xfrm>
-          <a:prstGeom prst="rect">
-            <a:avLst/>
-          </a:prstGeom>
-          <a:solidFill>
-            <a:srgbClr val="C0392B"/>
-          </a:solidFill>
-        </p:spPr>
-        <p:txBody>
-          <a:bodyPr wrap="square" anchor="ctr">
-            <a:spAutoFit/>
-          </a:bodyPr>
-          <a:lstStyle/>
-          <a:p>
-            <a:pPr algn="ctr"/>
-            <a:r>
-              <a:rPr sz="1600" b="1">
-                <a:solidFill>
-                  <a:srgbClr val="FFFFFF"/>
-                </a:solidFill>
-                <a:latin typeface="Calibri"/>
-              </a:rPr>
-              <a:t>C4.2.2</a:t>
-            </a:r>
-          </a:p>
-        </p:txBody>
-      </p:sp>
-      <p:sp>
-        <p:nvSpPr>
-          <p:cNvPr id="4" name="TextBox 3"/>
-          <p:cNvSpPr txBox="1"/>
-          <p:nvPr/>
-        </p:nvSpPr>
-        <p:spPr>
-          <a:xfrm>
-            <a:off x="600000" y="1600000"/>
-            <a:ext cx="11000000" cy="4600000"/>
-          </a:xfrm>
-          <a:prstGeom prst="rect">
-            <a:avLst/>
-          </a:prstGeom>
-          <a:noFill/>
-        </p:spPr>
-        <p:txBody>
-          <a:bodyPr wrap="square">
-            <a:spAutoFit/>
-          </a:bodyPr>
-          <a:lstStyle/>
-          <a:p>
-            <a:pPr>
-              <a:spcAft>
-                <a:spcPts val="1000"/>
-              </a:spcAft>
-            </a:pPr>
-            <a:r>
-              <a:rPr sz="2000">
-                <a:solidFill>
-                  <a:srgbClr val="5A5A5A"/>
-                </a:solidFill>
-                <a:latin typeface="Calibri"/>
-              </a:rPr>
-              <a:t>•  Fil de l'eau (SQL) : typage, nettoyage, déduplication</a:t>
-            </a:r>
-          </a:p>
-          <a:p>
-            <a:pPr>
-              <a:spcAft>
-                <a:spcPts val="1000"/>
-              </a:spcAft>
-            </a:pPr>
-            <a:r>
-              <a:rPr sz="2000">
-                <a:solidFill>
-                  <a:srgbClr val="5A5A5A"/>
-                </a:solidFill>
-                <a:latin typeface="Calibri"/>
-              </a:rPr>
-              <a:t>•  Orchestration (Airflow) : enchaîne et fiabilise</a:t>
-            </a:r>
-          </a:p>
-          <a:p>
-            <a:pPr>
-              <a:spcAft>
-                <a:spcPts val="1000"/>
-              </a:spcAft>
-            </a:pPr>
-            <a:r>
-              <a:rPr sz="2000">
-                <a:solidFill>
-                  <a:srgbClr val="5A5A5A"/>
-                </a:solidFill>
-                <a:latin typeface="Calibri"/>
-              </a:rPr>
-              <a:t>•  Distribué (Spark) : absorbe le volume du rapprochement</a:t>
-            </a:r>
-          </a:p>
-        </p:txBody>
-      </p:sp>
-    </p:spTree>
-  </p:cSld>
-  <p:clrMapOvr>
-    <a:masterClrMapping/>
-  </p:clrMapOvr>
-</p:sld>
-</file>
-
-<file path=ppt/slides/slide24.xml><?xml version="1.0" encoding="utf-8"?>
-<p:sld xmlns:a="http://schemas.openxmlformats.org/drawingml/2006/main" xmlns:p="http://schemas.openxmlformats.org/presentationml/2006/main" xmlns:r="http://schemas.openxmlformats.org/officeDocument/2006/relationships">
-  <p:cSld>
-    <p:spTree>
-      <p:nvGrpSpPr>
-        <p:cNvPr id="1" name=""/>
-        <p:cNvGrpSpPr/>
-        <p:nvPr/>
-      </p:nvGrpSpPr>
-      <p:grpSpPr/>
-      <p:sp>
-        <p:nvSpPr>
-          <p:cNvPr id="2" name="TextBox 1"/>
-          <p:cNvSpPr txBox="1"/>
-          <p:nvPr/>
-        </p:nvSpPr>
-        <p:spPr>
-          <a:xfrm>
-            <a:off x="500000" y="300000"/>
-            <a:ext cx="9200000" cy="1100000"/>
-          </a:xfrm>
-          <a:prstGeom prst="rect">
-            <a:avLst/>
-          </a:prstGeom>
-          <a:noFill/>
-        </p:spPr>
-        <p:txBody>
-          <a:bodyPr wrap="square">
-            <a:spAutoFit/>
-          </a:bodyPr>
-          <a:lstStyle/>
-          <a:p>
-            <a:pPr algn="l"/>
-            <a:r>
-              <a:rPr sz="3000" b="1">
-                <a:solidFill>
-                  <a:srgbClr val="0B3D66"/>
-                </a:solidFill>
-                <a:latin typeface="Calibri"/>
-              </a:rPr>
-              <a:t>Fil de l'eau : le nettoyage vit dans le moteur, pas dans l'appli</a:t>
-            </a:r>
-          </a:p>
-        </p:txBody>
-      </p:sp>
-      <p:sp>
-        <p:nvSpPr>
-          <p:cNvPr id="3" name="TextBox 2"/>
-          <p:cNvSpPr txBox="1"/>
-          <p:nvPr/>
-        </p:nvSpPr>
-        <p:spPr>
-          <a:xfrm>
-            <a:off x="10000000" y="180000"/>
-            <a:ext cx="1900000" cy="500000"/>
-          </a:xfrm>
-          <a:prstGeom prst="rect">
-            <a:avLst/>
-          </a:prstGeom>
-          <a:solidFill>
-            <a:srgbClr val="C0392B"/>
-          </a:solidFill>
-        </p:spPr>
-        <p:txBody>
-          <a:bodyPr wrap="square" anchor="ctr">
-            <a:spAutoFit/>
-          </a:bodyPr>
-          <a:lstStyle/>
-          <a:p>
-            <a:pPr algn="ctr"/>
-            <a:r>
-              <a:rPr sz="1600" b="1">
-                <a:solidFill>
-                  <a:srgbClr val="FFFFFF"/>
-                </a:solidFill>
-                <a:latin typeface="Calibri"/>
-              </a:rPr>
-              <a:t>C4.2.2</a:t>
-            </a:r>
-          </a:p>
-        </p:txBody>
-      </p:sp>
-      <p:sp>
-        <p:nvSpPr>
-          <p:cNvPr id="4" name="TextBox 3"/>
-          <p:cNvSpPr txBox="1"/>
-          <p:nvPr/>
-        </p:nvSpPr>
-        <p:spPr>
-          <a:xfrm>
-            <a:off x="600000" y="1600000"/>
-            <a:ext cx="11000000" cy="4600000"/>
-          </a:xfrm>
-          <a:prstGeom prst="rect">
-            <a:avLst/>
-          </a:prstGeom>
-          <a:noFill/>
-        </p:spPr>
-        <p:txBody>
-          <a:bodyPr wrap="square">
-            <a:spAutoFit/>
-          </a:bodyPr>
-          <a:lstStyle/>
-          <a:p>
-            <a:pPr>
-              <a:spcAft>
-                <a:spcPts val="1000"/>
-              </a:spcAft>
-            </a:pPr>
-            <a:r>
-              <a:rPr sz="2000">
-                <a:solidFill>
-                  <a:srgbClr val="5A5A5A"/>
-                </a:solidFill>
-                <a:latin typeface="Calibri"/>
-              </a:rPr>
-              <a:t>•  Découpage largeur fixe + typage + dédup en une requête SQL</a:t>
-            </a:r>
-          </a:p>
-          <a:p>
-            <a:pPr>
-              <a:spcAft>
-                <a:spcPts val="1000"/>
-              </a:spcAft>
-            </a:pPr>
-            <a:r>
-              <a:rPr sz="2000">
-                <a:solidFill>
-                  <a:srgbClr val="5A5A5A"/>
-                </a:solidFill>
-                <a:latin typeface="Calibri"/>
-              </a:rPr>
-              <a:t>•  DISTINCT ON (clé naturelle), ON CONFLICT DO NOTHING</a:t>
-            </a:r>
-          </a:p>
-          <a:p>
-            <a:pPr>
-              <a:spcAft>
-                <a:spcPts val="1000"/>
-              </a:spcAft>
-            </a:pPr>
-            <a:r>
-              <a:rPr sz="2000">
-                <a:solidFill>
-                  <a:srgbClr val="5A5A5A"/>
-                </a:solidFill>
-                <a:latin typeface="Calibri"/>
-              </a:rPr>
-              <a:t>•  Traitement au fil de l'eau, PAS du streaming permanent</a:t>
-            </a:r>
-          </a:p>
-        </p:txBody>
-      </p:sp>
-    </p:spTree>
-  </p:cSld>
-  <p:clrMapOvr>
-    <a:masterClrMapping/>
-  </p:clrMapOvr>
-</p:sld>
-</file>
-
-<file path=ppt/slides/slide25.xml><?xml version="1.0" encoding="utf-8"?>
-<p:sld xmlns:a="http://schemas.openxmlformats.org/drawingml/2006/main" xmlns:p="http://schemas.openxmlformats.org/presentationml/2006/main" xmlns:r="http://schemas.openxmlformats.org/officeDocument/2006/relationships">
-  <p:cSld>
-    <p:spTree>
-      <p:nvGrpSpPr>
-        <p:cNvPr id="1" name=""/>
-        <p:cNvGrpSpPr/>
-        <p:nvPr/>
-      </p:nvGrpSpPr>
-      <p:grpSpPr/>
-      <p:sp>
-        <p:nvSpPr>
-          <p:cNvPr id="2" name="TextBox 1"/>
-          <p:cNvSpPr txBox="1"/>
-          <p:nvPr/>
-        </p:nvSpPr>
-        <p:spPr>
-          <a:xfrm>
-            <a:off x="500000" y="300000"/>
-            <a:ext cx="9200000" cy="1100000"/>
-          </a:xfrm>
-          <a:prstGeom prst="rect">
-            <a:avLst/>
-          </a:prstGeom>
-          <a:noFill/>
-        </p:spPr>
-        <p:txBody>
-          <a:bodyPr wrap="square">
-            <a:spAutoFit/>
-          </a:bodyPr>
-          <a:lstStyle/>
-          <a:p>
-            <a:pPr algn="l"/>
-            <a:r>
-              <a:rPr sz="3000" b="1">
-                <a:solidFill>
-                  <a:srgbClr val="0B3D66"/>
-                </a:solidFill>
-                <a:latin typeface="Calibri"/>
-              </a:rPr>
-              <a:t>Orchestration : le DAG Airflow fiabilise la chaîne réelle</a:t>
-            </a:r>
-          </a:p>
-        </p:txBody>
-      </p:sp>
-      <p:sp>
-        <p:nvSpPr>
-          <p:cNvPr id="3" name="TextBox 2"/>
-          <p:cNvSpPr txBox="1"/>
-          <p:nvPr/>
-        </p:nvSpPr>
-        <p:spPr>
-          <a:xfrm>
-            <a:off x="10000000" y="180000"/>
-            <a:ext cx="1900000" cy="500000"/>
-          </a:xfrm>
-          <a:prstGeom prst="rect">
-            <a:avLst/>
-          </a:prstGeom>
-          <a:solidFill>
-            <a:srgbClr val="C0392B"/>
-          </a:solidFill>
-        </p:spPr>
-        <p:txBody>
-          <a:bodyPr wrap="square" anchor="ctr">
-            <a:spAutoFit/>
-          </a:bodyPr>
-          <a:lstStyle/>
-          <a:p>
-            <a:pPr algn="ctr"/>
-            <a:r>
-              <a:rPr sz="1600" b="1">
-                <a:solidFill>
-                  <a:srgbClr val="FFFFFF"/>
-                </a:solidFill>
-                <a:latin typeface="Calibri"/>
-              </a:rPr>
-              <a:t>C4.2.2</a:t>
-            </a:r>
-          </a:p>
-        </p:txBody>
-      </p:sp>
-      <p:sp>
-        <p:nvSpPr>
-          <p:cNvPr id="4" name="TextBox 3"/>
-          <p:cNvSpPr txBox="1"/>
-          <p:nvPr/>
-        </p:nvSpPr>
-        <p:spPr>
-          <a:xfrm>
-            <a:off x="600000" y="1500000"/>
-            <a:ext cx="11000000" cy="1300000"/>
-          </a:xfrm>
-          <a:prstGeom prst="rect">
-            <a:avLst/>
-          </a:prstGeom>
-          <a:noFill/>
-        </p:spPr>
-        <p:txBody>
-          <a:bodyPr wrap="square">
-            <a:spAutoFit/>
-          </a:bodyPr>
-          <a:lstStyle/>
-          <a:p>
-            <a:pPr>
-              <a:spcAft>
-                <a:spcPts val="1000"/>
-              </a:spcAft>
-            </a:pPr>
-            <a:r>
-              <a:rPr sz="1800">
-                <a:solidFill>
-                  <a:srgbClr val="5A5A5A"/>
-                </a:solidFill>
-                <a:latin typeface="Calibri"/>
-              </a:rPr>
-              <a:t>•  4 tâches, planification mensuelle, retries backoff</a:t>
-            </a:r>
-          </a:p>
-          <a:p>
-            <a:pPr>
-              <a:spcAft>
-                <a:spcPts val="1000"/>
-              </a:spcAft>
-            </a:pPr>
-            <a:r>
-              <a:rPr sz="1800">
-                <a:solidFill>
-                  <a:srgbClr val="5A5A5A"/>
-                </a:solidFill>
-                <a:latin typeface="Calibri"/>
-              </a:rPr>
-              <a:t>•  SLA 30 min + callbacks (échec / SLA)</a:t>
-            </a:r>
-          </a:p>
-          <a:p>
-            <a:pPr>
-              <a:spcAft>
-                <a:spcPts val="1000"/>
-              </a:spcAft>
-            </a:pPr>
-            <a:r>
-              <a:rPr sz="1800">
-                <a:solidFill>
-                  <a:srgbClr val="5A5A5A"/>
-                </a:solidFill>
-                <a:latin typeface="Calibri"/>
-              </a:rPr>
-              <a:t>•  Exécution réelle sur le vrai fichier INSEE : tout vert</a:t>
-            </a:r>
-          </a:p>
-        </p:txBody>
-      </p:sp>
-      <p:pic>
-        <p:nvPicPr>
-          <p:cNvPr id="5" name="Picture 4" descr="C4-2-2_airflow_run.png"/>
-          <p:cNvPicPr>
-            <a:picLocks noChangeAspect="1"/>
-          </p:cNvPicPr>
-          <p:nvPr/>
-        </p:nvPicPr>
-        <p:blipFill>
-          <a:blip r:embed="rId2"/>
-          <a:stretch>
-            <a:fillRect/>
-          </a:stretch>
-        </p:blipFill>
-        <p:spPr>
-          <a:xfrm>
-            <a:off x="1200000" y="2900000"/>
-            <a:ext cx="9800000" cy="2881752"/>
-          </a:xfrm>
-          <a:prstGeom prst="rect">
-            <a:avLst/>
-          </a:prstGeom>
-        </p:spPr>
-      </p:pic>
-    </p:spTree>
-  </p:cSld>
-  <p:clrMapOvr>
-    <a:masterClrMapping/>
-  </p:clrMapOvr>
-</p:sld>
-</file>
-
-<file path=ppt/slides/slide26.xml><?xml version="1.0" encoding="utf-8"?>
-<p:sld xmlns:a="http://schemas.openxmlformats.org/drawingml/2006/main" xmlns:p="http://schemas.openxmlformats.org/presentationml/2006/main" xmlns:r="http://schemas.openxmlformats.org/officeDocument/2006/relationships">
-  <p:cSld>
-    <p:spTree>
-      <p:nvGrpSpPr>
-        <p:cNvPr id="1" name=""/>
-        <p:cNvGrpSpPr/>
-        <p:nvPr/>
-      </p:nvGrpSpPr>
-      <p:grpSpPr/>
-      <p:sp>
-        <p:nvSpPr>
-          <p:cNvPr id="2" name="TextBox 1"/>
-          <p:cNvSpPr txBox="1"/>
-          <p:nvPr/>
-        </p:nvSpPr>
-        <p:spPr>
-          <a:xfrm>
-            <a:off x="500000" y="300000"/>
-            <a:ext cx="9200000" cy="1100000"/>
-          </a:xfrm>
-          <a:prstGeom prst="rect">
-            <a:avLst/>
-          </a:prstGeom>
-          <a:noFill/>
-        </p:spPr>
-        <p:txBody>
-          <a:bodyPr wrap="square">
-            <a:spAutoFit/>
-          </a:bodyPr>
-          <a:lstStyle/>
-          <a:p>
-            <a:pPr algn="l"/>
-            <a:r>
-              <a:rPr sz="3000" b="1">
-                <a:solidFill>
-                  <a:srgbClr val="0B3D66"/>
-                </a:solidFill>
-                <a:latin typeface="Calibri"/>
-              </a:rPr>
-              <a:t>Distribué : Spark parce que la DONNÉE l'exige</a:t>
-            </a:r>
-          </a:p>
-        </p:txBody>
-      </p:sp>
-      <p:sp>
-        <p:nvSpPr>
-          <p:cNvPr id="3" name="TextBox 2"/>
-          <p:cNvSpPr txBox="1"/>
-          <p:nvPr/>
-        </p:nvSpPr>
-        <p:spPr>
-          <a:xfrm>
-            <a:off x="10000000" y="180000"/>
-            <a:ext cx="1900000" cy="500000"/>
-          </a:xfrm>
-          <a:prstGeom prst="rect">
-            <a:avLst/>
-          </a:prstGeom>
-          <a:solidFill>
-            <a:srgbClr val="C0392B"/>
-          </a:solidFill>
-        </p:spPr>
-        <p:txBody>
-          <a:bodyPr wrap="square" anchor="ctr">
-            <a:spAutoFit/>
-          </a:bodyPr>
-          <a:lstStyle/>
-          <a:p>
-            <a:pPr algn="ctr"/>
-            <a:r>
-              <a:rPr sz="1600" b="1">
-                <a:solidFill>
-                  <a:srgbClr val="FFFFFF"/>
-                </a:solidFill>
-                <a:latin typeface="Calibri"/>
-              </a:rPr>
-              <a:t>C4.2.2</a:t>
-            </a:r>
-          </a:p>
-        </p:txBody>
-      </p:sp>
-      <p:sp>
-        <p:nvSpPr>
-          <p:cNvPr id="4" name="TextBox 3"/>
-          <p:cNvSpPr txBox="1"/>
-          <p:nvPr/>
-        </p:nvSpPr>
-        <p:spPr>
-          <a:xfrm>
-            <a:off x="600000" y="1600000"/>
-            <a:ext cx="11000000" cy="4600000"/>
-          </a:xfrm>
-          <a:prstGeom prst="rect">
-            <a:avLst/>
-          </a:prstGeom>
-          <a:noFill/>
-        </p:spPr>
-        <p:txBody>
-          <a:bodyPr wrap="square">
-            <a:spAutoFit/>
-          </a:bodyPr>
-          <a:lstStyle/>
-          <a:p>
-            <a:pPr>
-              <a:spcAft>
-                <a:spcPts val="1000"/>
-              </a:spcAft>
-            </a:pPr>
-            <a:r>
-              <a:rPr sz="2000">
-                <a:solidFill>
-                  <a:srgbClr val="5A5A5A"/>
-                </a:solidFill>
-                <a:latin typeface="Calibri"/>
-              </a:rPr>
-              <a:t>•  Rapprochement décès × contrats sur cluster (master + worker)</a:t>
-            </a:r>
-          </a:p>
-          <a:p>
-            <a:pPr>
-              <a:spcAft>
-                <a:spcPts val="1000"/>
-              </a:spcAft>
-            </a:pPr>
-            <a:r>
-              <a:rPr sz="2000">
-                <a:solidFill>
-                  <a:srgbClr val="5A5A5A"/>
-                </a:solidFill>
-                <a:latin typeface="Calibri"/>
-              </a:rPr>
-              <a:t>•  Justifié par la volumétrie cumulée, pas par la grille</a:t>
-            </a:r>
-          </a:p>
-          <a:p>
-            <a:pPr>
-              <a:spcAft>
-                <a:spcPts val="1000"/>
-              </a:spcAft>
-            </a:pPr>
-            <a:r>
-              <a:rPr sz="2000">
-                <a:solidFill>
-                  <a:srgbClr val="5A5A5A"/>
-                </a:solidFill>
-                <a:latin typeface="Calibri"/>
-              </a:rPr>
-              <a:t>•  Sur le volume mensuel seul, Postgres suffirait (assumé)</a:t>
-            </a:r>
-          </a:p>
-        </p:txBody>
-      </p:sp>
-    </p:spTree>
-  </p:cSld>
-  <p:clrMapOvr>
-    <a:masterClrMapping/>
-  </p:clrMapOvr>
-</p:sld>
-</file>
-
-<file path=ppt/slides/slide27.xml><?xml version="1.0" encoding="utf-8"?>
-<p:sld xmlns:a="http://schemas.openxmlformats.org/drawingml/2006/main" xmlns:p="http://schemas.openxmlformats.org/presentationml/2006/main" xmlns:r="http://schemas.openxmlformats.org/officeDocument/2006/relationships">
-  <p:cSld>
-    <p:spTree>
-      <p:nvGrpSpPr>
-        <p:cNvPr id="1" name=""/>
-        <p:cNvGrpSpPr/>
-        <p:nvPr/>
-      </p:nvGrpSpPr>
-      <p:grpSpPr/>
-      <p:sp>
-        <p:nvSpPr>
-          <p:cNvPr id="2" name="TextBox 1"/>
-          <p:cNvSpPr txBox="1"/>
-          <p:nvPr/>
-        </p:nvSpPr>
-        <p:spPr>
-          <a:xfrm>
-            <a:off x="500000" y="300000"/>
-            <a:ext cx="9200000" cy="1100000"/>
-          </a:xfrm>
-          <a:prstGeom prst="rect">
-            <a:avLst/>
-          </a:prstGeom>
-          <a:noFill/>
-        </p:spPr>
-        <p:txBody>
-          <a:bodyPr wrap="square">
-            <a:spAutoFit/>
-          </a:bodyPr>
-          <a:lstStyle/>
-          <a:p>
-            <a:pPr algn="l"/>
-            <a:r>
-              <a:rPr sz="3000" b="1">
-                <a:solidFill>
-                  <a:srgbClr val="0B3D66"/>
-                </a:solidFill>
-                <a:latin typeface="Calibri"/>
-              </a:rPr>
-              <a:t>Le rapprochement gradue la confiance en trois niveaux</a:t>
-            </a:r>
-          </a:p>
-        </p:txBody>
-      </p:sp>
-      <p:sp>
-        <p:nvSpPr>
-          <p:cNvPr id="3" name="TextBox 2"/>
-          <p:cNvSpPr txBox="1"/>
-          <p:nvPr/>
-        </p:nvSpPr>
-        <p:spPr>
-          <a:xfrm>
-            <a:off x="10000000" y="180000"/>
-            <a:ext cx="1900000" cy="500000"/>
-          </a:xfrm>
-          <a:prstGeom prst="rect">
-            <a:avLst/>
-          </a:prstGeom>
-          <a:solidFill>
-            <a:srgbClr val="C0392B"/>
-          </a:solidFill>
-        </p:spPr>
-        <p:txBody>
-          <a:bodyPr wrap="square" anchor="ctr">
-            <a:spAutoFit/>
-          </a:bodyPr>
-          <a:lstStyle/>
-          <a:p>
-            <a:pPr algn="ctr"/>
-            <a:r>
-              <a:rPr sz="1600" b="1">
-                <a:solidFill>
-                  <a:srgbClr val="FFFFFF"/>
-                </a:solidFill>
-                <a:latin typeface="Calibri"/>
-              </a:rPr>
-              <a:t>C4.2.2</a:t>
-            </a:r>
-          </a:p>
-        </p:txBody>
-      </p:sp>
-      <p:sp>
-        <p:nvSpPr>
-          <p:cNvPr id="4" name="TextBox 3"/>
-          <p:cNvSpPr txBox="1"/>
-          <p:nvPr/>
-        </p:nvSpPr>
-        <p:spPr>
-          <a:xfrm>
-            <a:off x="600000" y="1600000"/>
-            <a:ext cx="11000000" cy="4600000"/>
-          </a:xfrm>
-          <a:prstGeom prst="rect">
-            <a:avLst/>
-          </a:prstGeom>
-          <a:noFill/>
-        </p:spPr>
-        <p:txBody>
-          <a:bodyPr wrap="square">
-            <a:spAutoFit/>
-          </a:bodyPr>
-          <a:lstStyle/>
-          <a:p>
-            <a:pPr>
-              <a:spcAft>
-                <a:spcPts val="1000"/>
-              </a:spcAft>
-            </a:pPr>
-            <a:r>
-              <a:rPr sz="2000">
-                <a:solidFill>
-                  <a:srgbClr val="5A5A5A"/>
-                </a:solidFill>
-                <a:latin typeface="Calibri"/>
-              </a:rPr>
-              <a:t>•  CERTAIN : clé + sexe + lieu concordants</a:t>
-            </a:r>
-          </a:p>
-          <a:p>
-            <a:pPr>
-              <a:spcAft>
-                <a:spcPts val="1000"/>
-              </a:spcAft>
-            </a:pPr>
-            <a:r>
-              <a:rPr sz="2000">
-                <a:solidFill>
-                  <a:srgbClr val="5A5A5A"/>
-                </a:solidFill>
-                <a:latin typeface="Calibri"/>
-              </a:rPr>
-              <a:t>•  PROBABLE : clé exacte seule</a:t>
-            </a:r>
-          </a:p>
-          <a:p>
-            <a:pPr>
-              <a:spcAft>
-                <a:spcPts val="1000"/>
-              </a:spcAft>
-            </a:pPr>
-            <a:r>
-              <a:rPr sz="2000">
-                <a:solidFill>
-                  <a:srgbClr val="5A5A5A"/>
-                </a:solidFill>
-                <a:latin typeface="Calibri"/>
-              </a:rPr>
-              <a:t>•  A_VERIFIER : homonymie (levée humaine)</a:t>
-            </a:r>
-          </a:p>
-        </p:txBody>
-      </p:sp>
-    </p:spTree>
-  </p:cSld>
-  <p:clrMapOvr>
-    <a:masterClrMapping/>
-  </p:clrMapOvr>
-</p:sld>
-</file>
-
-<file path=ppt/slides/slide28.xml><?xml version="1.0" encoding="utf-8"?>
-<p:sld xmlns:a="http://schemas.openxmlformats.org/drawingml/2006/main" xmlns:p="http://schemas.openxmlformats.org/presentationml/2006/main" xmlns:r="http://schemas.openxmlformats.org/officeDocument/2006/relationships">
-  <p:cSld>
-    <p:spTree>
-      <p:nvGrpSpPr>
-        <p:cNvPr id="1" name=""/>
-        <p:cNvGrpSpPr/>
-        <p:nvPr/>
-      </p:nvGrpSpPr>
-      <p:grpSpPr/>
-      <p:sp>
-        <p:nvSpPr>
-          <p:cNvPr id="2" name="TextBox 1"/>
-          <p:cNvSpPr txBox="1"/>
-          <p:nvPr/>
-        </p:nvSpPr>
-        <p:spPr>
-          <a:xfrm>
-            <a:off x="500000" y="300000"/>
-            <a:ext cx="9200000" cy="1100000"/>
-          </a:xfrm>
-          <a:prstGeom prst="rect">
-            <a:avLst/>
-          </a:prstGeom>
-          <a:noFill/>
-        </p:spPr>
-        <p:txBody>
-          <a:bodyPr wrap="square">
-            <a:spAutoFit/>
-          </a:bodyPr>
-          <a:lstStyle/>
-          <a:p>
-            <a:pPr algn="l"/>
-            <a:r>
-              <a:rPr sz="3000" b="1">
-                <a:solidFill>
-                  <a:srgbClr val="0B3D66"/>
-                </a:solidFill>
-                <a:latin typeface="Calibri"/>
-              </a:rPr>
-              <a:t>Résultat : 4 162 contrats détectés, 88 M€ en niveau CERTAIN</a:t>
-            </a:r>
-          </a:p>
-        </p:txBody>
-      </p:sp>
-      <p:sp>
-        <p:nvSpPr>
-          <p:cNvPr id="3" name="TextBox 2"/>
-          <p:cNvSpPr txBox="1"/>
-          <p:nvPr/>
-        </p:nvSpPr>
-        <p:spPr>
-          <a:xfrm>
-            <a:off x="10000000" y="180000"/>
-            <a:ext cx="1900000" cy="500000"/>
-          </a:xfrm>
-          <a:prstGeom prst="rect">
-            <a:avLst/>
-          </a:prstGeom>
-          <a:solidFill>
-            <a:srgbClr val="C0392B"/>
-          </a:solidFill>
-        </p:spPr>
-        <p:txBody>
-          <a:bodyPr wrap="square" anchor="ctr">
-            <a:spAutoFit/>
-          </a:bodyPr>
-          <a:lstStyle/>
-          <a:p>
-            <a:pPr algn="ctr"/>
-            <a:r>
-              <a:rPr sz="1600" b="1">
-                <a:solidFill>
-                  <a:srgbClr val="FFFFFF"/>
-                </a:solidFill>
-                <a:latin typeface="Calibri"/>
-              </a:rPr>
-              <a:t>C4.2.2</a:t>
-            </a:r>
-          </a:p>
-        </p:txBody>
-      </p:sp>
-      <p:sp>
-        <p:nvSpPr>
-          <p:cNvPr id="4" name="TextBox 3"/>
-          <p:cNvSpPr txBox="1"/>
-          <p:nvPr/>
-        </p:nvSpPr>
-        <p:spPr>
-          <a:xfrm>
-            <a:off x="600000" y="1500000"/>
-            <a:ext cx="11000000" cy="1300000"/>
-          </a:xfrm>
-          <a:prstGeom prst="rect">
-            <a:avLst/>
-          </a:prstGeom>
-          <a:noFill/>
-        </p:spPr>
-        <p:txBody>
-          <a:bodyPr wrap="square">
-            <a:spAutoFit/>
-          </a:bodyPr>
-          <a:lstStyle/>
-          <a:p>
-            <a:pPr>
-              <a:spcAft>
-                <a:spcPts val="1000"/>
-              </a:spcAft>
-            </a:pPr>
-            <a:r>
-              <a:rPr sz="1800">
-                <a:solidFill>
-                  <a:srgbClr val="5A5A5A"/>
-                </a:solidFill>
-                <a:latin typeface="Calibri"/>
-              </a:rPr>
-              <a:t>•  CERTAIN : 2 846 contrats (88,1 M€)</a:t>
-            </a:r>
-          </a:p>
-          <a:p>
-            <a:pPr>
-              <a:spcAft>
-                <a:spcPts val="1000"/>
-              </a:spcAft>
-            </a:pPr>
-            <a:r>
-              <a:rPr sz="1800">
-                <a:solidFill>
-                  <a:srgbClr val="5A5A5A"/>
-                </a:solidFill>
-                <a:latin typeface="Calibri"/>
-              </a:rPr>
-              <a:t>•  PROBABLE : 1 259 (38,4 M€) — A_VERIFIER : 57 (2,0 M€)</a:t>
-            </a:r>
-          </a:p>
-          <a:p>
-            <a:pPr>
-              <a:spcAft>
-                <a:spcPts val="1000"/>
-              </a:spcAft>
-            </a:pPr>
-            <a:r>
-              <a:rPr sz="1800">
-                <a:solidFill>
-                  <a:srgbClr val="5A5A5A"/>
-                </a:solidFill>
-                <a:latin typeface="Calibri"/>
-              </a:rPr>
-              <a:t>•  Écrit dans gold, application Spark FINISHED</a:t>
-            </a:r>
-          </a:p>
-        </p:txBody>
-      </p:sp>
-      <p:pic>
-        <p:nvPicPr>
-          <p:cNvPr id="5" name="Picture 4" descr="C4-2-2_spark_ui.png"/>
-          <p:cNvPicPr>
-            <a:picLocks noChangeAspect="1"/>
-          </p:cNvPicPr>
-          <p:nvPr/>
-        </p:nvPicPr>
-        <p:blipFill>
-          <a:blip r:embed="rId2"/>
-          <a:stretch>
-            <a:fillRect/>
-          </a:stretch>
-        </p:blipFill>
-        <p:spPr>
-          <a:xfrm>
-            <a:off x="1200000" y="2900000"/>
-            <a:ext cx="9800000" cy="4062044"/>
-          </a:xfrm>
-          <a:prstGeom prst="rect">
-            <a:avLst/>
-          </a:prstGeom>
-        </p:spPr>
-      </p:pic>
-    </p:spTree>
-  </p:cSld>
-  <p:clrMapOvr>
-    <a:masterClrMapping/>
-  </p:clrMapOvr>
-</p:sld>
-</file>
-
-<file path=ppt/slides/slide29.xml><?xml version="1.0" encoding="utf-8"?>
-<p:sld xmlns:a="http://schemas.openxmlformats.org/drawingml/2006/main" xmlns:p="http://schemas.openxmlformats.org/presentationml/2006/main" xmlns:r="http://schemas.openxmlformats.org/officeDocument/2006/relationships">
-  <p:cSld>
-    <p:spTree>
-      <p:nvGrpSpPr>
-        <p:cNvPr id="1" name=""/>
-        <p:cNvGrpSpPr/>
-        <p:nvPr/>
-      </p:nvGrpSpPr>
-      <p:grpSpPr/>
-      <p:sp>
-        <p:nvSpPr>
-          <p:cNvPr id="2" name="TextBox 1"/>
-          <p:cNvSpPr txBox="1"/>
-          <p:nvPr/>
-        </p:nvSpPr>
-        <p:spPr>
-          <a:xfrm>
-            <a:off x="0" y="0"/>
-            <a:ext cx="12192000" cy="6858000"/>
-          </a:xfrm>
-          <a:prstGeom prst="rect">
-            <a:avLst/>
-          </a:prstGeom>
-          <a:solidFill>
-            <a:srgbClr val="0B3D66"/>
-          </a:solidFill>
-          <a:ln>
-            <a:noFill/>
-          </a:ln>
-        </p:spPr>
-        <p:txBody>
-          <a:bodyPr wrap="none">
-            <a:spAutoFit/>
-          </a:bodyPr>
-          <a:lstStyle/>
-          <a:p/>
-        </p:txBody>
-      </p:sp>
-      <p:sp>
-        <p:nvSpPr>
-          <p:cNvPr id="3" name="TextBox 2"/>
-          <p:cNvSpPr txBox="1"/>
-          <p:nvPr/>
-        </p:nvSpPr>
-        <p:spPr>
-          <a:xfrm>
-            <a:off x="700000" y="2600000"/>
-            <a:ext cx="10800000" cy="1200000"/>
-          </a:xfrm>
-          <a:prstGeom prst="rect">
-            <a:avLst/>
-          </a:prstGeom>
-          <a:noFill/>
-        </p:spPr>
-        <p:txBody>
-          <a:bodyPr wrap="square">
-            <a:spAutoFit/>
-          </a:bodyPr>
-          <a:lstStyle/>
-          <a:p>
-            <a:pPr algn="l"/>
-            <a:r>
-              <a:rPr sz="4000" b="1">
-                <a:solidFill>
-                  <a:srgbClr val="FFFFFF"/>
-                </a:solidFill>
-                <a:latin typeface="Calibri"/>
-              </a:rPr>
-              <a:t>Industrialiser : CI/CD</a:t>
-            </a:r>
-          </a:p>
-        </p:txBody>
-      </p:sp>
-      <p:sp>
-        <p:nvSpPr>
-          <p:cNvPr id="4" name="TextBox 3"/>
-          <p:cNvSpPr txBox="1"/>
-          <p:nvPr/>
-        </p:nvSpPr>
-        <p:spPr>
-          <a:xfrm>
-            <a:off x="700000" y="3900000"/>
-            <a:ext cx="10800000" cy="800000"/>
-          </a:xfrm>
-          <a:prstGeom prst="rect">
-            <a:avLst/>
-          </a:prstGeom>
-          <a:noFill/>
-        </p:spPr>
-        <p:txBody>
-          <a:bodyPr wrap="square">
-            <a:spAutoFit/>
-          </a:bodyPr>
-          <a:lstStyle/>
-          <a:p>
-            <a:pPr algn="l"/>
-            <a:r>
-              <a:rPr sz="2200" b="0">
-                <a:solidFill>
-                  <a:srgbClr val="E8ECF0"/>
-                </a:solidFill>
-                <a:latin typeface="Calibri"/>
-              </a:rPr>
-              <a:t>C4.2.3</a:t>
+              <a:rPr sz="2100">
+                <a:solidFill>
+                  <a:srgbClr val="404040"/>
+                </a:solidFill>
+                <a:latin typeface="Calibri"/>
+              </a:rPr>
+              <a:t>•  Qualité, tests, sécurité, DAG, déploiement GHCR</a:t>
             </a:r>
           </a:p>
         </p:txBody>
@@ -9642,7 +6895,7 @@
         <p:spPr>
           <a:xfrm>
             <a:off x="500000" y="300000"/>
-            <a:ext cx="9200000" cy="1100000"/>
+            <a:ext cx="9200000" cy="1150000"/>
           </a:xfrm>
           <a:prstGeom prst="rect">
             <a:avLst/>
@@ -9657,13 +6910,13 @@
           <a:p>
             <a:pPr algn="l"/>
             <a:r>
-              <a:rPr sz="3000" b="1">
+              <a:rPr sz="2900" b="1">
                 <a:solidFill>
                   <a:srgbClr val="0B3D66"/>
                 </a:solidFill>
                 <a:latin typeface="Calibri"/>
               </a:rPr>
-              <a:t>Ce que je présente : une plateforme reconstruite sur un contexte réel</a:t>
+              <a:t>Une plateforme reconstruite sur un contexte réel — et mon rôle</a:t>
             </a:r>
           </a:p>
         </p:txBody>
@@ -9677,7 +6930,7 @@
         <p:spPr>
           <a:xfrm>
             <a:off x="10000000" y="180000"/>
-            <a:ext cx="1900000" cy="500000"/>
+            <a:ext cx="1950000" cy="520000"/>
           </a:xfrm>
           <a:prstGeom prst="rect">
             <a:avLst/>
@@ -9685,6 +6938,9 @@
           <a:solidFill>
             <a:srgbClr val="C0392B"/>
           </a:solidFill>
+          <a:ln>
+            <a:noFill/>
+          </a:ln>
         </p:spPr>
         <p:txBody>
           <a:bodyPr wrap="square" anchor="ctr">
@@ -9713,7 +6969,7 @@
         </p:nvSpPr>
         <p:spPr>
           <a:xfrm>
-            <a:off x="600000" y="1600000"/>
+            <a:off x="600000" y="1650000"/>
             <a:ext cx="11000000" cy="4600000"/>
           </a:xfrm>
           <a:prstGeom prst="rect">
@@ -9733,13 +6989,13 @@
               </a:spcAft>
             </a:pPr>
             <a:r>
-              <a:rPr sz="2000">
-                <a:solidFill>
-                  <a:srgbClr val="5A5A5A"/>
-                </a:solidFill>
-                <a:latin typeface="Calibri"/>
-              </a:rPr>
-              <a:t>•  Contexte métier réel (alternance Prévifrance)</a:t>
+              <a:rPr sz="2100">
+                <a:solidFill>
+                  <a:srgbClr val="404040"/>
+                </a:solidFill>
+                <a:latin typeface="Calibri"/>
+              </a:rPr>
+              <a:t>•  Contexte métier réel vécu en alternance (Prévifrance)</a:t>
             </a:r>
           </a:p>
           <a:p>
@@ -9749,9 +7005,9 @@
               </a:spcAft>
             </a:pPr>
             <a:r>
-              <a:rPr sz="2000">
-                <a:solidFill>
-                  <a:srgbClr val="5A5A5A"/>
+              <a:rPr sz="2100">
+                <a:solidFill>
+                  <a:srgbClr val="404040"/>
                 </a:solidFill>
                 <a:latin typeface="Calibri"/>
               </a:rPr>
@@ -9765,13 +7021,13 @@
               </a:spcAft>
             </a:pPr>
             <a:r>
-              <a:rPr sz="2000">
-                <a:solidFill>
-                  <a:srgbClr val="5A5A5A"/>
-                </a:solidFill>
-                <a:latin typeface="Calibri"/>
-              </a:rPr>
-              <a:t>•  Fichier INSEE réel + référentiel adhérents synthétique (Faker)</a:t>
+              <a:rPr sz="2100">
+                <a:solidFill>
+                  <a:srgbClr val="404040"/>
+                </a:solidFill>
+                <a:latin typeface="Calibri"/>
+              </a:rPr>
+              <a:t>•  Fichier INSEE réel · référentiel adhérents synthétique (Faker)</a:t>
             </a:r>
           </a:p>
           <a:p>
@@ -9781,1607 +7037,13 @@
               </a:spcAft>
             </a:pPr>
             <a:r>
-              <a:rPr sz="2000">
-                <a:solidFill>
-                  <a:srgbClr val="5A5A5A"/>
-                </a:solidFill>
-                <a:latin typeface="Calibri"/>
-              </a:rPr>
-              <a:t>•  Aucune donnée d'entreprise ni personnelle réelle</a:t>
-            </a:r>
-          </a:p>
-        </p:txBody>
-      </p:sp>
-    </p:spTree>
-  </p:cSld>
-  <p:clrMapOvr>
-    <a:masterClrMapping/>
-  </p:clrMapOvr>
-</p:sld>
-</file>
-
-<file path=ppt/slides/slide30.xml><?xml version="1.0" encoding="utf-8"?>
-<p:sld xmlns:a="http://schemas.openxmlformats.org/drawingml/2006/main" xmlns:p="http://schemas.openxmlformats.org/presentationml/2006/main" xmlns:r="http://schemas.openxmlformats.org/officeDocument/2006/relationships">
-  <p:cSld>
-    <p:spTree>
-      <p:nvGrpSpPr>
-        <p:cNvPr id="1" name=""/>
-        <p:cNvGrpSpPr/>
-        <p:nvPr/>
-      </p:nvGrpSpPr>
-      <p:grpSpPr/>
-      <p:sp>
-        <p:nvSpPr>
-          <p:cNvPr id="2" name="TextBox 1"/>
-          <p:cNvSpPr txBox="1"/>
-          <p:nvPr/>
-        </p:nvSpPr>
-        <p:spPr>
-          <a:xfrm>
-            <a:off x="500000" y="300000"/>
-            <a:ext cx="9200000" cy="1100000"/>
-          </a:xfrm>
-          <a:prstGeom prst="rect">
-            <a:avLst/>
-          </a:prstGeom>
-          <a:noFill/>
-        </p:spPr>
-        <p:txBody>
-          <a:bodyPr wrap="square">
-            <a:spAutoFit/>
-          </a:bodyPr>
-          <a:lstStyle/>
-          <a:p>
-            <a:pPr algn="l"/>
-            <a:r>
-              <a:rPr sz="3000" b="1">
-                <a:solidFill>
-                  <a:srgbClr val="0B3D66"/>
-                </a:solidFill>
-                <a:latin typeface="Calibri"/>
-              </a:rPr>
-              <a:t>Un pipeline CI/CD construit de zéro, cinq étages</a:t>
-            </a:r>
-          </a:p>
-        </p:txBody>
-      </p:sp>
-      <p:sp>
-        <p:nvSpPr>
-          <p:cNvPr id="3" name="TextBox 2"/>
-          <p:cNvSpPr txBox="1"/>
-          <p:nvPr/>
-        </p:nvSpPr>
-        <p:spPr>
-          <a:xfrm>
-            <a:off x="10000000" y="180000"/>
-            <a:ext cx="1900000" cy="500000"/>
-          </a:xfrm>
-          <a:prstGeom prst="rect">
-            <a:avLst/>
-          </a:prstGeom>
-          <a:solidFill>
-            <a:srgbClr val="C0392B"/>
-          </a:solidFill>
-        </p:spPr>
-        <p:txBody>
-          <a:bodyPr wrap="square" anchor="ctr">
-            <a:spAutoFit/>
-          </a:bodyPr>
-          <a:lstStyle/>
-          <a:p>
-            <a:pPr algn="ctr"/>
-            <a:r>
-              <a:rPr sz="1600" b="1">
-                <a:solidFill>
-                  <a:srgbClr val="FFFFFF"/>
-                </a:solidFill>
-                <a:latin typeface="Calibri"/>
-              </a:rPr>
-              <a:t>C4.2.3</a:t>
-            </a:r>
-          </a:p>
-        </p:txBody>
-      </p:sp>
-      <p:sp>
-        <p:nvSpPr>
-          <p:cNvPr id="4" name="TextBox 3"/>
-          <p:cNvSpPr txBox="1"/>
-          <p:nvPr/>
-        </p:nvSpPr>
-        <p:spPr>
-          <a:xfrm>
-            <a:off x="600000" y="1600000"/>
-            <a:ext cx="11000000" cy="4600000"/>
-          </a:xfrm>
-          <a:prstGeom prst="rect">
-            <a:avLst/>
-          </a:prstGeom>
-          <a:noFill/>
-        </p:spPr>
-        <p:txBody>
-          <a:bodyPr wrap="square">
-            <a:spAutoFit/>
-          </a:bodyPr>
-          <a:lstStyle/>
-          <a:p>
-            <a:pPr>
-              <a:spcAft>
-                <a:spcPts val="1000"/>
-              </a:spcAft>
-            </a:pPr>
-            <a:r>
-              <a:rPr sz="2000">
-                <a:solidFill>
-                  <a:srgbClr val="5A5A5A"/>
-                </a:solidFill>
-                <a:latin typeface="Calibri"/>
-              </a:rPr>
-              <a:t>•  Qualité (ruff) · Tests (pytest) · Sécurité (pip-audit)</a:t>
-            </a:r>
-          </a:p>
-          <a:p>
-            <a:pPr>
-              <a:spcAft>
-                <a:spcPts val="1000"/>
-              </a:spcAft>
-            </a:pPr>
-            <a:r>
-              <a:rPr sz="2000">
-                <a:solidFill>
-                  <a:srgbClr val="5A5A5A"/>
-                </a:solidFill>
-                <a:latin typeface="Calibri"/>
-              </a:rPr>
-              <a:t>•  Validation des DAG Airflow</a:t>
-            </a:r>
-          </a:p>
-          <a:p>
-            <a:pPr>
-              <a:spcAft>
-                <a:spcPts val="1000"/>
-              </a:spcAft>
-            </a:pPr>
-            <a:r>
-              <a:rPr sz="2000">
-                <a:solidFill>
-                  <a:srgbClr val="5A5A5A"/>
-                </a:solidFill>
-                <a:latin typeface="Calibri"/>
-              </a:rPr>
-              <a:t>•  Déploiement de l'image applicative</a:t>
-            </a:r>
-          </a:p>
-        </p:txBody>
-      </p:sp>
-    </p:spTree>
-  </p:cSld>
-  <p:clrMapOvr>
-    <a:masterClrMapping/>
-  </p:clrMapOvr>
-</p:sld>
-</file>
-
-<file path=ppt/slides/slide31.xml><?xml version="1.0" encoding="utf-8"?>
-<p:sld xmlns:a="http://schemas.openxmlformats.org/drawingml/2006/main" xmlns:p="http://schemas.openxmlformats.org/presentationml/2006/main" xmlns:r="http://schemas.openxmlformats.org/officeDocument/2006/relationships">
-  <p:cSld>
-    <p:spTree>
-      <p:nvGrpSpPr>
-        <p:cNvPr id="1" name=""/>
-        <p:cNvGrpSpPr/>
-        <p:nvPr/>
-      </p:nvGrpSpPr>
-      <p:grpSpPr/>
-      <p:sp>
-        <p:nvSpPr>
-          <p:cNvPr id="2" name="TextBox 1"/>
-          <p:cNvSpPr txBox="1"/>
-          <p:nvPr/>
-        </p:nvSpPr>
-        <p:spPr>
-          <a:xfrm>
-            <a:off x="500000" y="300000"/>
-            <a:ext cx="9200000" cy="1100000"/>
-          </a:xfrm>
-          <a:prstGeom prst="rect">
-            <a:avLst/>
-          </a:prstGeom>
-          <a:noFill/>
-        </p:spPr>
-        <p:txBody>
-          <a:bodyPr wrap="square">
-            <a:spAutoFit/>
-          </a:bodyPr>
-          <a:lstStyle/>
-          <a:p>
-            <a:pPr algn="l"/>
-            <a:r>
-              <a:rPr sz="3000" b="1">
-                <a:solidFill>
-                  <a:srgbClr val="0B3D66"/>
-                </a:solidFill>
-                <a:latin typeface="Calibri"/>
-              </a:rPr>
-              <a:t>Exécution réelle : les cinq jobs au vert</a:t>
-            </a:r>
-          </a:p>
-        </p:txBody>
-      </p:sp>
-      <p:sp>
-        <p:nvSpPr>
-          <p:cNvPr id="3" name="TextBox 2"/>
-          <p:cNvSpPr txBox="1"/>
-          <p:nvPr/>
-        </p:nvSpPr>
-        <p:spPr>
-          <a:xfrm>
-            <a:off x="10000000" y="180000"/>
-            <a:ext cx="1900000" cy="500000"/>
-          </a:xfrm>
-          <a:prstGeom prst="rect">
-            <a:avLst/>
-          </a:prstGeom>
-          <a:solidFill>
-            <a:srgbClr val="C0392B"/>
-          </a:solidFill>
-        </p:spPr>
-        <p:txBody>
-          <a:bodyPr wrap="square" anchor="ctr">
-            <a:spAutoFit/>
-          </a:bodyPr>
-          <a:lstStyle/>
-          <a:p>
-            <a:pPr algn="ctr"/>
-            <a:r>
-              <a:rPr sz="1600" b="1">
-                <a:solidFill>
-                  <a:srgbClr val="FFFFFF"/>
-                </a:solidFill>
-                <a:latin typeface="Calibri"/>
-              </a:rPr>
-              <a:t>C4.2.3</a:t>
-            </a:r>
-          </a:p>
-        </p:txBody>
-      </p:sp>
-      <p:sp>
-        <p:nvSpPr>
-          <p:cNvPr id="4" name="TextBox 3"/>
-          <p:cNvSpPr txBox="1"/>
-          <p:nvPr/>
-        </p:nvSpPr>
-        <p:spPr>
-          <a:xfrm>
-            <a:off x="600000" y="1500000"/>
-            <a:ext cx="11000000" cy="1300000"/>
-          </a:xfrm>
-          <a:prstGeom prst="rect">
-            <a:avLst/>
-          </a:prstGeom>
-          <a:noFill/>
-        </p:spPr>
-        <p:txBody>
-          <a:bodyPr wrap="square">
-            <a:spAutoFit/>
-          </a:bodyPr>
-          <a:lstStyle/>
-          <a:p>
-            <a:pPr>
-              <a:spcAft>
-                <a:spcPts val="1000"/>
-              </a:spcAft>
-            </a:pPr>
-            <a:r>
-              <a:rPr sz="1800">
-                <a:solidFill>
-                  <a:srgbClr val="5A5A5A"/>
-                </a:solidFill>
-                <a:latin typeface="Calibri"/>
-              </a:rPr>
-              <a:t>•  Déclenché à chaque push sur main</a:t>
-            </a:r>
-          </a:p>
-          <a:p>
-            <a:pPr>
-              <a:spcAft>
-                <a:spcPts val="1000"/>
-              </a:spcAft>
-            </a:pPr>
-            <a:r>
-              <a:rPr sz="1800">
-                <a:solidFill>
-                  <a:srgbClr val="5A5A5A"/>
-                </a:solidFill>
-                <a:latin typeface="Calibri"/>
-              </a:rPr>
-              <a:t>•  Rapport de tests + couverture archivés</a:t>
-            </a:r>
-          </a:p>
-          <a:p>
-            <a:pPr>
-              <a:spcAft>
-                <a:spcPts val="1000"/>
-              </a:spcAft>
-            </a:pPr>
-            <a:r>
-              <a:rPr sz="1800">
-                <a:solidFill>
-                  <a:srgbClr val="5A5A5A"/>
-                </a:solidFill>
-                <a:latin typeface="Calibri"/>
-              </a:rPr>
-              <a:t>•  Rouge = pas de fusion</a:t>
-            </a:r>
-          </a:p>
-        </p:txBody>
-      </p:sp>
-      <p:pic>
-        <p:nvPicPr>
-          <p:cNvPr id="5" name="Picture 4" descr="C4-2-3_ci_run_vert.png"/>
-          <p:cNvPicPr>
-            <a:picLocks noChangeAspect="1"/>
-          </p:cNvPicPr>
-          <p:nvPr/>
-        </p:nvPicPr>
-        <p:blipFill>
-          <a:blip r:embed="rId2"/>
-          <a:stretch>
-            <a:fillRect/>
-          </a:stretch>
-        </p:blipFill>
-        <p:spPr>
-          <a:xfrm>
-            <a:off x="1200000" y="2900000"/>
-            <a:ext cx="9800000" cy="4429927"/>
-          </a:xfrm>
-          <a:prstGeom prst="rect">
-            <a:avLst/>
-          </a:prstGeom>
-        </p:spPr>
-      </p:pic>
-    </p:spTree>
-  </p:cSld>
-  <p:clrMapOvr>
-    <a:masterClrMapping/>
-  </p:clrMapOvr>
-</p:sld>
-</file>
-
-<file path=ppt/slides/slide32.xml><?xml version="1.0" encoding="utf-8"?>
-<p:sld xmlns:a="http://schemas.openxmlformats.org/drawingml/2006/main" xmlns:p="http://schemas.openxmlformats.org/presentationml/2006/main" xmlns:r="http://schemas.openxmlformats.org/officeDocument/2006/relationships">
-  <p:cSld>
-    <p:spTree>
-      <p:nvGrpSpPr>
-        <p:cNvPr id="1" name=""/>
-        <p:cNvGrpSpPr/>
-        <p:nvPr/>
-      </p:nvGrpSpPr>
-      <p:grpSpPr/>
-      <p:sp>
-        <p:nvSpPr>
-          <p:cNvPr id="2" name="TextBox 1"/>
-          <p:cNvSpPr txBox="1"/>
-          <p:nvPr/>
-        </p:nvSpPr>
-        <p:spPr>
-          <a:xfrm>
-            <a:off x="500000" y="300000"/>
-            <a:ext cx="9200000" cy="1100000"/>
-          </a:xfrm>
-          <a:prstGeom prst="rect">
-            <a:avLst/>
-          </a:prstGeom>
-          <a:noFill/>
-        </p:spPr>
-        <p:txBody>
-          <a:bodyPr wrap="square">
-            <a:spAutoFit/>
-          </a:bodyPr>
-          <a:lstStyle/>
-          <a:p>
-            <a:pPr algn="l"/>
-            <a:r>
-              <a:rPr sz="3000" b="1">
-                <a:solidFill>
-                  <a:srgbClr val="0B3D66"/>
-                </a:solidFill>
-                <a:latin typeface="Calibri"/>
-              </a:rPr>
-              <a:t>Déploiement réel : l'image est publiée sur un registre (GHCR)</a:t>
-            </a:r>
-          </a:p>
-        </p:txBody>
-      </p:sp>
-      <p:sp>
-        <p:nvSpPr>
-          <p:cNvPr id="3" name="TextBox 2"/>
-          <p:cNvSpPr txBox="1"/>
-          <p:nvPr/>
-        </p:nvSpPr>
-        <p:spPr>
-          <a:xfrm>
-            <a:off x="10000000" y="180000"/>
-            <a:ext cx="1900000" cy="500000"/>
-          </a:xfrm>
-          <a:prstGeom prst="rect">
-            <a:avLst/>
-          </a:prstGeom>
-          <a:solidFill>
-            <a:srgbClr val="C0392B"/>
-          </a:solidFill>
-        </p:spPr>
-        <p:txBody>
-          <a:bodyPr wrap="square" anchor="ctr">
-            <a:spAutoFit/>
-          </a:bodyPr>
-          <a:lstStyle/>
-          <a:p>
-            <a:pPr algn="ctr"/>
-            <a:r>
-              <a:rPr sz="1600" b="1">
-                <a:solidFill>
-                  <a:srgbClr val="FFFFFF"/>
-                </a:solidFill>
-                <a:latin typeface="Calibri"/>
-              </a:rPr>
-              <a:t>C4.2.3</a:t>
-            </a:r>
-          </a:p>
-        </p:txBody>
-      </p:sp>
-      <p:sp>
-        <p:nvSpPr>
-          <p:cNvPr id="4" name="TextBox 3"/>
-          <p:cNvSpPr txBox="1"/>
-          <p:nvPr/>
-        </p:nvSpPr>
-        <p:spPr>
-          <a:xfrm>
-            <a:off x="600000" y="1500000"/>
-            <a:ext cx="11000000" cy="1300000"/>
-          </a:xfrm>
-          <a:prstGeom prst="rect">
-            <a:avLst/>
-          </a:prstGeom>
-          <a:noFill/>
-        </p:spPr>
-        <p:txBody>
-          <a:bodyPr wrap="square">
-            <a:spAutoFit/>
-          </a:bodyPr>
-          <a:lstStyle/>
-          <a:p>
-            <a:pPr>
-              <a:spcAft>
-                <a:spcPts val="1000"/>
-              </a:spcAft>
-            </a:pPr>
-            <a:r>
-              <a:rPr sz="1800">
-                <a:solidFill>
-                  <a:srgbClr val="5A5A5A"/>
-                </a:solidFill>
-                <a:latin typeface="Calibri"/>
-              </a:rPr>
-              <a:t>•  build → push ghcr.io/ratpigene/eckert-elt → pull + smoke test</a:t>
-            </a:r>
-          </a:p>
-          <a:p>
-            <a:pPr>
-              <a:spcAft>
-                <a:spcPts val="1000"/>
-              </a:spcAft>
-            </a:pPr>
-            <a:r>
-              <a:rPr sz="1800">
-                <a:solidFill>
-                  <a:srgbClr val="5A5A5A"/>
-                </a:solidFill>
-                <a:latin typeface="Calibri"/>
-              </a:rPr>
-              <a:t>•  Authentifié par le token intégré, aucun secret externe</a:t>
-            </a:r>
-          </a:p>
-          <a:p>
-            <a:pPr>
-              <a:spcAft>
-                <a:spcPts val="1000"/>
-              </a:spcAft>
-            </a:pPr>
-            <a:r>
-              <a:rPr sz="1800">
-                <a:solidFill>
-                  <a:srgbClr val="5A5A5A"/>
-                </a:solidFill>
-                <a:latin typeface="Calibri"/>
-              </a:rPr>
-              <a:t>•  Image récupérable par tout consommateur (docker pull)</a:t>
-            </a:r>
-          </a:p>
-        </p:txBody>
-      </p:sp>
-      <p:pic>
-        <p:nvPicPr>
-          <p:cNvPr id="5" name="Picture 4" descr="C4-2-3_deploiement_ghcr.png"/>
-          <p:cNvPicPr>
-            <a:picLocks noChangeAspect="1"/>
-          </p:cNvPicPr>
-          <p:nvPr/>
-        </p:nvPicPr>
-        <p:blipFill>
-          <a:blip r:embed="rId2"/>
-          <a:stretch>
-            <a:fillRect/>
-          </a:stretch>
-        </p:blipFill>
-        <p:spPr>
-          <a:xfrm>
-            <a:off x="1200000" y="2900000"/>
-            <a:ext cx="9800000" cy="5477480"/>
-          </a:xfrm>
-          <a:prstGeom prst="rect">
-            <a:avLst/>
-          </a:prstGeom>
-        </p:spPr>
-      </p:pic>
-    </p:spTree>
-  </p:cSld>
-  <p:clrMapOvr>
-    <a:masterClrMapping/>
-  </p:clrMapOvr>
-</p:sld>
-</file>
-
-<file path=ppt/slides/slide33.xml><?xml version="1.0" encoding="utf-8"?>
-<p:sld xmlns:a="http://schemas.openxmlformats.org/drawingml/2006/main" xmlns:p="http://schemas.openxmlformats.org/presentationml/2006/main" xmlns:r="http://schemas.openxmlformats.org/officeDocument/2006/relationships">
-  <p:cSld>
-    <p:spTree>
-      <p:nvGrpSpPr>
-        <p:cNvPr id="1" name=""/>
-        <p:cNvGrpSpPr/>
-        <p:nvPr/>
-      </p:nvGrpSpPr>
-      <p:grpSpPr/>
-      <p:sp>
-        <p:nvSpPr>
-          <p:cNvPr id="2" name="TextBox 1"/>
-          <p:cNvSpPr txBox="1"/>
-          <p:nvPr/>
-        </p:nvSpPr>
-        <p:spPr>
-          <a:xfrm>
-            <a:off x="0" y="0"/>
-            <a:ext cx="12192000" cy="6858000"/>
-          </a:xfrm>
-          <a:prstGeom prst="rect">
-            <a:avLst/>
-          </a:prstGeom>
-          <a:solidFill>
-            <a:srgbClr val="0B3D66"/>
-          </a:solidFill>
-          <a:ln>
-            <a:noFill/>
-          </a:ln>
-        </p:spPr>
-        <p:txBody>
-          <a:bodyPr wrap="none">
-            <a:spAutoFit/>
-          </a:bodyPr>
-          <a:lstStyle/>
-          <a:p/>
-        </p:txBody>
-      </p:sp>
-      <p:sp>
-        <p:nvSpPr>
-          <p:cNvPr id="3" name="TextBox 2"/>
-          <p:cNvSpPr txBox="1"/>
-          <p:nvPr/>
-        </p:nvSpPr>
-        <p:spPr>
-          <a:xfrm>
-            <a:off x="700000" y="2600000"/>
-            <a:ext cx="10800000" cy="1200000"/>
-          </a:xfrm>
-          <a:prstGeom prst="rect">
-            <a:avLst/>
-          </a:prstGeom>
-          <a:noFill/>
-        </p:spPr>
-        <p:txBody>
-          <a:bodyPr wrap="square">
-            <a:spAutoFit/>
-          </a:bodyPr>
-          <a:lstStyle/>
-          <a:p>
-            <a:pPr algn="l"/>
-            <a:r>
-              <a:rPr sz="4000" b="1">
-                <a:solidFill>
-                  <a:srgbClr val="FFFFFF"/>
-                </a:solidFill>
-                <a:latin typeface="Calibri"/>
-              </a:rPr>
-              <a:t>Exploiter : supervision, MCO, documentation</a:t>
-            </a:r>
-          </a:p>
-        </p:txBody>
-      </p:sp>
-      <p:sp>
-        <p:nvSpPr>
-          <p:cNvPr id="4" name="TextBox 3"/>
-          <p:cNvSpPr txBox="1"/>
-          <p:nvPr/>
-        </p:nvSpPr>
-        <p:spPr>
-          <a:xfrm>
-            <a:off x="700000" y="3900000"/>
-            <a:ext cx="10800000" cy="800000"/>
-          </a:xfrm>
-          <a:prstGeom prst="rect">
-            <a:avLst/>
-          </a:prstGeom>
-          <a:noFill/>
-        </p:spPr>
-        <p:txBody>
-          <a:bodyPr wrap="square">
-            <a:spAutoFit/>
-          </a:bodyPr>
-          <a:lstStyle/>
-          <a:p>
-            <a:pPr algn="l"/>
-            <a:r>
-              <a:rPr sz="2200" b="0">
-                <a:solidFill>
-                  <a:srgbClr val="E8ECF0"/>
-                </a:solidFill>
-                <a:latin typeface="Calibri"/>
-              </a:rPr>
-              <a:t>C4.3.1 · C4.3.2 · C4.3.3</a:t>
-            </a:r>
-          </a:p>
-        </p:txBody>
-      </p:sp>
-    </p:spTree>
-  </p:cSld>
-  <p:clrMapOvr>
-    <a:masterClrMapping/>
-  </p:clrMapOvr>
-</p:sld>
-</file>
-
-<file path=ppt/slides/slide34.xml><?xml version="1.0" encoding="utf-8"?>
-<p:sld xmlns:a="http://schemas.openxmlformats.org/drawingml/2006/main" xmlns:p="http://schemas.openxmlformats.org/presentationml/2006/main" xmlns:r="http://schemas.openxmlformats.org/officeDocument/2006/relationships">
-  <p:cSld>
-    <p:spTree>
-      <p:nvGrpSpPr>
-        <p:cNvPr id="1" name=""/>
-        <p:cNvGrpSpPr/>
-        <p:nvPr/>
-      </p:nvGrpSpPr>
-      <p:grpSpPr/>
-      <p:sp>
-        <p:nvSpPr>
-          <p:cNvPr id="2" name="TextBox 1"/>
-          <p:cNvSpPr txBox="1"/>
-          <p:nvPr/>
-        </p:nvSpPr>
-        <p:spPr>
-          <a:xfrm>
-            <a:off x="500000" y="300000"/>
-            <a:ext cx="9200000" cy="1100000"/>
-          </a:xfrm>
-          <a:prstGeom prst="rect">
-            <a:avLst/>
-          </a:prstGeom>
-          <a:noFill/>
-        </p:spPr>
-        <p:txBody>
-          <a:bodyPr wrap="square">
-            <a:spAutoFit/>
-          </a:bodyPr>
-          <a:lstStyle/>
-          <a:p>
-            <a:pPr algn="l"/>
-            <a:r>
-              <a:rPr sz="3000" b="1">
-                <a:solidFill>
-                  <a:srgbClr val="0B3D66"/>
-                </a:solidFill>
-                <a:latin typeface="Calibri"/>
-              </a:rPr>
-              <a:t>Supervision : ce qui est surveillé et ses seuils</a:t>
-            </a:r>
-          </a:p>
-        </p:txBody>
-      </p:sp>
-      <p:sp>
-        <p:nvSpPr>
-          <p:cNvPr id="3" name="TextBox 2"/>
-          <p:cNvSpPr txBox="1"/>
-          <p:nvPr/>
-        </p:nvSpPr>
-        <p:spPr>
-          <a:xfrm>
-            <a:off x="10000000" y="180000"/>
-            <a:ext cx="1900000" cy="500000"/>
-          </a:xfrm>
-          <a:prstGeom prst="rect">
-            <a:avLst/>
-          </a:prstGeom>
-          <a:solidFill>
-            <a:srgbClr val="C0392B"/>
-          </a:solidFill>
-        </p:spPr>
-        <p:txBody>
-          <a:bodyPr wrap="square" anchor="ctr">
-            <a:spAutoFit/>
-          </a:bodyPr>
-          <a:lstStyle/>
-          <a:p>
-            <a:pPr algn="ctr"/>
-            <a:r>
-              <a:rPr sz="1600" b="1">
-                <a:solidFill>
-                  <a:srgbClr val="FFFFFF"/>
-                </a:solidFill>
-                <a:latin typeface="Calibri"/>
-              </a:rPr>
-              <a:t>C4.3.1</a:t>
-            </a:r>
-          </a:p>
-        </p:txBody>
-      </p:sp>
-      <p:sp>
-        <p:nvSpPr>
-          <p:cNvPr id="4" name="TextBox 3"/>
-          <p:cNvSpPr txBox="1"/>
-          <p:nvPr/>
-        </p:nvSpPr>
-        <p:spPr>
-          <a:xfrm>
-            <a:off x="600000" y="1600000"/>
-            <a:ext cx="11000000" cy="4600000"/>
-          </a:xfrm>
-          <a:prstGeom prst="rect">
-            <a:avLst/>
-          </a:prstGeom>
-          <a:noFill/>
-        </p:spPr>
-        <p:txBody>
-          <a:bodyPr wrap="square">
-            <a:spAutoFit/>
-          </a:bodyPr>
-          <a:lstStyle/>
-          <a:p>
-            <a:pPr>
-              <a:spcAft>
-                <a:spcPts val="1000"/>
-              </a:spcAft>
-            </a:pPr>
-            <a:r>
-              <a:rPr sz="2000">
-                <a:solidFill>
-                  <a:srgbClr val="5A5A5A"/>
-                </a:solidFill>
-                <a:latin typeface="Calibri"/>
-              </a:rPr>
-              <a:t>•  Statut de tâche, durée/SLA, taux de rejet, volumétrie</a:t>
-            </a:r>
-          </a:p>
-          <a:p>
-            <a:pPr>
-              <a:spcAft>
-                <a:spcPts val="1000"/>
-              </a:spcAft>
-            </a:pPr>
-            <a:r>
-              <a:rPr sz="2000">
-                <a:solidFill>
-                  <a:srgbClr val="5A5A5A"/>
-                </a:solidFill>
-                <a:latin typeface="Calibri"/>
-              </a:rPr>
-              <a:t>•  Seuils explicites et centralisés (taux de rejet 2 %, min 1000 lignes)</a:t>
-            </a:r>
-          </a:p>
-          <a:p>
-            <a:pPr>
-              <a:spcAft>
-                <a:spcPts val="1000"/>
-              </a:spcAft>
-            </a:pPr>
-            <a:r>
-              <a:rPr sz="2000">
-                <a:solidFill>
-                  <a:srgbClr val="5A5A5A"/>
-                </a:solidFill>
-                <a:latin typeface="Calibri"/>
-              </a:rPr>
-              <a:t>•  Journal ops = mémoire historisée</a:t>
-            </a:r>
-          </a:p>
-        </p:txBody>
-      </p:sp>
-    </p:spTree>
-  </p:cSld>
-  <p:clrMapOvr>
-    <a:masterClrMapping/>
-  </p:clrMapOvr>
-</p:sld>
-</file>
-
-<file path=ppt/slides/slide35.xml><?xml version="1.0" encoding="utf-8"?>
-<p:sld xmlns:a="http://schemas.openxmlformats.org/drawingml/2006/main" xmlns:p="http://schemas.openxmlformats.org/presentationml/2006/main" xmlns:r="http://schemas.openxmlformats.org/officeDocument/2006/relationships">
-  <p:cSld>
-    <p:spTree>
-      <p:nvGrpSpPr>
-        <p:cNvPr id="1" name=""/>
-        <p:cNvGrpSpPr/>
-        <p:nvPr/>
-      </p:nvGrpSpPr>
-      <p:grpSpPr/>
-      <p:sp>
-        <p:nvSpPr>
-          <p:cNvPr id="2" name="TextBox 1"/>
-          <p:cNvSpPr txBox="1"/>
-          <p:nvPr/>
-        </p:nvSpPr>
-        <p:spPr>
-          <a:xfrm>
-            <a:off x="500000" y="300000"/>
-            <a:ext cx="9200000" cy="1100000"/>
-          </a:xfrm>
-          <a:prstGeom prst="rect">
-            <a:avLst/>
-          </a:prstGeom>
-          <a:noFill/>
-        </p:spPr>
-        <p:txBody>
-          <a:bodyPr wrap="square">
-            <a:spAutoFit/>
-          </a:bodyPr>
-          <a:lstStyle/>
-          <a:p>
-            <a:pPr algn="l"/>
-            <a:r>
-              <a:rPr sz="3000" b="1">
-                <a:solidFill>
-                  <a:srgbClr val="0B3D66"/>
-                </a:solidFill>
-                <a:latin typeface="Calibri"/>
-              </a:rPr>
-              <a:t>Alertes : trois canaux, une escalade — et réellement délivrées</a:t>
-            </a:r>
-          </a:p>
-        </p:txBody>
-      </p:sp>
-      <p:sp>
-        <p:nvSpPr>
-          <p:cNvPr id="3" name="TextBox 2"/>
-          <p:cNvSpPr txBox="1"/>
-          <p:nvPr/>
-        </p:nvSpPr>
-        <p:spPr>
-          <a:xfrm>
-            <a:off x="10000000" y="180000"/>
-            <a:ext cx="1900000" cy="500000"/>
-          </a:xfrm>
-          <a:prstGeom prst="rect">
-            <a:avLst/>
-          </a:prstGeom>
-          <a:solidFill>
-            <a:srgbClr val="C0392B"/>
-          </a:solidFill>
-        </p:spPr>
-        <p:txBody>
-          <a:bodyPr wrap="square" anchor="ctr">
-            <a:spAutoFit/>
-          </a:bodyPr>
-          <a:lstStyle/>
-          <a:p>
-            <a:pPr algn="ctr"/>
-            <a:r>
-              <a:rPr sz="1600" b="1">
-                <a:solidFill>
-                  <a:srgbClr val="FFFFFF"/>
-                </a:solidFill>
-                <a:latin typeface="Calibri"/>
-              </a:rPr>
-              <a:t>C4.3.1</a:t>
-            </a:r>
-          </a:p>
-        </p:txBody>
-      </p:sp>
-      <p:sp>
-        <p:nvSpPr>
-          <p:cNvPr id="4" name="TextBox 3"/>
-          <p:cNvSpPr txBox="1"/>
-          <p:nvPr/>
-        </p:nvSpPr>
-        <p:spPr>
-          <a:xfrm>
-            <a:off x="600000" y="1500000"/>
-            <a:ext cx="11000000" cy="1300000"/>
-          </a:xfrm>
-          <a:prstGeom prst="rect">
-            <a:avLst/>
-          </a:prstGeom>
-          <a:noFill/>
-        </p:spPr>
-        <p:txBody>
-          <a:bodyPr wrap="square">
-            <a:spAutoFit/>
-          </a:bodyPr>
-          <a:lstStyle/>
-          <a:p>
-            <a:pPr>
-              <a:spcAft>
-                <a:spcPts val="1000"/>
-              </a:spcAft>
-            </a:pPr>
-            <a:r>
-              <a:rPr sz="1800">
-                <a:solidFill>
-                  <a:srgbClr val="5A5A5A"/>
-                </a:solidFill>
-                <a:latin typeface="Calibri"/>
-              </a:rPr>
-              <a:t>•  Journal ops → webhook (échec) → courriel (SLA)</a:t>
-            </a:r>
-          </a:p>
-          <a:p>
-            <a:pPr>
-              <a:spcAft>
-                <a:spcPts val="1000"/>
-              </a:spcAft>
-            </a:pPr>
-            <a:r>
-              <a:rPr sz="1800">
-                <a:solidFill>
-                  <a:srgbClr val="5A5A5A"/>
-                </a:solidFill>
-                <a:latin typeface="Calibri"/>
-              </a:rPr>
-              <a:t>•  Alerte reçue : titre + corps + destinataire capturés</a:t>
-            </a:r>
-          </a:p>
-          <a:p>
-            <a:pPr>
-              <a:spcAft>
-                <a:spcPts val="1000"/>
-              </a:spcAft>
-            </a:pPr>
-            <a:r>
-              <a:rPr sz="1800">
-                <a:solidFill>
-                  <a:srgbClr val="5A5A5A"/>
-                </a:solidFill>
-                <a:latin typeface="Calibri"/>
-              </a:rPr>
-              <a:t>•  Panne à 3 h : notification immédiate + reprise (Clear)</a:t>
-            </a:r>
-          </a:p>
-        </p:txBody>
-      </p:sp>
-      <p:pic>
-        <p:nvPicPr>
-          <p:cNvPr id="5" name="Picture 4" descr="C4-3-1_airflow_eventlog.png"/>
-          <p:cNvPicPr>
-            <a:picLocks noChangeAspect="1"/>
-          </p:cNvPicPr>
-          <p:nvPr/>
-        </p:nvPicPr>
-        <p:blipFill>
-          <a:blip r:embed="rId2"/>
-          <a:stretch>
-            <a:fillRect/>
-          </a:stretch>
-        </p:blipFill>
-        <p:spPr>
-          <a:xfrm>
-            <a:off x="1200000" y="2900000"/>
-            <a:ext cx="9800000" cy="3111679"/>
-          </a:xfrm>
-          <a:prstGeom prst="rect">
-            <a:avLst/>
-          </a:prstGeom>
-        </p:spPr>
-      </p:pic>
-    </p:spTree>
-  </p:cSld>
-  <p:clrMapOvr>
-    <a:masterClrMapping/>
-  </p:clrMapOvr>
-</p:sld>
-</file>
-
-<file path=ppt/slides/slide36.xml><?xml version="1.0" encoding="utf-8"?>
-<p:sld xmlns:a="http://schemas.openxmlformats.org/drawingml/2006/main" xmlns:p="http://schemas.openxmlformats.org/presentationml/2006/main" xmlns:r="http://schemas.openxmlformats.org/officeDocument/2006/relationships">
-  <p:cSld>
-    <p:spTree>
-      <p:nvGrpSpPr>
-        <p:cNvPr id="1" name=""/>
-        <p:cNvGrpSpPr/>
-        <p:nvPr/>
-      </p:nvGrpSpPr>
-      <p:grpSpPr/>
-      <p:sp>
-        <p:nvSpPr>
-          <p:cNvPr id="2" name="TextBox 1"/>
-          <p:cNvSpPr txBox="1"/>
-          <p:nvPr/>
-        </p:nvSpPr>
-        <p:spPr>
-          <a:xfrm>
-            <a:off x="500000" y="300000"/>
-            <a:ext cx="9200000" cy="1100000"/>
-          </a:xfrm>
-          <a:prstGeom prst="rect">
-            <a:avLst/>
-          </a:prstGeom>
-          <a:noFill/>
-        </p:spPr>
-        <p:txBody>
-          <a:bodyPr wrap="square">
-            <a:spAutoFit/>
-          </a:bodyPr>
-          <a:lstStyle/>
-          <a:p>
-            <a:pPr algn="l"/>
-            <a:r>
-              <a:rPr sz="3000" b="1">
-                <a:solidFill>
-                  <a:srgbClr val="0B3D66"/>
-                </a:solidFill>
-                <a:latin typeface="Calibri"/>
-              </a:rPr>
-              <a:t>Exploitation : un calendrier de MCO, secrets et certificats</a:t>
-            </a:r>
-          </a:p>
-        </p:txBody>
-      </p:sp>
-      <p:sp>
-        <p:nvSpPr>
-          <p:cNvPr id="3" name="TextBox 2"/>
-          <p:cNvSpPr txBox="1"/>
-          <p:nvPr/>
-        </p:nvSpPr>
-        <p:spPr>
-          <a:xfrm>
-            <a:off x="10000000" y="180000"/>
-            <a:ext cx="1900000" cy="500000"/>
-          </a:xfrm>
-          <a:prstGeom prst="rect">
-            <a:avLst/>
-          </a:prstGeom>
-          <a:solidFill>
-            <a:srgbClr val="C0392B"/>
-          </a:solidFill>
-        </p:spPr>
-        <p:txBody>
-          <a:bodyPr wrap="square" anchor="ctr">
-            <a:spAutoFit/>
-          </a:bodyPr>
-          <a:lstStyle/>
-          <a:p>
-            <a:pPr algn="ctr"/>
-            <a:r>
-              <a:rPr sz="1600" b="1">
-                <a:solidFill>
-                  <a:srgbClr val="FFFFFF"/>
-                </a:solidFill>
-                <a:latin typeface="Calibri"/>
-              </a:rPr>
-              <a:t>C4.3.2</a:t>
-            </a:r>
-          </a:p>
-        </p:txBody>
-      </p:sp>
-      <p:sp>
-        <p:nvSpPr>
-          <p:cNvPr id="4" name="TextBox 3"/>
-          <p:cNvSpPr txBox="1"/>
-          <p:nvPr/>
-        </p:nvSpPr>
-        <p:spPr>
-          <a:xfrm>
-            <a:off x="600000" y="1600000"/>
-            <a:ext cx="11000000" cy="4600000"/>
-          </a:xfrm>
-          <a:prstGeom prst="rect">
-            <a:avLst/>
-          </a:prstGeom>
-          <a:noFill/>
-        </p:spPr>
-        <p:txBody>
-          <a:bodyPr wrap="square">
-            <a:spAutoFit/>
-          </a:bodyPr>
-          <a:lstStyle/>
-          <a:p>
-            <a:pPr>
-              <a:spcAft>
-                <a:spcPts val="1000"/>
-              </a:spcAft>
-            </a:pPr>
-            <a:r>
-              <a:rPr sz="2000">
-                <a:solidFill>
-                  <a:srgbClr val="5A5A5A"/>
-                </a:solidFill>
-                <a:latin typeface="Calibri"/>
-              </a:rPr>
-              <a:t>•  Cycle mensuel / trimestriel / semestriel / annuel</a:t>
-            </a:r>
-          </a:p>
-          <a:p>
-            <a:pPr>
-              <a:spcAft>
-                <a:spcPts val="1000"/>
-              </a:spcAft>
-            </a:pPr>
-            <a:r>
-              <a:rPr sz="2000">
-                <a:solidFill>
-                  <a:srgbClr val="5A5A5A"/>
-                </a:solidFill>
-                <a:latin typeface="Calibri"/>
-              </a:rPr>
-              <a:t>•  Rotation des secrets (trim.), certificats TLS (sem.)</a:t>
-            </a:r>
-          </a:p>
-          <a:p>
-            <a:pPr>
-              <a:spcAft>
-                <a:spcPts val="1000"/>
-              </a:spcAft>
-            </a:pPr>
-            <a:r>
-              <a:rPr sz="2000">
-                <a:solidFill>
-                  <a:srgbClr val="5A5A5A"/>
-                </a:solidFill>
-                <a:latin typeface="Calibri"/>
-              </a:rPr>
-              <a:t>•  Point de vigilance n°1 : dérive du taux de rejet</a:t>
-            </a:r>
-          </a:p>
-        </p:txBody>
-      </p:sp>
-    </p:spTree>
-  </p:cSld>
-  <p:clrMapOvr>
-    <a:masterClrMapping/>
-  </p:clrMapOvr>
-</p:sld>
-</file>
-
-<file path=ppt/slides/slide37.xml><?xml version="1.0" encoding="utf-8"?>
-<p:sld xmlns:a="http://schemas.openxmlformats.org/drawingml/2006/main" xmlns:p="http://schemas.openxmlformats.org/presentationml/2006/main" xmlns:r="http://schemas.openxmlformats.org/officeDocument/2006/relationships">
-  <p:cSld>
-    <p:spTree>
-      <p:nvGrpSpPr>
-        <p:cNvPr id="1" name=""/>
-        <p:cNvGrpSpPr/>
-        <p:nvPr/>
-      </p:nvGrpSpPr>
-      <p:grpSpPr/>
-      <p:sp>
-        <p:nvSpPr>
-          <p:cNvPr id="2" name="TextBox 1"/>
-          <p:cNvSpPr txBox="1"/>
-          <p:nvPr/>
-        </p:nvSpPr>
-        <p:spPr>
-          <a:xfrm>
-            <a:off x="500000" y="300000"/>
-            <a:ext cx="9200000" cy="1100000"/>
-          </a:xfrm>
-          <a:prstGeom prst="rect">
-            <a:avLst/>
-          </a:prstGeom>
-          <a:noFill/>
-        </p:spPr>
-        <p:txBody>
-          <a:bodyPr wrap="square">
-            <a:spAutoFit/>
-          </a:bodyPr>
-          <a:lstStyle/>
-          <a:p>
-            <a:pPr algn="l"/>
-            <a:r>
-              <a:rPr sz="3000" b="1">
-                <a:solidFill>
-                  <a:srgbClr val="0B3D66"/>
-                </a:solidFill>
-                <a:latin typeface="Calibri"/>
-              </a:rPr>
-              <a:t>Documentation : un successeur reprend sans moi</a:t>
-            </a:r>
-          </a:p>
-        </p:txBody>
-      </p:sp>
-      <p:sp>
-        <p:nvSpPr>
-          <p:cNvPr id="3" name="TextBox 2"/>
-          <p:cNvSpPr txBox="1"/>
-          <p:nvPr/>
-        </p:nvSpPr>
-        <p:spPr>
-          <a:xfrm>
-            <a:off x="10000000" y="180000"/>
-            <a:ext cx="1900000" cy="500000"/>
-          </a:xfrm>
-          <a:prstGeom prst="rect">
-            <a:avLst/>
-          </a:prstGeom>
-          <a:solidFill>
-            <a:srgbClr val="C0392B"/>
-          </a:solidFill>
-        </p:spPr>
-        <p:txBody>
-          <a:bodyPr wrap="square" anchor="ctr">
-            <a:spAutoFit/>
-          </a:bodyPr>
-          <a:lstStyle/>
-          <a:p>
-            <a:pPr algn="ctr"/>
-            <a:r>
-              <a:rPr sz="1600" b="1">
-                <a:solidFill>
-                  <a:srgbClr val="FFFFFF"/>
-                </a:solidFill>
-                <a:latin typeface="Calibri"/>
-              </a:rPr>
-              <a:t>C4.3.3</a:t>
-            </a:r>
-          </a:p>
-        </p:txBody>
-      </p:sp>
-      <p:sp>
-        <p:nvSpPr>
-          <p:cNvPr id="4" name="TextBox 3"/>
-          <p:cNvSpPr txBox="1"/>
-          <p:nvPr/>
-        </p:nvSpPr>
-        <p:spPr>
-          <a:xfrm>
-            <a:off x="600000" y="1600000"/>
-            <a:ext cx="11000000" cy="4600000"/>
-          </a:xfrm>
-          <a:prstGeom prst="rect">
-            <a:avLst/>
-          </a:prstGeom>
-          <a:noFill/>
-        </p:spPr>
-        <p:txBody>
-          <a:bodyPr wrap="square">
-            <a:spAutoFit/>
-          </a:bodyPr>
-          <a:lstStyle/>
-          <a:p>
-            <a:pPr>
-              <a:spcAft>
-                <a:spcPts val="1000"/>
-              </a:spcAft>
-            </a:pPr>
-            <a:r>
-              <a:rPr sz="2000">
-                <a:solidFill>
-                  <a:srgbClr val="5A5A5A"/>
-                </a:solidFill>
-                <a:latin typeface="Calibri"/>
-              </a:rPr>
-              <a:t>•  Public + objectif énoncés</a:t>
-            </a:r>
-          </a:p>
-          <a:p>
-            <a:pPr>
-              <a:spcAft>
-                <a:spcPts val="1000"/>
-              </a:spcAft>
-            </a:pPr>
-            <a:r>
-              <a:rPr sz="2000">
-                <a:solidFill>
-                  <a:srgbClr val="5A5A5A"/>
-                </a:solidFill>
-                <a:latin typeface="Calibri"/>
-              </a:rPr>
-              <a:t>•  Procédure de configuration depuis zéro</a:t>
-            </a:r>
-          </a:p>
-          <a:p>
-            <a:pPr>
-              <a:spcAft>
-                <a:spcPts val="1000"/>
-              </a:spcAft>
-            </a:pPr>
-            <a:r>
-              <a:rPr sz="2000">
-                <a:solidFill>
-                  <a:srgbClr val="5A5A5A"/>
-                </a:solidFill>
-                <a:latin typeface="Calibri"/>
-              </a:rPr>
-              <a:t>•  Runbook : DAG en échec, Spark, rotation, reset propre</a:t>
-            </a:r>
-          </a:p>
-        </p:txBody>
-      </p:sp>
-    </p:spTree>
-  </p:cSld>
-  <p:clrMapOvr>
-    <a:masterClrMapping/>
-  </p:clrMapOvr>
-</p:sld>
-</file>
-
-<file path=ppt/slides/slide38.xml><?xml version="1.0" encoding="utf-8"?>
-<p:sld xmlns:a="http://schemas.openxmlformats.org/drawingml/2006/main" xmlns:p="http://schemas.openxmlformats.org/presentationml/2006/main" xmlns:r="http://schemas.openxmlformats.org/officeDocument/2006/relationships">
-  <p:cSld>
-    <p:spTree>
-      <p:nvGrpSpPr>
-        <p:cNvPr id="1" name=""/>
-        <p:cNvGrpSpPr/>
-        <p:nvPr/>
-      </p:nvGrpSpPr>
-      <p:grpSpPr/>
-      <p:sp>
-        <p:nvSpPr>
-          <p:cNvPr id="2" name="TextBox 1"/>
-          <p:cNvSpPr txBox="1"/>
-          <p:nvPr/>
-        </p:nvSpPr>
-        <p:spPr>
-          <a:xfrm>
-            <a:off x="0" y="0"/>
-            <a:ext cx="12192000" cy="6858000"/>
-          </a:xfrm>
-          <a:prstGeom prst="rect">
-            <a:avLst/>
-          </a:prstGeom>
-          <a:solidFill>
-            <a:srgbClr val="0B3D66"/>
-          </a:solidFill>
-          <a:ln>
-            <a:noFill/>
-          </a:ln>
-        </p:spPr>
-        <p:txBody>
-          <a:bodyPr wrap="none">
-            <a:spAutoFit/>
-          </a:bodyPr>
-          <a:lstStyle/>
-          <a:p/>
-        </p:txBody>
-      </p:sp>
-      <p:sp>
-        <p:nvSpPr>
-          <p:cNvPr id="3" name="TextBox 2"/>
-          <p:cNvSpPr txBox="1"/>
-          <p:nvPr/>
-        </p:nvSpPr>
-        <p:spPr>
-          <a:xfrm>
-            <a:off x="700000" y="2600000"/>
-            <a:ext cx="10800000" cy="1200000"/>
-          </a:xfrm>
-          <a:prstGeom prst="rect">
-            <a:avLst/>
-          </a:prstGeom>
-          <a:noFill/>
-        </p:spPr>
-        <p:txBody>
-          <a:bodyPr wrap="square">
-            <a:spAutoFit/>
-          </a:bodyPr>
-          <a:lstStyle/>
-          <a:p>
-            <a:pPr algn="l"/>
-            <a:r>
-              <a:rPr sz="4000" b="1">
-                <a:solidFill>
-                  <a:srgbClr val="FFFFFF"/>
-                </a:solidFill>
-                <a:latin typeface="Calibri"/>
-              </a:rPr>
-              <a:t>Qualité et résilience</a:t>
-            </a:r>
-          </a:p>
-        </p:txBody>
-      </p:sp>
-      <p:sp>
-        <p:nvSpPr>
-          <p:cNvPr id="4" name="TextBox 3"/>
-          <p:cNvSpPr txBox="1"/>
-          <p:nvPr/>
-        </p:nvSpPr>
-        <p:spPr>
-          <a:xfrm>
-            <a:off x="700000" y="3900000"/>
-            <a:ext cx="10800000" cy="800000"/>
-          </a:xfrm>
-          <a:prstGeom prst="rect">
-            <a:avLst/>
-          </a:prstGeom>
-          <a:noFill/>
-        </p:spPr>
-        <p:txBody>
-          <a:bodyPr wrap="square">
-            <a:spAutoFit/>
-          </a:bodyPr>
-          <a:lstStyle/>
-          <a:p>
-            <a:pPr algn="l"/>
-            <a:r>
-              <a:rPr sz="2200" b="0">
-                <a:solidFill>
-                  <a:srgbClr val="E8ECF0"/>
-                </a:solidFill>
-                <a:latin typeface="Calibri"/>
-              </a:rPr>
-              <a:t>C4.4.1 · C4.4.2</a:t>
-            </a:r>
-          </a:p>
-        </p:txBody>
-      </p:sp>
-    </p:spTree>
-  </p:cSld>
-  <p:clrMapOvr>
-    <a:masterClrMapping/>
-  </p:clrMapOvr>
-</p:sld>
-</file>
-
-<file path=ppt/slides/slide39.xml><?xml version="1.0" encoding="utf-8"?>
-<p:sld xmlns:a="http://schemas.openxmlformats.org/drawingml/2006/main" xmlns:p="http://schemas.openxmlformats.org/presentationml/2006/main" xmlns:r="http://schemas.openxmlformats.org/officeDocument/2006/relationships">
-  <p:cSld>
-    <p:spTree>
-      <p:nvGrpSpPr>
-        <p:cNvPr id="1" name=""/>
-        <p:cNvGrpSpPr/>
-        <p:nvPr/>
-      </p:nvGrpSpPr>
-      <p:grpSpPr/>
-      <p:sp>
-        <p:nvSpPr>
-          <p:cNvPr id="2" name="TextBox 1"/>
-          <p:cNvSpPr txBox="1"/>
-          <p:nvPr/>
-        </p:nvSpPr>
-        <p:spPr>
-          <a:xfrm>
-            <a:off x="500000" y="300000"/>
-            <a:ext cx="9200000" cy="1100000"/>
-          </a:xfrm>
-          <a:prstGeom prst="rect">
-            <a:avLst/>
-          </a:prstGeom>
-          <a:noFill/>
-        </p:spPr>
-        <p:txBody>
-          <a:bodyPr wrap="square">
-            <a:spAutoFit/>
-          </a:bodyPr>
-          <a:lstStyle/>
-          <a:p>
-            <a:pPr algn="l"/>
-            <a:r>
-              <a:rPr sz="3000" b="1">
-                <a:solidFill>
-                  <a:srgbClr val="0B3D66"/>
-                </a:solidFill>
-                <a:latin typeface="Calibri"/>
-              </a:rPr>
-              <a:t>Un cahier de recette automatisé, rejoué à chaque push</a:t>
-            </a:r>
-          </a:p>
-        </p:txBody>
-      </p:sp>
-      <p:sp>
-        <p:nvSpPr>
-          <p:cNvPr id="3" name="TextBox 2"/>
-          <p:cNvSpPr txBox="1"/>
-          <p:nvPr/>
-        </p:nvSpPr>
-        <p:spPr>
-          <a:xfrm>
-            <a:off x="10000000" y="180000"/>
-            <a:ext cx="1900000" cy="500000"/>
-          </a:xfrm>
-          <a:prstGeom prst="rect">
-            <a:avLst/>
-          </a:prstGeom>
-          <a:solidFill>
-            <a:srgbClr val="C0392B"/>
-          </a:solidFill>
-        </p:spPr>
-        <p:txBody>
-          <a:bodyPr wrap="square" anchor="ctr">
-            <a:spAutoFit/>
-          </a:bodyPr>
-          <a:lstStyle/>
-          <a:p>
-            <a:pPr algn="ctr"/>
-            <a:r>
-              <a:rPr sz="1600" b="1">
-                <a:solidFill>
-                  <a:srgbClr val="FFFFFF"/>
-                </a:solidFill>
-                <a:latin typeface="Calibri"/>
-              </a:rPr>
-              <a:t>C4.4.1</a:t>
-            </a:r>
-          </a:p>
-        </p:txBody>
-      </p:sp>
-      <p:sp>
-        <p:nvSpPr>
-          <p:cNvPr id="4" name="TextBox 3"/>
-          <p:cNvSpPr txBox="1"/>
-          <p:nvPr/>
-        </p:nvSpPr>
-        <p:spPr>
-          <a:xfrm>
-            <a:off x="600000" y="1600000"/>
-            <a:ext cx="11000000" cy="4600000"/>
-          </a:xfrm>
-          <a:prstGeom prst="rect">
-            <a:avLst/>
-          </a:prstGeom>
-          <a:noFill/>
-        </p:spPr>
-        <p:txBody>
-          <a:bodyPr wrap="square">
-            <a:spAutoFit/>
-          </a:bodyPr>
-          <a:lstStyle/>
-          <a:p>
-            <a:pPr>
-              <a:spcAft>
-                <a:spcPts val="1000"/>
-              </a:spcAft>
-            </a:pPr>
-            <a:r>
-              <a:rPr sz="2000">
-                <a:solidFill>
-                  <a:srgbClr val="5A5A5A"/>
-                </a:solidFill>
-                <a:latin typeface="Calibri"/>
-              </a:rPr>
-              <a:t>•  19 tests : fonctionnels, structurels ET sécurité</a:t>
-            </a:r>
-          </a:p>
-          <a:p>
-            <a:pPr>
-              <a:spcAft>
-                <a:spcPts val="1000"/>
-              </a:spcAft>
-            </a:pPr>
-            <a:r>
-              <a:rPr sz="2000">
-                <a:solidFill>
-                  <a:srgbClr val="5A5A5A"/>
-                </a:solidFill>
-                <a:latin typeface="Calibri"/>
-              </a:rPr>
-              <a:t>•  Droits, secrets, dépendances testés</a:t>
-            </a:r>
-          </a:p>
-          <a:p>
-            <a:pPr>
-              <a:spcAft>
-                <a:spcPts val="1000"/>
-              </a:spcAft>
-            </a:pPr>
-            <a:r>
-              <a:rPr sz="2000">
-                <a:solidFill>
-                  <a:srgbClr val="5A5A5A"/>
-                </a:solidFill>
-                <a:latin typeface="Calibri"/>
-              </a:rPr>
-              <a:t>•  Ce n'est pas un instantané, c'est un filet permanent</a:t>
+              <a:rPr sz="2100">
+                <a:solidFill>
+                  <a:srgbClr val="404040"/>
+                </a:solidFill>
+                <a:latin typeface="Calibri"/>
+              </a:rPr>
+              <a:t>•  J'ai vécu en production l'ingestion Eckert et l'incident</a:t>
             </a:r>
           </a:p>
         </p:txBody>
@@ -11413,7 +7075,7 @@
         <p:spPr>
           <a:xfrm>
             <a:off x="500000" y="300000"/>
-            <a:ext cx="9200000" cy="1100000"/>
+            <a:ext cx="9200000" cy="1150000"/>
           </a:xfrm>
           <a:prstGeom prst="rect">
             <a:avLst/>
@@ -11428,13 +7090,13 @@
           <a:p>
             <a:pPr algn="l"/>
             <a:r>
-              <a:rPr sz="3000" b="1">
+              <a:rPr sz="2900" b="1">
                 <a:solidFill>
                   <a:srgbClr val="0B3D66"/>
                 </a:solidFill>
                 <a:latin typeface="Calibri"/>
               </a:rPr>
-              <a:t>Mon rôle : de l'ingestion Eckert en production à l'incident vécu</a:t>
+              <a:t>Analyse : besoins, contraintes, et les quatre trous à combler</a:t>
             </a:r>
           </a:p>
         </p:txBody>
@@ -11448,7 +7110,7 @@
         <p:spPr>
           <a:xfrm>
             <a:off x="10000000" y="180000"/>
-            <a:ext cx="1900000" cy="500000"/>
+            <a:ext cx="1950000" cy="520000"/>
           </a:xfrm>
           <a:prstGeom prst="rect">
             <a:avLst/>
@@ -11456,6 +7118,9 @@
           <a:solidFill>
             <a:srgbClr val="C0392B"/>
           </a:solidFill>
+          <a:ln>
+            <a:noFill/>
+          </a:ln>
         </p:spPr>
         <p:txBody>
           <a:bodyPr wrap="square" anchor="ctr">
@@ -11471,7 +7136,7 @@
                 </a:solidFill>
                 <a:latin typeface="Calibri"/>
               </a:rPr>
-              <a:t>Contexte</a:t>
+              <a:t>C4.1.1</a:t>
             </a:r>
           </a:p>
         </p:txBody>
@@ -11484,7 +7149,7 @@
         </p:nvSpPr>
         <p:spPr>
           <a:xfrm>
-            <a:off x="600000" y="1600000"/>
+            <a:off x="600000" y="1650000"/>
             <a:ext cx="11000000" cy="4600000"/>
           </a:xfrm>
           <a:prstGeom prst="rect">
@@ -11504,13 +7169,13 @@
               </a:spcAft>
             </a:pPr>
             <a:r>
-              <a:rPr sz="2000">
-                <a:solidFill>
-                  <a:srgbClr val="5A5A5A"/>
-                </a:solidFill>
-                <a:latin typeface="Calibri"/>
-              </a:rPr>
-              <a:t>•  Chargé d'étude Data / AMOA</a:t>
+              <a:rPr sz="2100">
+                <a:solidFill>
+                  <a:srgbClr val="404040"/>
+                </a:solidFill>
+                <a:latin typeface="Calibri"/>
+              </a:rPr>
+              <a:t>•  Besoin : une donnée actionnable, fiable, tracée, au rythme mensuel</a:t>
             </a:r>
           </a:p>
           <a:p>
@@ -11520,13 +7185,13 @@
               </a:spcAft>
             </a:pPr>
             <a:r>
-              <a:rPr sz="2000">
-                <a:solidFill>
-                  <a:srgbClr val="5A5A5A"/>
-                </a:solidFill>
-                <a:latin typeface="Calibri"/>
-              </a:rPr>
-              <a:t>•  Traitement de collecte Eckert orchestré (Airflow) en production</a:t>
+              <a:rPr sz="2100">
+                <a:solidFill>
+                  <a:srgbClr val="404040"/>
+                </a:solidFill>
+                <a:latin typeface="Calibri"/>
+              </a:rPr>
+              <a:t>•  Contraintes : coût nul · délai &lt; 1 mois · forte volumétrie</a:t>
             </a:r>
           </a:p>
           <a:p>
@@ -11536,128 +7201,15 @@
               </a:spcAft>
             </a:pPr>
             <a:r>
-              <a:rPr sz="2000">
-                <a:solidFill>
-                  <a:srgbClr val="5A5A5A"/>
-                </a:solidFill>
-                <a:latin typeface="Calibri"/>
-              </a:rPr>
-              <a:t>•  Étude d'architecture cible Snowflake menée puis non retenue</a:t>
-            </a:r>
-          </a:p>
-        </p:txBody>
-      </p:sp>
-    </p:spTree>
-  </p:cSld>
-  <p:clrMapOvr>
-    <a:masterClrMapping/>
-  </p:clrMapOvr>
-</p:sld>
-</file>
-
-<file path=ppt/slides/slide40.xml><?xml version="1.0" encoding="utf-8"?>
-<p:sld xmlns:a="http://schemas.openxmlformats.org/drawingml/2006/main" xmlns:p="http://schemas.openxmlformats.org/presentationml/2006/main" xmlns:r="http://schemas.openxmlformats.org/officeDocument/2006/relationships">
-  <p:cSld>
-    <p:spTree>
-      <p:nvGrpSpPr>
-        <p:cNvPr id="1" name=""/>
-        <p:cNvGrpSpPr/>
-        <p:nvPr/>
-      </p:nvGrpSpPr>
-      <p:grpSpPr/>
-      <p:sp>
-        <p:nvSpPr>
-          <p:cNvPr id="2" name="TextBox 1"/>
-          <p:cNvSpPr txBox="1"/>
-          <p:nvPr/>
-        </p:nvSpPr>
-        <p:spPr>
-          <a:xfrm>
-            <a:off x="500000" y="300000"/>
-            <a:ext cx="9200000" cy="1100000"/>
-          </a:xfrm>
-          <a:prstGeom prst="rect">
-            <a:avLst/>
-          </a:prstGeom>
-          <a:noFill/>
-        </p:spPr>
-        <p:txBody>
-          <a:bodyPr wrap="square">
-            <a:spAutoFit/>
-          </a:bodyPr>
-          <a:lstStyle/>
-          <a:p>
-            <a:pPr algn="l"/>
-            <a:r>
-              <a:rPr sz="3000" b="1">
-                <a:solidFill>
-                  <a:srgbClr val="0B3D66"/>
-                </a:solidFill>
-                <a:latin typeface="Calibri"/>
-              </a:rPr>
-              <a:t>L'incident réel : la confiance aveugle dans les métadonnées</a:t>
-            </a:r>
-          </a:p>
-        </p:txBody>
-      </p:sp>
-      <p:sp>
-        <p:nvSpPr>
-          <p:cNvPr id="3" name="TextBox 2"/>
-          <p:cNvSpPr txBox="1"/>
-          <p:nvPr/>
-        </p:nvSpPr>
-        <p:spPr>
-          <a:xfrm>
-            <a:off x="10000000" y="180000"/>
-            <a:ext cx="1900000" cy="500000"/>
-          </a:xfrm>
-          <a:prstGeom prst="rect">
-            <a:avLst/>
-          </a:prstGeom>
-          <a:solidFill>
-            <a:srgbClr val="C0392B"/>
-          </a:solidFill>
-        </p:spPr>
-        <p:txBody>
-          <a:bodyPr wrap="square" anchor="ctr">
-            <a:spAutoFit/>
-          </a:bodyPr>
-          <a:lstStyle/>
-          <a:p>
-            <a:pPr algn="ctr"/>
-            <a:r>
-              <a:rPr sz="1600" b="1">
-                <a:solidFill>
-                  <a:srgbClr val="FFFFFF"/>
-                </a:solidFill>
-                <a:latin typeface="Calibri"/>
-              </a:rPr>
-              <a:t>C4.4.2</a:t>
-            </a:r>
-          </a:p>
-        </p:txBody>
-      </p:sp>
-      <p:sp>
-        <p:nvSpPr>
-          <p:cNvPr id="4" name="TextBox 3"/>
-          <p:cNvSpPr txBox="1"/>
-          <p:nvPr/>
-        </p:nvSpPr>
-        <p:spPr>
-          <a:xfrm>
-            <a:off x="600000" y="1600000"/>
-            <a:ext cx="11000000" cy="4600000"/>
-          </a:xfrm>
-          <a:prstGeom prst="rect">
-            <a:avLst/>
-          </a:prstGeom>
-          <a:noFill/>
-        </p:spPr>
-        <p:txBody>
-          <a:bodyPr wrap="square">
-            <a:spAutoFit/>
-          </a:bodyPr>
-          <a:lstStyle/>
+              <a:rPr sz="2100">
+                <a:solidFill>
+                  <a:srgbClr val="404040"/>
+                </a:solidFill>
+                <a:latin typeface="Calibri"/>
+              </a:rPr>
+              <a:t>•  Existant : SQL Server, SSRS, un traitement Eckert sous Airflow</a:t>
+            </a:r>
+          </a:p>
           <a:p>
             <a:pPr>
               <a:spcAft>
@@ -11665,1197 +7217,13 @@
               </a:spcAft>
             </a:pPr>
             <a:r>
-              <a:rPr sz="2000">
-                <a:solidFill>
-                  <a:srgbClr val="5A5A5A"/>
-                </a:solidFill>
-                <a:latin typeface="Calibri"/>
-              </a:rPr>
-              <a:t>•  La V1 validait sur les métadonnées DÉCLARÉES (taille, empreinte)</a:t>
-            </a:r>
-          </a:p>
-          <a:p>
-            <a:pPr>
-              <a:spcAft>
-                <a:spcPts val="1000"/>
-              </a:spcAft>
-            </a:pPr>
-            <a:r>
-              <a:rPr sz="2000">
-                <a:solidFill>
-                  <a:srgbClr val="5A5A5A"/>
-                </a:solidFill>
-                <a:latin typeface="Calibri"/>
-              </a:rPr>
-              <a:t>•  Le producteur cesse de les publier → rejet systématique</a:t>
-            </a:r>
-          </a:p>
-          <a:p>
-            <a:pPr>
-              <a:spcAft>
-                <a:spcPts val="1000"/>
-              </a:spcAft>
-            </a:pPr>
-            <a:r>
-              <a:rPr sz="2000">
-                <a:solidFill>
-                  <a:srgbClr val="5A5A5A"/>
-                </a:solidFill>
-                <a:latin typeface="Calibri"/>
-              </a:rPr>
-              <a:t>•  Fichiers pourtant parfaitement exploitables</a:t>
-            </a:r>
-          </a:p>
-        </p:txBody>
-      </p:sp>
-    </p:spTree>
-  </p:cSld>
-  <p:clrMapOvr>
-    <a:masterClrMapping/>
-  </p:clrMapOvr>
-</p:sld>
-</file>
-
-<file path=ppt/slides/slide41.xml><?xml version="1.0" encoding="utf-8"?>
-<p:sld xmlns:a="http://schemas.openxmlformats.org/drawingml/2006/main" xmlns:p="http://schemas.openxmlformats.org/presentationml/2006/main" xmlns:r="http://schemas.openxmlformats.org/officeDocument/2006/relationships">
-  <p:cSld>
-    <p:spTree>
-      <p:nvGrpSpPr>
-        <p:cNvPr id="1" name=""/>
-        <p:cNvGrpSpPr/>
-        <p:nvPr/>
-      </p:nvGrpSpPr>
-      <p:grpSpPr/>
-      <p:sp>
-        <p:nvSpPr>
-          <p:cNvPr id="2" name="TextBox 1"/>
-          <p:cNvSpPr txBox="1"/>
-          <p:nvPr/>
-        </p:nvSpPr>
-        <p:spPr>
-          <a:xfrm>
-            <a:off x="500000" y="300000"/>
-            <a:ext cx="9200000" cy="1100000"/>
-          </a:xfrm>
-          <a:prstGeom prst="rect">
-            <a:avLst/>
-          </a:prstGeom>
-          <a:noFill/>
-        </p:spPr>
-        <p:txBody>
-          <a:bodyPr wrap="square">
-            <a:spAutoFit/>
-          </a:bodyPr>
-          <a:lstStyle/>
-          <a:p>
-            <a:pPr algn="l"/>
-            <a:r>
-              <a:rPr sz="3000" b="1">
-                <a:solidFill>
-                  <a:srgbClr val="0B3D66"/>
-                </a:solidFill>
-                <a:latin typeface="Calibri"/>
-              </a:rPr>
-              <a:t>Le correctif et le rejeu vert : valider le CONTENU, pas la promesse</a:t>
-            </a:r>
-          </a:p>
-        </p:txBody>
-      </p:sp>
-      <p:sp>
-        <p:nvSpPr>
-          <p:cNvPr id="3" name="TextBox 2"/>
-          <p:cNvSpPr txBox="1"/>
-          <p:nvPr/>
-        </p:nvSpPr>
-        <p:spPr>
-          <a:xfrm>
-            <a:off x="10000000" y="180000"/>
-            <a:ext cx="1900000" cy="500000"/>
-          </a:xfrm>
-          <a:prstGeom prst="rect">
-            <a:avLst/>
-          </a:prstGeom>
-          <a:solidFill>
-            <a:srgbClr val="C0392B"/>
-          </a:solidFill>
-        </p:spPr>
-        <p:txBody>
-          <a:bodyPr wrap="square" anchor="ctr">
-            <a:spAutoFit/>
-          </a:bodyPr>
-          <a:lstStyle/>
-          <a:p>
-            <a:pPr algn="ctr"/>
-            <a:r>
-              <a:rPr sz="1600" b="1">
-                <a:solidFill>
-                  <a:srgbClr val="FFFFFF"/>
-                </a:solidFill>
-                <a:latin typeface="Calibri"/>
-              </a:rPr>
-              <a:t>C4.4.2</a:t>
-            </a:r>
-          </a:p>
-        </p:txBody>
-      </p:sp>
-      <p:sp>
-        <p:nvSpPr>
-          <p:cNvPr id="4" name="TextBox 3"/>
-          <p:cNvSpPr txBox="1"/>
-          <p:nvPr/>
-        </p:nvSpPr>
-        <p:spPr>
-          <a:xfrm>
-            <a:off x="600000" y="1600000"/>
-            <a:ext cx="11000000" cy="4600000"/>
-          </a:xfrm>
-          <a:prstGeom prst="rect">
-            <a:avLst/>
-          </a:prstGeom>
-          <a:noFill/>
-        </p:spPr>
-        <p:txBody>
-          <a:bodyPr wrap="square">
-            <a:spAutoFit/>
-          </a:bodyPr>
-          <a:lstStyle/>
-          <a:p>
-            <a:pPr>
-              <a:spcAft>
-                <a:spcPts val="1000"/>
-              </a:spcAft>
-            </a:pPr>
-            <a:r>
-              <a:rPr sz="2000">
-                <a:solidFill>
-                  <a:srgbClr val="5A5A5A"/>
-                </a:solidFill>
-                <a:latin typeface="Calibri"/>
-              </a:rPr>
-              <a:t>•  Métadonnées → alerte ; contenu → seule source de vérité</a:t>
-            </a:r>
-          </a:p>
-          <a:p>
-            <a:pPr>
-              <a:spcAft>
-                <a:spcPts val="1000"/>
-              </a:spcAft>
-            </a:pPr>
-            <a:r>
-              <a:rPr sz="2000">
-                <a:solidFill>
-                  <a:srgbClr val="5A5A5A"/>
-                </a:solidFill>
-                <a:latin typeface="Calibri"/>
-              </a:rPr>
-              <a:t>•  Fichier sain sans métadonnées : CONFORME + alerte</a:t>
-            </a:r>
-          </a:p>
-          <a:p>
-            <a:pPr>
-              <a:spcAft>
-                <a:spcPts val="1000"/>
-              </a:spcAft>
-            </a:pPr>
-            <a:r>
-              <a:rPr sz="2000">
-                <a:solidFill>
-                  <a:srgbClr val="5A5A5A"/>
-                </a:solidFill>
-                <a:latin typeface="Calibri"/>
-              </a:rPr>
-              <a:t>•  Fichier corrompu : toujours bloqué. Test de non-régression</a:t>
-            </a:r>
-          </a:p>
-        </p:txBody>
-      </p:sp>
-    </p:spTree>
-  </p:cSld>
-  <p:clrMapOvr>
-    <a:masterClrMapping/>
-  </p:clrMapOvr>
-</p:sld>
-</file>
-
-<file path=ppt/slides/slide42.xml><?xml version="1.0" encoding="utf-8"?>
-<p:sld xmlns:a="http://schemas.openxmlformats.org/drawingml/2006/main" xmlns:p="http://schemas.openxmlformats.org/presentationml/2006/main" xmlns:r="http://schemas.openxmlformats.org/officeDocument/2006/relationships">
-  <p:cSld>
-    <p:spTree>
-      <p:nvGrpSpPr>
-        <p:cNvPr id="1" name=""/>
-        <p:cNvGrpSpPr/>
-        <p:nvPr/>
-      </p:nvGrpSpPr>
-      <p:grpSpPr/>
-      <p:sp>
-        <p:nvSpPr>
-          <p:cNvPr id="2" name="TextBox 1"/>
-          <p:cNvSpPr txBox="1"/>
-          <p:nvPr/>
-        </p:nvSpPr>
-        <p:spPr>
-          <a:xfrm>
-            <a:off x="0" y="0"/>
-            <a:ext cx="12192000" cy="6858000"/>
-          </a:xfrm>
-          <a:prstGeom prst="rect">
-            <a:avLst/>
-          </a:prstGeom>
-          <a:solidFill>
-            <a:srgbClr val="0B3D66"/>
-          </a:solidFill>
-          <a:ln>
-            <a:noFill/>
-          </a:ln>
-        </p:spPr>
-        <p:txBody>
-          <a:bodyPr wrap="none">
-            <a:spAutoFit/>
-          </a:bodyPr>
-          <a:lstStyle/>
-          <a:p/>
-        </p:txBody>
-      </p:sp>
-      <p:sp>
-        <p:nvSpPr>
-          <p:cNvPr id="3" name="TextBox 2"/>
-          <p:cNvSpPr txBox="1"/>
-          <p:nvPr/>
-        </p:nvSpPr>
-        <p:spPr>
-          <a:xfrm>
-            <a:off x="700000" y="2600000"/>
-            <a:ext cx="10800000" cy="1200000"/>
-          </a:xfrm>
-          <a:prstGeom prst="rect">
-            <a:avLst/>
-          </a:prstGeom>
-          <a:noFill/>
-        </p:spPr>
-        <p:txBody>
-          <a:bodyPr wrap="square">
-            <a:spAutoFit/>
-          </a:bodyPr>
-          <a:lstStyle/>
-          <a:p>
-            <a:pPr algn="l"/>
-            <a:r>
-              <a:rPr sz="4000" b="1">
-                <a:solidFill>
-                  <a:srgbClr val="FFFFFF"/>
-                </a:solidFill>
-                <a:latin typeface="Calibri"/>
-              </a:rPr>
-              <a:t>Bilan</a:t>
-            </a:r>
-          </a:p>
-        </p:txBody>
-      </p:sp>
-      <p:sp>
-        <p:nvSpPr>
-          <p:cNvPr id="4" name="TextBox 3"/>
-          <p:cNvSpPr txBox="1"/>
-          <p:nvPr/>
-        </p:nvSpPr>
-        <p:spPr>
-          <a:xfrm>
-            <a:off x="700000" y="3900000"/>
-            <a:ext cx="10800000" cy="800000"/>
-          </a:xfrm>
-          <a:prstGeom prst="rect">
-            <a:avLst/>
-          </a:prstGeom>
-          <a:noFill/>
-        </p:spPr>
-        <p:txBody>
-          <a:bodyPr wrap="square">
-            <a:spAutoFit/>
-          </a:bodyPr>
-          <a:lstStyle/>
-          <a:p>
-            <a:pPr algn="l"/>
-            <a:r>
-              <a:rPr sz="2200" b="0">
-                <a:solidFill>
-                  <a:srgbClr val="E8ECF0"/>
-                </a:solidFill>
-                <a:latin typeface="Calibri"/>
-              </a:rPr>
-              <a:t>Synthèse</a:t>
-            </a:r>
-          </a:p>
-        </p:txBody>
-      </p:sp>
-    </p:spTree>
-  </p:cSld>
-  <p:clrMapOvr>
-    <a:masterClrMapping/>
-  </p:clrMapOvr>
-</p:sld>
-</file>
-
-<file path=ppt/slides/slide43.xml><?xml version="1.0" encoding="utf-8"?>
-<p:sld xmlns:a="http://schemas.openxmlformats.org/drawingml/2006/main" xmlns:p="http://schemas.openxmlformats.org/presentationml/2006/main" xmlns:r="http://schemas.openxmlformats.org/officeDocument/2006/relationships">
-  <p:cSld>
-    <p:spTree>
-      <p:nvGrpSpPr>
-        <p:cNvPr id="1" name=""/>
-        <p:cNvGrpSpPr/>
-        <p:nvPr/>
-      </p:nvGrpSpPr>
-      <p:grpSpPr/>
-      <p:sp>
-        <p:nvSpPr>
-          <p:cNvPr id="2" name="TextBox 1"/>
-          <p:cNvSpPr txBox="1"/>
-          <p:nvPr/>
-        </p:nvSpPr>
-        <p:spPr>
-          <a:xfrm>
-            <a:off x="500000" y="300000"/>
-            <a:ext cx="9200000" cy="1100000"/>
-          </a:xfrm>
-          <a:prstGeom prst="rect">
-            <a:avLst/>
-          </a:prstGeom>
-          <a:noFill/>
-        </p:spPr>
-        <p:txBody>
-          <a:bodyPr wrap="square">
-            <a:spAutoFit/>
-          </a:bodyPr>
-          <a:lstStyle/>
-          <a:p>
-            <a:pPr algn="l"/>
-            <a:r>
-              <a:rPr sz="3000" b="1">
-                <a:solidFill>
-                  <a:srgbClr val="0B3D66"/>
-                </a:solidFill>
-                <a:latin typeface="Calibri"/>
-              </a:rPr>
-              <a:t>Ce qui tourne, ce que j'assume comme limite</a:t>
-            </a:r>
-          </a:p>
-        </p:txBody>
-      </p:sp>
-      <p:sp>
-        <p:nvSpPr>
-          <p:cNvPr id="3" name="TextBox 2"/>
-          <p:cNvSpPr txBox="1"/>
-          <p:nvPr/>
-        </p:nvSpPr>
-        <p:spPr>
-          <a:xfrm>
-            <a:off x="10000000" y="180000"/>
-            <a:ext cx="1900000" cy="500000"/>
-          </a:xfrm>
-          <a:prstGeom prst="rect">
-            <a:avLst/>
-          </a:prstGeom>
-          <a:solidFill>
-            <a:srgbClr val="C0392B"/>
-          </a:solidFill>
-        </p:spPr>
-        <p:txBody>
-          <a:bodyPr wrap="square" anchor="ctr">
-            <a:spAutoFit/>
-          </a:bodyPr>
-          <a:lstStyle/>
-          <a:p>
-            <a:pPr algn="ctr"/>
-            <a:r>
-              <a:rPr sz="1600" b="1">
-                <a:solidFill>
-                  <a:srgbClr val="FFFFFF"/>
-                </a:solidFill>
-                <a:latin typeface="Calibri"/>
-              </a:rPr>
-              <a:t>Bilan</a:t>
-            </a:r>
-          </a:p>
-        </p:txBody>
-      </p:sp>
-      <p:sp>
-        <p:nvSpPr>
-          <p:cNvPr id="4" name="TextBox 3"/>
-          <p:cNvSpPr txBox="1"/>
-          <p:nvPr/>
-        </p:nvSpPr>
-        <p:spPr>
-          <a:xfrm>
-            <a:off x="600000" y="1600000"/>
-            <a:ext cx="11000000" cy="4600000"/>
-          </a:xfrm>
-          <a:prstGeom prst="rect">
-            <a:avLst/>
-          </a:prstGeom>
-          <a:noFill/>
-        </p:spPr>
-        <p:txBody>
-          <a:bodyPr wrap="square">
-            <a:spAutoFit/>
-          </a:bodyPr>
-          <a:lstStyle/>
-          <a:p>
-            <a:pPr>
-              <a:spcAft>
-                <a:spcPts val="1000"/>
-              </a:spcAft>
-            </a:pPr>
-            <a:r>
-              <a:rPr sz="2000">
-                <a:solidFill>
-                  <a:srgbClr val="5A5A5A"/>
-                </a:solidFill>
-                <a:latin typeface="Calibri"/>
-              </a:rPr>
-              <a:t>•  Chaîne complète prouvée : ingestion → Spark → gold → restitution</a:t>
-            </a:r>
-          </a:p>
-          <a:p>
-            <a:pPr>
-              <a:spcAft>
-                <a:spcPts val="1000"/>
-              </a:spcAft>
-            </a:pPr>
-            <a:r>
-              <a:rPr sz="2000">
-                <a:solidFill>
-                  <a:srgbClr val="5A5A5A"/>
-                </a:solidFill>
-                <a:latin typeface="Calibri"/>
-              </a:rPr>
-              <a:t>•  Sécurité testée, CI verte, incident rejoué</a:t>
-            </a:r>
-          </a:p>
-          <a:p>
-            <a:pPr>
-              <a:spcAft>
-                <a:spcPts val="1000"/>
-              </a:spcAft>
-            </a:pPr>
-            <a:r>
-              <a:rPr sz="2000">
-                <a:solidFill>
-                  <a:srgbClr val="5A5A5A"/>
-                </a:solidFill>
-                <a:latin typeface="Calibri"/>
-              </a:rPr>
-              <a:t>•  Limites assumées : Postgres unique, Spark soumis manuellement, pas de supervision infra</a:t>
-            </a:r>
-          </a:p>
-        </p:txBody>
-      </p:sp>
-    </p:spTree>
-  </p:cSld>
-  <p:clrMapOvr>
-    <a:masterClrMapping/>
-  </p:clrMapOvr>
-</p:sld>
-</file>
-
-<file path=ppt/slides/slide44.xml><?xml version="1.0" encoding="utf-8"?>
-<p:sld xmlns:a="http://schemas.openxmlformats.org/drawingml/2006/main" xmlns:p="http://schemas.openxmlformats.org/presentationml/2006/main" xmlns:r="http://schemas.openxmlformats.org/officeDocument/2006/relationships">
-  <p:cSld>
-    <p:spTree>
-      <p:nvGrpSpPr>
-        <p:cNvPr id="1" name=""/>
-        <p:cNvGrpSpPr/>
-        <p:nvPr/>
-      </p:nvGrpSpPr>
-      <p:grpSpPr/>
-      <p:sp>
-        <p:nvSpPr>
-          <p:cNvPr id="2" name="TextBox 1"/>
-          <p:cNvSpPr txBox="1"/>
-          <p:nvPr/>
-        </p:nvSpPr>
-        <p:spPr>
-          <a:xfrm>
-            <a:off x="500000" y="300000"/>
-            <a:ext cx="9200000" cy="1100000"/>
-          </a:xfrm>
-          <a:prstGeom prst="rect">
-            <a:avLst/>
-          </a:prstGeom>
-          <a:noFill/>
-        </p:spPr>
-        <p:txBody>
-          <a:bodyPr wrap="square">
-            <a:spAutoFit/>
-          </a:bodyPr>
-          <a:lstStyle/>
-          <a:p>
-            <a:pPr algn="l"/>
-            <a:r>
-              <a:rPr sz="3000" b="1">
-                <a:solidFill>
-                  <a:srgbClr val="0B3D66"/>
-                </a:solidFill>
-                <a:latin typeface="Calibri"/>
-              </a:rPr>
-              <a:t>Ce que je referais autrement</a:t>
-            </a:r>
-          </a:p>
-        </p:txBody>
-      </p:sp>
-      <p:sp>
-        <p:nvSpPr>
-          <p:cNvPr id="3" name="TextBox 2"/>
-          <p:cNvSpPr txBox="1"/>
-          <p:nvPr/>
-        </p:nvSpPr>
-        <p:spPr>
-          <a:xfrm>
-            <a:off x="10000000" y="180000"/>
-            <a:ext cx="1900000" cy="500000"/>
-          </a:xfrm>
-          <a:prstGeom prst="rect">
-            <a:avLst/>
-          </a:prstGeom>
-          <a:solidFill>
-            <a:srgbClr val="C0392B"/>
-          </a:solidFill>
-        </p:spPr>
-        <p:txBody>
-          <a:bodyPr wrap="square" anchor="ctr">
-            <a:spAutoFit/>
-          </a:bodyPr>
-          <a:lstStyle/>
-          <a:p>
-            <a:pPr algn="ctr"/>
-            <a:r>
-              <a:rPr sz="1600" b="1">
-                <a:solidFill>
-                  <a:srgbClr val="FFFFFF"/>
-                </a:solidFill>
-                <a:latin typeface="Calibri"/>
-              </a:rPr>
-              <a:t>Bilan</a:t>
-            </a:r>
-          </a:p>
-        </p:txBody>
-      </p:sp>
-      <p:sp>
-        <p:nvSpPr>
-          <p:cNvPr id="4" name="TextBox 3"/>
-          <p:cNvSpPr txBox="1"/>
-          <p:nvPr/>
-        </p:nvSpPr>
-        <p:spPr>
-          <a:xfrm>
-            <a:off x="600000" y="1600000"/>
-            <a:ext cx="11000000" cy="4600000"/>
-          </a:xfrm>
-          <a:prstGeom prst="rect">
-            <a:avLst/>
-          </a:prstGeom>
-          <a:noFill/>
-        </p:spPr>
-        <p:txBody>
-          <a:bodyPr wrap="square">
-            <a:spAutoFit/>
-          </a:bodyPr>
-          <a:lstStyle/>
-          <a:p>
-            <a:pPr>
-              <a:spcAft>
-                <a:spcPts val="1000"/>
-              </a:spcAft>
-            </a:pPr>
-            <a:r>
-              <a:rPr sz="2000">
-                <a:solidFill>
-                  <a:srgbClr val="5A5A5A"/>
-                </a:solidFill>
-                <a:latin typeface="Calibri"/>
-              </a:rPr>
-              <a:t>•  Outiller le déclenchement Spark par Airflow</a:t>
-            </a:r>
-          </a:p>
-          <a:p>
-            <a:pPr>
-              <a:spcAft>
-                <a:spcPts val="1000"/>
-              </a:spcAft>
-            </a:pPr>
-            <a:r>
-              <a:rPr sz="2000">
-                <a:solidFill>
-                  <a:srgbClr val="5A5A5A"/>
-                </a:solidFill>
-                <a:latin typeface="Calibri"/>
-              </a:rPr>
-              <a:t>•  Ajouter une supervision d'infrastructure</a:t>
-            </a:r>
-          </a:p>
-          <a:p>
-            <a:pPr>
-              <a:spcAft>
-                <a:spcPts val="1000"/>
-              </a:spcAft>
-            </a:pPr>
-            <a:r>
-              <a:rPr sz="2000">
-                <a:solidFill>
-                  <a:srgbClr val="5A5A5A"/>
-                </a:solidFill>
-                <a:latin typeface="Calibri"/>
-              </a:rPr>
-              <a:t>•  Exposer un environnement de recette pour un déploiement complet</a:t>
-            </a:r>
-          </a:p>
-        </p:txBody>
-      </p:sp>
-    </p:spTree>
-  </p:cSld>
-  <p:clrMapOvr>
-    <a:masterClrMapping/>
-  </p:clrMapOvr>
-</p:sld>
-</file>
-
-<file path=ppt/slides/slide45.xml><?xml version="1.0" encoding="utf-8"?>
-<p:sld xmlns:a="http://schemas.openxmlformats.org/drawingml/2006/main" xmlns:p="http://schemas.openxmlformats.org/presentationml/2006/main" xmlns:r="http://schemas.openxmlformats.org/officeDocument/2006/relationships">
-  <p:cSld>
-    <p:spTree>
-      <p:nvGrpSpPr>
-        <p:cNvPr id="1" name=""/>
-        <p:cNvGrpSpPr/>
-        <p:nvPr/>
-      </p:nvGrpSpPr>
-      <p:grpSpPr/>
-      <p:sp>
-        <p:nvSpPr>
-          <p:cNvPr id="2" name="TextBox 1"/>
-          <p:cNvSpPr txBox="1"/>
-          <p:nvPr/>
-        </p:nvSpPr>
-        <p:spPr>
-          <a:xfrm>
-            <a:off x="0" y="0"/>
-            <a:ext cx="12192000" cy="6858000"/>
-          </a:xfrm>
-          <a:prstGeom prst="rect">
-            <a:avLst/>
-          </a:prstGeom>
-          <a:solidFill>
-            <a:srgbClr val="0B3D66"/>
-          </a:solidFill>
-          <a:ln>
-            <a:noFill/>
-          </a:ln>
-        </p:spPr>
-        <p:txBody>
-          <a:bodyPr wrap="none">
-            <a:spAutoFit/>
-          </a:bodyPr>
-          <a:lstStyle/>
-          <a:p/>
-        </p:txBody>
-      </p:sp>
-      <p:sp>
-        <p:nvSpPr>
-          <p:cNvPr id="3" name="TextBox 2"/>
-          <p:cNvSpPr txBox="1"/>
-          <p:nvPr/>
-        </p:nvSpPr>
-        <p:spPr>
-          <a:xfrm>
-            <a:off x="700000" y="2600000"/>
-            <a:ext cx="10800000" cy="1200000"/>
-          </a:xfrm>
-          <a:prstGeom prst="rect">
-            <a:avLst/>
-          </a:prstGeom>
-          <a:noFill/>
-        </p:spPr>
-        <p:txBody>
-          <a:bodyPr wrap="square">
-            <a:spAutoFit/>
-          </a:bodyPr>
-          <a:lstStyle/>
-          <a:p>
-            <a:pPr algn="l"/>
-            <a:r>
-              <a:rPr sz="4000" b="1">
-                <a:solidFill>
-                  <a:srgbClr val="FFFFFF"/>
-                </a:solidFill>
-                <a:latin typeface="Calibri"/>
-              </a:rPr>
-              <a:t>Annexes</a:t>
-            </a:r>
-          </a:p>
-        </p:txBody>
-      </p:sp>
-      <p:sp>
-        <p:nvSpPr>
-          <p:cNvPr id="4" name="TextBox 3"/>
-          <p:cNvSpPr txBox="1"/>
-          <p:nvPr/>
-        </p:nvSpPr>
-        <p:spPr>
-          <a:xfrm>
-            <a:off x="700000" y="3900000"/>
-            <a:ext cx="10800000" cy="800000"/>
-          </a:xfrm>
-          <a:prstGeom prst="rect">
-            <a:avLst/>
-          </a:prstGeom>
-          <a:noFill/>
-        </p:spPr>
-        <p:txBody>
-          <a:bodyPr wrap="square">
-            <a:spAutoFit/>
-          </a:bodyPr>
-          <a:lstStyle/>
-          <a:p>
-            <a:pPr algn="l"/>
-            <a:r>
-              <a:rPr sz="2200" b="0">
-                <a:solidFill>
-                  <a:srgbClr val="E8ECF0"/>
-                </a:solidFill>
-                <a:latin typeface="Calibri"/>
-              </a:rPr>
-              <a:t>Pour les questions du jury</a:t>
-            </a:r>
-          </a:p>
-        </p:txBody>
-      </p:sp>
-    </p:spTree>
-  </p:cSld>
-  <p:clrMapOvr>
-    <a:masterClrMapping/>
-  </p:clrMapOvr>
-</p:sld>
-</file>
-
-<file path=ppt/slides/slide46.xml><?xml version="1.0" encoding="utf-8"?>
-<p:sld xmlns:a="http://schemas.openxmlformats.org/drawingml/2006/main" xmlns:p="http://schemas.openxmlformats.org/presentationml/2006/main" xmlns:r="http://schemas.openxmlformats.org/officeDocument/2006/relationships">
-  <p:cSld>
-    <p:spTree>
-      <p:nvGrpSpPr>
-        <p:cNvPr id="1" name=""/>
-        <p:cNvGrpSpPr/>
-        <p:nvPr/>
-      </p:nvGrpSpPr>
-      <p:grpSpPr/>
-      <p:sp>
-        <p:nvSpPr>
-          <p:cNvPr id="2" name="TextBox 1"/>
-          <p:cNvSpPr txBox="1"/>
-          <p:nvPr/>
-        </p:nvSpPr>
-        <p:spPr>
-          <a:xfrm>
-            <a:off x="500000" y="300000"/>
-            <a:ext cx="9200000" cy="1100000"/>
-          </a:xfrm>
-          <a:prstGeom prst="rect">
-            <a:avLst/>
-          </a:prstGeom>
-          <a:noFill/>
-        </p:spPr>
-        <p:txBody>
-          <a:bodyPr wrap="square">
-            <a:spAutoFit/>
-          </a:bodyPr>
-          <a:lstStyle/>
-          <a:p>
-            <a:pPr algn="l"/>
-            <a:r>
-              <a:rPr sz="3000" b="1">
-                <a:solidFill>
-                  <a:srgbClr val="0B3D66"/>
-                </a:solidFill>
-                <a:latin typeface="Calibri"/>
-              </a:rPr>
-              <a:t>A1 — Schéma détaillé des tables et rôles</a:t>
-            </a:r>
-          </a:p>
-        </p:txBody>
-      </p:sp>
-      <p:sp>
-        <p:nvSpPr>
-          <p:cNvPr id="3" name="TextBox 2"/>
-          <p:cNvSpPr txBox="1"/>
-          <p:nvPr/>
-        </p:nvSpPr>
-        <p:spPr>
-          <a:xfrm>
-            <a:off x="10000000" y="180000"/>
-            <a:ext cx="1900000" cy="500000"/>
-          </a:xfrm>
-          <a:prstGeom prst="rect">
-            <a:avLst/>
-          </a:prstGeom>
-          <a:solidFill>
-            <a:srgbClr val="C0392B"/>
-          </a:solidFill>
-        </p:spPr>
-        <p:txBody>
-          <a:bodyPr wrap="square" anchor="ctr">
-            <a:spAutoFit/>
-          </a:bodyPr>
-          <a:lstStyle/>
-          <a:p>
-            <a:pPr algn="ctr"/>
-            <a:r>
-              <a:rPr sz="1600" b="1">
-                <a:solidFill>
-                  <a:srgbClr val="FFFFFF"/>
-                </a:solidFill>
-                <a:latin typeface="Calibri"/>
-              </a:rPr>
-              <a:t>Annexe</a:t>
-            </a:r>
-          </a:p>
-        </p:txBody>
-      </p:sp>
-      <p:sp>
-        <p:nvSpPr>
-          <p:cNvPr id="4" name="TextBox 3"/>
-          <p:cNvSpPr txBox="1"/>
-          <p:nvPr/>
-        </p:nvSpPr>
-        <p:spPr>
-          <a:xfrm>
-            <a:off x="600000" y="1600000"/>
-            <a:ext cx="11000000" cy="4600000"/>
-          </a:xfrm>
-          <a:prstGeom prst="rect">
-            <a:avLst/>
-          </a:prstGeom>
-          <a:noFill/>
-        </p:spPr>
-        <p:txBody>
-          <a:bodyPr wrap="square">
-            <a:spAutoFit/>
-          </a:bodyPr>
-          <a:lstStyle/>
-          <a:p>
-            <a:pPr>
-              <a:spcAft>
-                <a:spcPts val="1000"/>
-              </a:spcAft>
-            </a:pPr>
-            <a:r>
-              <a:rPr sz="2000">
-                <a:solidFill>
-                  <a:srgbClr val="5A5A5A"/>
-                </a:solidFill>
-                <a:latin typeface="Calibri"/>
-              </a:rPr>
-              <a:t>•  4 schémas, 6 tables, 2 rôles, 1 vue</a:t>
-            </a:r>
-          </a:p>
-          <a:p>
-            <a:pPr>
-              <a:spcAft>
-                <a:spcPts val="1000"/>
-              </a:spcAft>
-            </a:pPr>
-            <a:r>
-              <a:rPr sz="2000">
-                <a:solidFill>
-                  <a:srgbClr val="5A5A5A"/>
-                </a:solidFill>
-                <a:latin typeface="Calibri"/>
-              </a:rPr>
-              <a:t>•  Preuve : C4-2-1_schema_postgres.txt</a:t>
-            </a:r>
-          </a:p>
-        </p:txBody>
-      </p:sp>
-    </p:spTree>
-  </p:cSld>
-  <p:clrMapOvr>
-    <a:masterClrMapping/>
-  </p:clrMapOvr>
-</p:sld>
-</file>
-
-<file path=ppt/slides/slide47.xml><?xml version="1.0" encoding="utf-8"?>
-<p:sld xmlns:a="http://schemas.openxmlformats.org/drawingml/2006/main" xmlns:p="http://schemas.openxmlformats.org/presentationml/2006/main" xmlns:r="http://schemas.openxmlformats.org/officeDocument/2006/relationships">
-  <p:cSld>
-    <p:spTree>
-      <p:nvGrpSpPr>
-        <p:cNvPr id="1" name=""/>
-        <p:cNvGrpSpPr/>
-        <p:nvPr/>
-      </p:nvGrpSpPr>
-      <p:grpSpPr/>
-      <p:sp>
-        <p:nvSpPr>
-          <p:cNvPr id="2" name="TextBox 1"/>
-          <p:cNvSpPr txBox="1"/>
-          <p:nvPr/>
-        </p:nvSpPr>
-        <p:spPr>
-          <a:xfrm>
-            <a:off x="500000" y="300000"/>
-            <a:ext cx="9200000" cy="1100000"/>
-          </a:xfrm>
-          <a:prstGeom prst="rect">
-            <a:avLst/>
-          </a:prstGeom>
-          <a:noFill/>
-        </p:spPr>
-        <p:txBody>
-          <a:bodyPr wrap="square">
-            <a:spAutoFit/>
-          </a:bodyPr>
-          <a:lstStyle/>
-          <a:p>
-            <a:pPr algn="l"/>
-            <a:r>
-              <a:rPr sz="3000" b="1">
-                <a:solidFill>
-                  <a:srgbClr val="0B3D66"/>
-                </a:solidFill>
-                <a:latin typeface="Calibri"/>
-              </a:rPr>
-              <a:t>A2 — Tableau de coûts détaillé (3 scénarios)</a:t>
-            </a:r>
-          </a:p>
-        </p:txBody>
-      </p:sp>
-      <p:sp>
-        <p:nvSpPr>
-          <p:cNvPr id="3" name="TextBox 2"/>
-          <p:cNvSpPr txBox="1"/>
-          <p:nvPr/>
-        </p:nvSpPr>
-        <p:spPr>
-          <a:xfrm>
-            <a:off x="10000000" y="180000"/>
-            <a:ext cx="1900000" cy="500000"/>
-          </a:xfrm>
-          <a:prstGeom prst="rect">
-            <a:avLst/>
-          </a:prstGeom>
-          <a:solidFill>
-            <a:srgbClr val="C0392B"/>
-          </a:solidFill>
-        </p:spPr>
-        <p:txBody>
-          <a:bodyPr wrap="square" anchor="ctr">
-            <a:spAutoFit/>
-          </a:bodyPr>
-          <a:lstStyle/>
-          <a:p>
-            <a:pPr algn="ctr"/>
-            <a:r>
-              <a:rPr sz="1600" b="1">
-                <a:solidFill>
-                  <a:srgbClr val="FFFFFF"/>
-                </a:solidFill>
-                <a:latin typeface="Calibri"/>
-              </a:rPr>
-              <a:t>Annexe</a:t>
-            </a:r>
-          </a:p>
-        </p:txBody>
-      </p:sp>
-      <p:sp>
-        <p:nvSpPr>
-          <p:cNvPr id="4" name="TextBox 3"/>
-          <p:cNvSpPr txBox="1"/>
-          <p:nvPr/>
-        </p:nvSpPr>
-        <p:spPr>
-          <a:xfrm>
-            <a:off x="600000" y="1600000"/>
-            <a:ext cx="11000000" cy="4600000"/>
-          </a:xfrm>
-          <a:prstGeom prst="rect">
-            <a:avLst/>
-          </a:prstGeom>
-          <a:noFill/>
-        </p:spPr>
-        <p:txBody>
-          <a:bodyPr wrap="square">
-            <a:spAutoFit/>
-          </a:bodyPr>
-          <a:lstStyle/>
-          <a:p>
-            <a:pPr>
-              <a:spcAft>
-                <a:spcPts val="1000"/>
-              </a:spcAft>
-            </a:pPr>
-            <a:r>
-              <a:rPr sz="2000">
-                <a:solidFill>
-                  <a:srgbClr val="5A5A5A"/>
-                </a:solidFill>
-                <a:latin typeface="Calibri"/>
-              </a:rPr>
-              <a:t>•  Hypothèses de volumétrie explicites</a:t>
-            </a:r>
-          </a:p>
-          <a:p>
-            <a:pPr>
-              <a:spcAft>
-                <a:spcPts val="1000"/>
-              </a:spcAft>
-            </a:pPr>
-            <a:r>
-              <a:rPr sz="2000">
-                <a:solidFill>
-                  <a:srgbClr val="5A5A5A"/>
-                </a:solidFill>
-                <a:latin typeface="Calibri"/>
-              </a:rPr>
-              <a:t>•  Comparatif local / Azure / SaaS</a:t>
-            </a:r>
-          </a:p>
-        </p:txBody>
-      </p:sp>
-    </p:spTree>
-  </p:cSld>
-  <p:clrMapOvr>
-    <a:masterClrMapping/>
-  </p:clrMapOvr>
-</p:sld>
-</file>
-
-<file path=ppt/slides/slide48.xml><?xml version="1.0" encoding="utf-8"?>
-<p:sld xmlns:a="http://schemas.openxmlformats.org/drawingml/2006/main" xmlns:p="http://schemas.openxmlformats.org/presentationml/2006/main" xmlns:r="http://schemas.openxmlformats.org/officeDocument/2006/relationships">
-  <p:cSld>
-    <p:spTree>
-      <p:nvGrpSpPr>
-        <p:cNvPr id="1" name=""/>
-        <p:cNvGrpSpPr/>
-        <p:nvPr/>
-      </p:nvGrpSpPr>
-      <p:grpSpPr/>
-      <p:sp>
-        <p:nvSpPr>
-          <p:cNvPr id="2" name="TextBox 1"/>
-          <p:cNvSpPr txBox="1"/>
-          <p:nvPr/>
-        </p:nvSpPr>
-        <p:spPr>
-          <a:xfrm>
-            <a:off x="500000" y="300000"/>
-            <a:ext cx="9200000" cy="1100000"/>
-          </a:xfrm>
-          <a:prstGeom prst="rect">
-            <a:avLst/>
-          </a:prstGeom>
-          <a:noFill/>
-        </p:spPr>
-        <p:txBody>
-          <a:bodyPr wrap="square">
-            <a:spAutoFit/>
-          </a:bodyPr>
-          <a:lstStyle/>
-          <a:p>
-            <a:pPr algn="l"/>
-            <a:r>
-              <a:rPr sz="3000" b="1">
-                <a:solidFill>
-                  <a:srgbClr val="0B3D66"/>
-                </a:solidFill>
-                <a:latin typeface="Calibri"/>
-              </a:rPr>
-              <a:t>A3 — Workflow CI/CD complet</a:t>
-            </a:r>
-          </a:p>
-        </p:txBody>
-      </p:sp>
-      <p:sp>
-        <p:nvSpPr>
-          <p:cNvPr id="3" name="TextBox 2"/>
-          <p:cNvSpPr txBox="1"/>
-          <p:nvPr/>
-        </p:nvSpPr>
-        <p:spPr>
-          <a:xfrm>
-            <a:off x="10000000" y="180000"/>
-            <a:ext cx="1900000" cy="500000"/>
-          </a:xfrm>
-          <a:prstGeom prst="rect">
-            <a:avLst/>
-          </a:prstGeom>
-          <a:solidFill>
-            <a:srgbClr val="C0392B"/>
-          </a:solidFill>
-        </p:spPr>
-        <p:txBody>
-          <a:bodyPr wrap="square" anchor="ctr">
-            <a:spAutoFit/>
-          </a:bodyPr>
-          <a:lstStyle/>
-          <a:p>
-            <a:pPr algn="ctr"/>
-            <a:r>
-              <a:rPr sz="1600" b="1">
-                <a:solidFill>
-                  <a:srgbClr val="FFFFFF"/>
-                </a:solidFill>
-                <a:latin typeface="Calibri"/>
-              </a:rPr>
-              <a:t>Annexe</a:t>
-            </a:r>
-          </a:p>
-        </p:txBody>
-      </p:sp>
-      <p:sp>
-        <p:nvSpPr>
-          <p:cNvPr id="4" name="TextBox 3"/>
-          <p:cNvSpPr txBox="1"/>
-          <p:nvPr/>
-        </p:nvSpPr>
-        <p:spPr>
-          <a:xfrm>
-            <a:off x="600000" y="1600000"/>
-            <a:ext cx="11000000" cy="4600000"/>
-          </a:xfrm>
-          <a:prstGeom prst="rect">
-            <a:avLst/>
-          </a:prstGeom>
-          <a:noFill/>
-        </p:spPr>
-        <p:txBody>
-          <a:bodyPr wrap="square">
-            <a:spAutoFit/>
-          </a:bodyPr>
-          <a:lstStyle/>
-          <a:p>
-            <a:pPr>
-              <a:spcAft>
-                <a:spcPts val="1000"/>
-              </a:spcAft>
-            </a:pPr>
-            <a:r>
-              <a:rPr sz="2000">
-                <a:solidFill>
-                  <a:srgbClr val="5A5A5A"/>
-                </a:solidFill>
-                <a:latin typeface="Calibri"/>
-              </a:rPr>
-              <a:t>•  .github/workflows/ci.yml</a:t>
-            </a:r>
-          </a:p>
-          <a:p>
-            <a:pPr>
-              <a:spcAft>
-                <a:spcPts val="1000"/>
-              </a:spcAft>
-            </a:pPr>
-            <a:r>
-              <a:rPr sz="2000">
-                <a:solidFill>
-                  <a:srgbClr val="5A5A5A"/>
-                </a:solidFill>
-                <a:latin typeface="Calibri"/>
-              </a:rPr>
-              <a:t>•  5 jobs, déploiement GHCR</a:t>
+              <a:rPr sz="2100">
+                <a:solidFill>
+                  <a:srgbClr val="404040"/>
+                </a:solidFill>
+                <a:latin typeface="Calibri"/>
+              </a:rPr>
+              <a:t>•  Trous sans matériau : Spark, CI/CD, alerting, tests de sécurité</a:t>
             </a:r>
           </a:p>
         </p:txBody>
@@ -12887,7 +7255,7 @@
         <p:spPr>
           <a:xfrm>
             <a:off x="500000" y="300000"/>
-            <a:ext cx="9200000" cy="1100000"/>
+            <a:ext cx="9200000" cy="1150000"/>
           </a:xfrm>
           <a:prstGeom prst="rect">
             <a:avLst/>
@@ -12902,13 +7270,13 @@
           <a:p>
             <a:pPr algn="l"/>
             <a:r>
-              <a:rPr sz="3000" b="1">
+              <a:rPr sz="2900" b="1">
                 <a:solidFill>
                   <a:srgbClr val="0B3D66"/>
                 </a:solidFill>
                 <a:latin typeface="Calibri"/>
               </a:rPr>
-              <a:t>La donnée qui justifie tout : des dizaines de millions de décès</a:t>
+              <a:t>Des composants open source, locaux, portables vers le cloud</a:t>
             </a:r>
           </a:p>
         </p:txBody>
@@ -12922,7 +7290,7 @@
         <p:spPr>
           <a:xfrm>
             <a:off x="10000000" y="180000"/>
-            <a:ext cx="1900000" cy="500000"/>
+            <a:ext cx="1950000" cy="520000"/>
           </a:xfrm>
           <a:prstGeom prst="rect">
             <a:avLst/>
@@ -12930,6 +7298,9 @@
           <a:solidFill>
             <a:srgbClr val="C0392B"/>
           </a:solidFill>
+          <a:ln>
+            <a:noFill/>
+          </a:ln>
         </p:spPr>
         <p:txBody>
           <a:bodyPr wrap="square" anchor="ctr">
@@ -12945,7 +7316,7 @@
                 </a:solidFill>
                 <a:latin typeface="Calibri"/>
               </a:rPr>
-              <a:t>Contexte</a:t>
+              <a:t>C4.1.2</a:t>
             </a:r>
           </a:p>
         </p:txBody>
@@ -12958,7 +7329,7 @@
         </p:nvSpPr>
         <p:spPr>
           <a:xfrm>
-            <a:off x="600000" y="1600000"/>
+            <a:off x="600000" y="1650000"/>
             <a:ext cx="11000000" cy="4600000"/>
           </a:xfrm>
           <a:prstGeom prst="rect">
@@ -12978,13 +7349,13 @@
               </a:spcAft>
             </a:pPr>
             <a:r>
-              <a:rPr sz="2000">
-                <a:solidFill>
-                  <a:srgbClr val="5A5A5A"/>
-                </a:solidFill>
-                <a:latin typeface="Calibri"/>
-              </a:rPr>
-              <a:t>•  Fichier INSEE à largeur fixe (176 caractères)</a:t>
+              <a:rPr sz="2100">
+                <a:solidFill>
+                  <a:srgbClr val="404040"/>
+                </a:solidFill>
+                <a:latin typeface="Calibri"/>
+              </a:rPr>
+              <a:t>•  Airflow · PostgreSQL · MinIO (S3) · Spark · GitHub Actions</a:t>
             </a:r>
           </a:p>
           <a:p>
@@ -12994,13 +7365,13 @@
               </a:spcAft>
             </a:pPr>
             <a:r>
-              <a:rPr sz="2000">
-                <a:solidFill>
-                  <a:srgbClr val="5A5A5A"/>
-                </a:solidFill>
-                <a:latin typeface="Calibri"/>
-              </a:rPr>
-              <a:t>•  Publication mensuelle + fichiers annuels historiques</a:t>
+              <a:rPr sz="2100">
+                <a:solidFill>
+                  <a:srgbClr val="404040"/>
+                </a:solidFill>
+                <a:latin typeface="Calibri"/>
+              </a:rPr>
+              <a:t>•  Interfaces standard : S3, SQL, PySpark</a:t>
             </a:r>
           </a:p>
           <a:p>
@@ -13010,13 +7381,13 @@
               </a:spcAft>
             </a:pPr>
             <a:r>
-              <a:rPr sz="2000">
-                <a:solidFill>
-                  <a:srgbClr val="5A5A5A"/>
-                </a:solidFill>
-                <a:latin typeface="Calibri"/>
-              </a:rPr>
-              <a:t>•  Volumétrie cumulée : dizaines de M de lignes → justifie le distribué</a:t>
+              <a:rPr sz="2100">
+                <a:solidFill>
+                  <a:srgbClr val="404040"/>
+                </a:solidFill>
+                <a:latin typeface="Calibri"/>
+              </a:rPr>
+              <a:t>•  Vendor lock-in traité par conception (bascule cloud sans réécriture)</a:t>
             </a:r>
           </a:p>
         </p:txBody>
@@ -13047,37 +7418,83 @@
         </p:nvSpPr>
         <p:spPr>
           <a:xfrm>
-            <a:off x="0" y="0"/>
-            <a:ext cx="12192000" cy="6858000"/>
+            <a:off x="500000" y="300000"/>
+            <a:ext cx="9200000" cy="1150000"/>
+          </a:xfrm>
+          <a:prstGeom prst="rect">
+            <a:avLst/>
+          </a:prstGeom>
+          <a:noFill/>
+        </p:spPr>
+        <p:txBody>
+          <a:bodyPr wrap="square">
+            <a:spAutoFit/>
+          </a:bodyPr>
+          <a:lstStyle/>
+          <a:p>
+            <a:pPr algn="l"/>
+            <a:r>
+              <a:rPr sz="2900" b="1">
+                <a:solidFill>
+                  <a:srgbClr val="0B3D66"/>
+                </a:solidFill>
+                <a:latin typeface="Calibri"/>
+              </a:rPr>
+              <a:t>Trois scénarios de coût, avec des hypothèses explicites</a:t>
+            </a:r>
+          </a:p>
+        </p:txBody>
+      </p:sp>
+      <p:sp>
+        <p:nvSpPr>
+          <p:cNvPr id="3" name="TextBox 2"/>
+          <p:cNvSpPr txBox="1"/>
+          <p:nvPr/>
+        </p:nvSpPr>
+        <p:spPr>
+          <a:xfrm>
+            <a:off x="10000000" y="180000"/>
+            <a:ext cx="1950000" cy="520000"/>
           </a:xfrm>
           <a:prstGeom prst="rect">
             <a:avLst/>
           </a:prstGeom>
           <a:solidFill>
-            <a:srgbClr val="0B3D66"/>
+            <a:srgbClr val="C0392B"/>
           </a:solidFill>
           <a:ln>
             <a:noFill/>
           </a:ln>
         </p:spPr>
         <p:txBody>
-          <a:bodyPr wrap="none">
+          <a:bodyPr wrap="square" anchor="ctr">
             <a:spAutoFit/>
           </a:bodyPr>
           <a:lstStyle/>
-          <a:p/>
-        </p:txBody>
-      </p:sp>
-      <p:sp>
-        <p:nvSpPr>
-          <p:cNvPr id="3" name="TextBox 2"/>
+          <a:p>
+            <a:pPr algn="ctr"/>
+            <a:r>
+              <a:rPr sz="1600" b="1">
+                <a:solidFill>
+                  <a:srgbClr val="FFFFFF"/>
+                </a:solidFill>
+                <a:latin typeface="Calibri"/>
+              </a:rPr>
+              <a:t>C4.1.2</a:t>
+            </a:r>
+          </a:p>
+        </p:txBody>
+      </p:sp>
+      <p:sp>
+        <p:nvSpPr>
+          <p:cNvPr id="4" name="TextBox 3"/>
           <p:cNvSpPr txBox="1"/>
           <p:nvPr/>
         </p:nvSpPr>
         <p:spPr>
           <a:xfrm>
-            <a:off x="700000" y="2600000"/>
-            <a:ext cx="10800000" cy="1200000"/>
+            <a:off x="600000" y="1650000"/>
+            <a:ext cx="11000000" cy="4600000"/>
           </a:xfrm>
           <a:prstGeom prst="rect">
             <a:avLst/>
@@ -13090,50 +7507,67 @@
           </a:bodyPr>
           <a:lstStyle/>
           <a:p>
-            <a:pPr algn="l"/>
-            <a:r>
-              <a:rPr sz="4000" b="1">
-                <a:solidFill>
-                  <a:srgbClr val="FFFFFF"/>
-                </a:solidFill>
-                <a:latin typeface="Calibri"/>
-              </a:rPr>
-              <a:t>Analyser l'environnement</a:t>
-            </a:r>
-          </a:p>
-        </p:txBody>
-      </p:sp>
-      <p:sp>
-        <p:nvSpPr>
-          <p:cNvPr id="4" name="TextBox 3"/>
-          <p:cNvSpPr txBox="1"/>
-          <p:nvPr/>
-        </p:nvSpPr>
-        <p:spPr>
-          <a:xfrm>
-            <a:off x="700000" y="3900000"/>
-            <a:ext cx="10800000" cy="800000"/>
-          </a:xfrm>
-          <a:prstGeom prst="rect">
-            <a:avLst/>
-          </a:prstGeom>
-          <a:noFill/>
-        </p:spPr>
-        <p:txBody>
-          <a:bodyPr wrap="square">
-            <a:spAutoFit/>
-          </a:bodyPr>
-          <a:lstStyle/>
-          <a:p>
-            <a:pPr algn="l"/>
-            <a:r>
-              <a:rPr sz="2200" b="0">
-                <a:solidFill>
-                  <a:srgbClr val="E8ECF0"/>
-                </a:solidFill>
-                <a:latin typeface="Calibri"/>
-              </a:rPr>
-              <a:t>C4.1.1</a:t>
+            <a:pPr>
+              <a:spcAft>
+                <a:spcPts val="1000"/>
+              </a:spcAft>
+            </a:pPr>
+            <a:r>
+              <a:rPr sz="2100">
+                <a:solidFill>
+                  <a:srgbClr val="404040"/>
+                </a:solidFill>
+                <a:latin typeface="Calibri"/>
+              </a:rPr>
+              <a:t>•  Local (retenu) : ~ coût du temps humain seul</a:t>
+            </a:r>
+          </a:p>
+          <a:p>
+            <a:pPr>
+              <a:spcAft>
+                <a:spcPts val="1000"/>
+              </a:spcAft>
+            </a:pPr>
+            <a:r>
+              <a:rPr sz="2100">
+                <a:solidFill>
+                  <a:srgbClr val="404040"/>
+                </a:solidFill>
+                <a:latin typeface="Calibri"/>
+              </a:rPr>
+              <a:t>•  Cloud Azure : ~ 50 à 145 € / mois</a:t>
+            </a:r>
+          </a:p>
+          <a:p>
+            <a:pPr>
+              <a:spcAft>
+                <a:spcPts val="1000"/>
+              </a:spcAft>
+            </a:pPr>
+            <a:r>
+              <a:rPr sz="2100">
+                <a:solidFill>
+                  <a:srgbClr val="404040"/>
+                </a:solidFill>
+                <a:latin typeface="Calibri"/>
+              </a:rPr>
+              <a:t>•  SaaS Snowflake/Fabric : ~ 80 à 250 € / mois</a:t>
+            </a:r>
+          </a:p>
+          <a:p>
+            <a:pPr>
+              <a:spcAft>
+                <a:spcPts val="1000"/>
+              </a:spcAft>
+            </a:pPr>
+            <a:r>
+              <a:rPr sz="2100">
+                <a:solidFill>
+                  <a:srgbClr val="404040"/>
+                </a:solidFill>
+                <a:latin typeface="Calibri"/>
+              </a:rPr>
+              <a:t>•  SaaS écarté (réel) : coût récurrent + souveraineté des données</a:t>
             </a:r>
           </a:p>
         </p:txBody>
@@ -13165,7 +7599,7 @@
         <p:spPr>
           <a:xfrm>
             <a:off x="500000" y="300000"/>
-            <a:ext cx="9200000" cy="1100000"/>
+            <a:ext cx="9200000" cy="1150000"/>
           </a:xfrm>
           <a:prstGeom prst="rect">
             <a:avLst/>
@@ -13180,13 +7614,13 @@
           <a:p>
             <a:pPr algn="l"/>
             <a:r>
-              <a:rPr sz="3000" b="1">
+              <a:rPr sz="2900" b="1">
                 <a:solidFill>
                   <a:srgbClr val="0B3D66"/>
                 </a:solidFill>
                 <a:latin typeface="Calibri"/>
               </a:rPr>
-              <a:t>Le besoin : transformer une obligation en donnée actionnable</a:t>
+              <a:t>Un entrepôt en quatre couches, avec des droits testés</a:t>
             </a:r>
           </a:p>
         </p:txBody>
@@ -13200,7 +7634,7 @@
         <p:spPr>
           <a:xfrm>
             <a:off x="10000000" y="180000"/>
-            <a:ext cx="1900000" cy="500000"/>
+            <a:ext cx="1950000" cy="520000"/>
           </a:xfrm>
           <a:prstGeom prst="rect">
             <a:avLst/>
@@ -13208,6 +7642,9 @@
           <a:solidFill>
             <a:srgbClr val="C0392B"/>
           </a:solidFill>
+          <a:ln>
+            <a:noFill/>
+          </a:ln>
         </p:spPr>
         <p:txBody>
           <a:bodyPr wrap="square" anchor="ctr">
@@ -13223,7 +7660,7 @@
                 </a:solidFill>
                 <a:latin typeface="Calibri"/>
               </a:rPr>
-              <a:t>C4.1.1</a:t>
+              <a:t>C4.2.1</a:t>
             </a:r>
           </a:p>
         </p:txBody>
@@ -13236,7 +7673,7 @@
         </p:nvSpPr>
         <p:spPr>
           <a:xfrm>
-            <a:off x="600000" y="1600000"/>
+            <a:off x="600000" y="1650000"/>
             <a:ext cx="11000000" cy="4600000"/>
           </a:xfrm>
           <a:prstGeom prst="rect">
@@ -13256,13 +7693,13 @@
               </a:spcAft>
             </a:pPr>
             <a:r>
-              <a:rPr sz="2000">
-                <a:solidFill>
-                  <a:srgbClr val="5A5A5A"/>
-                </a:solidFill>
-                <a:latin typeface="Calibri"/>
-              </a:rPr>
-              <a:t>•  Ingérer la source de vérité (INSEE)</a:t>
+              <a:rPr sz="2100">
+                <a:solidFill>
+                  <a:srgbClr val="404040"/>
+                </a:solidFill>
+                <a:latin typeface="Calibri"/>
+              </a:rPr>
+              <a:t>•  bronze (brut) · silver (typé) · gold (métier) · ops (journal)</a:t>
             </a:r>
           </a:p>
           <a:p>
@@ -13272,13 +7709,13 @@
               </a:spcAft>
             </a:pPr>
             <a:r>
-              <a:rPr sz="2000">
-                <a:solidFill>
-                  <a:srgbClr val="5A5A5A"/>
-                </a:solidFill>
-                <a:latin typeface="Calibri"/>
-              </a:rPr>
-              <a:t>•  Rapprocher décès × portefeuille d'adhérents</a:t>
+              <a:rPr sz="2100">
+                <a:solidFill>
+                  <a:srgbClr val="404040"/>
+                </a:solidFill>
+                <a:latin typeface="Calibri"/>
+              </a:rPr>
+              <a:t>•  Deux rôles : le pipeline écrit, le métier lit gold seulement</a:t>
             </a:r>
           </a:p>
           <a:p>
@@ -13288,13 +7725,13 @@
               </a:spcAft>
             </a:pPr>
             <a:r>
-              <a:rPr sz="2000">
-                <a:solidFill>
-                  <a:srgbClr val="5A5A5A"/>
-                </a:solidFill>
-                <a:latin typeface="Calibri"/>
-              </a:rPr>
-              <a:t>•  Produire une liste priorisée, fiable et tracée</a:t>
+              <a:rPr sz="2100">
+                <a:solidFill>
+                  <a:srgbClr val="404040"/>
+                </a:solidFill>
+                <a:latin typeface="Calibri"/>
+              </a:rPr>
+              <a:t>•  Le rôle lecture ne peut ni écrire ni lire le brut — TESTÉ</a:t>
             </a:r>
           </a:p>
           <a:p>
@@ -13304,13 +7741,13 @@
               </a:spcAft>
             </a:pPr>
             <a:r>
-              <a:rPr sz="2000">
-                <a:solidFill>
-                  <a:srgbClr val="5A5A5A"/>
-                </a:solidFill>
-                <a:latin typeface="Calibri"/>
-              </a:rPr>
-              <a:t>•  Rythme mensuel, valeur réglementaire → traçabilité non négociable</a:t>
+              <a:rPr sz="2100">
+                <a:solidFill>
+                  <a:srgbClr val="404040"/>
+                </a:solidFill>
+                <a:latin typeface="Calibri"/>
+              </a:rPr>
+              <a:t>•  Le métier consomme une vue déjà priorisée</a:t>
             </a:r>
           </a:p>
         </p:txBody>
@@ -13342,7 +7779,7 @@
         <p:spPr>
           <a:xfrm>
             <a:off x="500000" y="300000"/>
-            <a:ext cx="9200000" cy="1100000"/>
+            <a:ext cx="9200000" cy="1150000"/>
           </a:xfrm>
           <a:prstGeom prst="rect">
             <a:avLst/>
@@ -13357,13 +7794,13 @@
           <a:p>
             <a:pPr algn="l"/>
             <a:r>
-              <a:rPr sz="3000" b="1">
+              <a:rPr sz="2900" b="1">
                 <a:solidFill>
                   <a:srgbClr val="0B3D66"/>
                 </a:solidFill>
                 <a:latin typeface="Calibri"/>
               </a:rPr>
-              <a:t>L'enjeu structurant : ne pas dépendre d'une source non maîtrisée</a:t>
+              <a:t>Trois méthodes de pipeline, dont le distribué</a:t>
             </a:r>
           </a:p>
         </p:txBody>
@@ -13377,7 +7814,7 @@
         <p:spPr>
           <a:xfrm>
             <a:off x="10000000" y="180000"/>
-            <a:ext cx="1900000" cy="500000"/>
+            <a:ext cx="1950000" cy="520000"/>
           </a:xfrm>
           <a:prstGeom prst="rect">
             <a:avLst/>
@@ -13385,6 +7822,9 @@
           <a:solidFill>
             <a:srgbClr val="C0392B"/>
           </a:solidFill>
+          <a:ln>
+            <a:noFill/>
+          </a:ln>
         </p:spPr>
         <p:txBody>
           <a:bodyPr wrap="square" anchor="ctr">
@@ -13400,7 +7840,7 @@
                 </a:solidFill>
                 <a:latin typeface="Calibri"/>
               </a:rPr>
-              <a:t>C4.1.1</a:t>
+              <a:t>C4.2.2</a:t>
             </a:r>
           </a:p>
         </p:txBody>
@@ -13413,7 +7853,7 @@
         </p:nvSpPr>
         <p:spPr>
           <a:xfrm>
-            <a:off x="600000" y="1600000"/>
+            <a:off x="600000" y="1650000"/>
             <a:ext cx="11000000" cy="4600000"/>
           </a:xfrm>
           <a:prstGeom prst="rect">
@@ -13433,13 +7873,13 @@
               </a:spcAft>
             </a:pPr>
             <a:r>
-              <a:rPr sz="2000">
-                <a:solidFill>
-                  <a:srgbClr val="5A5A5A"/>
-                </a:solidFill>
-                <a:latin typeface="Calibri"/>
-              </a:rPr>
-              <a:t>•  Conformité, fiabilité de la détection</a:t>
+              <a:rPr sz="2100">
+                <a:solidFill>
+                  <a:srgbClr val="404040"/>
+                </a:solidFill>
+                <a:latin typeface="Calibri"/>
+              </a:rPr>
+              <a:t>•  Fil de l'eau (SQL) : typage, nettoyage, déduplication dans le moteur</a:t>
             </a:r>
           </a:p>
           <a:p>
@@ -13449,13 +7889,13 @@
               </a:spcAft>
             </a:pPr>
             <a:r>
-              <a:rPr sz="2000">
-                <a:solidFill>
-                  <a:srgbClr val="5A5A5A"/>
-                </a:solidFill>
-                <a:latin typeface="Calibri"/>
-              </a:rPr>
-              <a:t>•  Résilience aux sources externes (← l'incident)</a:t>
+              <a:rPr sz="2100">
+                <a:solidFill>
+                  <a:srgbClr val="404040"/>
+                </a:solidFill>
+                <a:latin typeface="Calibri"/>
+              </a:rPr>
+              <a:t>•  Orchestration (Airflow) : enchaîne et fiabilise</a:t>
             </a:r>
           </a:p>
           <a:p>
@@ -13465,13 +7905,29 @@
               </a:spcAft>
             </a:pPr>
             <a:r>
-              <a:rPr sz="2000">
-                <a:solidFill>
-                  <a:srgbClr val="5A5A5A"/>
-                </a:solidFill>
-                <a:latin typeface="Calibri"/>
-              </a:rPr>
-              <a:t>•  RGPD : cloisonnement, aucune donnée réelle hors périmètre</a:t>
+              <a:rPr sz="2100">
+                <a:solidFill>
+                  <a:srgbClr val="404040"/>
+                </a:solidFill>
+                <a:latin typeface="Calibri"/>
+              </a:rPr>
+              <a:t>•  Distribué (Spark) : absorbe le volume du rapprochement</a:t>
+            </a:r>
+          </a:p>
+          <a:p>
+            <a:pPr>
+              <a:spcAft>
+                <a:spcPts val="1000"/>
+              </a:spcAft>
+            </a:pPr>
+            <a:r>
+              <a:rPr sz="2100">
+                <a:solidFill>
+                  <a:srgbClr val="404040"/>
+                </a:solidFill>
+                <a:latin typeface="Calibri"/>
+              </a:rPr>
+              <a:t>•  Chaque méthode produit une donnée demandée</a:t>
             </a:r>
           </a:p>
         </p:txBody>
@@ -13503,7 +7959,7 @@
         <p:spPr>
           <a:xfrm>
             <a:off x="500000" y="300000"/>
-            <a:ext cx="9200000" cy="1100000"/>
+            <a:ext cx="9200000" cy="1150000"/>
           </a:xfrm>
           <a:prstGeom prst="rect">
             <a:avLst/>
@@ -13518,13 +7974,13 @@
           <a:p>
             <a:pPr algn="l"/>
             <a:r>
-              <a:rPr sz="3000" b="1">
+              <a:rPr sz="2900" b="1">
                 <a:solidFill>
                   <a:srgbClr val="0B3D66"/>
                 </a:solidFill>
                 <a:latin typeface="Calibri"/>
               </a:rPr>
-              <a:t>Trois contraintes qui cadrent toute la conception</a:t>
+              <a:t>Orchestration : le DAG réel tourne vert sur le fichier INSEE</a:t>
             </a:r>
           </a:p>
         </p:txBody>
@@ -13538,7 +7994,7 @@
         <p:spPr>
           <a:xfrm>
             <a:off x="10000000" y="180000"/>
-            <a:ext cx="1900000" cy="500000"/>
+            <a:ext cx="1950000" cy="520000"/>
           </a:xfrm>
           <a:prstGeom prst="rect">
             <a:avLst/>
@@ -13546,6 +8002,9 @@
           <a:solidFill>
             <a:srgbClr val="C0392B"/>
           </a:solidFill>
+          <a:ln>
+            <a:noFill/>
+          </a:ln>
         </p:spPr>
         <p:txBody>
           <a:bodyPr wrap="square" anchor="ctr">
@@ -13561,7 +8020,7 @@
                 </a:solidFill>
                 <a:latin typeface="Calibri"/>
               </a:rPr>
-              <a:t>C4.1.1</a:t>
+              <a:t>C4.2.2</a:t>
             </a:r>
           </a:p>
         </p:txBody>
@@ -13574,8 +8033,8 @@
         </p:nvSpPr>
         <p:spPr>
           <a:xfrm>
-            <a:off x="600000" y="1600000"/>
-            <a:ext cx="11000000" cy="4600000"/>
+            <a:off x="600000" y="1500000"/>
+            <a:ext cx="11000000" cy="1250000"/>
           </a:xfrm>
           <a:prstGeom prst="rect">
             <a:avLst/>
@@ -13594,49 +8053,41 @@
               </a:spcAft>
             </a:pPr>
             <a:r>
-              <a:rPr sz="2000">
-                <a:solidFill>
-                  <a:srgbClr val="5A5A5A"/>
-                </a:solidFill>
-                <a:latin typeface="Calibri"/>
-              </a:rPr>
-              <a:t>•  Coût nul : rien de managé, tout en local conteneurisé</a:t>
-            </a:r>
-          </a:p>
-          <a:p>
-            <a:pPr>
-              <a:spcAft>
-                <a:spcPts val="1000"/>
-              </a:spcAft>
-            </a:pPr>
-            <a:r>
-              <a:rPr sz="2000">
-                <a:solidFill>
-                  <a:srgbClr val="5A5A5A"/>
-                </a:solidFill>
-                <a:latin typeface="Calibri"/>
-              </a:rPr>
-              <a:t>•  Délai &lt; 1 mois : chaque brique démontrable en 5 min</a:t>
-            </a:r>
-          </a:p>
-          <a:p>
-            <a:pPr>
-              <a:spcAft>
-                <a:spcPts val="1000"/>
-              </a:spcAft>
-            </a:pPr>
-            <a:r>
-              <a:rPr sz="2000">
-                <a:solidFill>
-                  <a:srgbClr val="5A5A5A"/>
-                </a:solidFill>
-                <a:latin typeface="Calibri"/>
-              </a:rPr>
-              <a:t>•  Complexité : volumétrie + source non contractuelle + pas d'ID pivot</a:t>
-            </a:r>
-          </a:p>
-        </p:txBody>
-      </p:sp>
+              <a:rPr sz="1700">
+                <a:solidFill>
+                  <a:srgbClr val="404040"/>
+                </a:solidFill>
+                <a:latin typeface="Calibri"/>
+              </a:rPr>
+              <a:t>•  4 tâches · retries · SLA · callbacks d'alerte · exécution réelle data.gouv</a:t>
+            </a:r>
+          </a:p>
+        </p:txBody>
+      </p:sp>
+      <p:pic>
+        <p:nvPicPr>
+          <p:cNvPr id="5" name="Picture 4" descr="C4-2-2_airflow_run.png"/>
+          <p:cNvPicPr>
+            <a:picLocks noChangeAspect="1"/>
+          </p:cNvPicPr>
+          <p:nvPr/>
+        </p:nvPicPr>
+        <p:blipFill>
+          <a:blip r:embed="rId2"/>
+          <a:stretch>
+            <a:fillRect/>
+          </a:stretch>
+        </p:blipFill>
+        <p:spPr>
+          <a:xfrm>
+            <a:off x="1400000" y="2850000"/>
+            <a:ext cx="9400000" cy="2764129"/>
+          </a:xfrm>
+          <a:prstGeom prst="rect">
+            <a:avLst/>
+          </a:prstGeom>
+        </p:spPr>
+      </p:pic>
     </p:spTree>
   </p:cSld>
   <p:clrMapOvr>

--- a/soutenance/support_eckert.pptx
+++ b/soutenance/support_eckert.pptx
@@ -4,29 +4,32 @@
   <p:sldMasterIdLst>
     <p:sldMasterId id="2147483648" r:id="rId1"/>
   </p:sldMasterIdLst>
+  <p:notesMasterIdLst>
+    <p:notesMasterId r:id="rId22"/>
+  </p:notesMasterIdLst>
   <p:sldIdLst>
-    <p:sldId id="256" r:id="rId7"/>
-    <p:sldId id="257" r:id="rId9"/>
-    <p:sldId id="258" r:id="rId10"/>
-    <p:sldId id="259" r:id="rId11"/>
-    <p:sldId id="260" r:id="rId12"/>
-    <p:sldId id="261" r:id="rId13"/>
-    <p:sldId id="262" r:id="rId14"/>
-    <p:sldId id="263" r:id="rId15"/>
-    <p:sldId id="264" r:id="rId16"/>
-    <p:sldId id="265" r:id="rId17"/>
-    <p:sldId id="266" r:id="rId18"/>
-    <p:sldId id="267" r:id="rId19"/>
-    <p:sldId id="268" r:id="rId20"/>
-    <p:sldId id="269" r:id="rId21"/>
-    <p:sldId id="270" r:id="rId22"/>
-    <p:sldId id="271" r:id="rId23"/>
-    <p:sldId id="272" r:id="rId24"/>
-    <p:sldId id="273" r:id="rId25"/>
-    <p:sldId id="274" r:id="rId26"/>
-    <p:sldId id="275" r:id="rId27"/>
+    <p:sldId id="256" r:id="rId2"/>
+    <p:sldId id="257" r:id="rId3"/>
+    <p:sldId id="258" r:id="rId4"/>
+    <p:sldId id="259" r:id="rId5"/>
+    <p:sldId id="260" r:id="rId6"/>
+    <p:sldId id="261" r:id="rId7"/>
+    <p:sldId id="262" r:id="rId8"/>
+    <p:sldId id="263" r:id="rId9"/>
+    <p:sldId id="264" r:id="rId10"/>
+    <p:sldId id="265" r:id="rId11"/>
+    <p:sldId id="266" r:id="rId12"/>
+    <p:sldId id="267" r:id="rId13"/>
+    <p:sldId id="268" r:id="rId14"/>
+    <p:sldId id="269" r:id="rId15"/>
+    <p:sldId id="270" r:id="rId16"/>
+    <p:sldId id="271" r:id="rId17"/>
+    <p:sldId id="272" r:id="rId18"/>
+    <p:sldId id="273" r:id="rId19"/>
+    <p:sldId id="274" r:id="rId20"/>
+    <p:sldId id="275" r:id="rId21"/>
   </p:sldIdLst>
-  <p:sldSz cx="12192000" cy="6858000" type="screen4x3"/>
+  <p:sldSz cx="12192000" cy="6858000"/>
   <p:notesSz cx="6858000" cy="9144000"/>
   <p:defaultTextStyle>
     <a:defPPr>
@@ -123,11 +126,27 @@
       </a:defRPr>
     </a:lvl9pPr>
   </p:defaultTextStyle>
+  <p:extLst>
+    <p:ext uri="{EFAFB233-063F-42B5-8137-9DF3F51BA10A}">
+      <p15:sldGuideLst xmlns:p15="http://schemas.microsoft.com/office/powerpoint/2012/main">
+        <p15:guide id="1" orient="horz" pos="2160">
+          <p15:clr>
+            <a:srgbClr val="A4A3A4"/>
+          </p15:clr>
+        </p15:guide>
+        <p15:guide id="2" pos="2880">
+          <p15:clr>
+            <a:srgbClr val="A4A3A4"/>
+          </p15:clr>
+        </p15:guide>
+      </p15:sldGuideLst>
+    </p:ext>
+  </p:extLst>
 </p:presentation>
 </file>
 
 <file path=ppt/notesMasters/notesMaster1.xml><?xml version="1.0" encoding="utf-8"?>
-<p:notesMaster xmlns:a="http://schemas.openxmlformats.org/drawingml/2006/main" xmlns:p="http://schemas.openxmlformats.org/presentationml/2006/main" xmlns:r="http://schemas.openxmlformats.org/officeDocument/2006/relationships">
+<p:notesMaster xmlns:a="http://schemas.openxmlformats.org/drawingml/2006/main" xmlns:r="http://schemas.openxmlformats.org/officeDocument/2006/relationships" xmlns:p="http://schemas.openxmlformats.org/presentationml/2006/main">
   <p:cSld>
     <p:bg>
       <p:bgRef idx="1001">
@@ -148,241 +167,16 @@
           <a:chExt cx="0" cy="0"/>
         </a:xfrm>
       </p:grpSpPr>
-      <p:sp>
-        <p:nvSpPr>
-          <p:cNvPr id="2" name="Header Placeholder 1"/>
-          <p:cNvSpPr>
-            <a:spLocks noGrp="1"/>
-          </p:cNvSpPr>
-          <p:nvPr>
-            <p:ph type="hdr" sz="quarter"/>
-          </p:nvPr>
-        </p:nvSpPr>
-        <p:spPr>
-          <a:xfrm>
-            <a:off x="0" y="0"/>
-            <a:ext cx="2971800" cy="457200"/>
-          </a:xfrm>
-          <a:prstGeom prst="rect">
-            <a:avLst/>
-          </a:prstGeom>
-        </p:spPr>
-        <p:txBody>
-          <a:bodyPr vert="horz" lIns="91440" tIns="45720" rIns="91440" bIns="45720" rtlCol="0"/>
-          <a:lstStyle>
-            <a:lvl1pPr algn="l">
-              <a:defRPr sz="1200"/>
-            </a:lvl1pPr>
-          </a:lstStyle>
-          <a:p>
-            <a:endParaRPr lang="en-US"/>
-          </a:p>
-        </p:txBody>
-      </p:sp>
-      <p:sp>
-        <p:nvSpPr>
-          <p:cNvPr id="3" name="Date Placeholder 2"/>
-          <p:cNvSpPr>
-            <a:spLocks noGrp="1"/>
-          </p:cNvSpPr>
-          <p:nvPr>
-            <p:ph type="dt" idx="1"/>
-          </p:nvPr>
-        </p:nvSpPr>
-        <p:spPr>
-          <a:xfrm>
-            <a:off x="3884613" y="0"/>
-            <a:ext cx="2971800" cy="457200"/>
-          </a:xfrm>
-          <a:prstGeom prst="rect">
-            <a:avLst/>
-          </a:prstGeom>
-        </p:spPr>
-        <p:txBody>
-          <a:bodyPr vert="horz" lIns="91440" tIns="45720" rIns="91440" bIns="45720" rtlCol="0"/>
-          <a:lstStyle>
-            <a:lvl1pPr algn="r">
-              <a:defRPr sz="1200"/>
-            </a:lvl1pPr>
-          </a:lstStyle>
-          <a:p>
-            <a:fld id="{0F89C1C7-3DCD-1040-A9CF-14679D8B5DDD}" type="datetimeFigureOut">
-              <a:rPr lang="en-US" smtClean="0"/>
-              <a:t>10/17/16</a:t>
-            </a:fld>
-            <a:endParaRPr lang="en-US"/>
-          </a:p>
-        </p:txBody>
-      </p:sp>
-      <p:sp>
-        <p:nvSpPr>
-          <p:cNvPr id="4" name="Slide Image Placeholder 3"/>
-          <p:cNvSpPr>
-            <a:spLocks noGrp="1" noRot="1" noChangeAspect="1"/>
-          </p:cNvSpPr>
-          <p:nvPr>
-            <p:ph type="sldImg" idx="2"/>
-          </p:nvPr>
-        </p:nvSpPr>
-        <p:spPr>
-          <a:xfrm>
-            <a:off x="1143000" y="685800"/>
-            <a:ext cx="4572000" cy="3429000"/>
-          </a:xfrm>
-          <a:prstGeom prst="rect">
-            <a:avLst/>
-          </a:prstGeom>
-          <a:noFill/>
-          <a:ln w="12700">
-            <a:solidFill>
-              <a:prstClr val="black"/>
-            </a:solidFill>
-          </a:ln>
-        </p:spPr>
-        <p:txBody>
-          <a:bodyPr vert="horz" lIns="91440" tIns="45720" rIns="91440" bIns="45720" rtlCol="0" anchor="ctr"/>
-          <a:lstStyle/>
-          <a:p>
-            <a:endParaRPr lang="en-US"/>
-          </a:p>
-        </p:txBody>
-      </p:sp>
-      <p:sp>
-        <p:nvSpPr>
-          <p:cNvPr id="5" name="Notes Placeholder 4"/>
-          <p:cNvSpPr>
-            <a:spLocks noGrp="1"/>
-          </p:cNvSpPr>
-          <p:nvPr>
-            <p:ph type="body" sz="quarter" idx="3"/>
-          </p:nvPr>
-        </p:nvSpPr>
-        <p:spPr>
-          <a:xfrm>
-            <a:off x="685800" y="4343400"/>
-            <a:ext cx="5486400" cy="4114800"/>
-          </a:xfrm>
-          <a:prstGeom prst="rect">
-            <a:avLst/>
-          </a:prstGeom>
-        </p:spPr>
-        <p:txBody>
-          <a:bodyPr vert="horz" lIns="91440" tIns="45720" rIns="91440" bIns="45720" rtlCol="0"/>
-          <a:lstStyle/>
-          <a:p>
-            <a:pPr lvl="0"/>
-            <a:r>
-              <a:rPr lang="en-US" smtClean="0"/>
-              <a:t>Click to edit Master text styles</a:t>
-            </a:r>
-          </a:p>
-          <a:p>
-            <a:pPr lvl="1"/>
-            <a:r>
-              <a:rPr lang="en-US" smtClean="0"/>
-              <a:t>Second level</a:t>
-            </a:r>
-          </a:p>
-          <a:p>
-            <a:pPr lvl="2"/>
-            <a:r>
-              <a:rPr lang="en-US" smtClean="0"/>
-              <a:t>Third level</a:t>
-            </a:r>
-          </a:p>
-          <a:p>
-            <a:pPr lvl="3"/>
-            <a:r>
-              <a:rPr lang="en-US" smtClean="0"/>
-              <a:t>Fourth level</a:t>
-            </a:r>
-          </a:p>
-          <a:p>
-            <a:pPr lvl="4"/>
-            <a:r>
-              <a:rPr lang="en-US" smtClean="0"/>
-              <a:t>Fifth level</a:t>
-            </a:r>
-            <a:endParaRPr lang="en-US"/>
-          </a:p>
-        </p:txBody>
-      </p:sp>
-      <p:sp>
-        <p:nvSpPr>
-          <p:cNvPr id="6" name="Footer Placeholder 5"/>
-          <p:cNvSpPr>
-            <a:spLocks noGrp="1"/>
-          </p:cNvSpPr>
-          <p:nvPr>
-            <p:ph type="ftr" sz="quarter" idx="4"/>
-          </p:nvPr>
-        </p:nvSpPr>
-        <p:spPr>
-          <a:xfrm>
-            <a:off x="0" y="8685213"/>
-            <a:ext cx="2971800" cy="457200"/>
-          </a:xfrm>
-          <a:prstGeom prst="rect">
-            <a:avLst/>
-          </a:prstGeom>
-        </p:spPr>
-        <p:txBody>
-          <a:bodyPr vert="horz" lIns="91440" tIns="45720" rIns="91440" bIns="45720" rtlCol="0" anchor="b"/>
-          <a:lstStyle>
-            <a:lvl1pPr algn="l">
-              <a:defRPr sz="1200"/>
-            </a:lvl1pPr>
-          </a:lstStyle>
-          <a:p>
-            <a:endParaRPr lang="en-US"/>
-          </a:p>
-        </p:txBody>
-      </p:sp>
-      <p:sp>
-        <p:nvSpPr>
-          <p:cNvPr id="7" name="Slide Number Placeholder 6"/>
-          <p:cNvSpPr>
-            <a:spLocks noGrp="1"/>
-          </p:cNvSpPr>
-          <p:nvPr>
-            <p:ph type="sldNum" sz="quarter" idx="5"/>
-          </p:nvPr>
-        </p:nvSpPr>
-        <p:spPr>
-          <a:xfrm>
-            <a:off x="3884613" y="8685213"/>
-            <a:ext cx="2971800" cy="457200"/>
-          </a:xfrm>
-          <a:prstGeom prst="rect">
-            <a:avLst/>
-          </a:prstGeom>
-        </p:spPr>
-        <p:txBody>
-          <a:bodyPr vert="horz" lIns="91440" tIns="45720" rIns="91440" bIns="45720" rtlCol="0" anchor="b"/>
-          <a:lstStyle>
-            <a:lvl1pPr algn="r">
-              <a:defRPr sz="1200"/>
-            </a:lvl1pPr>
-          </a:lstStyle>
-          <a:p>
-            <a:fld id="{BB5E49A5-4136-284D-997B-48E1D791AD67}" type="slidenum">
-              <a:rPr lang="en-US" smtClean="0"/>
-              <a:t>‹#›</a:t>
-            </a:fld>
-            <a:endParaRPr lang="en-US"/>
-          </a:p>
-        </p:txBody>
-      </p:sp>
     </p:spTree>
     <p:extLst>
       <p:ext uri="{BB962C8B-B14F-4D97-AF65-F5344CB8AC3E}">
-        <p14:creationId xmlns:p14="http://schemas.microsoft.com/office/powerpoint/2010/main" val="2623252185"/>
+        <p14:creationId xmlns:p14="http://schemas.microsoft.com/office/powerpoint/2010/main" val="2424729202"/>
       </p:ext>
     </p:extLst>
   </p:cSld>
   <p:clrMap bg1="lt1" tx1="dk1" bg2="lt2" tx2="dk2" accent1="accent1" accent2="accent2" accent3="accent3" accent4="accent4" accent5="accent5" accent6="accent6" hlink="hlink" folHlink="folHlink"/>
   <p:notesStyle>
-    <a:lvl1pPr marL="0" algn="l" defTabSz="457200" rtl="0" eaLnBrk="1" latinLnBrk="0" hangingPunct="1">
+    <a:lvl1pPr marL="0" algn="l" defTabSz="914400" rtl="0" eaLnBrk="1" latinLnBrk="0" hangingPunct="1">
       <a:defRPr sz="1200" kern="1200">
         <a:solidFill>
           <a:schemeClr val="tx1"/>
@@ -392,7 +186,7 @@
         <a:cs typeface="+mn-cs"/>
       </a:defRPr>
     </a:lvl1pPr>
-    <a:lvl2pPr marL="457200" algn="l" defTabSz="457200" rtl="0" eaLnBrk="1" latinLnBrk="0" hangingPunct="1">
+    <a:lvl2pPr marL="457200" algn="l" defTabSz="914400" rtl="0" eaLnBrk="1" latinLnBrk="0" hangingPunct="1">
       <a:defRPr sz="1200" kern="1200">
         <a:solidFill>
           <a:schemeClr val="tx1"/>
@@ -402,7 +196,7 @@
         <a:cs typeface="+mn-cs"/>
       </a:defRPr>
     </a:lvl2pPr>
-    <a:lvl3pPr marL="914400" algn="l" defTabSz="457200" rtl="0" eaLnBrk="1" latinLnBrk="0" hangingPunct="1">
+    <a:lvl3pPr marL="914400" algn="l" defTabSz="914400" rtl="0" eaLnBrk="1" latinLnBrk="0" hangingPunct="1">
       <a:defRPr sz="1200" kern="1200">
         <a:solidFill>
           <a:schemeClr val="tx1"/>
@@ -412,7 +206,7 @@
         <a:cs typeface="+mn-cs"/>
       </a:defRPr>
     </a:lvl3pPr>
-    <a:lvl4pPr marL="1371600" algn="l" defTabSz="457200" rtl="0" eaLnBrk="1" latinLnBrk="0" hangingPunct="1">
+    <a:lvl4pPr marL="1371600" algn="l" defTabSz="914400" rtl="0" eaLnBrk="1" latinLnBrk="0" hangingPunct="1">
       <a:defRPr sz="1200" kern="1200">
         <a:solidFill>
           <a:schemeClr val="tx1"/>
@@ -422,7 +216,7 @@
         <a:cs typeface="+mn-cs"/>
       </a:defRPr>
     </a:lvl4pPr>
-    <a:lvl5pPr marL="1828800" algn="l" defTabSz="457200" rtl="0" eaLnBrk="1" latinLnBrk="0" hangingPunct="1">
+    <a:lvl5pPr marL="1828800" algn="l" defTabSz="914400" rtl="0" eaLnBrk="1" latinLnBrk="0" hangingPunct="1">
       <a:defRPr sz="1200" kern="1200">
         <a:solidFill>
           <a:schemeClr val="tx1"/>
@@ -432,7 +226,7 @@
         <a:cs typeface="+mn-cs"/>
       </a:defRPr>
     </a:lvl5pPr>
-    <a:lvl6pPr marL="2286000" algn="l" defTabSz="457200" rtl="0" eaLnBrk="1" latinLnBrk="0" hangingPunct="1">
+    <a:lvl6pPr marL="2286000" algn="l" defTabSz="914400" rtl="0" eaLnBrk="1" latinLnBrk="0" hangingPunct="1">
       <a:defRPr sz="1200" kern="1200">
         <a:solidFill>
           <a:schemeClr val="tx1"/>
@@ -442,7 +236,7 @@
         <a:cs typeface="+mn-cs"/>
       </a:defRPr>
     </a:lvl6pPr>
-    <a:lvl7pPr marL="2743200" algn="l" defTabSz="457200" rtl="0" eaLnBrk="1" latinLnBrk="0" hangingPunct="1">
+    <a:lvl7pPr marL="2743200" algn="l" defTabSz="914400" rtl="0" eaLnBrk="1" latinLnBrk="0" hangingPunct="1">
       <a:defRPr sz="1200" kern="1200">
         <a:solidFill>
           <a:schemeClr val="tx1"/>
@@ -452,7 +246,7 @@
         <a:cs typeface="+mn-cs"/>
       </a:defRPr>
     </a:lvl7pPr>
-    <a:lvl8pPr marL="3200400" algn="l" defTabSz="457200" rtl="0" eaLnBrk="1" latinLnBrk="0" hangingPunct="1">
+    <a:lvl8pPr marL="3200400" algn="l" defTabSz="914400" rtl="0" eaLnBrk="1" latinLnBrk="0" hangingPunct="1">
       <a:defRPr sz="1200" kern="1200">
         <a:solidFill>
           <a:schemeClr val="tx1"/>
@@ -462,7 +256,7 @@
         <a:cs typeface="+mn-cs"/>
       </a:defRPr>
     </a:lvl8pPr>
-    <a:lvl9pPr marL="3657600" algn="l" defTabSz="457200" rtl="0" eaLnBrk="1" latinLnBrk="0" hangingPunct="1">
+    <a:lvl9pPr marL="3657600" algn="l" defTabSz="914400" rtl="0" eaLnBrk="1" latinLnBrk="0" hangingPunct="1">
       <a:defRPr sz="1200" kern="1200">
         <a:solidFill>
           <a:schemeClr val="tx1"/>
@@ -477,7 +271,7 @@
 </file>
 
 <file path=ppt/notesSlides/notesSlide1.xml><?xml version="1.0" encoding="utf-8"?>
-<p:notes xmlns:a="http://schemas.openxmlformats.org/drawingml/2006/main" xmlns:p="http://schemas.openxmlformats.org/presentationml/2006/main" xmlns:r="http://schemas.openxmlformats.org/officeDocument/2006/relationships">
+<p:notes xmlns:a="http://schemas.openxmlformats.org/drawingml/2006/main" xmlns:r="http://schemas.openxmlformats.org/officeDocument/2006/relationships" xmlns:p="http://schemas.openxmlformats.org/presentationml/2006/main">
   <p:cSld>
     <p:spTree>
       <p:nvGrpSpPr>
@@ -497,7 +291,7 @@
         <p:nvSpPr>
           <p:cNvPr id="2" name="Slide Image Placeholder 1"/>
           <p:cNvSpPr>
-            <a:spLocks noGrp="1"/>
+            <a:spLocks noGrp="1" noRot="1" noChangeAspect="1"/>
           </p:cNvSpPr>
           <p:nvPr>
             <p:ph type="sldImg" idx="2"/>
@@ -512,7 +306,7 @@
             <a:spLocks noGrp="1"/>
           </p:cNvSpPr>
           <p:nvPr>
-            <p:ph type="body" idx="3" sz="quarter"/>
+            <p:ph type="body" sz="quarter" idx="3"/>
           </p:nvPr>
         </p:nvSpPr>
         <p:spPr/>
@@ -520,9 +314,7 @@
           <a:bodyPr/>
           <a:lstStyle/>
           <a:p>
-            <a:r>
-              <a:t>Bonjour. En 30 minutes, je vous présente une plateforme data que j'ai conçue et opérée pour répondre à l'obligation loi Eckert, puis je réponds à vos questions.</a:t>
-            </a:r>
+            <a:endParaRPr dirty="0"/>
           </a:p>
         </p:txBody>
       </p:sp>
@@ -533,7 +325,7 @@
             <a:spLocks noGrp="1"/>
           </p:cNvSpPr>
           <p:nvPr>
-            <p:ph type="sldNum" idx="5" sz="quarter"/>
+            <p:ph type="sldNum" sz="quarter" idx="5"/>
           </p:nvPr>
         </p:nvSpPr>
         <p:spPr/>
@@ -547,7 +339,7 @@
 </file>
 
 <file path=ppt/notesSlides/notesSlide10.xml><?xml version="1.0" encoding="utf-8"?>
-<p:notes xmlns:a="http://schemas.openxmlformats.org/drawingml/2006/main" xmlns:p="http://schemas.openxmlformats.org/presentationml/2006/main" xmlns:r="http://schemas.openxmlformats.org/officeDocument/2006/relationships">
+<p:notes xmlns:a="http://schemas.openxmlformats.org/drawingml/2006/main" xmlns:r="http://schemas.openxmlformats.org/officeDocument/2006/relationships" xmlns:p="http://schemas.openxmlformats.org/presentationml/2006/main">
   <p:cSld>
     <p:spTree>
       <p:nvGrpSpPr>
@@ -567,7 +359,7 @@
         <p:nvSpPr>
           <p:cNvPr id="2" name="Slide Image Placeholder 1"/>
           <p:cNvSpPr>
-            <a:spLocks noGrp="1"/>
+            <a:spLocks noGrp="1" noRot="1" noChangeAspect="1"/>
           </p:cNvSpPr>
           <p:nvPr>
             <p:ph type="sldImg" idx="2"/>
@@ -582,7 +374,7 @@
             <a:spLocks noGrp="1"/>
           </p:cNvSpPr>
           <p:nvPr>
-            <p:ph type="body" idx="3" sz="quarter"/>
+            <p:ph type="body" sz="quarter" idx="3"/>
           </p:nvPr>
         </p:nvSpPr>
         <p:spPr/>
@@ -590,9 +382,7 @@
           <a:bodyPr/>
           <a:lstStyle/>
           <a:p>
-            <a:r>
-              <a:t>Le rapprochement tourne sur un cluster Spark et gradue la confiance en trois niveaux, faute d'identifiant national. Résultat : 4 162 contrats potentiellement en déshérence, dont 88 millions d'euros en niveau certain. Sur le seul volume mensuel, un Postgres indexé suffirait — je l'assume ; Spark se justifie par la volumétrie cumulée et la trajectoire de croissance.</a:t>
-            </a:r>
+            <a:endParaRPr dirty="0"/>
           </a:p>
         </p:txBody>
       </p:sp>
@@ -603,7 +393,7 @@
             <a:spLocks noGrp="1"/>
           </p:cNvSpPr>
           <p:nvPr>
-            <p:ph type="sldNum" idx="5" sz="quarter"/>
+            <p:ph type="sldNum" sz="quarter" idx="5"/>
           </p:nvPr>
         </p:nvSpPr>
         <p:spPr/>
@@ -617,7 +407,7 @@
 </file>
 
 <file path=ppt/notesSlides/notesSlide11.xml><?xml version="1.0" encoding="utf-8"?>
-<p:notes xmlns:a="http://schemas.openxmlformats.org/drawingml/2006/main" xmlns:p="http://schemas.openxmlformats.org/presentationml/2006/main" xmlns:r="http://schemas.openxmlformats.org/officeDocument/2006/relationships">
+<p:notes xmlns:a="http://schemas.openxmlformats.org/drawingml/2006/main" xmlns:r="http://schemas.openxmlformats.org/officeDocument/2006/relationships" xmlns:p="http://schemas.openxmlformats.org/presentationml/2006/main">
   <p:cSld>
     <p:spTree>
       <p:nvGrpSpPr>
@@ -637,7 +427,7 @@
         <p:nvSpPr>
           <p:cNvPr id="2" name="Slide Image Placeholder 1"/>
           <p:cNvSpPr>
-            <a:spLocks noGrp="1"/>
+            <a:spLocks noGrp="1" noRot="1" noChangeAspect="1"/>
           </p:cNvSpPr>
           <p:nvPr>
             <p:ph type="sldImg" idx="2"/>
@@ -652,7 +442,7 @@
             <a:spLocks noGrp="1"/>
           </p:cNvSpPr>
           <p:nvPr>
-            <p:ph type="body" idx="3" sz="quarter"/>
+            <p:ph type="body" sz="quarter" idx="3"/>
           </p:nvPr>
         </p:nvSpPr>
         <p:spPr/>
@@ -660,9 +450,7 @@
           <a:bodyPr/>
           <a:lstStyle/>
           <a:p>
-            <a:r>
-              <a:t>La CI/CD, construite de zéro, enchaîne cinq contrôles à chaque push : qualité, tests, scan de sécurité, validation des DAG, et déploiement. Le déploiement est réel : l'image est publiée sur le registre GitHub, puis re-téléchargée et testée. Détail assumé : mon premier run était rouge — la preuve que les garde-fous mordent.</a:t>
-            </a:r>
+            <a:endParaRPr dirty="0"/>
           </a:p>
         </p:txBody>
       </p:sp>
@@ -673,7 +461,7 @@
             <a:spLocks noGrp="1"/>
           </p:cNvSpPr>
           <p:nvPr>
-            <p:ph type="sldNum" idx="5" sz="quarter"/>
+            <p:ph type="sldNum" sz="quarter" idx="5"/>
           </p:nvPr>
         </p:nvSpPr>
         <p:spPr/>
@@ -687,7 +475,7 @@
 </file>
 
 <file path=ppt/notesSlides/notesSlide12.xml><?xml version="1.0" encoding="utf-8"?>
-<p:notes xmlns:a="http://schemas.openxmlformats.org/drawingml/2006/main" xmlns:p="http://schemas.openxmlformats.org/presentationml/2006/main" xmlns:r="http://schemas.openxmlformats.org/officeDocument/2006/relationships">
+<p:notes xmlns:a="http://schemas.openxmlformats.org/drawingml/2006/main" xmlns:r="http://schemas.openxmlformats.org/officeDocument/2006/relationships" xmlns:p="http://schemas.openxmlformats.org/presentationml/2006/main">
   <p:cSld>
     <p:spTree>
       <p:nvGrpSpPr>
@@ -707,7 +495,7 @@
         <p:nvSpPr>
           <p:cNvPr id="2" name="Slide Image Placeholder 1"/>
           <p:cNvSpPr>
-            <a:spLocks noGrp="1"/>
+            <a:spLocks noGrp="1" noRot="1" noChangeAspect="1"/>
           </p:cNvSpPr>
           <p:nvPr>
             <p:ph type="sldImg" idx="2"/>
@@ -722,7 +510,7 @@
             <a:spLocks noGrp="1"/>
           </p:cNvSpPr>
           <p:nvPr>
-            <p:ph type="body" idx="3" sz="quarter"/>
+            <p:ph type="body" sz="quarter" idx="3"/>
           </p:nvPr>
         </p:nvSpPr>
         <p:spPr/>
@@ -730,9 +518,7 @@
           <a:bodyPr/>
           <a:lstStyle/>
           <a:p>
-            <a:r>
-              <a:t>La supervision surveille le statut, les SLA et surtout le taux de rejet. Chaque étape est journalisée. Sur échec, une alerte part vraiment : j'ai capturé la notification reçue par le destinataire, avec le lien vers le journal. Un dépassement de délai escalade par courriel.</a:t>
-            </a:r>
+            <a:endParaRPr dirty="0"/>
           </a:p>
         </p:txBody>
       </p:sp>
@@ -743,7 +529,7 @@
             <a:spLocks noGrp="1"/>
           </p:cNvSpPr>
           <p:nvPr>
-            <p:ph type="sldNum" idx="5" sz="quarter"/>
+            <p:ph type="sldNum" sz="quarter" idx="5"/>
           </p:nvPr>
         </p:nvSpPr>
         <p:spPr/>
@@ -757,7 +543,7 @@
 </file>
 
 <file path=ppt/notesSlides/notesSlide13.xml><?xml version="1.0" encoding="utf-8"?>
-<p:notes xmlns:a="http://schemas.openxmlformats.org/drawingml/2006/main" xmlns:p="http://schemas.openxmlformats.org/presentationml/2006/main" xmlns:r="http://schemas.openxmlformats.org/officeDocument/2006/relationships">
+<p:notes xmlns:a="http://schemas.openxmlformats.org/drawingml/2006/main" xmlns:r="http://schemas.openxmlformats.org/officeDocument/2006/relationships" xmlns:p="http://schemas.openxmlformats.org/presentationml/2006/main">
   <p:cSld>
     <p:spTree>
       <p:nvGrpSpPr>
@@ -777,7 +563,7 @@
         <p:nvSpPr>
           <p:cNvPr id="2" name="Slide Image Placeholder 1"/>
           <p:cNvSpPr>
-            <a:spLocks noGrp="1"/>
+            <a:spLocks noGrp="1" noRot="1" noChangeAspect="1"/>
           </p:cNvSpPr>
           <p:nvPr>
             <p:ph type="sldImg" idx="2"/>
@@ -792,7 +578,7 @@
             <a:spLocks noGrp="1"/>
           </p:cNvSpPr>
           <p:nvPr>
-            <p:ph type="body" idx="3" sz="quarter"/>
+            <p:ph type="body" sz="quarter" idx="3"/>
           </p:nvPr>
         </p:nvSpPr>
         <p:spPr/>
@@ -800,9 +586,7 @@
           <a:bodyPr/>
           <a:lstStyle/>
           <a:p>
-            <a:r>
-              <a:t>Une feuille de route calendaire cadre la maintenance : rotation des secrets au trimestre, certificats au semestre. Et une documentation avec runbook permet à un successeur de reprendre sans moi — d'ailleurs c'est cette procédure qui a servi à monter la plateforme.</a:t>
-            </a:r>
+            <a:endParaRPr dirty="0"/>
           </a:p>
         </p:txBody>
       </p:sp>
@@ -813,7 +597,7 @@
             <a:spLocks noGrp="1"/>
           </p:cNvSpPr>
           <p:nvPr>
-            <p:ph type="sldNum" idx="5" sz="quarter"/>
+            <p:ph type="sldNum" sz="quarter" idx="5"/>
           </p:nvPr>
         </p:nvSpPr>
         <p:spPr/>
@@ -827,7 +611,7 @@
 </file>
 
 <file path=ppt/notesSlides/notesSlide14.xml><?xml version="1.0" encoding="utf-8"?>
-<p:notes xmlns:a="http://schemas.openxmlformats.org/drawingml/2006/main" xmlns:p="http://schemas.openxmlformats.org/presentationml/2006/main" xmlns:r="http://schemas.openxmlformats.org/officeDocument/2006/relationships">
+<p:notes xmlns:a="http://schemas.openxmlformats.org/drawingml/2006/main" xmlns:r="http://schemas.openxmlformats.org/officeDocument/2006/relationships" xmlns:p="http://schemas.openxmlformats.org/presentationml/2006/main">
   <p:cSld>
     <p:spTree>
       <p:nvGrpSpPr>
@@ -847,7 +631,7 @@
         <p:nvSpPr>
           <p:cNvPr id="2" name="Slide Image Placeholder 1"/>
           <p:cNvSpPr>
-            <a:spLocks noGrp="1"/>
+            <a:spLocks noGrp="1" noRot="1" noChangeAspect="1"/>
           </p:cNvSpPr>
           <p:nvPr>
             <p:ph type="sldImg" idx="2"/>
@@ -862,7 +646,7 @@
             <a:spLocks noGrp="1"/>
           </p:cNvSpPr>
           <p:nvPr>
-            <p:ph type="body" idx="3" sz="quarter"/>
+            <p:ph type="body" sz="quarter" idx="3"/>
           </p:nvPr>
         </p:nvSpPr>
         <p:spPr/>
@@ -870,9 +654,7 @@
           <a:bodyPr/>
           <a:lstStyle/>
           <a:p>
-            <a:r>
-              <a:t>La recette est automatisée : dix-neuf tests fonctionnels, structurels et de sécurité — les droits, les secrets, les dépendances. Elle est rejouée à chaque push. Ce n'est pas un instantané, c'est un filet permanent. Je peux la lancer en direct : elle passe en moins d'une seconde.</a:t>
-            </a:r>
+            <a:endParaRPr dirty="0"/>
           </a:p>
         </p:txBody>
       </p:sp>
@@ -883,7 +665,7 @@
             <a:spLocks noGrp="1"/>
           </p:cNvSpPr>
           <p:nvPr>
-            <p:ph type="sldNum" idx="5" sz="quarter"/>
+            <p:ph type="sldNum" sz="quarter" idx="5"/>
           </p:nvPr>
         </p:nvSpPr>
         <p:spPr/>
@@ -897,7 +679,7 @@
 </file>
 
 <file path=ppt/notesSlides/notesSlide15.xml><?xml version="1.0" encoding="utf-8"?>
-<p:notes xmlns:a="http://schemas.openxmlformats.org/drawingml/2006/main" xmlns:p="http://schemas.openxmlformats.org/presentationml/2006/main" xmlns:r="http://schemas.openxmlformats.org/officeDocument/2006/relationships">
+<p:notes xmlns:a="http://schemas.openxmlformats.org/drawingml/2006/main" xmlns:r="http://schemas.openxmlformats.org/officeDocument/2006/relationships" xmlns:p="http://schemas.openxmlformats.org/presentationml/2006/main">
   <p:cSld>
     <p:spTree>
       <p:nvGrpSpPr>
@@ -917,7 +699,7 @@
         <p:nvSpPr>
           <p:cNvPr id="2" name="Slide Image Placeholder 1"/>
           <p:cNvSpPr>
-            <a:spLocks noGrp="1"/>
+            <a:spLocks noGrp="1" noRot="1" noChangeAspect="1"/>
           </p:cNvSpPr>
           <p:nvPr>
             <p:ph type="sldImg" idx="2"/>
@@ -932,7 +714,7 @@
             <a:spLocks noGrp="1"/>
           </p:cNvSpPr>
           <p:nvPr>
-            <p:ph type="body" idx="3" sz="quarter"/>
+            <p:ph type="body" sz="quarter" idx="3"/>
           </p:nvPr>
         </p:nvSpPr>
         <p:spPr/>
@@ -941,8 +723,10 @@
           <a:lstStyle/>
           <a:p>
             <a:r>
-              <a:t>Voici l'incident, vécu en production. Le contrôle d'entrée validait le fichier sur ses métadonnées déclarées : taille et empreinte annoncées. Après deux mois nominaux, le producteur a cessé de les publier. Résultat : rejet systématique, traitement en erreur chaque jour — alors que les fichiers étaient parfaitement exploitables. La cause n'est pas triviale : le contrat de données change sans préavis, côté producteur.</a:t>
-            </a:r>
+              <a:rPr lang="fr-FR" dirty="0"/>
+              <a:t>=</a:t>
+            </a:r>
+            <a:endParaRPr dirty="0"/>
           </a:p>
         </p:txBody>
       </p:sp>
@@ -953,7 +737,7 @@
             <a:spLocks noGrp="1"/>
           </p:cNvSpPr>
           <p:nvPr>
-            <p:ph type="sldNum" idx="5" sz="quarter"/>
+            <p:ph type="sldNum" sz="quarter" idx="5"/>
           </p:nvPr>
         </p:nvSpPr>
         <p:spPr/>
@@ -967,7 +751,7 @@
 </file>
 
 <file path=ppt/notesSlides/notesSlide16.xml><?xml version="1.0" encoding="utf-8"?>
-<p:notes xmlns:a="http://schemas.openxmlformats.org/drawingml/2006/main" xmlns:p="http://schemas.openxmlformats.org/presentationml/2006/main" xmlns:r="http://schemas.openxmlformats.org/officeDocument/2006/relationships">
+<p:notes xmlns:a="http://schemas.openxmlformats.org/drawingml/2006/main" xmlns:r="http://schemas.openxmlformats.org/officeDocument/2006/relationships" xmlns:p="http://schemas.openxmlformats.org/presentationml/2006/main">
   <p:cSld>
     <p:spTree>
       <p:nvGrpSpPr>
@@ -987,7 +771,7 @@
         <p:nvSpPr>
           <p:cNvPr id="2" name="Slide Image Placeholder 1"/>
           <p:cNvSpPr>
-            <a:spLocks noGrp="1"/>
+            <a:spLocks noGrp="1" noRot="1" noChangeAspect="1"/>
           </p:cNvSpPr>
           <p:nvPr>
             <p:ph type="sldImg" idx="2"/>
@@ -1002,7 +786,7 @@
             <a:spLocks noGrp="1"/>
           </p:cNvSpPr>
           <p:nvPr>
-            <p:ph type="body" idx="3" sz="quarter"/>
+            <p:ph type="body" sz="quarter" idx="3"/>
           </p:nvPr>
         </p:nvSpPr>
         <p:spPr/>
@@ -1010,9 +794,7 @@
           <a:bodyPr/>
           <a:lstStyle/>
           <a:p>
-            <a:r>
-              <a:t>Le correctif inverse la logique : les métadonnées ne font qu'alerter, la vérité c'est le contenu — structure, volumétrie, taux de rejet. Un fichier sain sans métadonnées passe désormais ; un fichier corrompu reste bloqué. Un test de non-régression verrouille le cas. Je peux rejouer l'avant/après en direct, en moins d'une seconde. La leçon : une source externe n'est jamais un contrat.</a:t>
-            </a:r>
+            <a:endParaRPr dirty="0"/>
           </a:p>
         </p:txBody>
       </p:sp>
@@ -1023,7 +805,7 @@
             <a:spLocks noGrp="1"/>
           </p:cNvSpPr>
           <p:nvPr>
-            <p:ph type="sldNum" idx="5" sz="quarter"/>
+            <p:ph type="sldNum" sz="quarter" idx="5"/>
           </p:nvPr>
         </p:nvSpPr>
         <p:spPr/>
@@ -1037,7 +819,7 @@
 </file>
 
 <file path=ppt/notesSlides/notesSlide17.xml><?xml version="1.0" encoding="utf-8"?>
-<p:notes xmlns:a="http://schemas.openxmlformats.org/drawingml/2006/main" xmlns:p="http://schemas.openxmlformats.org/presentationml/2006/main" xmlns:r="http://schemas.openxmlformats.org/officeDocument/2006/relationships">
+<p:notes xmlns:a="http://schemas.openxmlformats.org/drawingml/2006/main" xmlns:r="http://schemas.openxmlformats.org/officeDocument/2006/relationships" xmlns:p="http://schemas.openxmlformats.org/presentationml/2006/main">
   <p:cSld>
     <p:spTree>
       <p:nvGrpSpPr>
@@ -1057,7 +839,7 @@
         <p:nvSpPr>
           <p:cNvPr id="2" name="Slide Image Placeholder 1"/>
           <p:cNvSpPr>
-            <a:spLocks noGrp="1"/>
+            <a:spLocks noGrp="1" noRot="1" noChangeAspect="1"/>
           </p:cNvSpPr>
           <p:nvPr>
             <p:ph type="sldImg" idx="2"/>
@@ -1072,7 +854,7 @@
             <a:spLocks noGrp="1"/>
           </p:cNvSpPr>
           <p:nvPr>
-            <p:ph type="body" idx="3" sz="quarter"/>
+            <p:ph type="body" sz="quarter" idx="3"/>
           </p:nvPr>
         </p:nvSpPr>
         <p:spPr/>
@@ -1080,9 +862,7 @@
           <a:bodyPr/>
           <a:lstStyle/>
           <a:p>
-            <a:r>
-              <a:t>En bilan : la chaîne complète tourne et est prouvée, la sécurité est testée, la CI est verte, l'incident est rejoué. J'assume mes limites : une seule instance Postgres, le job Spark lancé manuellement, pas de supervision d'infrastructure. Si je continuais, j'outillerais le déclenchement Spark par Airflow et une supervision infra. Merci — je suis prêt pour vos questions.</a:t>
-            </a:r>
+            <a:endParaRPr dirty="0"/>
           </a:p>
         </p:txBody>
       </p:sp>
@@ -1093,7 +873,7 @@
             <a:spLocks noGrp="1"/>
           </p:cNvSpPr>
           <p:nvPr>
-            <p:ph type="sldNum" idx="5" sz="quarter"/>
+            <p:ph type="sldNum" sz="quarter" idx="5"/>
           </p:nvPr>
         </p:nvSpPr>
         <p:spPr/>
@@ -1107,7 +887,7 @@
 </file>
 
 <file path=ppt/notesSlides/notesSlide18.xml><?xml version="1.0" encoding="utf-8"?>
-<p:notes xmlns:a="http://schemas.openxmlformats.org/drawingml/2006/main" xmlns:p="http://schemas.openxmlformats.org/presentationml/2006/main" xmlns:r="http://schemas.openxmlformats.org/officeDocument/2006/relationships">
+<p:notes xmlns:a="http://schemas.openxmlformats.org/drawingml/2006/main" xmlns:r="http://schemas.openxmlformats.org/officeDocument/2006/relationships" xmlns:p="http://schemas.openxmlformats.org/presentationml/2006/main">
   <p:cSld>
     <p:spTree>
       <p:nvGrpSpPr>
@@ -1127,7 +907,7 @@
         <p:nvSpPr>
           <p:cNvPr id="2" name="Slide Image Placeholder 1"/>
           <p:cNvSpPr>
-            <a:spLocks noGrp="1"/>
+            <a:spLocks noGrp="1" noRot="1" noChangeAspect="1"/>
           </p:cNvSpPr>
           <p:nvPr>
             <p:ph type="sldImg" idx="2"/>
@@ -1142,7 +922,7 @@
             <a:spLocks noGrp="1"/>
           </p:cNvSpPr>
           <p:nvPr>
-            <p:ph type="body" idx="3" sz="quarter"/>
+            <p:ph type="body" sz="quarter" idx="3"/>
           </p:nvPr>
         </p:nvSpPr>
         <p:spPr/>
@@ -1150,9 +930,7 @@
           <a:bodyPr/>
           <a:lstStyle/>
           <a:p>
-            <a:r>
-              <a:t>Annexe ouverte si le jury creuse l'entrepôt.</a:t>
-            </a:r>
+            <a:endParaRPr dirty="0"/>
           </a:p>
         </p:txBody>
       </p:sp>
@@ -1163,7 +941,7 @@
             <a:spLocks noGrp="1"/>
           </p:cNvSpPr>
           <p:nvPr>
-            <p:ph type="sldNum" idx="5" sz="quarter"/>
+            <p:ph type="sldNum" sz="quarter" idx="5"/>
           </p:nvPr>
         </p:nvSpPr>
         <p:spPr/>
@@ -1177,7 +955,7 @@
 </file>
 
 <file path=ppt/notesSlides/notesSlide19.xml><?xml version="1.0" encoding="utf-8"?>
-<p:notes xmlns:a="http://schemas.openxmlformats.org/drawingml/2006/main" xmlns:p="http://schemas.openxmlformats.org/presentationml/2006/main" xmlns:r="http://schemas.openxmlformats.org/officeDocument/2006/relationships">
+<p:notes xmlns:a="http://schemas.openxmlformats.org/drawingml/2006/main" xmlns:r="http://schemas.openxmlformats.org/officeDocument/2006/relationships" xmlns:p="http://schemas.openxmlformats.org/presentationml/2006/main">
   <p:cSld>
     <p:spTree>
       <p:nvGrpSpPr>
@@ -1197,7 +975,7 @@
         <p:nvSpPr>
           <p:cNvPr id="2" name="Slide Image Placeholder 1"/>
           <p:cNvSpPr>
-            <a:spLocks noGrp="1"/>
+            <a:spLocks noGrp="1" noRot="1" noChangeAspect="1"/>
           </p:cNvSpPr>
           <p:nvPr>
             <p:ph type="sldImg" idx="2"/>
@@ -1212,7 +990,7 @@
             <a:spLocks noGrp="1"/>
           </p:cNvSpPr>
           <p:nvPr>
-            <p:ph type="body" idx="3" sz="quarter"/>
+            <p:ph type="body" sz="quarter" idx="3"/>
           </p:nvPr>
         </p:nvSpPr>
         <p:spPr/>
@@ -1220,9 +998,7 @@
           <a:bodyPr/>
           <a:lstStyle/>
           <a:p>
-            <a:r>
-              <a:t>Annexe ouverte sur une question de coût ou de lock-in.</a:t>
-            </a:r>
+            <a:endParaRPr dirty="0"/>
           </a:p>
         </p:txBody>
       </p:sp>
@@ -1233,7 +1009,7 @@
             <a:spLocks noGrp="1"/>
           </p:cNvSpPr>
           <p:nvPr>
-            <p:ph type="sldNum" idx="5" sz="quarter"/>
+            <p:ph type="sldNum" sz="quarter" idx="5"/>
           </p:nvPr>
         </p:nvSpPr>
         <p:spPr/>
@@ -1247,7 +1023,7 @@
 </file>
 
 <file path=ppt/notesSlides/notesSlide2.xml><?xml version="1.0" encoding="utf-8"?>
-<p:notes xmlns:a="http://schemas.openxmlformats.org/drawingml/2006/main" xmlns:p="http://schemas.openxmlformats.org/presentationml/2006/main" xmlns:r="http://schemas.openxmlformats.org/officeDocument/2006/relationships">
+<p:notes xmlns:a="http://schemas.openxmlformats.org/drawingml/2006/main" xmlns:r="http://schemas.openxmlformats.org/officeDocument/2006/relationships" xmlns:p="http://schemas.openxmlformats.org/presentationml/2006/main">
   <p:cSld>
     <p:spTree>
       <p:nvGrpSpPr>
@@ -1267,7 +1043,7 @@
         <p:nvSpPr>
           <p:cNvPr id="2" name="Slide Image Placeholder 1"/>
           <p:cNvSpPr>
-            <a:spLocks noGrp="1"/>
+            <a:spLocks noGrp="1" noRot="1" noChangeAspect="1"/>
           </p:cNvSpPr>
           <p:nvPr>
             <p:ph type="sldImg" idx="2"/>
@@ -1282,7 +1058,7 @@
             <a:spLocks noGrp="1"/>
           </p:cNvSpPr>
           <p:nvPr>
-            <p:ph type="body" idx="3" sz="quarter"/>
+            <p:ph type="body" sz="quarter" idx="3"/>
           </p:nvPr>
         </p:nvSpPr>
         <p:spPr/>
@@ -1290,9 +1066,7 @@
           <a:bodyPr/>
           <a:lstStyle/>
           <a:p>
-            <a:r>
-              <a:t>Une mutuelle doit repérer ses adhérents décédés pour verser les capitaux des contrats en déshérence. C'est une obligation légale — la loi Eckert — sous risque de sanction. La source de vérité, c'est le fichier des décès de l'INSEE.</a:t>
-            </a:r>
+            <a:endParaRPr dirty="0"/>
           </a:p>
         </p:txBody>
       </p:sp>
@@ -1303,7 +1077,7 @@
             <a:spLocks noGrp="1"/>
           </p:cNvSpPr>
           <p:nvPr>
-            <p:ph type="sldNum" idx="5" sz="quarter"/>
+            <p:ph type="sldNum" sz="quarter" idx="5"/>
           </p:nvPr>
         </p:nvSpPr>
         <p:spPr/>
@@ -1317,7 +1091,7 @@
 </file>
 
 <file path=ppt/notesSlides/notesSlide20.xml><?xml version="1.0" encoding="utf-8"?>
-<p:notes xmlns:a="http://schemas.openxmlformats.org/drawingml/2006/main" xmlns:p="http://schemas.openxmlformats.org/presentationml/2006/main" xmlns:r="http://schemas.openxmlformats.org/officeDocument/2006/relationships">
+<p:notes xmlns:a="http://schemas.openxmlformats.org/drawingml/2006/main" xmlns:r="http://schemas.openxmlformats.org/officeDocument/2006/relationships" xmlns:p="http://schemas.openxmlformats.org/presentationml/2006/main">
   <p:cSld>
     <p:spTree>
       <p:nvGrpSpPr>
@@ -1337,7 +1111,7 @@
         <p:nvSpPr>
           <p:cNvPr id="2" name="Slide Image Placeholder 1"/>
           <p:cNvSpPr>
-            <a:spLocks noGrp="1"/>
+            <a:spLocks noGrp="1" noRot="1" noChangeAspect="1"/>
           </p:cNvSpPr>
           <p:nvPr>
             <p:ph type="sldImg" idx="2"/>
@@ -1352,7 +1126,7 @@
             <a:spLocks noGrp="1"/>
           </p:cNvSpPr>
           <p:nvPr>
-            <p:ph type="body" idx="3" sz="quarter"/>
+            <p:ph type="body" sz="quarter" idx="3"/>
           </p:nvPr>
         </p:nvSpPr>
         <p:spPr/>
@@ -1360,9 +1134,7 @@
           <a:bodyPr/>
           <a:lstStyle/>
           <a:p>
-            <a:r>
-              <a:t>Annexe ouverte sur une question CI/CD ou déploiement.</a:t>
-            </a:r>
+            <a:endParaRPr dirty="0"/>
           </a:p>
         </p:txBody>
       </p:sp>
@@ -1373,7 +1145,7 @@
             <a:spLocks noGrp="1"/>
           </p:cNvSpPr>
           <p:nvPr>
-            <p:ph type="sldNum" idx="5" sz="quarter"/>
+            <p:ph type="sldNum" sz="quarter" idx="5"/>
           </p:nvPr>
         </p:nvSpPr>
         <p:spPr/>
@@ -1387,7 +1159,7 @@
 </file>
 
 <file path=ppt/notesSlides/notesSlide3.xml><?xml version="1.0" encoding="utf-8"?>
-<p:notes xmlns:a="http://schemas.openxmlformats.org/drawingml/2006/main" xmlns:p="http://schemas.openxmlformats.org/presentationml/2006/main" xmlns:r="http://schemas.openxmlformats.org/officeDocument/2006/relationships">
+<p:notes xmlns:a="http://schemas.openxmlformats.org/drawingml/2006/main" xmlns:r="http://schemas.openxmlformats.org/officeDocument/2006/relationships" xmlns:p="http://schemas.openxmlformats.org/presentationml/2006/main">
   <p:cSld>
     <p:spTree>
       <p:nvGrpSpPr>
@@ -1407,7 +1179,7 @@
         <p:nvSpPr>
           <p:cNvPr id="2" name="Slide Image Placeholder 1"/>
           <p:cNvSpPr>
-            <a:spLocks noGrp="1"/>
+            <a:spLocks noGrp="1" noRot="1" noChangeAspect="1"/>
           </p:cNvSpPr>
           <p:nvPr>
             <p:ph type="sldImg" idx="2"/>
@@ -1422,7 +1194,7 @@
             <a:spLocks noGrp="1"/>
           </p:cNvSpPr>
           <p:nvPr>
-            <p:ph type="body" idx="3" sz="quarter"/>
+            <p:ph type="body" sz="quarter" idx="3"/>
           </p:nvPr>
         </p:nvSpPr>
         <p:spPr/>
@@ -1430,9 +1202,7 @@
           <a:bodyPr/>
           <a:lstStyle/>
           <a:p>
-            <a:r>
-              <a:t>Point d'honnêteté important : j'ai reconstruit entièrement cette plateforme, sur un contexte réel. Ce n'est pas le SI de l'entreprise. Le fichier décès est la vraie donnée publique, mais le référentiel adhérents est synthétique, généré avec Faker : aucune donnée personnelle réelle. J'ai vécu l'ingestion Eckert en production, et l'incident que je rejouerai à la fin.</a:t>
-            </a:r>
+            <a:endParaRPr dirty="0"/>
           </a:p>
         </p:txBody>
       </p:sp>
@@ -1443,7 +1213,7 @@
             <a:spLocks noGrp="1"/>
           </p:cNvSpPr>
           <p:nvPr>
-            <p:ph type="sldNum" idx="5" sz="quarter"/>
+            <p:ph type="sldNum" sz="quarter" idx="5"/>
           </p:nvPr>
         </p:nvSpPr>
         <p:spPr/>
@@ -1457,7 +1227,7 @@
 </file>
 
 <file path=ppt/notesSlides/notesSlide4.xml><?xml version="1.0" encoding="utf-8"?>
-<p:notes xmlns:a="http://schemas.openxmlformats.org/drawingml/2006/main" xmlns:p="http://schemas.openxmlformats.org/presentationml/2006/main" xmlns:r="http://schemas.openxmlformats.org/officeDocument/2006/relationships">
+<p:notes xmlns:a="http://schemas.openxmlformats.org/drawingml/2006/main" xmlns:r="http://schemas.openxmlformats.org/officeDocument/2006/relationships" xmlns:p="http://schemas.openxmlformats.org/presentationml/2006/main">
   <p:cSld>
     <p:spTree>
       <p:nvGrpSpPr>
@@ -1477,7 +1247,7 @@
         <p:nvSpPr>
           <p:cNvPr id="2" name="Slide Image Placeholder 1"/>
           <p:cNvSpPr>
-            <a:spLocks noGrp="1"/>
+            <a:spLocks noGrp="1" noRot="1" noChangeAspect="1"/>
           </p:cNvSpPr>
           <p:nvPr>
             <p:ph type="sldImg" idx="2"/>
@@ -1492,7 +1262,7 @@
             <a:spLocks noGrp="1"/>
           </p:cNvSpPr>
           <p:nvPr>
-            <p:ph type="body" idx="3" sz="quarter"/>
+            <p:ph type="body" sz="quarter" idx="3"/>
           </p:nvPr>
         </p:nvSpPr>
         <p:spPr/>
@@ -1500,9 +1270,7 @@
           <a:bodyPr/>
           <a:lstStyle/>
           <a:p>
-            <a:r>
-              <a:t>Trois contraintes cadrent tout : coût nul, donc tout en local ; délai court, donc chaque brique démontrable en cinq minutes ; et une forte volumétrie. L'existant couvrait SQL Server et un Airflow. Mais quatre compétences n'avaient aucun matériau : le distribué, la CI/CD, l'alerting et les tests de sécurité. Ce sont mes priorités.</a:t>
-            </a:r>
+            <a:endParaRPr dirty="0"/>
           </a:p>
         </p:txBody>
       </p:sp>
@@ -1513,7 +1281,7 @@
             <a:spLocks noGrp="1"/>
           </p:cNvSpPr>
           <p:nvPr>
-            <p:ph type="sldNum" idx="5" sz="quarter"/>
+            <p:ph type="sldNum" sz="quarter" idx="5"/>
           </p:nvPr>
         </p:nvSpPr>
         <p:spPr/>
@@ -1527,7 +1295,7 @@
 </file>
 
 <file path=ppt/notesSlides/notesSlide5.xml><?xml version="1.0" encoding="utf-8"?>
-<p:notes xmlns:a="http://schemas.openxmlformats.org/drawingml/2006/main" xmlns:p="http://schemas.openxmlformats.org/presentationml/2006/main" xmlns:r="http://schemas.openxmlformats.org/officeDocument/2006/relationships">
+<p:notes xmlns:a="http://schemas.openxmlformats.org/drawingml/2006/main" xmlns:r="http://schemas.openxmlformats.org/officeDocument/2006/relationships" xmlns:p="http://schemas.openxmlformats.org/presentationml/2006/main">
   <p:cSld>
     <p:spTree>
       <p:nvGrpSpPr>
@@ -1547,7 +1315,7 @@
         <p:nvSpPr>
           <p:cNvPr id="2" name="Slide Image Placeholder 1"/>
           <p:cNvSpPr>
-            <a:spLocks noGrp="1"/>
+            <a:spLocks noGrp="1" noRot="1" noChangeAspect="1"/>
           </p:cNvSpPr>
           <p:nvPr>
             <p:ph type="sldImg" idx="2"/>
@@ -1562,7 +1330,7 @@
             <a:spLocks noGrp="1"/>
           </p:cNvSpPr>
           <p:nvPr>
-            <p:ph type="body" idx="3" sz="quarter"/>
+            <p:ph type="body" sz="quarter" idx="3"/>
           </p:nvPr>
         </p:nvSpPr>
         <p:spPr/>
@@ -1570,9 +1338,7 @@
           <a:bodyPr/>
           <a:lstStyle/>
           <a:p>
-            <a:r>
-              <a:t>J'ai retenu cinq briques open source. Toutes exposent des interfaces standard — S3, SQL, PySpark — ce qui traite le vendor lock-in par conception : je peux basculer vers le cloud sans réécriture majeure.</a:t>
-            </a:r>
+            <a:endParaRPr dirty="0"/>
           </a:p>
         </p:txBody>
       </p:sp>
@@ -1583,7 +1349,7 @@
             <a:spLocks noGrp="1"/>
           </p:cNvSpPr>
           <p:nvPr>
-            <p:ph type="sldNum" idx="5" sz="quarter"/>
+            <p:ph type="sldNum" sz="quarter" idx="5"/>
           </p:nvPr>
         </p:nvSpPr>
         <p:spPr/>
@@ -1597,7 +1363,7 @@
 </file>
 
 <file path=ppt/notesSlides/notesSlide6.xml><?xml version="1.0" encoding="utf-8"?>
-<p:notes xmlns:a="http://schemas.openxmlformats.org/drawingml/2006/main" xmlns:p="http://schemas.openxmlformats.org/presentationml/2006/main" xmlns:r="http://schemas.openxmlformats.org/officeDocument/2006/relationships">
+<p:notes xmlns:a="http://schemas.openxmlformats.org/drawingml/2006/main" xmlns:r="http://schemas.openxmlformats.org/officeDocument/2006/relationships" xmlns:p="http://schemas.openxmlformats.org/presentationml/2006/main">
   <p:cSld>
     <p:spTree>
       <p:nvGrpSpPr>
@@ -1617,7 +1383,7 @@
         <p:nvSpPr>
           <p:cNvPr id="2" name="Slide Image Placeholder 1"/>
           <p:cNvSpPr>
-            <a:spLocks noGrp="1"/>
+            <a:spLocks noGrp="1" noRot="1" noChangeAspect="1"/>
           </p:cNvSpPr>
           <p:nvPr>
             <p:ph type="sldImg" idx="2"/>
@@ -1632,7 +1398,7 @@
             <a:spLocks noGrp="1"/>
           </p:cNvSpPr>
           <p:nvPr>
-            <p:ph type="body" idx="3" sz="quarter"/>
+            <p:ph type="body" sz="quarter" idx="3"/>
           </p:nvPr>
         </p:nvSpPr>
         <p:spPr/>
@@ -1640,9 +1406,7 @@
           <a:bodyPr/>
           <a:lstStyle/>
           <a:p>
-            <a:r>
-              <a:t>Sur le coût, j'ai chiffré trois scénarios avec des hypothèses assumées. Le local coûte surtout du temps humain ; Azure, 50 à 145 € par mois ; le SaaS, 80 à 250. Dans le contexte réel, le SaaS a été écarté pour son coût récurrent et la souveraineté des données de santé. Le jury attend une méthode de chiffrage, pas un devis exact.</a:t>
-            </a:r>
+            <a:endParaRPr dirty="0"/>
           </a:p>
         </p:txBody>
       </p:sp>
@@ -1653,7 +1417,7 @@
             <a:spLocks noGrp="1"/>
           </p:cNvSpPr>
           <p:nvPr>
-            <p:ph type="sldNum" idx="5" sz="quarter"/>
+            <p:ph type="sldNum" sz="quarter" idx="5"/>
           </p:nvPr>
         </p:nvSpPr>
         <p:spPr/>
@@ -1667,7 +1431,7 @@
 </file>
 
 <file path=ppt/notesSlides/notesSlide7.xml><?xml version="1.0" encoding="utf-8"?>
-<p:notes xmlns:a="http://schemas.openxmlformats.org/drawingml/2006/main" xmlns:p="http://schemas.openxmlformats.org/presentationml/2006/main" xmlns:r="http://schemas.openxmlformats.org/officeDocument/2006/relationships">
+<p:notes xmlns:a="http://schemas.openxmlformats.org/drawingml/2006/main" xmlns:r="http://schemas.openxmlformats.org/officeDocument/2006/relationships" xmlns:p="http://schemas.openxmlformats.org/presentationml/2006/main">
   <p:cSld>
     <p:spTree>
       <p:nvGrpSpPr>
@@ -1687,7 +1451,7 @@
         <p:nvSpPr>
           <p:cNvPr id="2" name="Slide Image Placeholder 1"/>
           <p:cNvSpPr>
-            <a:spLocks noGrp="1"/>
+            <a:spLocks noGrp="1" noRot="1" noChangeAspect="1"/>
           </p:cNvSpPr>
           <p:nvPr>
             <p:ph type="sldImg" idx="2"/>
@@ -1702,7 +1466,7 @@
             <a:spLocks noGrp="1"/>
           </p:cNvSpPr>
           <p:nvPr>
-            <p:ph type="body" idx="3" sz="quarter"/>
+            <p:ph type="body" sz="quarter" idx="3"/>
           </p:nvPr>
         </p:nvSpPr>
         <p:spPr/>
@@ -1710,9 +1474,7 @@
           <a:bodyPr/>
           <a:lstStyle/>
           <a:p>
-            <a:r>
-              <a:t>L'entrepôt est en quatre couches : le brut, le nettoyé, le métier, le journal. Deux rôles appliquent le moindre privilège. Et je le prouve par des tests : le rôle lecture ne peut ni écrire, ni lire le brut. Le métier consomme une vue déjà priorisée par niveau de confiance.</a:t>
-            </a:r>
+            <a:endParaRPr dirty="0"/>
           </a:p>
         </p:txBody>
       </p:sp>
@@ -1723,7 +1485,7 @@
             <a:spLocks noGrp="1"/>
           </p:cNvSpPr>
           <p:nvPr>
-            <p:ph type="sldNum" idx="5" sz="quarter"/>
+            <p:ph type="sldNum" sz="quarter" idx="5"/>
           </p:nvPr>
         </p:nvSpPr>
         <p:spPr/>
@@ -1737,7 +1499,7 @@
 </file>
 
 <file path=ppt/notesSlides/notesSlide8.xml><?xml version="1.0" encoding="utf-8"?>
-<p:notes xmlns:a="http://schemas.openxmlformats.org/drawingml/2006/main" xmlns:p="http://schemas.openxmlformats.org/presentationml/2006/main" xmlns:r="http://schemas.openxmlformats.org/officeDocument/2006/relationships">
+<p:notes xmlns:a="http://schemas.openxmlformats.org/drawingml/2006/main" xmlns:r="http://schemas.openxmlformats.org/officeDocument/2006/relationships" xmlns:p="http://schemas.openxmlformats.org/presentationml/2006/main">
   <p:cSld>
     <p:spTree>
       <p:nvGrpSpPr>
@@ -1757,7 +1519,7 @@
         <p:nvSpPr>
           <p:cNvPr id="2" name="Slide Image Placeholder 1"/>
           <p:cNvSpPr>
-            <a:spLocks noGrp="1"/>
+            <a:spLocks noGrp="1" noRot="1" noChangeAspect="1"/>
           </p:cNvSpPr>
           <p:nvPr>
             <p:ph type="sldImg" idx="2"/>
@@ -1772,7 +1534,7 @@
             <a:spLocks noGrp="1"/>
           </p:cNvSpPr>
           <p:nvPr>
-            <p:ph type="body" idx="3" sz="quarter"/>
+            <p:ph type="body" sz="quarter" idx="3"/>
           </p:nvPr>
         </p:nvSpPr>
         <p:spPr/>
@@ -1780,9 +1542,7 @@
           <a:bodyPr/>
           <a:lstStyle/>
           <a:p>
-            <a:r>
-              <a:t>La compétence pipelines exige trois méthodes. Le fil de l'eau, en SQL, nettoie et dédoublonne au plus près de la donnée. L'orchestration Airflow enchaîne et fiabilise. Et le distribué, avec Spark, absorbe le volume du rapprochement. Les trois tournent.</a:t>
-            </a:r>
+            <a:endParaRPr dirty="0"/>
           </a:p>
         </p:txBody>
       </p:sp>
@@ -1793,7 +1553,7 @@
             <a:spLocks noGrp="1"/>
           </p:cNvSpPr>
           <p:nvPr>
-            <p:ph type="sldNum" idx="5" sz="quarter"/>
+            <p:ph type="sldNum" sz="quarter" idx="5"/>
           </p:nvPr>
         </p:nvSpPr>
         <p:spPr/>
@@ -1807,7 +1567,7 @@
 </file>
 
 <file path=ppt/notesSlides/notesSlide9.xml><?xml version="1.0" encoding="utf-8"?>
-<p:notes xmlns:a="http://schemas.openxmlformats.org/drawingml/2006/main" xmlns:p="http://schemas.openxmlformats.org/presentationml/2006/main" xmlns:r="http://schemas.openxmlformats.org/officeDocument/2006/relationships">
+<p:notes xmlns:a="http://schemas.openxmlformats.org/drawingml/2006/main" xmlns:r="http://schemas.openxmlformats.org/officeDocument/2006/relationships" xmlns:p="http://schemas.openxmlformats.org/presentationml/2006/main">
   <p:cSld>
     <p:spTree>
       <p:nvGrpSpPr>
@@ -1827,7 +1587,7 @@
         <p:nvSpPr>
           <p:cNvPr id="2" name="Slide Image Placeholder 1"/>
           <p:cNvSpPr>
-            <a:spLocks noGrp="1"/>
+            <a:spLocks noGrp="1" noRot="1" noChangeAspect="1"/>
           </p:cNvSpPr>
           <p:nvPr>
             <p:ph type="sldImg" idx="2"/>
@@ -1842,7 +1602,7 @@
             <a:spLocks noGrp="1"/>
           </p:cNvSpPr>
           <p:nvPr>
-            <p:ph type="body" idx="3" sz="quarter"/>
+            <p:ph type="body" sz="quarter" idx="3"/>
           </p:nvPr>
         </p:nvSpPr>
         <p:spPr/>
@@ -1850,9 +1610,7 @@
           <a:bodyPr/>
           <a:lstStyle/>
           <a:p>
-            <a:r>
-              <a:t>Voici le DAG réel : quatre tâches, de la récupération du catalogue à la promotion silver, avec retries, SLA et callbacks. Il tourne au vert sur le vrai fichier INSEE téléchargé depuis data.gouv.</a:t>
-            </a:r>
+            <a:endParaRPr dirty="0"/>
           </a:p>
         </p:txBody>
       </p:sp>
@@ -1863,7 +1621,7 @@
             <a:spLocks noGrp="1"/>
           </p:cNvSpPr>
           <p:nvPr>
-            <p:ph type="sldNum" idx="5" sz="quarter"/>
+            <p:ph type="sldNum" sz="quarter" idx="5"/>
           </p:nvPr>
         </p:nvSpPr>
         <p:spPr/>
@@ -1914,10 +1672,9 @@
           <a:lstStyle/>
           <a:p>
             <a:r>
-              <a:rPr lang="en-US" smtClean="0"/>
+              <a:rPr lang="en-US"/>
               <a:t>Click to edit Master title style</a:t>
             </a:r>
-            <a:endParaRPr lang="en-US"/>
           </a:p>
         </p:txBody>
       </p:sp>
@@ -2033,10 +1790,9 @@
           </a:lstStyle>
           <a:p>
             <a:r>
-              <a:rPr lang="en-US" smtClean="0"/>
+              <a:rPr lang="en-US"/>
               <a:t>Click to edit Master subtitle style</a:t>
             </a:r>
-            <a:endParaRPr lang="en-US"/>
           </a:p>
         </p:txBody>
       </p:sp>
@@ -2057,7 +1813,7 @@
           <a:p>
             <a:fld id="{5BCAD085-E8A6-8845-BD4E-CB4CCA059FC4}" type="datetimeFigureOut">
               <a:rPr lang="en-US" smtClean="0"/>
-              <a:t>1/27/13</a:t>
+              <a:t>9/12/2026</a:t>
             </a:fld>
             <a:endParaRPr lang="en-US"/>
           </a:p>
@@ -2099,7 +1855,7 @@
           <a:p>
             <a:fld id="{C1FF6DA9-008F-8B48-92A6-B652298478BF}" type="slidenum">
               <a:rPr lang="en-US" smtClean="0"/>
-              <a:t>‹#›</a:t>
+              <a:t>‹N°›</a:t>
             </a:fld>
             <a:endParaRPr lang="en-US"/>
           </a:p>
@@ -2151,10 +1907,9 @@
           <a:lstStyle/>
           <a:p>
             <a:r>
-              <a:rPr lang="en-US" smtClean="0"/>
+              <a:rPr lang="en-US"/>
               <a:t>Click to edit Master title style</a:t>
             </a:r>
-            <a:endParaRPr lang="en-US"/>
           </a:p>
         </p:txBody>
       </p:sp>
@@ -2175,38 +1930,37 @@
           <a:p>
             <a:pPr lvl="0"/>
             <a:r>
-              <a:rPr lang="en-US" smtClean="0"/>
+              <a:rPr lang="en-US"/>
               <a:t>Click to edit Master text styles</a:t>
             </a:r>
           </a:p>
           <a:p>
             <a:pPr lvl="1"/>
             <a:r>
-              <a:rPr lang="en-US" smtClean="0"/>
+              <a:rPr lang="en-US"/>
               <a:t>Second level</a:t>
             </a:r>
           </a:p>
           <a:p>
             <a:pPr lvl="2"/>
             <a:r>
-              <a:rPr lang="en-US" smtClean="0"/>
+              <a:rPr lang="en-US"/>
               <a:t>Third level</a:t>
             </a:r>
           </a:p>
           <a:p>
             <a:pPr lvl="3"/>
             <a:r>
-              <a:rPr lang="en-US" smtClean="0"/>
+              <a:rPr lang="en-US"/>
               <a:t>Fourth level</a:t>
             </a:r>
           </a:p>
           <a:p>
             <a:pPr lvl="4"/>
             <a:r>
-              <a:rPr lang="en-US" smtClean="0"/>
+              <a:rPr lang="en-US"/>
               <a:t>Fifth level</a:t>
             </a:r>
-            <a:endParaRPr lang="en-US"/>
           </a:p>
         </p:txBody>
       </p:sp>
@@ -2227,7 +1981,7 @@
           <a:p>
             <a:fld id="{5BCAD085-E8A6-8845-BD4E-CB4CCA059FC4}" type="datetimeFigureOut">
               <a:rPr lang="en-US" smtClean="0"/>
-              <a:t>1/27/13</a:t>
+              <a:t>9/12/2026</a:t>
             </a:fld>
             <a:endParaRPr lang="en-US"/>
           </a:p>
@@ -2269,7 +2023,7 @@
           <a:p>
             <a:fld id="{C1FF6DA9-008F-8B48-92A6-B652298478BF}" type="slidenum">
               <a:rPr lang="en-US" smtClean="0"/>
-              <a:t>‹#›</a:t>
+              <a:t>‹N°›</a:t>
             </a:fld>
             <a:endParaRPr lang="en-US"/>
           </a:p>
@@ -2326,10 +2080,9 @@
           <a:lstStyle/>
           <a:p>
             <a:r>
-              <a:rPr lang="en-US" smtClean="0"/>
+              <a:rPr lang="en-US"/>
               <a:t>Click to edit Master title style</a:t>
             </a:r>
-            <a:endParaRPr lang="en-US"/>
           </a:p>
         </p:txBody>
       </p:sp>
@@ -2355,38 +2108,37 @@
           <a:p>
             <a:pPr lvl="0"/>
             <a:r>
-              <a:rPr lang="en-US" smtClean="0"/>
+              <a:rPr lang="en-US"/>
               <a:t>Click to edit Master text styles</a:t>
             </a:r>
           </a:p>
           <a:p>
             <a:pPr lvl="1"/>
             <a:r>
-              <a:rPr lang="en-US" smtClean="0"/>
+              <a:rPr lang="en-US"/>
               <a:t>Second level</a:t>
             </a:r>
           </a:p>
           <a:p>
             <a:pPr lvl="2"/>
             <a:r>
-              <a:rPr lang="en-US" smtClean="0"/>
+              <a:rPr lang="en-US"/>
               <a:t>Third level</a:t>
             </a:r>
           </a:p>
           <a:p>
             <a:pPr lvl="3"/>
             <a:r>
-              <a:rPr lang="en-US" smtClean="0"/>
+              <a:rPr lang="en-US"/>
               <a:t>Fourth level</a:t>
             </a:r>
           </a:p>
           <a:p>
             <a:pPr lvl="4"/>
             <a:r>
-              <a:rPr lang="en-US" smtClean="0"/>
+              <a:rPr lang="en-US"/>
               <a:t>Fifth level</a:t>
             </a:r>
-            <a:endParaRPr lang="en-US"/>
           </a:p>
         </p:txBody>
       </p:sp>
@@ -2407,7 +2159,7 @@
           <a:p>
             <a:fld id="{5BCAD085-E8A6-8845-BD4E-CB4CCA059FC4}" type="datetimeFigureOut">
               <a:rPr lang="en-US" smtClean="0"/>
-              <a:t>1/27/13</a:t>
+              <a:t>9/12/2026</a:t>
             </a:fld>
             <a:endParaRPr lang="en-US"/>
           </a:p>
@@ -2449,7 +2201,7 @@
           <a:p>
             <a:fld id="{C1FF6DA9-008F-8B48-92A6-B652298478BF}" type="slidenum">
               <a:rPr lang="en-US" smtClean="0"/>
-              <a:t>‹#›</a:t>
+              <a:t>‹N°›</a:t>
             </a:fld>
             <a:endParaRPr lang="en-US"/>
           </a:p>
@@ -2501,10 +2253,9 @@
           <a:lstStyle/>
           <a:p>
             <a:r>
-              <a:rPr lang="en-US" smtClean="0"/>
+              <a:rPr lang="en-US"/>
               <a:t>Click to edit Master title style</a:t>
             </a:r>
-            <a:endParaRPr lang="en-US"/>
           </a:p>
         </p:txBody>
       </p:sp>
@@ -2525,38 +2276,37 @@
           <a:p>
             <a:pPr lvl="0"/>
             <a:r>
-              <a:rPr lang="en-US" smtClean="0"/>
+              <a:rPr lang="en-US"/>
               <a:t>Click to edit Master text styles</a:t>
             </a:r>
           </a:p>
           <a:p>
             <a:pPr lvl="1"/>
             <a:r>
-              <a:rPr lang="en-US" smtClean="0"/>
+              <a:rPr lang="en-US"/>
               <a:t>Second level</a:t>
             </a:r>
           </a:p>
           <a:p>
             <a:pPr lvl="2"/>
             <a:r>
-              <a:rPr lang="en-US" smtClean="0"/>
+              <a:rPr lang="en-US"/>
               <a:t>Third level</a:t>
             </a:r>
           </a:p>
           <a:p>
             <a:pPr lvl="3"/>
             <a:r>
-              <a:rPr lang="en-US" smtClean="0"/>
+              <a:rPr lang="en-US"/>
               <a:t>Fourth level</a:t>
             </a:r>
           </a:p>
           <a:p>
             <a:pPr lvl="4"/>
             <a:r>
-              <a:rPr lang="en-US" smtClean="0"/>
+              <a:rPr lang="en-US"/>
               <a:t>Fifth level</a:t>
             </a:r>
-            <a:endParaRPr lang="en-US"/>
           </a:p>
         </p:txBody>
       </p:sp>
@@ -2577,7 +2327,7 @@
           <a:p>
             <a:fld id="{5BCAD085-E8A6-8845-BD4E-CB4CCA059FC4}" type="datetimeFigureOut">
               <a:rPr lang="en-US" smtClean="0"/>
-              <a:t>1/27/13</a:t>
+              <a:t>9/12/2026</a:t>
             </a:fld>
             <a:endParaRPr lang="en-US"/>
           </a:p>
@@ -2619,7 +2369,7 @@
           <a:p>
             <a:fld id="{C1FF6DA9-008F-8B48-92A6-B652298478BF}" type="slidenum">
               <a:rPr lang="en-US" smtClean="0"/>
-              <a:t>‹#›</a:t>
+              <a:t>‹N°›</a:t>
             </a:fld>
             <a:endParaRPr lang="en-US"/>
           </a:p>
@@ -2680,10 +2430,9 @@
           </a:lstStyle>
           <a:p>
             <a:r>
-              <a:rPr lang="en-US" smtClean="0"/>
+              <a:rPr lang="en-US"/>
               <a:t>Click to edit Master title style</a:t>
             </a:r>
-            <a:endParaRPr lang="en-US"/>
           </a:p>
         </p:txBody>
       </p:sp>
@@ -2800,7 +2549,7 @@
           <a:p>
             <a:pPr lvl="0"/>
             <a:r>
-              <a:rPr lang="en-US" smtClean="0"/>
+              <a:rPr lang="en-US"/>
               <a:t>Click to edit Master text styles</a:t>
             </a:r>
           </a:p>
@@ -2823,7 +2572,7 @@
           <a:p>
             <a:fld id="{5BCAD085-E8A6-8845-BD4E-CB4CCA059FC4}" type="datetimeFigureOut">
               <a:rPr lang="en-US" smtClean="0"/>
-              <a:t>1/27/13</a:t>
+              <a:t>9/12/2026</a:t>
             </a:fld>
             <a:endParaRPr lang="en-US"/>
           </a:p>
@@ -2865,7 +2614,7 @@
           <a:p>
             <a:fld id="{C1FF6DA9-008F-8B48-92A6-B652298478BF}" type="slidenum">
               <a:rPr lang="en-US" smtClean="0"/>
-              <a:t>‹#›</a:t>
+              <a:t>‹N°›</a:t>
             </a:fld>
             <a:endParaRPr lang="en-US"/>
           </a:p>
@@ -2917,10 +2666,9 @@
           <a:lstStyle/>
           <a:p>
             <a:r>
-              <a:rPr lang="en-US" smtClean="0"/>
+              <a:rPr lang="en-US"/>
               <a:t>Click to edit Master title style</a:t>
             </a:r>
-            <a:endParaRPr lang="en-US"/>
           </a:p>
         </p:txBody>
       </p:sp>
@@ -2974,38 +2722,37 @@
           <a:p>
             <a:pPr lvl="0"/>
             <a:r>
-              <a:rPr lang="en-US" smtClean="0"/>
+              <a:rPr lang="en-US"/>
               <a:t>Click to edit Master text styles</a:t>
             </a:r>
           </a:p>
           <a:p>
             <a:pPr lvl="1"/>
             <a:r>
-              <a:rPr lang="en-US" smtClean="0"/>
+              <a:rPr lang="en-US"/>
               <a:t>Second level</a:t>
             </a:r>
           </a:p>
           <a:p>
             <a:pPr lvl="2"/>
             <a:r>
-              <a:rPr lang="en-US" smtClean="0"/>
+              <a:rPr lang="en-US"/>
               <a:t>Third level</a:t>
             </a:r>
           </a:p>
           <a:p>
             <a:pPr lvl="3"/>
             <a:r>
-              <a:rPr lang="en-US" smtClean="0"/>
+              <a:rPr lang="en-US"/>
               <a:t>Fourth level</a:t>
             </a:r>
           </a:p>
           <a:p>
             <a:pPr lvl="4"/>
             <a:r>
-              <a:rPr lang="en-US" smtClean="0"/>
+              <a:rPr lang="en-US"/>
               <a:t>Fifth level</a:t>
             </a:r>
-            <a:endParaRPr lang="en-US"/>
           </a:p>
         </p:txBody>
       </p:sp>
@@ -3059,38 +2806,37 @@
           <a:p>
             <a:pPr lvl="0"/>
             <a:r>
-              <a:rPr lang="en-US" smtClean="0"/>
+              <a:rPr lang="en-US"/>
               <a:t>Click to edit Master text styles</a:t>
             </a:r>
           </a:p>
           <a:p>
             <a:pPr lvl="1"/>
             <a:r>
-              <a:rPr lang="en-US" smtClean="0"/>
+              <a:rPr lang="en-US"/>
               <a:t>Second level</a:t>
             </a:r>
           </a:p>
           <a:p>
             <a:pPr lvl="2"/>
             <a:r>
-              <a:rPr lang="en-US" smtClean="0"/>
+              <a:rPr lang="en-US"/>
               <a:t>Third level</a:t>
             </a:r>
           </a:p>
           <a:p>
             <a:pPr lvl="3"/>
             <a:r>
-              <a:rPr lang="en-US" smtClean="0"/>
+              <a:rPr lang="en-US"/>
               <a:t>Fourth level</a:t>
             </a:r>
           </a:p>
           <a:p>
             <a:pPr lvl="4"/>
             <a:r>
-              <a:rPr lang="en-US" smtClean="0"/>
+              <a:rPr lang="en-US"/>
               <a:t>Fifth level</a:t>
             </a:r>
-            <a:endParaRPr lang="en-US"/>
           </a:p>
         </p:txBody>
       </p:sp>
@@ -3111,7 +2857,7 @@
           <a:p>
             <a:fld id="{5BCAD085-E8A6-8845-BD4E-CB4CCA059FC4}" type="datetimeFigureOut">
               <a:rPr lang="en-US" smtClean="0"/>
-              <a:t>1/27/13</a:t>
+              <a:t>9/12/2026</a:t>
             </a:fld>
             <a:endParaRPr lang="en-US"/>
           </a:p>
@@ -3153,7 +2899,7 @@
           <a:p>
             <a:fld id="{C1FF6DA9-008F-8B48-92A6-B652298478BF}" type="slidenum">
               <a:rPr lang="en-US" smtClean="0"/>
-              <a:t>‹#›</a:t>
+              <a:t>‹N°›</a:t>
             </a:fld>
             <a:endParaRPr lang="en-US"/>
           </a:p>
@@ -3209,10 +2955,9 @@
           </a:lstStyle>
           <a:p>
             <a:r>
-              <a:rPr lang="en-US" smtClean="0"/>
+              <a:rPr lang="en-US"/>
               <a:t>Click to edit Master title style</a:t>
             </a:r>
-            <a:endParaRPr lang="en-US"/>
           </a:p>
         </p:txBody>
       </p:sp>
@@ -3275,7 +3020,7 @@
           <a:p>
             <a:pPr lvl="0"/>
             <a:r>
-              <a:rPr lang="en-US" smtClean="0"/>
+              <a:rPr lang="en-US"/>
               <a:t>Click to edit Master text styles</a:t>
             </a:r>
           </a:p>
@@ -3331,38 +3076,37 @@
           <a:p>
             <a:pPr lvl="0"/>
             <a:r>
-              <a:rPr lang="en-US" smtClean="0"/>
+              <a:rPr lang="en-US"/>
               <a:t>Click to edit Master text styles</a:t>
             </a:r>
           </a:p>
           <a:p>
             <a:pPr lvl="1"/>
             <a:r>
-              <a:rPr lang="en-US" smtClean="0"/>
+              <a:rPr lang="en-US"/>
               <a:t>Second level</a:t>
             </a:r>
           </a:p>
           <a:p>
             <a:pPr lvl="2"/>
             <a:r>
-              <a:rPr lang="en-US" smtClean="0"/>
+              <a:rPr lang="en-US"/>
               <a:t>Third level</a:t>
             </a:r>
           </a:p>
           <a:p>
             <a:pPr lvl="3"/>
             <a:r>
-              <a:rPr lang="en-US" smtClean="0"/>
+              <a:rPr lang="en-US"/>
               <a:t>Fourth level</a:t>
             </a:r>
           </a:p>
           <a:p>
             <a:pPr lvl="4"/>
             <a:r>
-              <a:rPr lang="en-US" smtClean="0"/>
+              <a:rPr lang="en-US"/>
               <a:t>Fifth level</a:t>
             </a:r>
-            <a:endParaRPr lang="en-US"/>
           </a:p>
         </p:txBody>
       </p:sp>
@@ -3425,7 +3169,7 @@
           <a:p>
             <a:pPr lvl="0"/>
             <a:r>
-              <a:rPr lang="en-US" smtClean="0"/>
+              <a:rPr lang="en-US"/>
               <a:t>Click to edit Master text styles</a:t>
             </a:r>
           </a:p>
@@ -3481,38 +3225,37 @@
           <a:p>
             <a:pPr lvl="0"/>
             <a:r>
-              <a:rPr lang="en-US" smtClean="0"/>
+              <a:rPr lang="en-US"/>
               <a:t>Click to edit Master text styles</a:t>
             </a:r>
           </a:p>
           <a:p>
             <a:pPr lvl="1"/>
             <a:r>
-              <a:rPr lang="en-US" smtClean="0"/>
+              <a:rPr lang="en-US"/>
               <a:t>Second level</a:t>
             </a:r>
           </a:p>
           <a:p>
             <a:pPr lvl="2"/>
             <a:r>
-              <a:rPr lang="en-US" smtClean="0"/>
+              <a:rPr lang="en-US"/>
               <a:t>Third level</a:t>
             </a:r>
           </a:p>
           <a:p>
             <a:pPr lvl="3"/>
             <a:r>
-              <a:rPr lang="en-US" smtClean="0"/>
+              <a:rPr lang="en-US"/>
               <a:t>Fourth level</a:t>
             </a:r>
           </a:p>
           <a:p>
             <a:pPr lvl="4"/>
             <a:r>
-              <a:rPr lang="en-US" smtClean="0"/>
+              <a:rPr lang="en-US"/>
               <a:t>Fifth level</a:t>
             </a:r>
-            <a:endParaRPr lang="en-US"/>
           </a:p>
         </p:txBody>
       </p:sp>
@@ -3533,7 +3276,7 @@
           <a:p>
             <a:fld id="{5BCAD085-E8A6-8845-BD4E-CB4CCA059FC4}" type="datetimeFigureOut">
               <a:rPr lang="en-US" smtClean="0"/>
-              <a:t>1/27/13</a:t>
+              <a:t>9/12/2026</a:t>
             </a:fld>
             <a:endParaRPr lang="en-US"/>
           </a:p>
@@ -3575,7 +3318,7 @@
           <a:p>
             <a:fld id="{C1FF6DA9-008F-8B48-92A6-B652298478BF}" type="slidenum">
               <a:rPr lang="en-US" smtClean="0"/>
-              <a:t>‹#›</a:t>
+              <a:t>‹N°›</a:t>
             </a:fld>
             <a:endParaRPr lang="en-US"/>
           </a:p>
@@ -3627,10 +3370,9 @@
           <a:lstStyle/>
           <a:p>
             <a:r>
-              <a:rPr lang="en-US" smtClean="0"/>
+              <a:rPr lang="en-US"/>
               <a:t>Click to edit Master title style</a:t>
             </a:r>
-            <a:endParaRPr lang="en-US"/>
           </a:p>
         </p:txBody>
       </p:sp>
@@ -3651,7 +3393,7 @@
           <a:p>
             <a:fld id="{5BCAD085-E8A6-8845-BD4E-CB4CCA059FC4}" type="datetimeFigureOut">
               <a:rPr lang="en-US" smtClean="0"/>
-              <a:t>1/27/13</a:t>
+              <a:t>9/12/2026</a:t>
             </a:fld>
             <a:endParaRPr lang="en-US"/>
           </a:p>
@@ -3693,7 +3435,7 @@
           <a:p>
             <a:fld id="{C1FF6DA9-008F-8B48-92A6-B652298478BF}" type="slidenum">
               <a:rPr lang="en-US" smtClean="0"/>
-              <a:t>‹#›</a:t>
+              <a:t>‹N°›</a:t>
             </a:fld>
             <a:endParaRPr lang="en-US"/>
           </a:p>
@@ -3746,7 +3488,7 @@
           <a:p>
             <a:fld id="{5BCAD085-E8A6-8845-BD4E-CB4CCA059FC4}" type="datetimeFigureOut">
               <a:rPr lang="en-US" smtClean="0"/>
-              <a:t>1/27/13</a:t>
+              <a:t>9/12/2026</a:t>
             </a:fld>
             <a:endParaRPr lang="en-US"/>
           </a:p>
@@ -3788,7 +3530,7 @@
           <a:p>
             <a:fld id="{C1FF6DA9-008F-8B48-92A6-B652298478BF}" type="slidenum">
               <a:rPr lang="en-US" smtClean="0"/>
-              <a:t>‹#›</a:t>
+              <a:t>‹N°›</a:t>
             </a:fld>
             <a:endParaRPr lang="en-US"/>
           </a:p>
@@ -3849,10 +3591,9 @@
           </a:lstStyle>
           <a:p>
             <a:r>
-              <a:rPr lang="en-US" smtClean="0"/>
+              <a:rPr lang="en-US"/>
               <a:t>Click to edit Master title style</a:t>
             </a:r>
-            <a:endParaRPr lang="en-US"/>
           </a:p>
         </p:txBody>
       </p:sp>
@@ -3906,38 +3647,37 @@
           <a:p>
             <a:pPr lvl="0"/>
             <a:r>
-              <a:rPr lang="en-US" smtClean="0"/>
+              <a:rPr lang="en-US"/>
               <a:t>Click to edit Master text styles</a:t>
             </a:r>
           </a:p>
           <a:p>
             <a:pPr lvl="1"/>
             <a:r>
-              <a:rPr lang="en-US" smtClean="0"/>
+              <a:rPr lang="en-US"/>
               <a:t>Second level</a:t>
             </a:r>
           </a:p>
           <a:p>
             <a:pPr lvl="2"/>
             <a:r>
-              <a:rPr lang="en-US" smtClean="0"/>
+              <a:rPr lang="en-US"/>
               <a:t>Third level</a:t>
             </a:r>
           </a:p>
           <a:p>
             <a:pPr lvl="3"/>
             <a:r>
-              <a:rPr lang="en-US" smtClean="0"/>
+              <a:rPr lang="en-US"/>
               <a:t>Fourth level</a:t>
             </a:r>
           </a:p>
           <a:p>
             <a:pPr lvl="4"/>
             <a:r>
-              <a:rPr lang="en-US" smtClean="0"/>
+              <a:rPr lang="en-US"/>
               <a:t>Fifth level</a:t>
             </a:r>
-            <a:endParaRPr lang="en-US"/>
           </a:p>
         </p:txBody>
       </p:sp>
@@ -4000,7 +3740,7 @@
           <a:p>
             <a:pPr lvl="0"/>
             <a:r>
-              <a:rPr lang="en-US" smtClean="0"/>
+              <a:rPr lang="en-US"/>
               <a:t>Click to edit Master text styles</a:t>
             </a:r>
           </a:p>
@@ -4023,7 +3763,7 @@
           <a:p>
             <a:fld id="{5BCAD085-E8A6-8845-BD4E-CB4CCA059FC4}" type="datetimeFigureOut">
               <a:rPr lang="en-US" smtClean="0"/>
-              <a:t>1/27/13</a:t>
+              <a:t>9/12/2026</a:t>
             </a:fld>
             <a:endParaRPr lang="en-US"/>
           </a:p>
@@ -4065,7 +3805,7 @@
           <a:p>
             <a:fld id="{C1FF6DA9-008F-8B48-92A6-B652298478BF}" type="slidenum">
               <a:rPr lang="en-US" smtClean="0"/>
-              <a:t>‹#›</a:t>
+              <a:t>‹N°›</a:t>
             </a:fld>
             <a:endParaRPr lang="en-US"/>
           </a:p>
@@ -4126,10 +3866,9 @@
           </a:lstStyle>
           <a:p>
             <a:r>
-              <a:rPr lang="en-US" smtClean="0"/>
+              <a:rPr lang="en-US"/>
               <a:t>Click to edit Master title style</a:t>
             </a:r>
-            <a:endParaRPr lang="en-US"/>
           </a:p>
         </p:txBody>
       </p:sp>
@@ -4253,7 +3992,7 @@
           <a:p>
             <a:pPr lvl="0"/>
             <a:r>
-              <a:rPr lang="en-US" smtClean="0"/>
+              <a:rPr lang="en-US"/>
               <a:t>Click to edit Master text styles</a:t>
             </a:r>
           </a:p>
@@ -4276,7 +4015,7 @@
           <a:p>
             <a:fld id="{5BCAD085-E8A6-8845-BD4E-CB4CCA059FC4}" type="datetimeFigureOut">
               <a:rPr lang="en-US" smtClean="0"/>
-              <a:t>1/27/13</a:t>
+              <a:t>9/12/2026</a:t>
             </a:fld>
             <a:endParaRPr lang="en-US"/>
           </a:p>
@@ -4318,7 +4057,7 @@
           <a:p>
             <a:fld id="{C1FF6DA9-008F-8B48-92A6-B652298478BF}" type="slidenum">
               <a:rPr lang="en-US" smtClean="0"/>
-              <a:t>‹#›</a:t>
+              <a:t>‹N°›</a:t>
             </a:fld>
             <a:endParaRPr lang="en-US"/>
           </a:p>
@@ -4385,10 +4124,9 @@
           <a:lstStyle/>
           <a:p>
             <a:r>
-              <a:rPr lang="en-US" smtClean="0"/>
+              <a:rPr lang="en-US"/>
               <a:t>Click to edit Master title style</a:t>
             </a:r>
-            <a:endParaRPr lang="en-US"/>
           </a:p>
         </p:txBody>
       </p:sp>
@@ -4419,38 +4157,37 @@
           <a:p>
             <a:pPr lvl="0"/>
             <a:r>
-              <a:rPr lang="en-US" smtClean="0"/>
+              <a:rPr lang="en-US"/>
               <a:t>Click to edit Master text styles</a:t>
             </a:r>
           </a:p>
           <a:p>
             <a:pPr lvl="1"/>
             <a:r>
-              <a:rPr lang="en-US" smtClean="0"/>
+              <a:rPr lang="en-US"/>
               <a:t>Second level</a:t>
             </a:r>
           </a:p>
           <a:p>
             <a:pPr lvl="2"/>
             <a:r>
-              <a:rPr lang="en-US" smtClean="0"/>
+              <a:rPr lang="en-US"/>
               <a:t>Third level</a:t>
             </a:r>
           </a:p>
           <a:p>
             <a:pPr lvl="3"/>
             <a:r>
-              <a:rPr lang="en-US" smtClean="0"/>
+              <a:rPr lang="en-US"/>
               <a:t>Fourth level</a:t>
             </a:r>
           </a:p>
           <a:p>
             <a:pPr lvl="4"/>
             <a:r>
-              <a:rPr lang="en-US" smtClean="0"/>
+              <a:rPr lang="en-US"/>
               <a:t>Fifth level</a:t>
             </a:r>
-            <a:endParaRPr lang="en-US"/>
           </a:p>
         </p:txBody>
       </p:sp>
@@ -4489,7 +4226,7 @@
           <a:p>
             <a:fld id="{5BCAD085-E8A6-8845-BD4E-CB4CCA059FC4}" type="datetimeFigureOut">
               <a:rPr lang="en-US" smtClean="0"/>
-              <a:t>1/27/13</a:t>
+              <a:t>9/12/2026</a:t>
             </a:fld>
             <a:endParaRPr lang="en-US"/>
           </a:p>
@@ -4567,7 +4304,7 @@
           <a:p>
             <a:fld id="{C1FF6DA9-008F-8B48-92A6-B652298478BF}" type="slidenum">
               <a:rPr lang="en-US" smtClean="0"/>
-              <a:t>‹#›</a:t>
+              <a:t>‹N°›</a:t>
             </a:fld>
             <a:endParaRPr lang="en-US"/>
           </a:p>
@@ -4848,7 +4585,7 @@
 </file>
 
 <file path=ppt/slides/slide1.xml><?xml version="1.0" encoding="utf-8"?>
-<p:sld xmlns:a="http://schemas.openxmlformats.org/drawingml/2006/main" xmlns:p="http://schemas.openxmlformats.org/presentationml/2006/main" xmlns:r="http://schemas.openxmlformats.org/officeDocument/2006/relationships">
+<p:sld xmlns:a="http://schemas.openxmlformats.org/drawingml/2006/main" xmlns:r="http://schemas.openxmlformats.org/officeDocument/2006/relationships" xmlns:p="http://schemas.openxmlformats.org/presentationml/2006/main">
   <p:cSld>
     <p:spTree>
       <p:nvGrpSpPr>
@@ -4856,7 +4593,14 @@
         <p:cNvGrpSpPr/>
         <p:nvPr/>
       </p:nvGrpSpPr>
-      <p:grpSpPr/>
+      <p:grpSpPr>
+        <a:xfrm>
+          <a:off x="0" y="0"/>
+          <a:ext cx="0" cy="0"/>
+          <a:chOff x="0" y="0"/>
+          <a:chExt cx="0" cy="0"/>
+        </a:xfrm>
+      </p:grpSpPr>
       <p:sp>
         <p:nvSpPr>
           <p:cNvPr id="2" name="TextBox 1"/>
@@ -4883,7 +4627,9 @@
             <a:spAutoFit/>
           </a:bodyPr>
           <a:lstStyle/>
-          <a:p/>
+          <a:p>
+            <a:endParaRPr/>
+          </a:p>
         </p:txBody>
       </p:sp>
       <p:sp>
@@ -4910,14 +4656,92 @@
           <a:p>
             <a:pPr algn="l"/>
             <a:r>
-              <a:rPr sz="3400" b="1">
+              <a:rPr sz="3400" b="1" dirty="0" err="1">
                 <a:solidFill>
                   <a:srgbClr val="FFFFFF"/>
                 </a:solidFill>
                 <a:latin typeface="Calibri"/>
               </a:rPr>
-              <a:t>Plateforme ELT Eckert — détecter les contrats en déshérence</a:t>
-            </a:r>
+              <a:t>Plateforme</a:t>
+            </a:r>
+            <a:r>
+              <a:rPr sz="3400" b="1" dirty="0">
+                <a:solidFill>
+                  <a:srgbClr val="FFFFFF"/>
+                </a:solidFill>
+                <a:latin typeface="Calibri"/>
+              </a:rPr>
+              <a:t> ELT Eckert — </a:t>
+            </a:r>
+            <a:r>
+              <a:rPr sz="3400" b="1" dirty="0" err="1">
+                <a:solidFill>
+                  <a:srgbClr val="FFFFFF"/>
+                </a:solidFill>
+                <a:latin typeface="Calibri"/>
+              </a:rPr>
+              <a:t>détecter</a:t>
+            </a:r>
+            <a:r>
+              <a:rPr sz="3400" b="1" dirty="0">
+                <a:solidFill>
+                  <a:srgbClr val="FFFFFF"/>
+                </a:solidFill>
+                <a:latin typeface="Calibri"/>
+              </a:rPr>
+              <a:t> les </a:t>
+            </a:r>
+            <a:r>
+              <a:rPr sz="3400" b="1" dirty="0" err="1">
+                <a:solidFill>
+                  <a:srgbClr val="FFFFFF"/>
+                </a:solidFill>
+                <a:latin typeface="Calibri"/>
+              </a:rPr>
+              <a:t>contrats</a:t>
+            </a:r>
+            <a:r>
+              <a:rPr sz="3400" b="1" dirty="0">
+                <a:solidFill>
+                  <a:srgbClr val="FFFFFF"/>
+                </a:solidFill>
+                <a:latin typeface="Calibri"/>
+              </a:rPr>
+              <a:t> </a:t>
+            </a:r>
+            <a:r>
+              <a:rPr sz="3400" b="1" dirty="0" err="1">
+                <a:solidFill>
+                  <a:srgbClr val="FFFFFF"/>
+                </a:solidFill>
+                <a:latin typeface="Calibri"/>
+              </a:rPr>
+              <a:t>en</a:t>
+            </a:r>
+            <a:r>
+              <a:rPr sz="3400" b="1" dirty="0">
+                <a:solidFill>
+                  <a:srgbClr val="FFFFFF"/>
+                </a:solidFill>
+                <a:latin typeface="Calibri"/>
+              </a:rPr>
+              <a:t> </a:t>
+            </a:r>
+            <a:r>
+              <a:rPr sz="3400" b="1" dirty="0" err="1">
+                <a:solidFill>
+                  <a:srgbClr val="FFFFFF"/>
+                </a:solidFill>
+                <a:latin typeface="Calibri"/>
+              </a:rPr>
+              <a:t>déshérence</a:t>
+            </a:r>
+            <a:endParaRPr sz="3400" b="1" dirty="0">
+              <a:solidFill>
+                <a:srgbClr val="FFFFFF"/>
+              </a:solidFill>
+              <a:latin typeface="Calibri"/>
+            </a:endParaRPr>
           </a:p>
         </p:txBody>
       </p:sp>
@@ -4929,8 +4753,8 @@
         </p:nvSpPr>
         <p:spPr>
           <a:xfrm>
-            <a:off x="700000" y="3900000"/>
-            <a:ext cx="10800000" cy="1000000"/>
+            <a:off x="696000" y="3900000"/>
+            <a:ext cx="10800000" cy="2800767"/>
           </a:xfrm>
           <a:prstGeom prst="rect">
             <a:avLst/>
@@ -4945,13 +4769,85 @@
           <a:p>
             <a:pPr algn="l"/>
             <a:r>
-              <a:rPr sz="2200" b="0">
+              <a:rPr sz="2200" b="0" dirty="0">
                 <a:solidFill>
                   <a:srgbClr val="E8ECF0"/>
                 </a:solidFill>
                 <a:latin typeface="Calibri"/>
               </a:rPr>
               <a:t>Bloc 4 · Spécialité Data Engineer · RNCP 39586</a:t>
+            </a:r>
+            <a:endParaRPr lang="fr-FR" sz="2200" b="0" dirty="0">
+              <a:solidFill>
+                <a:srgbClr val="E8ECF0"/>
+              </a:solidFill>
+              <a:latin typeface="Calibri"/>
+            </a:endParaRPr>
+          </a:p>
+          <a:p>
+            <a:pPr algn="l"/>
+            <a:endParaRPr lang="fr-FR" sz="2200" dirty="0">
+              <a:solidFill>
+                <a:srgbClr val="E8ECF0"/>
+              </a:solidFill>
+              <a:latin typeface="Calibri"/>
+            </a:endParaRPr>
+          </a:p>
+          <a:p>
+            <a:pPr algn="l"/>
+            <a:endParaRPr lang="fr-FR" sz="2200" b="0" dirty="0">
+              <a:solidFill>
+                <a:srgbClr val="E8ECF0"/>
+              </a:solidFill>
+              <a:latin typeface="Calibri"/>
+            </a:endParaRPr>
+          </a:p>
+          <a:p>
+            <a:pPr algn="l"/>
+            <a:endParaRPr lang="fr-FR" sz="2200" dirty="0">
+              <a:solidFill>
+                <a:srgbClr val="E8ECF0"/>
+              </a:solidFill>
+              <a:latin typeface="Calibri"/>
+            </a:endParaRPr>
+          </a:p>
+          <a:p>
+            <a:pPr algn="l"/>
+            <a:endParaRPr lang="fr-FR" sz="2200" b="0" dirty="0">
+              <a:solidFill>
+                <a:srgbClr val="E8ECF0"/>
+              </a:solidFill>
+              <a:latin typeface="Calibri"/>
+            </a:endParaRPr>
+          </a:p>
+          <a:p>
+            <a:pPr algn="l"/>
+            <a:endParaRPr lang="fr-FR" sz="2200" dirty="0">
+              <a:solidFill>
+                <a:srgbClr val="E8ECF0"/>
+              </a:solidFill>
+              <a:latin typeface="Calibri"/>
+            </a:endParaRPr>
+          </a:p>
+          <a:p>
+            <a:pPr algn="l"/>
+            <a:endParaRPr lang="fr-FR" sz="2200" b="0" dirty="0">
+              <a:solidFill>
+                <a:srgbClr val="E8ECF0"/>
+              </a:solidFill>
+              <a:latin typeface="Calibri"/>
+            </a:endParaRPr>
+          </a:p>
+          <a:p>
+            <a:pPr algn="l"/>
+            <a:r>
+              <a:rPr lang="fr-FR" sz="1600" b="0" dirty="0">
+                <a:solidFill>
+                  <a:srgbClr val="E8ECF0"/>
+                </a:solidFill>
+                <a:latin typeface="Calibri"/>
+              </a:rPr>
+              <a:t>Emmanuel Jovanovic</a:t>
             </a:r>
           </a:p>
         </p:txBody>
@@ -4965,7 +4861,7 @@
 </file>
 
 <file path=ppt/slides/slide10.xml><?xml version="1.0" encoding="utf-8"?>
-<p:sld xmlns:a="http://schemas.openxmlformats.org/drawingml/2006/main" xmlns:p="http://schemas.openxmlformats.org/presentationml/2006/main" xmlns:r="http://schemas.openxmlformats.org/officeDocument/2006/relationships">
+<p:sld xmlns:a="http://schemas.openxmlformats.org/drawingml/2006/main" xmlns:r="http://schemas.openxmlformats.org/officeDocument/2006/relationships" xmlns:p="http://schemas.openxmlformats.org/presentationml/2006/main">
   <p:cSld>
     <p:spTree>
       <p:nvGrpSpPr>
@@ -4973,7 +4869,14 @@
         <p:cNvGrpSpPr/>
         <p:nvPr/>
       </p:nvGrpSpPr>
-      <p:grpSpPr/>
+      <p:grpSpPr>
+        <a:xfrm>
+          <a:off x="0" y="0"/>
+          <a:ext cx="0" cy="0"/>
+          <a:chOff x="0" y="0"/>
+          <a:chExt cx="0" cy="0"/>
+        </a:xfrm>
+      </p:grpSpPr>
       <p:sp>
         <p:nvSpPr>
           <p:cNvPr id="2" name="TextBox 1"/>
@@ -5097,7 +5000,7 @@
           <p:nvPr/>
         </p:nvPicPr>
         <p:blipFill>
-          <a:blip r:embed="rId2"/>
+          <a:blip r:embed="rId3"/>
           <a:stretch>
             <a:fillRect/>
           </a:stretch>
@@ -5121,7 +5024,7 @@
 </file>
 
 <file path=ppt/slides/slide11.xml><?xml version="1.0" encoding="utf-8"?>
-<p:sld xmlns:a="http://schemas.openxmlformats.org/drawingml/2006/main" xmlns:p="http://schemas.openxmlformats.org/presentationml/2006/main" xmlns:r="http://schemas.openxmlformats.org/officeDocument/2006/relationships">
+<p:sld xmlns:a="http://schemas.openxmlformats.org/drawingml/2006/main" xmlns:r="http://schemas.openxmlformats.org/officeDocument/2006/relationships" xmlns:p="http://schemas.openxmlformats.org/presentationml/2006/main">
   <p:cSld>
     <p:spTree>
       <p:nvGrpSpPr>
@@ -5129,7 +5032,14 @@
         <p:cNvGrpSpPr/>
         <p:nvPr/>
       </p:nvGrpSpPr>
-      <p:grpSpPr/>
+      <p:grpSpPr>
+        <a:xfrm>
+          <a:off x="0" y="0"/>
+          <a:ext cx="0" cy="0"/>
+          <a:chOff x="0" y="0"/>
+          <a:chExt cx="0" cy="0"/>
+        </a:xfrm>
+      </p:grpSpPr>
       <p:sp>
         <p:nvSpPr>
           <p:cNvPr id="2" name="TextBox 1"/>
@@ -5253,7 +5163,7 @@
           <p:nvPr/>
         </p:nvPicPr>
         <p:blipFill>
-          <a:blip r:embed="rId2"/>
+          <a:blip r:embed="rId3"/>
           <a:stretch>
             <a:fillRect/>
           </a:stretch>
@@ -5277,7 +5187,7 @@
 </file>
 
 <file path=ppt/slides/slide12.xml><?xml version="1.0" encoding="utf-8"?>
-<p:sld xmlns:a="http://schemas.openxmlformats.org/drawingml/2006/main" xmlns:p="http://schemas.openxmlformats.org/presentationml/2006/main" xmlns:r="http://schemas.openxmlformats.org/officeDocument/2006/relationships">
+<p:sld xmlns:a="http://schemas.openxmlformats.org/drawingml/2006/main" xmlns:r="http://schemas.openxmlformats.org/officeDocument/2006/relationships" xmlns:p="http://schemas.openxmlformats.org/presentationml/2006/main">
   <p:cSld>
     <p:spTree>
       <p:nvGrpSpPr>
@@ -5285,7 +5195,14 @@
         <p:cNvGrpSpPr/>
         <p:nvPr/>
       </p:nvGrpSpPr>
-      <p:grpSpPr/>
+      <p:grpSpPr>
+        <a:xfrm>
+          <a:off x="0" y="0"/>
+          <a:ext cx="0" cy="0"/>
+          <a:chOff x="0" y="0"/>
+          <a:chExt cx="0" cy="0"/>
+        </a:xfrm>
+      </p:grpSpPr>
       <p:sp>
         <p:nvSpPr>
           <p:cNvPr id="2" name="TextBox 1"/>
@@ -5409,7 +5326,7 @@
           <p:nvPr/>
         </p:nvPicPr>
         <p:blipFill>
-          <a:blip r:embed="rId2"/>
+          <a:blip r:embed="rId3"/>
           <a:stretch>
             <a:fillRect/>
           </a:stretch>
@@ -5433,7 +5350,7 @@
 </file>
 
 <file path=ppt/slides/slide13.xml><?xml version="1.0" encoding="utf-8"?>
-<p:sld xmlns:a="http://schemas.openxmlformats.org/drawingml/2006/main" xmlns:p="http://schemas.openxmlformats.org/presentationml/2006/main" xmlns:r="http://schemas.openxmlformats.org/officeDocument/2006/relationships">
+<p:sld xmlns:a="http://schemas.openxmlformats.org/drawingml/2006/main" xmlns:r="http://schemas.openxmlformats.org/officeDocument/2006/relationships" xmlns:p="http://schemas.openxmlformats.org/presentationml/2006/main">
   <p:cSld>
     <p:spTree>
       <p:nvGrpSpPr>
@@ -5441,7 +5358,14 @@
         <p:cNvGrpSpPr/>
         <p:nvPr/>
       </p:nvGrpSpPr>
-      <p:grpSpPr/>
+      <p:grpSpPr>
+        <a:xfrm>
+          <a:off x="0" y="0"/>
+          <a:ext cx="0" cy="0"/>
+          <a:chOff x="0" y="0"/>
+          <a:chExt cx="0" cy="0"/>
+        </a:xfrm>
+      </p:grpSpPr>
       <p:sp>
         <p:nvSpPr>
           <p:cNvPr id="2" name="TextBox 1"/>
@@ -5597,7 +5521,7 @@
 </file>
 
 <file path=ppt/slides/slide14.xml><?xml version="1.0" encoding="utf-8"?>
-<p:sld xmlns:a="http://schemas.openxmlformats.org/drawingml/2006/main" xmlns:p="http://schemas.openxmlformats.org/presentationml/2006/main" xmlns:r="http://schemas.openxmlformats.org/officeDocument/2006/relationships">
+<p:sld xmlns:a="http://schemas.openxmlformats.org/drawingml/2006/main" xmlns:r="http://schemas.openxmlformats.org/officeDocument/2006/relationships" xmlns:p="http://schemas.openxmlformats.org/presentationml/2006/main">
   <p:cSld>
     <p:spTree>
       <p:nvGrpSpPr>
@@ -5605,7 +5529,14 @@
         <p:cNvGrpSpPr/>
         <p:nvPr/>
       </p:nvGrpSpPr>
-      <p:grpSpPr/>
+      <p:grpSpPr>
+        <a:xfrm>
+          <a:off x="0" y="0"/>
+          <a:ext cx="0" cy="0"/>
+          <a:chOff x="0" y="0"/>
+          <a:chExt cx="0" cy="0"/>
+        </a:xfrm>
+      </p:grpSpPr>
       <p:sp>
         <p:nvSpPr>
           <p:cNvPr id="2" name="TextBox 1"/>
@@ -5761,7 +5692,7 @@
 </file>
 
 <file path=ppt/slides/slide15.xml><?xml version="1.0" encoding="utf-8"?>
-<p:sld xmlns:a="http://schemas.openxmlformats.org/drawingml/2006/main" xmlns:p="http://schemas.openxmlformats.org/presentationml/2006/main" xmlns:r="http://schemas.openxmlformats.org/officeDocument/2006/relationships">
+<p:sld xmlns:a="http://schemas.openxmlformats.org/drawingml/2006/main" xmlns:r="http://schemas.openxmlformats.org/officeDocument/2006/relationships" xmlns:p="http://schemas.openxmlformats.org/presentationml/2006/main">
   <p:cSld>
     <p:spTree>
       <p:nvGrpSpPr>
@@ -5769,7 +5700,14 @@
         <p:cNvGrpSpPr/>
         <p:nvPr/>
       </p:nvGrpSpPr>
-      <p:grpSpPr/>
+      <p:grpSpPr>
+        <a:xfrm>
+          <a:off x="0" y="0"/>
+          <a:ext cx="0" cy="0"/>
+          <a:chOff x="0" y="0"/>
+          <a:chExt cx="0" cy="0"/>
+        </a:xfrm>
+      </p:grpSpPr>
       <p:sp>
         <p:nvSpPr>
           <p:cNvPr id="2" name="TextBox 1"/>
@@ -5925,7 +5863,7 @@
 </file>
 
 <file path=ppt/slides/slide16.xml><?xml version="1.0" encoding="utf-8"?>
-<p:sld xmlns:a="http://schemas.openxmlformats.org/drawingml/2006/main" xmlns:p="http://schemas.openxmlformats.org/presentationml/2006/main" xmlns:r="http://schemas.openxmlformats.org/officeDocument/2006/relationships">
+<p:sld xmlns:a="http://schemas.openxmlformats.org/drawingml/2006/main" xmlns:r="http://schemas.openxmlformats.org/officeDocument/2006/relationships" xmlns:p="http://schemas.openxmlformats.org/presentationml/2006/main">
   <p:cSld>
     <p:spTree>
       <p:nvGrpSpPr>
@@ -5933,7 +5871,14 @@
         <p:cNvGrpSpPr/>
         <p:nvPr/>
       </p:nvGrpSpPr>
-      <p:grpSpPr/>
+      <p:grpSpPr>
+        <a:xfrm>
+          <a:off x="0" y="0"/>
+          <a:ext cx="0" cy="0"/>
+          <a:chOff x="0" y="0"/>
+          <a:chExt cx="0" cy="0"/>
+        </a:xfrm>
+      </p:grpSpPr>
       <p:sp>
         <p:nvSpPr>
           <p:cNvPr id="2" name="TextBox 1"/>
@@ -6089,7 +6034,7 @@
 </file>
 
 <file path=ppt/slides/slide17.xml><?xml version="1.0" encoding="utf-8"?>
-<p:sld xmlns:a="http://schemas.openxmlformats.org/drawingml/2006/main" xmlns:p="http://schemas.openxmlformats.org/presentationml/2006/main" xmlns:r="http://schemas.openxmlformats.org/officeDocument/2006/relationships">
+<p:sld xmlns:a="http://schemas.openxmlformats.org/drawingml/2006/main" xmlns:r="http://schemas.openxmlformats.org/officeDocument/2006/relationships" xmlns:p="http://schemas.openxmlformats.org/presentationml/2006/main">
   <p:cSld>
     <p:spTree>
       <p:nvGrpSpPr>
@@ -6097,7 +6042,14 @@
         <p:cNvGrpSpPr/>
         <p:nvPr/>
       </p:nvGrpSpPr>
-      <p:grpSpPr/>
+      <p:grpSpPr>
+        <a:xfrm>
+          <a:off x="0" y="0"/>
+          <a:ext cx="0" cy="0"/>
+          <a:chOff x="0" y="0"/>
+          <a:chExt cx="0" cy="0"/>
+        </a:xfrm>
+      </p:grpSpPr>
       <p:sp>
         <p:nvSpPr>
           <p:cNvPr id="2" name="TextBox 1"/>
@@ -6269,7 +6221,7 @@
 </file>
 
 <file path=ppt/slides/slide18.xml><?xml version="1.0" encoding="utf-8"?>
-<p:sld xmlns:a="http://schemas.openxmlformats.org/drawingml/2006/main" xmlns:p="http://schemas.openxmlformats.org/presentationml/2006/main" xmlns:r="http://schemas.openxmlformats.org/officeDocument/2006/relationships" show="0">
+<p:sld xmlns:a="http://schemas.openxmlformats.org/drawingml/2006/main" xmlns:r="http://schemas.openxmlformats.org/officeDocument/2006/relationships" xmlns:p="http://schemas.openxmlformats.org/presentationml/2006/main" show="0">
   <p:cSld>
     <p:spTree>
       <p:nvGrpSpPr>
@@ -6277,7 +6229,14 @@
         <p:cNvGrpSpPr/>
         <p:nvPr/>
       </p:nvGrpSpPr>
-      <p:grpSpPr/>
+      <p:grpSpPr>
+        <a:xfrm>
+          <a:off x="0" y="0"/>
+          <a:ext cx="0" cy="0"/>
+          <a:chOff x="0" y="0"/>
+          <a:chExt cx="0" cy="0"/>
+        </a:xfrm>
+      </p:grpSpPr>
       <p:sp>
         <p:nvSpPr>
           <p:cNvPr id="2" name="TextBox 1"/>
@@ -6417,7 +6376,7 @@
 </file>
 
 <file path=ppt/slides/slide19.xml><?xml version="1.0" encoding="utf-8"?>
-<p:sld xmlns:a="http://schemas.openxmlformats.org/drawingml/2006/main" xmlns:p="http://schemas.openxmlformats.org/presentationml/2006/main" xmlns:r="http://schemas.openxmlformats.org/officeDocument/2006/relationships" show="0">
+<p:sld xmlns:a="http://schemas.openxmlformats.org/drawingml/2006/main" xmlns:r="http://schemas.openxmlformats.org/officeDocument/2006/relationships" xmlns:p="http://schemas.openxmlformats.org/presentationml/2006/main" show="0">
   <p:cSld>
     <p:spTree>
       <p:nvGrpSpPr>
@@ -6425,7 +6384,14 @@
         <p:cNvGrpSpPr/>
         <p:nvPr/>
       </p:nvGrpSpPr>
-      <p:grpSpPr/>
+      <p:grpSpPr>
+        <a:xfrm>
+          <a:off x="0" y="0"/>
+          <a:ext cx="0" cy="0"/>
+          <a:chOff x="0" y="0"/>
+          <a:chExt cx="0" cy="0"/>
+        </a:xfrm>
+      </p:grpSpPr>
       <p:sp>
         <p:nvSpPr>
           <p:cNvPr id="2" name="TextBox 1"/>
@@ -6565,7 +6531,7 @@
 </file>
 
 <file path=ppt/slides/slide2.xml><?xml version="1.0" encoding="utf-8"?>
-<p:sld xmlns:a="http://schemas.openxmlformats.org/drawingml/2006/main" xmlns:p="http://schemas.openxmlformats.org/presentationml/2006/main" xmlns:r="http://schemas.openxmlformats.org/officeDocument/2006/relationships">
+<p:sld xmlns:a="http://schemas.openxmlformats.org/drawingml/2006/main" xmlns:r="http://schemas.openxmlformats.org/officeDocument/2006/relationships" xmlns:p="http://schemas.openxmlformats.org/presentationml/2006/main">
   <p:cSld>
     <p:spTree>
       <p:nvGrpSpPr>
@@ -6573,7 +6539,14 @@
         <p:cNvGrpSpPr/>
         <p:nvPr/>
       </p:nvGrpSpPr>
-      <p:grpSpPr/>
+      <p:grpSpPr>
+        <a:xfrm>
+          <a:off x="0" y="0"/>
+          <a:ext cx="0" cy="0"/>
+          <a:chOff x="0" y="0"/>
+          <a:chExt cx="0" cy="0"/>
+        </a:xfrm>
+      </p:grpSpPr>
       <p:sp>
         <p:nvSpPr>
           <p:cNvPr id="2" name="TextBox 1"/>
@@ -6729,7 +6702,7 @@
 </file>
 
 <file path=ppt/slides/slide20.xml><?xml version="1.0" encoding="utf-8"?>
-<p:sld xmlns:a="http://schemas.openxmlformats.org/drawingml/2006/main" xmlns:p="http://schemas.openxmlformats.org/presentationml/2006/main" xmlns:r="http://schemas.openxmlformats.org/officeDocument/2006/relationships" show="0">
+<p:sld xmlns:a="http://schemas.openxmlformats.org/drawingml/2006/main" xmlns:r="http://schemas.openxmlformats.org/officeDocument/2006/relationships" xmlns:p="http://schemas.openxmlformats.org/presentationml/2006/main" show="0">
   <p:cSld>
     <p:spTree>
       <p:nvGrpSpPr>
@@ -6737,7 +6710,14 @@
         <p:cNvGrpSpPr/>
         <p:nvPr/>
       </p:nvGrpSpPr>
-      <p:grpSpPr/>
+      <p:grpSpPr>
+        <a:xfrm>
+          <a:off x="0" y="0"/>
+          <a:ext cx="0" cy="0"/>
+          <a:chOff x="0" y="0"/>
+          <a:chExt cx="0" cy="0"/>
+        </a:xfrm>
+      </p:grpSpPr>
       <p:sp>
         <p:nvSpPr>
           <p:cNvPr id="2" name="TextBox 1"/>
@@ -6877,7 +6857,7 @@
 </file>
 
 <file path=ppt/slides/slide3.xml><?xml version="1.0" encoding="utf-8"?>
-<p:sld xmlns:a="http://schemas.openxmlformats.org/drawingml/2006/main" xmlns:p="http://schemas.openxmlformats.org/presentationml/2006/main" xmlns:r="http://schemas.openxmlformats.org/officeDocument/2006/relationships">
+<p:sld xmlns:a="http://schemas.openxmlformats.org/drawingml/2006/main" xmlns:r="http://schemas.openxmlformats.org/officeDocument/2006/relationships" xmlns:p="http://schemas.openxmlformats.org/presentationml/2006/main">
   <p:cSld>
     <p:spTree>
       <p:nvGrpSpPr>
@@ -6885,7 +6865,14 @@
         <p:cNvGrpSpPr/>
         <p:nvPr/>
       </p:nvGrpSpPr>
-      <p:grpSpPr/>
+      <p:grpSpPr>
+        <a:xfrm>
+          <a:off x="0" y="0"/>
+          <a:ext cx="0" cy="0"/>
+          <a:chOff x="0" y="0"/>
+          <a:chExt cx="0" cy="0"/>
+        </a:xfrm>
+      </p:grpSpPr>
       <p:sp>
         <p:nvSpPr>
           <p:cNvPr id="2" name="TextBox 1"/>
@@ -6895,7 +6882,7 @@
         <p:spPr>
           <a:xfrm>
             <a:off x="500000" y="300000"/>
-            <a:ext cx="9200000" cy="1150000"/>
+            <a:ext cx="9200000" cy="984885"/>
           </a:xfrm>
           <a:prstGeom prst="rect">
             <a:avLst/>
@@ -6910,14 +6897,137 @@
           <a:p>
             <a:pPr algn="l"/>
             <a:r>
-              <a:rPr sz="2900" b="1">
+              <a:rPr sz="2900" b="1" dirty="0">
                 <a:solidFill>
                   <a:srgbClr val="0B3D66"/>
                 </a:solidFill>
                 <a:latin typeface="Calibri"/>
               </a:rPr>
-              <a:t>Une plateforme reconstruite sur un contexte réel — et mon rôle</a:t>
-            </a:r>
+              <a:t>Une </a:t>
+            </a:r>
+            <a:r>
+              <a:rPr sz="2900" b="1" dirty="0" err="1">
+                <a:solidFill>
+                  <a:srgbClr val="0B3D66"/>
+                </a:solidFill>
+                <a:latin typeface="Calibri"/>
+              </a:rPr>
+              <a:t>plateforme</a:t>
+            </a:r>
+            <a:r>
+              <a:rPr sz="2900" b="1" dirty="0">
+                <a:solidFill>
+                  <a:srgbClr val="0B3D66"/>
+                </a:solidFill>
+                <a:latin typeface="Calibri"/>
+              </a:rPr>
+              <a:t> </a:t>
+            </a:r>
+            <a:r>
+              <a:rPr sz="2900" b="1" dirty="0" err="1">
+                <a:solidFill>
+                  <a:srgbClr val="0B3D66"/>
+                </a:solidFill>
+                <a:latin typeface="Calibri"/>
+              </a:rPr>
+              <a:t>reconstruite</a:t>
+            </a:r>
+            <a:r>
+              <a:rPr sz="2900" b="1" dirty="0">
+                <a:solidFill>
+                  <a:srgbClr val="0B3D66"/>
+                </a:solidFill>
+                <a:latin typeface="Calibri"/>
+              </a:rPr>
+              <a:t> sur un </a:t>
+            </a:r>
+            <a:r>
+              <a:rPr sz="2900" b="1" dirty="0" err="1">
+                <a:solidFill>
+                  <a:srgbClr val="0B3D66"/>
+                </a:solidFill>
+                <a:latin typeface="Calibri"/>
+              </a:rPr>
+              <a:t>contexte</a:t>
+            </a:r>
+            <a:r>
+              <a:rPr sz="2900" b="1" dirty="0">
+                <a:solidFill>
+                  <a:srgbClr val="0B3D66"/>
+                </a:solidFill>
+                <a:latin typeface="Calibri"/>
+              </a:rPr>
+              <a:t> </a:t>
+            </a:r>
+            <a:r>
+              <a:rPr sz="2900" b="1" dirty="0" err="1">
+                <a:solidFill>
+                  <a:srgbClr val="0B3D66"/>
+                </a:solidFill>
+                <a:latin typeface="Calibri"/>
+              </a:rPr>
+              <a:t>réel</a:t>
+            </a:r>
+            <a:r>
+              <a:rPr lang="fr-FR" sz="2900" b="1" dirty="0">
+                <a:solidFill>
+                  <a:srgbClr val="0B3D66"/>
+                </a:solidFill>
+                <a:latin typeface="Calibri"/>
+              </a:rPr>
+              <a:t>,</a:t>
+            </a:r>
+            <a:r>
+              <a:rPr sz="2900" b="1" dirty="0">
+                <a:solidFill>
+                  <a:srgbClr val="0B3D66"/>
+                </a:solidFill>
+                <a:latin typeface="Calibri"/>
+              </a:rPr>
+              <a:t> </a:t>
+            </a:r>
+            <a:r>
+              <a:rPr sz="2900" b="1" dirty="0" err="1">
+                <a:solidFill>
+                  <a:srgbClr val="0B3D66"/>
+                </a:solidFill>
+                <a:latin typeface="Calibri"/>
+              </a:rPr>
+              <a:t>mon</a:t>
+            </a:r>
+            <a:r>
+              <a:rPr sz="2900" b="1" dirty="0">
+                <a:solidFill>
+                  <a:srgbClr val="0B3D66"/>
+                </a:solidFill>
+                <a:latin typeface="Calibri"/>
+              </a:rPr>
+              <a:t> </a:t>
+            </a:r>
+            <a:r>
+              <a:rPr sz="2900" b="1" dirty="0" err="1">
+                <a:solidFill>
+                  <a:srgbClr val="0B3D66"/>
+                </a:solidFill>
+                <a:latin typeface="Calibri"/>
+              </a:rPr>
+              <a:t>rôle</a:t>
+            </a:r>
+            <a:r>
+              <a:rPr lang="fr-FR" sz="2900" b="1" dirty="0">
+                <a:solidFill>
+                  <a:srgbClr val="0B3D66"/>
+                </a:solidFill>
+                <a:latin typeface="Calibri"/>
+              </a:rPr>
+              <a:t> dans le projet</a:t>
+            </a:r>
+            <a:endParaRPr sz="2900" b="1" dirty="0">
+              <a:solidFill>
+                <a:srgbClr val="0B3D66"/>
+              </a:solidFill>
+              <a:latin typeface="Calibri"/>
+            </a:endParaRPr>
           </a:p>
         </p:txBody>
       </p:sp>
@@ -6969,8 +7079,8 @@
         </p:nvSpPr>
         <p:spPr>
           <a:xfrm>
-            <a:off x="600000" y="1650000"/>
-            <a:ext cx="11000000" cy="4600000"/>
+            <a:off x="600000" y="1656292"/>
+            <a:ext cx="11000000" cy="1769715"/>
           </a:xfrm>
           <a:prstGeom prst="rect">
             <a:avLst/>
@@ -6989,13 +7099,103 @@
               </a:spcAft>
             </a:pPr>
             <a:r>
-              <a:rPr sz="2100">
-                <a:solidFill>
-                  <a:srgbClr val="404040"/>
-                </a:solidFill>
-                <a:latin typeface="Calibri"/>
-              </a:rPr>
-              <a:t>•  Contexte métier réel vécu en alternance (Prévifrance)</a:t>
+              <a:rPr sz="2100" dirty="0">
+                <a:solidFill>
+                  <a:srgbClr val="404040"/>
+                </a:solidFill>
+                <a:latin typeface="Calibri"/>
+              </a:rPr>
+              <a:t>•  </a:t>
+            </a:r>
+            <a:r>
+              <a:rPr sz="2100" dirty="0" err="1">
+                <a:solidFill>
+                  <a:srgbClr val="404040"/>
+                </a:solidFill>
+                <a:latin typeface="Calibri"/>
+              </a:rPr>
+              <a:t>Contexte</a:t>
+            </a:r>
+            <a:r>
+              <a:rPr sz="2100" dirty="0">
+                <a:solidFill>
+                  <a:srgbClr val="404040"/>
+                </a:solidFill>
+                <a:latin typeface="Calibri"/>
+              </a:rPr>
+              <a:t> métier </a:t>
+            </a:r>
+            <a:r>
+              <a:rPr sz="2100" dirty="0" err="1">
+                <a:solidFill>
+                  <a:srgbClr val="404040"/>
+                </a:solidFill>
+                <a:latin typeface="Calibri"/>
+              </a:rPr>
+              <a:t>réel</a:t>
+            </a:r>
+            <a:r>
+              <a:rPr sz="2100" dirty="0">
+                <a:solidFill>
+                  <a:srgbClr val="404040"/>
+                </a:solidFill>
+                <a:latin typeface="Calibri"/>
+              </a:rPr>
+              <a:t> </a:t>
+            </a:r>
+            <a:r>
+              <a:rPr sz="2100" dirty="0" err="1">
+                <a:solidFill>
+                  <a:srgbClr val="404040"/>
+                </a:solidFill>
+                <a:latin typeface="Calibri"/>
+              </a:rPr>
+              <a:t>vécu</a:t>
+            </a:r>
+            <a:r>
+              <a:rPr sz="2100" dirty="0">
+                <a:solidFill>
+                  <a:srgbClr val="404040"/>
+                </a:solidFill>
+                <a:latin typeface="Calibri"/>
+              </a:rPr>
+              <a:t> </a:t>
+            </a:r>
+            <a:r>
+              <a:rPr sz="2100" dirty="0" err="1">
+                <a:solidFill>
+                  <a:srgbClr val="404040"/>
+                </a:solidFill>
+                <a:latin typeface="Calibri"/>
+              </a:rPr>
+              <a:t>en</a:t>
+            </a:r>
+            <a:r>
+              <a:rPr sz="2100" dirty="0">
+                <a:solidFill>
+                  <a:srgbClr val="404040"/>
+                </a:solidFill>
+                <a:latin typeface="Calibri"/>
+              </a:rPr>
+              <a:t> alternance (</a:t>
+            </a:r>
+            <a:r>
+              <a:rPr sz="2100" dirty="0" err="1">
+                <a:solidFill>
+                  <a:srgbClr val="404040"/>
+                </a:solidFill>
+                <a:latin typeface="Calibri"/>
+              </a:rPr>
+              <a:t>Prévifrance</a:t>
+            </a:r>
+            <a:r>
+              <a:rPr sz="2100" dirty="0">
+                <a:solidFill>
+                  <a:srgbClr val="404040"/>
+                </a:solidFill>
+                <a:latin typeface="Calibri"/>
+              </a:rPr>
+              <a:t>)</a:t>
             </a:r>
           </a:p>
           <a:p>
@@ -7005,13 +7205,85 @@
               </a:spcAft>
             </a:pPr>
             <a:r>
-              <a:rPr sz="2100">
-                <a:solidFill>
-                  <a:srgbClr val="404040"/>
-                </a:solidFill>
-                <a:latin typeface="Calibri"/>
-              </a:rPr>
-              <a:t>•  Plateforme entièrement RECONSTRUITE pour ce dossier</a:t>
+              <a:rPr sz="2100" dirty="0">
+                <a:solidFill>
+                  <a:srgbClr val="404040"/>
+                </a:solidFill>
+                <a:latin typeface="Calibri"/>
+              </a:rPr>
+              <a:t>•  </a:t>
+            </a:r>
+            <a:r>
+              <a:rPr sz="2100" dirty="0" err="1">
+                <a:solidFill>
+                  <a:srgbClr val="404040"/>
+                </a:solidFill>
+                <a:latin typeface="Calibri"/>
+              </a:rPr>
+              <a:t>Plateforme</a:t>
+            </a:r>
+            <a:r>
+              <a:rPr sz="2100" dirty="0">
+                <a:solidFill>
+                  <a:srgbClr val="404040"/>
+                </a:solidFill>
+                <a:latin typeface="Calibri"/>
+              </a:rPr>
+              <a:t> </a:t>
+            </a:r>
+            <a:r>
+              <a:rPr sz="2100" dirty="0" err="1">
+                <a:solidFill>
+                  <a:srgbClr val="404040"/>
+                </a:solidFill>
+                <a:latin typeface="Calibri"/>
+              </a:rPr>
+              <a:t>entièrement</a:t>
+            </a:r>
+            <a:r>
+              <a:rPr sz="2100" dirty="0">
+                <a:solidFill>
+                  <a:srgbClr val="404040"/>
+                </a:solidFill>
+                <a:latin typeface="Calibri"/>
+              </a:rPr>
+              <a:t> </a:t>
+            </a:r>
+            <a:r>
+              <a:rPr lang="fr-FR" sz="2100" dirty="0">
+                <a:solidFill>
+                  <a:srgbClr val="404040"/>
+                </a:solidFill>
+                <a:latin typeface="Calibri"/>
+              </a:rPr>
+              <a:t>reconstruire</a:t>
+            </a:r>
+            <a:r>
+              <a:rPr sz="2100" dirty="0">
+                <a:solidFill>
+                  <a:srgbClr val="404040"/>
+                </a:solidFill>
+                <a:latin typeface="Calibri"/>
+              </a:rPr>
+              <a:t> pour </a:t>
+            </a:r>
+            <a:r>
+              <a:rPr sz="2100" dirty="0" err="1">
+                <a:solidFill>
+                  <a:srgbClr val="404040"/>
+                </a:solidFill>
+                <a:latin typeface="Calibri"/>
+              </a:rPr>
+              <a:t>ce</a:t>
+            </a:r>
+            <a:r>
+              <a:rPr sz="2100" dirty="0">
+                <a:solidFill>
+                  <a:srgbClr val="404040"/>
+                </a:solidFill>
+                <a:latin typeface="Calibri"/>
+              </a:rPr>
+              <a:t> dossier</a:t>
             </a:r>
           </a:p>
           <a:p>
@@ -7021,13 +7293,103 @@
               </a:spcAft>
             </a:pPr>
             <a:r>
-              <a:rPr sz="2100">
-                <a:solidFill>
-                  <a:srgbClr val="404040"/>
-                </a:solidFill>
-                <a:latin typeface="Calibri"/>
-              </a:rPr>
-              <a:t>•  Fichier INSEE réel · référentiel adhérents synthétique (Faker)</a:t>
+              <a:rPr sz="2100" dirty="0">
+                <a:solidFill>
+                  <a:srgbClr val="404040"/>
+                </a:solidFill>
+                <a:latin typeface="Calibri"/>
+              </a:rPr>
+              <a:t>•  </a:t>
+            </a:r>
+            <a:r>
+              <a:rPr sz="2100" dirty="0" err="1">
+                <a:solidFill>
+                  <a:srgbClr val="404040"/>
+                </a:solidFill>
+                <a:latin typeface="Calibri"/>
+              </a:rPr>
+              <a:t>Fichier</a:t>
+            </a:r>
+            <a:r>
+              <a:rPr sz="2100" dirty="0">
+                <a:solidFill>
+                  <a:srgbClr val="404040"/>
+                </a:solidFill>
+                <a:latin typeface="Calibri"/>
+              </a:rPr>
+              <a:t> INSEE </a:t>
+            </a:r>
+            <a:r>
+              <a:rPr sz="2100" dirty="0" err="1">
+                <a:solidFill>
+                  <a:srgbClr val="404040"/>
+                </a:solidFill>
+                <a:latin typeface="Calibri"/>
+              </a:rPr>
+              <a:t>réel</a:t>
+            </a:r>
+            <a:r>
+              <a:rPr sz="2100" dirty="0">
+                <a:solidFill>
+                  <a:srgbClr val="404040"/>
+                </a:solidFill>
+                <a:latin typeface="Calibri"/>
+              </a:rPr>
+              <a:t> · </a:t>
+            </a:r>
+            <a:r>
+              <a:rPr sz="2100" dirty="0" err="1">
+                <a:solidFill>
+                  <a:srgbClr val="404040"/>
+                </a:solidFill>
+                <a:latin typeface="Calibri"/>
+              </a:rPr>
+              <a:t>référentiel</a:t>
+            </a:r>
+            <a:r>
+              <a:rPr sz="2100" dirty="0">
+                <a:solidFill>
+                  <a:srgbClr val="404040"/>
+                </a:solidFill>
+                <a:latin typeface="Calibri"/>
+              </a:rPr>
+              <a:t> </a:t>
+            </a:r>
+            <a:r>
+              <a:rPr sz="2100" dirty="0" err="1">
+                <a:solidFill>
+                  <a:srgbClr val="404040"/>
+                </a:solidFill>
+                <a:latin typeface="Calibri"/>
+              </a:rPr>
+              <a:t>adhérents</a:t>
+            </a:r>
+            <a:r>
+              <a:rPr sz="2100" dirty="0">
+                <a:solidFill>
+                  <a:srgbClr val="404040"/>
+                </a:solidFill>
+                <a:latin typeface="Calibri"/>
+              </a:rPr>
+              <a:t> </a:t>
+            </a:r>
+            <a:r>
+              <a:rPr sz="2100" dirty="0" err="1">
+                <a:solidFill>
+                  <a:srgbClr val="404040"/>
+                </a:solidFill>
+                <a:latin typeface="Calibri"/>
+              </a:rPr>
+              <a:t>synthétique</a:t>
+            </a:r>
+            <a:r>
+              <a:rPr sz="2100" dirty="0">
+                <a:solidFill>
+                  <a:srgbClr val="404040"/>
+                </a:solidFill>
+                <a:latin typeface="Calibri"/>
+              </a:rPr>
+              <a:t> (Faker)</a:t>
             </a:r>
           </a:p>
           <a:p>
@@ -7037,14 +7399,101 @@
               </a:spcAft>
             </a:pPr>
             <a:r>
-              <a:rPr sz="2100">
-                <a:solidFill>
-                  <a:srgbClr val="404040"/>
-                </a:solidFill>
-                <a:latin typeface="Calibri"/>
-              </a:rPr>
-              <a:t>•  J'ai vécu en production l'ingestion Eckert et l'incident</a:t>
-            </a:r>
+              <a:rPr sz="2100" dirty="0">
+                <a:solidFill>
+                  <a:srgbClr val="404040"/>
+                </a:solidFill>
+                <a:latin typeface="Calibri"/>
+              </a:rPr>
+              <a:t>•  </a:t>
+            </a:r>
+            <a:r>
+              <a:rPr sz="2100" dirty="0" err="1">
+                <a:solidFill>
+                  <a:srgbClr val="404040"/>
+                </a:solidFill>
+                <a:latin typeface="Calibri"/>
+              </a:rPr>
+              <a:t>J'ai</a:t>
+            </a:r>
+            <a:r>
+              <a:rPr sz="2100" dirty="0">
+                <a:solidFill>
+                  <a:srgbClr val="404040"/>
+                </a:solidFill>
+                <a:latin typeface="Calibri"/>
+              </a:rPr>
+              <a:t> </a:t>
+            </a:r>
+            <a:r>
+              <a:rPr sz="2100" dirty="0" err="1">
+                <a:solidFill>
+                  <a:srgbClr val="404040"/>
+                </a:solidFill>
+                <a:latin typeface="Calibri"/>
+              </a:rPr>
+              <a:t>vécu</a:t>
+            </a:r>
+            <a:r>
+              <a:rPr sz="2100" dirty="0">
+                <a:solidFill>
+                  <a:srgbClr val="404040"/>
+                </a:solidFill>
+                <a:latin typeface="Calibri"/>
+              </a:rPr>
+              <a:t> </a:t>
+            </a:r>
+            <a:r>
+              <a:rPr sz="2100" dirty="0" err="1">
+                <a:solidFill>
+                  <a:srgbClr val="404040"/>
+                </a:solidFill>
+                <a:latin typeface="Calibri"/>
+              </a:rPr>
+              <a:t>en</a:t>
+            </a:r>
+            <a:r>
+              <a:rPr sz="2100" dirty="0">
+                <a:solidFill>
+                  <a:srgbClr val="404040"/>
+                </a:solidFill>
+                <a:latin typeface="Calibri"/>
+              </a:rPr>
+              <a:t> production </a:t>
+            </a:r>
+            <a:r>
+              <a:rPr sz="2100" dirty="0" err="1">
+                <a:solidFill>
+                  <a:srgbClr val="404040"/>
+                </a:solidFill>
+                <a:latin typeface="Calibri"/>
+              </a:rPr>
+              <a:t>l'ingestion</a:t>
+            </a:r>
+            <a:r>
+              <a:rPr sz="2100" dirty="0">
+                <a:solidFill>
+                  <a:srgbClr val="404040"/>
+                </a:solidFill>
+                <a:latin typeface="Calibri"/>
+              </a:rPr>
+              <a:t> Eckert et </a:t>
+            </a:r>
+            <a:r>
+              <a:rPr sz="2100" dirty="0" err="1">
+                <a:solidFill>
+                  <a:srgbClr val="404040"/>
+                </a:solidFill>
+                <a:latin typeface="Calibri"/>
+              </a:rPr>
+              <a:t>l'incident</a:t>
+            </a:r>
+            <a:endParaRPr sz="2100" dirty="0">
+              <a:solidFill>
+                <a:srgbClr val="404040"/>
+              </a:solidFill>
+              <a:latin typeface="Calibri"/>
+            </a:endParaRPr>
           </a:p>
         </p:txBody>
       </p:sp>
@@ -7057,7 +7506,7 @@
 </file>
 
 <file path=ppt/slides/slide4.xml><?xml version="1.0" encoding="utf-8"?>
-<p:sld xmlns:a="http://schemas.openxmlformats.org/drawingml/2006/main" xmlns:p="http://schemas.openxmlformats.org/presentationml/2006/main" xmlns:r="http://schemas.openxmlformats.org/officeDocument/2006/relationships">
+<p:sld xmlns:a="http://schemas.openxmlformats.org/drawingml/2006/main" xmlns:r="http://schemas.openxmlformats.org/officeDocument/2006/relationships" xmlns:p="http://schemas.openxmlformats.org/presentationml/2006/main">
   <p:cSld>
     <p:spTree>
       <p:nvGrpSpPr>
@@ -7065,7 +7514,14 @@
         <p:cNvGrpSpPr/>
         <p:nvPr/>
       </p:nvGrpSpPr>
-      <p:grpSpPr/>
+      <p:grpSpPr>
+        <a:xfrm>
+          <a:off x="0" y="0"/>
+          <a:ext cx="0" cy="0"/>
+          <a:chOff x="0" y="0"/>
+          <a:chExt cx="0" cy="0"/>
+        </a:xfrm>
+      </p:grpSpPr>
       <p:sp>
         <p:nvSpPr>
           <p:cNvPr id="2" name="TextBox 1"/>
@@ -7237,7 +7693,7 @@
 </file>
 
 <file path=ppt/slides/slide5.xml><?xml version="1.0" encoding="utf-8"?>
-<p:sld xmlns:a="http://schemas.openxmlformats.org/drawingml/2006/main" xmlns:p="http://schemas.openxmlformats.org/presentationml/2006/main" xmlns:r="http://schemas.openxmlformats.org/officeDocument/2006/relationships">
+<p:sld xmlns:a="http://schemas.openxmlformats.org/drawingml/2006/main" xmlns:r="http://schemas.openxmlformats.org/officeDocument/2006/relationships" xmlns:p="http://schemas.openxmlformats.org/presentationml/2006/main">
   <p:cSld>
     <p:spTree>
       <p:nvGrpSpPr>
@@ -7245,7 +7701,14 @@
         <p:cNvGrpSpPr/>
         <p:nvPr/>
       </p:nvGrpSpPr>
-      <p:grpSpPr/>
+      <p:grpSpPr>
+        <a:xfrm>
+          <a:off x="0" y="0"/>
+          <a:ext cx="0" cy="0"/>
+          <a:chOff x="0" y="0"/>
+          <a:chExt cx="0" cy="0"/>
+        </a:xfrm>
+      </p:grpSpPr>
       <p:sp>
         <p:nvSpPr>
           <p:cNvPr id="2" name="TextBox 1"/>
@@ -7401,7 +7864,7 @@
 </file>
 
 <file path=ppt/slides/slide6.xml><?xml version="1.0" encoding="utf-8"?>
-<p:sld xmlns:a="http://schemas.openxmlformats.org/drawingml/2006/main" xmlns:p="http://schemas.openxmlformats.org/presentationml/2006/main" xmlns:r="http://schemas.openxmlformats.org/officeDocument/2006/relationships">
+<p:sld xmlns:a="http://schemas.openxmlformats.org/drawingml/2006/main" xmlns:r="http://schemas.openxmlformats.org/officeDocument/2006/relationships" xmlns:p="http://schemas.openxmlformats.org/presentationml/2006/main">
   <p:cSld>
     <p:spTree>
       <p:nvGrpSpPr>
@@ -7409,7 +7872,14 @@
         <p:cNvGrpSpPr/>
         <p:nvPr/>
       </p:nvGrpSpPr>
-      <p:grpSpPr/>
+      <p:grpSpPr>
+        <a:xfrm>
+          <a:off x="0" y="0"/>
+          <a:ext cx="0" cy="0"/>
+          <a:chOff x="0" y="0"/>
+          <a:chExt cx="0" cy="0"/>
+        </a:xfrm>
+      </p:grpSpPr>
       <p:sp>
         <p:nvSpPr>
           <p:cNvPr id="2" name="TextBox 1"/>
@@ -7581,7 +8051,7 @@
 </file>
 
 <file path=ppt/slides/slide7.xml><?xml version="1.0" encoding="utf-8"?>
-<p:sld xmlns:a="http://schemas.openxmlformats.org/drawingml/2006/main" xmlns:p="http://schemas.openxmlformats.org/presentationml/2006/main" xmlns:r="http://schemas.openxmlformats.org/officeDocument/2006/relationships">
+<p:sld xmlns:a="http://schemas.openxmlformats.org/drawingml/2006/main" xmlns:r="http://schemas.openxmlformats.org/officeDocument/2006/relationships" xmlns:p="http://schemas.openxmlformats.org/presentationml/2006/main">
   <p:cSld>
     <p:spTree>
       <p:nvGrpSpPr>
@@ -7589,7 +8059,14 @@
         <p:cNvGrpSpPr/>
         <p:nvPr/>
       </p:nvGrpSpPr>
-      <p:grpSpPr/>
+      <p:grpSpPr>
+        <a:xfrm>
+          <a:off x="0" y="0"/>
+          <a:ext cx="0" cy="0"/>
+          <a:chOff x="0" y="0"/>
+          <a:chExt cx="0" cy="0"/>
+        </a:xfrm>
+      </p:grpSpPr>
       <p:sp>
         <p:nvSpPr>
           <p:cNvPr id="2" name="TextBox 1"/>
@@ -7674,7 +8151,7 @@
         <p:spPr>
           <a:xfrm>
             <a:off x="600000" y="1650000"/>
-            <a:ext cx="11000000" cy="4600000"/>
+            <a:ext cx="11000000" cy="1769715"/>
           </a:xfrm>
           <a:prstGeom prst="rect">
             <a:avLst/>
@@ -7693,13 +8170,31 @@
               </a:spcAft>
             </a:pPr>
             <a:r>
-              <a:rPr sz="2100">
-                <a:solidFill>
-                  <a:srgbClr val="404040"/>
-                </a:solidFill>
-                <a:latin typeface="Calibri"/>
-              </a:rPr>
-              <a:t>•  bronze (brut) · silver (typé) · gold (métier) · ops (journal)</a:t>
+              <a:rPr sz="2100" dirty="0">
+                <a:solidFill>
+                  <a:srgbClr val="404040"/>
+                </a:solidFill>
+                <a:latin typeface="Calibri"/>
+              </a:rPr>
+              <a:t>•  bronze (brut) · silver (</a:t>
+            </a:r>
+            <a:r>
+              <a:rPr sz="2100" dirty="0" err="1">
+                <a:solidFill>
+                  <a:srgbClr val="404040"/>
+                </a:solidFill>
+                <a:latin typeface="Calibri"/>
+              </a:rPr>
+              <a:t>typé</a:t>
+            </a:r>
+            <a:r>
+              <a:rPr sz="2100" dirty="0">
+                <a:solidFill>
+                  <a:srgbClr val="404040"/>
+                </a:solidFill>
+                <a:latin typeface="Calibri"/>
+              </a:rPr>
+              <a:t>) · gold (métier) · ops (journal)</a:t>
             </a:r>
           </a:p>
           <a:p>
@@ -7709,14 +8204,65 @@
               </a:spcAft>
             </a:pPr>
             <a:r>
-              <a:rPr sz="2100">
-                <a:solidFill>
-                  <a:srgbClr val="404040"/>
-                </a:solidFill>
-                <a:latin typeface="Calibri"/>
-              </a:rPr>
-              <a:t>•  Deux rôles : le pipeline écrit, le métier lit gold seulement</a:t>
-            </a:r>
+              <a:rPr sz="2100" dirty="0">
+                <a:solidFill>
+                  <a:srgbClr val="404040"/>
+                </a:solidFill>
+                <a:latin typeface="Calibri"/>
+              </a:rPr>
+              <a:t>•  Deux </a:t>
+            </a:r>
+            <a:r>
+              <a:rPr sz="2100" dirty="0" err="1">
+                <a:solidFill>
+                  <a:srgbClr val="404040"/>
+                </a:solidFill>
+                <a:latin typeface="Calibri"/>
+              </a:rPr>
+              <a:t>rôles</a:t>
+            </a:r>
+            <a:r>
+              <a:rPr sz="2100" dirty="0">
+                <a:solidFill>
+                  <a:srgbClr val="404040"/>
+                </a:solidFill>
+                <a:latin typeface="Calibri"/>
+              </a:rPr>
+              <a:t> : le pipeline </a:t>
+            </a:r>
+            <a:r>
+              <a:rPr sz="2100" dirty="0" err="1">
+                <a:solidFill>
+                  <a:srgbClr val="404040"/>
+                </a:solidFill>
+                <a:latin typeface="Calibri"/>
+              </a:rPr>
+              <a:t>écrit</a:t>
+            </a:r>
+            <a:r>
+              <a:rPr sz="2100" dirty="0">
+                <a:solidFill>
+                  <a:srgbClr val="404040"/>
+                </a:solidFill>
+                <a:latin typeface="Calibri"/>
+              </a:rPr>
+              <a:t>, le métier lit gold </a:t>
+            </a:r>
+            <a:r>
+              <a:rPr sz="2100" dirty="0" err="1">
+                <a:solidFill>
+                  <a:srgbClr val="404040"/>
+                </a:solidFill>
+                <a:latin typeface="Calibri"/>
+              </a:rPr>
+              <a:t>seulement</a:t>
+            </a:r>
+            <a:endParaRPr sz="2100" dirty="0">
+              <a:solidFill>
+                <a:srgbClr val="404040"/>
+              </a:solidFill>
+              <a:latin typeface="Calibri"/>
+            </a:endParaRPr>
           </a:p>
           <a:p>
             <a:pPr>
@@ -7725,13 +8271,121 @@
               </a:spcAft>
             </a:pPr>
             <a:r>
-              <a:rPr sz="2100">
-                <a:solidFill>
-                  <a:srgbClr val="404040"/>
-                </a:solidFill>
-                <a:latin typeface="Calibri"/>
-              </a:rPr>
-              <a:t>•  Le rôle lecture ne peut ni écrire ni lire le brut — TESTÉ</a:t>
+              <a:rPr sz="2100" dirty="0">
+                <a:solidFill>
+                  <a:srgbClr val="404040"/>
+                </a:solidFill>
+                <a:latin typeface="Calibri"/>
+              </a:rPr>
+              <a:t>•  Le </a:t>
+            </a:r>
+            <a:r>
+              <a:rPr sz="2100" dirty="0" err="1">
+                <a:solidFill>
+                  <a:srgbClr val="404040"/>
+                </a:solidFill>
+                <a:latin typeface="Calibri"/>
+              </a:rPr>
+              <a:t>rôle</a:t>
+            </a:r>
+            <a:r>
+              <a:rPr sz="2100" dirty="0">
+                <a:solidFill>
+                  <a:srgbClr val="404040"/>
+                </a:solidFill>
+                <a:latin typeface="Calibri"/>
+              </a:rPr>
+              <a:t> lecture ne </a:t>
+            </a:r>
+            <a:r>
+              <a:rPr sz="2100" dirty="0" err="1">
+                <a:solidFill>
+                  <a:srgbClr val="404040"/>
+                </a:solidFill>
+                <a:latin typeface="Calibri"/>
+              </a:rPr>
+              <a:t>peut</a:t>
+            </a:r>
+            <a:r>
+              <a:rPr sz="2100" dirty="0">
+                <a:solidFill>
+                  <a:srgbClr val="404040"/>
+                </a:solidFill>
+                <a:latin typeface="Calibri"/>
+              </a:rPr>
+              <a:t> </a:t>
+            </a:r>
+            <a:r>
+              <a:rPr sz="2100" dirty="0" err="1">
+                <a:solidFill>
+                  <a:srgbClr val="404040"/>
+                </a:solidFill>
+                <a:latin typeface="Calibri"/>
+              </a:rPr>
+              <a:t>ni</a:t>
+            </a:r>
+            <a:r>
+              <a:rPr sz="2100" dirty="0">
+                <a:solidFill>
+                  <a:srgbClr val="404040"/>
+                </a:solidFill>
+                <a:latin typeface="Calibri"/>
+              </a:rPr>
+              <a:t> </a:t>
+            </a:r>
+            <a:r>
+              <a:rPr sz="2100" dirty="0" err="1">
+                <a:solidFill>
+                  <a:srgbClr val="404040"/>
+                </a:solidFill>
+                <a:latin typeface="Calibri"/>
+              </a:rPr>
+              <a:t>écrire</a:t>
+            </a:r>
+            <a:r>
+              <a:rPr sz="2100" dirty="0">
+                <a:solidFill>
+                  <a:srgbClr val="404040"/>
+                </a:solidFill>
+                <a:latin typeface="Calibri"/>
+              </a:rPr>
+              <a:t> </a:t>
+            </a:r>
+            <a:r>
+              <a:rPr sz="2100" dirty="0" err="1">
+                <a:solidFill>
+                  <a:srgbClr val="404040"/>
+                </a:solidFill>
+                <a:latin typeface="Calibri"/>
+              </a:rPr>
+              <a:t>ni</a:t>
+            </a:r>
+            <a:r>
+              <a:rPr sz="2100" dirty="0">
+                <a:solidFill>
+                  <a:srgbClr val="404040"/>
+                </a:solidFill>
+                <a:latin typeface="Calibri"/>
+              </a:rPr>
+              <a:t> lire le brut</a:t>
+            </a:r>
+            <a:r>
+              <a:rPr lang="fr-FR" sz="2100" dirty="0">
+                <a:solidFill>
+                  <a:srgbClr val="404040"/>
+                </a:solidFill>
+                <a:latin typeface="Calibri"/>
+              </a:rPr>
+              <a:t> -&gt;</a:t>
+            </a:r>
+            <a:r>
+              <a:rPr sz="2100" dirty="0">
+                <a:solidFill>
+                  <a:srgbClr val="404040"/>
+                </a:solidFill>
+                <a:latin typeface="Calibri"/>
+              </a:rPr>
+              <a:t> TESTÉ</a:t>
             </a:r>
           </a:p>
           <a:p>
@@ -7741,14 +8395,83 @@
               </a:spcAft>
             </a:pPr>
             <a:r>
-              <a:rPr sz="2100">
-                <a:solidFill>
-                  <a:srgbClr val="404040"/>
-                </a:solidFill>
-                <a:latin typeface="Calibri"/>
-              </a:rPr>
-              <a:t>•  Le métier consomme une vue déjà priorisée</a:t>
-            </a:r>
+              <a:rPr sz="2100" dirty="0">
+                <a:solidFill>
+                  <a:srgbClr val="404040"/>
+                </a:solidFill>
+                <a:latin typeface="Calibri"/>
+              </a:rPr>
+              <a:t>•  Le métier </a:t>
+            </a:r>
+            <a:r>
+              <a:rPr sz="2100" dirty="0" err="1">
+                <a:solidFill>
+                  <a:srgbClr val="404040"/>
+                </a:solidFill>
+                <a:latin typeface="Calibri"/>
+              </a:rPr>
+              <a:t>consomme</a:t>
+            </a:r>
+            <a:r>
+              <a:rPr sz="2100" dirty="0">
+                <a:solidFill>
+                  <a:srgbClr val="404040"/>
+                </a:solidFill>
+                <a:latin typeface="Calibri"/>
+              </a:rPr>
+              <a:t> </a:t>
+            </a:r>
+            <a:r>
+              <a:rPr sz="2100" dirty="0" err="1">
+                <a:solidFill>
+                  <a:srgbClr val="404040"/>
+                </a:solidFill>
+                <a:latin typeface="Calibri"/>
+              </a:rPr>
+              <a:t>une</a:t>
+            </a:r>
+            <a:r>
+              <a:rPr sz="2100" dirty="0">
+                <a:solidFill>
+                  <a:srgbClr val="404040"/>
+                </a:solidFill>
+                <a:latin typeface="Calibri"/>
+              </a:rPr>
+              <a:t> </a:t>
+            </a:r>
+            <a:r>
+              <a:rPr sz="2100" dirty="0" err="1">
+                <a:solidFill>
+                  <a:srgbClr val="404040"/>
+                </a:solidFill>
+                <a:latin typeface="Calibri"/>
+              </a:rPr>
+              <a:t>vue</a:t>
+            </a:r>
+            <a:r>
+              <a:rPr sz="2100" dirty="0">
+                <a:solidFill>
+                  <a:srgbClr val="404040"/>
+                </a:solidFill>
+                <a:latin typeface="Calibri"/>
+              </a:rPr>
+              <a:t> déjà </a:t>
+            </a:r>
+            <a:r>
+              <a:rPr sz="2100" dirty="0" err="1">
+                <a:solidFill>
+                  <a:srgbClr val="404040"/>
+                </a:solidFill>
+                <a:latin typeface="Calibri"/>
+              </a:rPr>
+              <a:t>priorisée</a:t>
+            </a:r>
+            <a:endParaRPr sz="2100" dirty="0">
+              <a:solidFill>
+                <a:srgbClr val="404040"/>
+              </a:solidFill>
+              <a:latin typeface="Calibri"/>
+            </a:endParaRPr>
           </a:p>
         </p:txBody>
       </p:sp>
@@ -7761,7 +8484,7 @@
 </file>
 
 <file path=ppt/slides/slide8.xml><?xml version="1.0" encoding="utf-8"?>
-<p:sld xmlns:a="http://schemas.openxmlformats.org/drawingml/2006/main" xmlns:p="http://schemas.openxmlformats.org/presentationml/2006/main" xmlns:r="http://schemas.openxmlformats.org/officeDocument/2006/relationships">
+<p:sld xmlns:a="http://schemas.openxmlformats.org/drawingml/2006/main" xmlns:r="http://schemas.openxmlformats.org/officeDocument/2006/relationships" xmlns:p="http://schemas.openxmlformats.org/presentationml/2006/main">
   <p:cSld>
     <p:spTree>
       <p:nvGrpSpPr>
@@ -7769,7 +8492,14 @@
         <p:cNvGrpSpPr/>
         <p:nvPr/>
       </p:nvGrpSpPr>
-      <p:grpSpPr/>
+      <p:grpSpPr>
+        <a:xfrm>
+          <a:off x="0" y="0"/>
+          <a:ext cx="0" cy="0"/>
+          <a:chOff x="0" y="0"/>
+          <a:chExt cx="0" cy="0"/>
+        </a:xfrm>
+      </p:grpSpPr>
       <p:sp>
         <p:nvSpPr>
           <p:cNvPr id="2" name="TextBox 1"/>
@@ -7941,7 +8671,7 @@
 </file>
 
 <file path=ppt/slides/slide9.xml><?xml version="1.0" encoding="utf-8"?>
-<p:sld xmlns:a="http://schemas.openxmlformats.org/drawingml/2006/main" xmlns:p="http://schemas.openxmlformats.org/presentationml/2006/main" xmlns:r="http://schemas.openxmlformats.org/officeDocument/2006/relationships">
+<p:sld xmlns:a="http://schemas.openxmlformats.org/drawingml/2006/main" xmlns:r="http://schemas.openxmlformats.org/officeDocument/2006/relationships" xmlns:p="http://schemas.openxmlformats.org/presentationml/2006/main">
   <p:cSld>
     <p:spTree>
       <p:nvGrpSpPr>
@@ -7949,7 +8679,14 @@
         <p:cNvGrpSpPr/>
         <p:nvPr/>
       </p:nvGrpSpPr>
-      <p:grpSpPr/>
+      <p:grpSpPr>
+        <a:xfrm>
+          <a:off x="0" y="0"/>
+          <a:ext cx="0" cy="0"/>
+          <a:chOff x="0" y="0"/>
+          <a:chExt cx="0" cy="0"/>
+        </a:xfrm>
+      </p:grpSpPr>
       <p:sp>
         <p:nvSpPr>
           <p:cNvPr id="2" name="TextBox 1"/>
@@ -8073,7 +8810,7 @@
           <p:nvPr/>
         </p:nvPicPr>
         <p:blipFill>
-          <a:blip r:embed="rId2"/>
+          <a:blip r:embed="rId3"/>
           <a:stretch>
             <a:fillRect/>
           </a:stretch>
@@ -8417,7 +9154,7 @@
 </file>
 
 <file path=ppt/theme/theme2.xml><?xml version="1.0" encoding="utf-8"?>
-<a:theme xmlns:a="http://schemas.openxmlformats.org/drawingml/2006/main" name="Office Theme">
+<a:theme xmlns:a="http://schemas.openxmlformats.org/drawingml/2006/main" name="Thème Office">
   <a:themeElements>
     <a:clrScheme name="Office">
       <a:dk1>
@@ -8427,44 +9164,44 @@
         <a:sysClr val="window" lastClr="FFFFFF"/>
       </a:lt1>
       <a:dk2>
-        <a:srgbClr val="1F497D"/>
+        <a:srgbClr val="0E2841"/>
       </a:dk2>
       <a:lt2>
-        <a:srgbClr val="EEECE1"/>
+        <a:srgbClr val="E8E8E8"/>
       </a:lt2>
       <a:accent1>
-        <a:srgbClr val="4F81BD"/>
+        <a:srgbClr val="156082"/>
       </a:accent1>
       <a:accent2>
-        <a:srgbClr val="C0504D"/>
+        <a:srgbClr val="E97132"/>
       </a:accent2>
       <a:accent3>
-        <a:srgbClr val="9BBB59"/>
+        <a:srgbClr val="196B24"/>
       </a:accent3>
       <a:accent4>
-        <a:srgbClr val="8064A2"/>
+        <a:srgbClr val="0F9ED5"/>
       </a:accent4>
       <a:accent5>
-        <a:srgbClr val="4BACC6"/>
+        <a:srgbClr val="A02B93"/>
       </a:accent5>
       <a:accent6>
-        <a:srgbClr val="F79646"/>
+        <a:srgbClr val="4EA72E"/>
       </a:accent6>
       <a:hlink>
-        <a:srgbClr val="0000FF"/>
+        <a:srgbClr val="467886"/>
       </a:hlink>
       <a:folHlink>
-        <a:srgbClr val="800080"/>
+        <a:srgbClr val="96607D"/>
       </a:folHlink>
     </a:clrScheme>
     <a:fontScheme name="Office">
       <a:majorFont>
-        <a:latin typeface="Calibri"/>
+        <a:latin typeface="Aptos Display" panose="02110004020202020204"/>
         <a:ea typeface=""/>
         <a:cs typeface=""/>
-        <a:font script="Jpan" typeface="ＭＳ Ｐゴシック"/>
+        <a:font script="Jpan" typeface="游ゴシック Light"/>
         <a:font script="Hang" typeface="맑은 고딕"/>
-        <a:font script="Hans" typeface="宋体"/>
+        <a:font script="Hans" typeface="等线 Light"/>
         <a:font script="Hant" typeface="新細明體"/>
         <a:font script="Arab" typeface="Times New Roman"/>
         <a:font script="Hebr" typeface="Times New Roman"/>
@@ -8492,14 +9229,31 @@
         <a:font script="Viet" typeface="Times New Roman"/>
         <a:font script="Uigh" typeface="Microsoft Uighur"/>
         <a:font script="Geor" typeface="Sylfaen"/>
+        <a:font script="Armn" typeface="Arial"/>
+        <a:font script="Bugi" typeface="Leelawadee UI"/>
+        <a:font script="Bopo" typeface="Microsoft JhengHei"/>
+        <a:font script="Java" typeface="Javanese Text"/>
+        <a:font script="Lisu" typeface="Segoe UI"/>
+        <a:font script="Mymr" typeface="Myanmar Text"/>
+        <a:font script="Nkoo" typeface="Ebrima"/>
+        <a:font script="Olck" typeface="Nirmala UI"/>
+        <a:font script="Osma" typeface="Ebrima"/>
+        <a:font script="Phag" typeface="Phagspa"/>
+        <a:font script="Syrn" typeface="Estrangelo Edessa"/>
+        <a:font script="Syrj" typeface="Estrangelo Edessa"/>
+        <a:font script="Syre" typeface="Estrangelo Edessa"/>
+        <a:font script="Sora" typeface="Nirmala UI"/>
+        <a:font script="Tale" typeface="Microsoft Tai Le"/>
+        <a:font script="Talu" typeface="Microsoft New Tai Lue"/>
+        <a:font script="Tfng" typeface="Ebrima"/>
       </a:majorFont>
       <a:minorFont>
-        <a:latin typeface="Calibri"/>
+        <a:latin typeface="Aptos" panose="02110004020202020204"/>
         <a:ea typeface=""/>
         <a:cs typeface=""/>
-        <a:font script="Jpan" typeface="ＭＳ Ｐゴシック"/>
+        <a:font script="Jpan" typeface="游ゴシック"/>
         <a:font script="Hang" typeface="맑은 고딕"/>
-        <a:font script="Hans" typeface="宋体"/>
+        <a:font script="Hans" typeface="等线"/>
         <a:font script="Hant" typeface="新細明體"/>
         <a:font script="Arab" typeface="Arial"/>
         <a:font script="Hebr" typeface="Arial"/>
@@ -8527,6 +9281,23 @@
         <a:font script="Viet" typeface="Arial"/>
         <a:font script="Uigh" typeface="Microsoft Uighur"/>
         <a:font script="Geor" typeface="Sylfaen"/>
+        <a:font script="Armn" typeface="Arial"/>
+        <a:font script="Bugi" typeface="Leelawadee UI"/>
+        <a:font script="Bopo" typeface="Microsoft JhengHei"/>
+        <a:font script="Java" typeface="Javanese Text"/>
+        <a:font script="Lisu" typeface="Segoe UI"/>
+        <a:font script="Mymr" typeface="Myanmar Text"/>
+        <a:font script="Nkoo" typeface="Ebrima"/>
+        <a:font script="Olck" typeface="Nirmala UI"/>
+        <a:font script="Osma" typeface="Ebrima"/>
+        <a:font script="Phag" typeface="Phagspa"/>
+        <a:font script="Syrn" typeface="Estrangelo Edessa"/>
+        <a:font script="Syrj" typeface="Estrangelo Edessa"/>
+        <a:font script="Syre" typeface="Estrangelo Edessa"/>
+        <a:font script="Sora" typeface="Nirmala UI"/>
+        <a:font script="Tale" typeface="Microsoft Tai Le"/>
+        <a:font script="Talu" typeface="Microsoft New Tai Lue"/>
+        <a:font script="Tfng" typeface="Ebrima"/>
       </a:minorFont>
     </a:fontScheme>
     <a:fmtScheme name="Office">
@@ -8538,180 +9309,136 @@
           <a:gsLst>
             <a:gs pos="0">
               <a:schemeClr val="phClr">
-                <a:tint val="50000"/>
-                <a:satMod val="300000"/>
+                <a:lumMod val="110000"/>
+                <a:satMod val="105000"/>
+                <a:tint val="67000"/>
               </a:schemeClr>
             </a:gs>
-            <a:gs pos="35000">
+            <a:gs pos="50000">
               <a:schemeClr val="phClr">
-                <a:tint val="37000"/>
-                <a:satMod val="300000"/>
+                <a:lumMod val="105000"/>
+                <a:satMod val="103000"/>
+                <a:tint val="73000"/>
               </a:schemeClr>
             </a:gs>
             <a:gs pos="100000">
               <a:schemeClr val="phClr">
-                <a:tint val="15000"/>
-                <a:satMod val="350000"/>
+                <a:lumMod val="105000"/>
+                <a:satMod val="109000"/>
+                <a:tint val="81000"/>
               </a:schemeClr>
             </a:gs>
           </a:gsLst>
-          <a:lin ang="16200000" scaled="1"/>
+          <a:lin ang="5400000" scaled="0"/>
         </a:gradFill>
         <a:gradFill rotWithShape="1">
           <a:gsLst>
             <a:gs pos="0">
               <a:schemeClr val="phClr">
-                <a:tint val="100000"/>
+                <a:satMod val="103000"/>
+                <a:lumMod val="102000"/>
+                <a:tint val="94000"/>
+              </a:schemeClr>
+            </a:gs>
+            <a:gs pos="50000">
+              <a:schemeClr val="phClr">
+                <a:satMod val="110000"/>
+                <a:lumMod val="100000"/>
                 <a:shade val="100000"/>
-                <a:satMod val="130000"/>
               </a:schemeClr>
             </a:gs>
             <a:gs pos="100000">
               <a:schemeClr val="phClr">
-                <a:tint val="50000"/>
-                <a:shade val="100000"/>
-                <a:satMod val="350000"/>
+                <a:lumMod val="99000"/>
+                <a:satMod val="120000"/>
+                <a:shade val="78000"/>
               </a:schemeClr>
             </a:gs>
           </a:gsLst>
-          <a:lin ang="16200000" scaled="0"/>
+          <a:lin ang="5400000" scaled="0"/>
         </a:gradFill>
       </a:fillStyleLst>
       <a:lnStyleLst>
-        <a:ln w="9525" cap="flat" cmpd="sng" algn="ctr">
+        <a:ln w="12700" cap="flat" cmpd="sng" algn="ctr">
           <a:solidFill>
-            <a:schemeClr val="phClr">
-              <a:shade val="95000"/>
-              <a:satMod val="105000"/>
-            </a:schemeClr>
+            <a:schemeClr val="phClr"/>
           </a:solidFill>
           <a:prstDash val="solid"/>
+          <a:miter lim="800000"/>
+        </a:ln>
+        <a:ln w="19050" cap="flat" cmpd="sng" algn="ctr">
+          <a:solidFill>
+            <a:schemeClr val="phClr"/>
+          </a:solidFill>
+          <a:prstDash val="solid"/>
+          <a:miter lim="800000"/>
         </a:ln>
         <a:ln w="25400" cap="flat" cmpd="sng" algn="ctr">
           <a:solidFill>
             <a:schemeClr val="phClr"/>
           </a:solidFill>
           <a:prstDash val="solid"/>
-        </a:ln>
-        <a:ln w="38100" cap="flat" cmpd="sng" algn="ctr">
-          <a:solidFill>
-            <a:schemeClr val="phClr"/>
-          </a:solidFill>
-          <a:prstDash val="solid"/>
+          <a:miter lim="800000"/>
         </a:ln>
       </a:lnStyleLst>
       <a:effectStyleLst>
         <a:effectStyle>
+          <a:effectLst/>
+        </a:effectStyle>
+        <a:effectStyle>
+          <a:effectLst/>
+        </a:effectStyle>
+        <a:effectStyle>
           <a:effectLst>
-            <a:outerShdw blurRad="40000" dist="20000" dir="5400000" rotWithShape="0">
+            <a:outerShdw blurRad="57150" dist="19050" dir="5400000" algn="ctr" rotWithShape="0">
               <a:srgbClr val="000000">
-                <a:alpha val="38000"/>
+                <a:alpha val="63000"/>
               </a:srgbClr>
             </a:outerShdw>
           </a:effectLst>
-        </a:effectStyle>
-        <a:effectStyle>
-          <a:effectLst>
-            <a:outerShdw blurRad="40000" dist="23000" dir="5400000" rotWithShape="0">
-              <a:srgbClr val="000000">
-                <a:alpha val="35000"/>
-              </a:srgbClr>
-            </a:outerShdw>
-          </a:effectLst>
-        </a:effectStyle>
-        <a:effectStyle>
-          <a:effectLst>
-            <a:outerShdw blurRad="40000" dist="23000" dir="5400000" rotWithShape="0">
-              <a:srgbClr val="000000">
-                <a:alpha val="35000"/>
-              </a:srgbClr>
-            </a:outerShdw>
-          </a:effectLst>
-          <a:scene3d>
-            <a:camera prst="orthographicFront">
-              <a:rot lat="0" lon="0" rev="0"/>
-            </a:camera>
-            <a:lightRig rig="threePt" dir="t">
-              <a:rot lat="0" lon="0" rev="1200000"/>
-            </a:lightRig>
-          </a:scene3d>
-          <a:sp3d>
-            <a:bevelT w="63500" h="25400"/>
-          </a:sp3d>
         </a:effectStyle>
       </a:effectStyleLst>
       <a:bgFillStyleLst>
         <a:solidFill>
           <a:schemeClr val="phClr"/>
         </a:solidFill>
+        <a:solidFill>
+          <a:schemeClr val="phClr">
+            <a:tint val="95000"/>
+            <a:satMod val="170000"/>
+          </a:schemeClr>
+        </a:solidFill>
         <a:gradFill rotWithShape="1">
           <a:gsLst>
             <a:gs pos="0">
               <a:schemeClr val="phClr">
-                <a:tint val="40000"/>
-                <a:satMod val="350000"/>
+                <a:tint val="93000"/>
+                <a:satMod val="150000"/>
+                <a:shade val="98000"/>
+                <a:lumMod val="102000"/>
               </a:schemeClr>
             </a:gs>
-            <a:gs pos="40000">
+            <a:gs pos="50000">
               <a:schemeClr val="phClr">
-                <a:tint val="45000"/>
-                <a:shade val="99000"/>
-                <a:satMod val="350000"/>
+                <a:tint val="98000"/>
+                <a:satMod val="130000"/>
+                <a:shade val="90000"/>
+                <a:lumMod val="103000"/>
               </a:schemeClr>
             </a:gs>
             <a:gs pos="100000">
               <a:schemeClr val="phClr">
-                <a:shade val="20000"/>
-                <a:satMod val="255000"/>
+                <a:shade val="63000"/>
+                <a:satMod val="120000"/>
               </a:schemeClr>
             </a:gs>
           </a:gsLst>
-          <a:path path="circle">
-            <a:fillToRect l="50000" t="-80000" r="50000" b="180000"/>
-          </a:path>
-        </a:gradFill>
-        <a:gradFill rotWithShape="1">
-          <a:gsLst>
-            <a:gs pos="0">
-              <a:schemeClr val="phClr">
-                <a:tint val="80000"/>
-                <a:satMod val="300000"/>
-              </a:schemeClr>
-            </a:gs>
-            <a:gs pos="100000">
-              <a:schemeClr val="phClr">
-                <a:shade val="30000"/>
-                <a:satMod val="200000"/>
-              </a:schemeClr>
-            </a:gs>
-          </a:gsLst>
-          <a:path path="circle">
-            <a:fillToRect l="50000" t="50000" r="50000" b="50000"/>
-          </a:path>
+          <a:lin ang="5400000" scaled="0"/>
         </a:gradFill>
       </a:bgFillStyleLst>
     </a:fmtScheme>
   </a:themeElements>
   <a:objectDefaults>
-    <a:spDef>
-      <a:spPr/>
-      <a:bodyPr/>
-      <a:lstStyle/>
-      <a:style>
-        <a:lnRef idx="1">
-          <a:schemeClr val="accent1"/>
-        </a:lnRef>
-        <a:fillRef idx="3">
-          <a:schemeClr val="accent1"/>
-        </a:fillRef>
-        <a:effectRef idx="2">
-          <a:schemeClr val="accent1"/>
-        </a:effectRef>
-        <a:fontRef idx="minor">
-          <a:schemeClr val="lt1"/>
-        </a:fontRef>
-      </a:style>
-    </a:spDef>
     <a:lnDef>
       <a:spPr/>
       <a:bodyPr/>
@@ -8733,5 +9460,10 @@
     </a:lnDef>
   </a:objectDefaults>
   <a:extraClrSchemeLst/>
+  <a:extLst>
+    <a:ext uri="{05A4C25C-085E-4340-85A3-A5531E510DB2}">
+      <thm15:themeFamily xmlns:thm15="http://schemas.microsoft.com/office/thememl/2012/main" name="Office Theme" id="{2E142A2C-CD16-42D6-873A-C26D2A0506FA}" vid="{1BDDFF52-6CD6-40A5-AB3C-68EB2F1E4D0A}"/>
+    </a:ext>
+  </a:extLst>
 </a:theme>
 </file>
--- a/soutenance/support_eckert.pptx
+++ b/soutenance/support_eckert.pptx
@@ -721,13 +721,7 @@
         <p:txBody>
           <a:bodyPr/>
           <a:lstStyle/>
-          <a:p>
-            <a:r>
-              <a:rPr lang="fr-FR" dirty="0"/>
-              <a:t>=</a:t>
-            </a:r>
-            <a:endParaRPr dirty="0"/>
-          </a:p>
+          <a:p/>
         </p:txBody>
       </p:sp>
       <p:sp>
@@ -4976,7 +4970,7 @@
           <a:p>
             <a:pPr>
               <a:spcAft>
-                <a:spcPts val="1000"/>
+                <a:spcPts val="800"/>
               </a:spcAft>
             </a:pPr>
             <a:r>
@@ -4986,7 +4980,23 @@
                 </a:solidFill>
                 <a:latin typeface="Calibri"/>
               </a:rPr>
-              <a:t>•  Rapprochement sur cluster · 3 niveaux CERTAIN / PROBABLE / A_VERIFIER · app FINISHED</a:t>
+              <a:t>•  Postgres stocke ; Spark lit/écrit via JDBC · INSEE partiel reconstruit</a:t>
+            </a:r>
+          </a:p>
+          <a:p>
+            <a:pPr>
+              <a:spcAft>
+                <a:spcPts val="800"/>
+              </a:spcAft>
+            </a:pPr>
+            <a:r>
+              <a:rPr sz="1700">
+                <a:solidFill>
+                  <a:srgbClr val="404040"/>
+                </a:solidFill>
+                <a:latin typeface="Calibri"/>
+              </a:rPr>
+              <a:t>•  3 niveaux · 4 162 contrats · 88 M€ certain · Spark justifié par le cumul</a:t>
             </a:r>
           </a:p>
         </p:txBody>
@@ -7979,7 +7989,7 @@
           <a:p>
             <a:pPr>
               <a:spcAft>
-                <a:spcPts val="1000"/>
+                <a:spcPts val="800"/>
               </a:spcAft>
             </a:pPr>
             <a:r>
@@ -7989,13 +7999,13 @@
                 </a:solidFill>
                 <a:latin typeface="Calibri"/>
               </a:rPr>
-              <a:t>•  Local (retenu) : ~ coût du temps humain seul</a:t>
+              <a:t>•  Local : logiciel gratuit, mais ~45 €/mois de temps humain (+ ~1 350 € de build)</a:t>
             </a:r>
           </a:p>
           <a:p>
             <a:pPr>
               <a:spcAft>
-                <a:spcPts val="1000"/>
+                <a:spcPts val="800"/>
               </a:spcAft>
             </a:pPr>
             <a:r>
@@ -8005,13 +8015,13 @@
                 </a:solidFill>
                 <a:latin typeface="Calibri"/>
               </a:rPr>
-              <a:t>•  Cloud Azure : ~ 50 à 145 € / mois</a:t>
+              <a:t>•  Cloud Azure (ressources détaillées) : ~30 – 90 €/mois</a:t>
             </a:r>
           </a:p>
           <a:p>
             <a:pPr>
               <a:spcAft>
-                <a:spcPts val="1000"/>
+                <a:spcPts val="800"/>
               </a:spcAft>
             </a:pPr>
             <a:r>
@@ -8021,13 +8031,13 @@
                 </a:solidFill>
                 <a:latin typeface="Calibri"/>
               </a:rPr>
-              <a:t>•  SaaS Snowflake/Fabric : ~ 80 à 250 € / mois</a:t>
+              <a:t>•  SaaS : Snowflake ~40-80 € (usage) · Fabric ~180-305 € (capacité)</a:t>
             </a:r>
           </a:p>
           <a:p>
             <a:pPr>
               <a:spcAft>
-                <a:spcPts val="1000"/>
+                <a:spcPts val="800"/>
               </a:spcAft>
             </a:pPr>
             <a:r>
@@ -8037,7 +8047,7 @@
                 </a:solidFill>
                 <a:latin typeface="Calibri"/>
               </a:rPr>
-              <a:t>•  SaaS écarté (réel) : coût récurrent + souveraineté des données</a:t>
+              <a:t>•  SaaS écarté (réel) : coût récurrent + souveraineté des données de santé</a:t>
             </a:r>
           </a:p>
         </p:txBody>
@@ -8166,312 +8176,66 @@
           <a:p>
             <a:pPr>
               <a:spcAft>
-                <a:spcPts val="1000"/>
+                <a:spcPts val="800"/>
               </a:spcAft>
             </a:pPr>
             <a:r>
-              <a:rPr sz="2100" dirty="0">
+              <a:rPr sz="2100">
                 <a:solidFill>
                   <a:srgbClr val="404040"/>
                 </a:solidFill>
                 <a:latin typeface="Calibri"/>
               </a:rPr>
-              <a:t>•  bronze (brut) · silver (</a:t>
-            </a:r>
-            <a:r>
-              <a:rPr sz="2100" dirty="0" err="1">
-                <a:solidFill>
-                  <a:srgbClr val="404040"/>
-                </a:solidFill>
-                <a:latin typeface="Calibri"/>
-              </a:rPr>
-              <a:t>typé</a:t>
-            </a:r>
-            <a:r>
-              <a:rPr sz="2100" dirty="0">
-                <a:solidFill>
-                  <a:srgbClr val="404040"/>
-                </a:solidFill>
-                <a:latin typeface="Calibri"/>
-              </a:rPr>
-              <a:t>) · gold (métier) · ops (journal)</a:t>
+              <a:t>•  bronze (brut) · silver (typé) · gold (métier) · ops (journal)</a:t>
             </a:r>
           </a:p>
           <a:p>
             <a:pPr>
               <a:spcAft>
-                <a:spcPts val="1000"/>
+                <a:spcPts val="800"/>
               </a:spcAft>
             </a:pPr>
             <a:r>
-              <a:rPr sz="2100" dirty="0">
+              <a:rPr sz="2100">
                 <a:solidFill>
                   <a:srgbClr val="404040"/>
                 </a:solidFill>
                 <a:latin typeface="Calibri"/>
               </a:rPr>
-              <a:t>•  Deux </a:t>
-            </a:r>
-            <a:r>
-              <a:rPr sz="2100" dirty="0" err="1">
-                <a:solidFill>
-                  <a:srgbClr val="404040"/>
-                </a:solidFill>
-                <a:latin typeface="Calibri"/>
-              </a:rPr>
-              <a:t>rôles</a:t>
-            </a:r>
-            <a:r>
-              <a:rPr sz="2100" dirty="0">
-                <a:solidFill>
-                  <a:srgbClr val="404040"/>
-                </a:solidFill>
-                <a:latin typeface="Calibri"/>
-              </a:rPr>
-              <a:t> : le pipeline </a:t>
-            </a:r>
-            <a:r>
-              <a:rPr sz="2100" dirty="0" err="1">
-                <a:solidFill>
-                  <a:srgbClr val="404040"/>
-                </a:solidFill>
-                <a:latin typeface="Calibri"/>
-              </a:rPr>
-              <a:t>écrit</a:t>
-            </a:r>
-            <a:r>
-              <a:rPr sz="2100" dirty="0">
-                <a:solidFill>
-                  <a:srgbClr val="404040"/>
-                </a:solidFill>
-                <a:latin typeface="Calibri"/>
-              </a:rPr>
-              <a:t>, le métier lit gold </a:t>
-            </a:r>
-            <a:r>
-              <a:rPr sz="2100" dirty="0" err="1">
-                <a:solidFill>
-                  <a:srgbClr val="404040"/>
-                </a:solidFill>
-                <a:latin typeface="Calibri"/>
-              </a:rPr>
-              <a:t>seulement</a:t>
-            </a:r>
-            <a:endParaRPr sz="2100" dirty="0">
-              <a:solidFill>
-                <a:srgbClr val="404040"/>
-              </a:solidFill>
-              <a:latin typeface="Calibri"/>
-            </a:endParaRPr>
+              <a:t>•  Trois rôles : administration (DBA), écriture (pipeline), lecture (métier)</a:t>
+            </a:r>
           </a:p>
           <a:p>
             <a:pPr>
               <a:spcAft>
-                <a:spcPts val="1000"/>
+                <a:spcPts val="800"/>
               </a:spcAft>
             </a:pPr>
             <a:r>
-              <a:rPr sz="2100" dirty="0">
+              <a:rPr sz="2100">
                 <a:solidFill>
                   <a:srgbClr val="404040"/>
                 </a:solidFill>
                 <a:latin typeface="Calibri"/>
               </a:rPr>
-              <a:t>•  Le </a:t>
-            </a:r>
-            <a:r>
-              <a:rPr sz="2100" dirty="0" err="1">
-                <a:solidFill>
-                  <a:srgbClr val="404040"/>
-                </a:solidFill>
-                <a:latin typeface="Calibri"/>
-              </a:rPr>
-              <a:t>rôle</a:t>
-            </a:r>
-            <a:r>
-              <a:rPr sz="2100" dirty="0">
-                <a:solidFill>
-                  <a:srgbClr val="404040"/>
-                </a:solidFill>
-                <a:latin typeface="Calibri"/>
-              </a:rPr>
-              <a:t> lecture ne </a:t>
-            </a:r>
-            <a:r>
-              <a:rPr sz="2100" dirty="0" err="1">
-                <a:solidFill>
-                  <a:srgbClr val="404040"/>
-                </a:solidFill>
-                <a:latin typeface="Calibri"/>
-              </a:rPr>
-              <a:t>peut</a:t>
-            </a:r>
-            <a:r>
-              <a:rPr sz="2100" dirty="0">
-                <a:solidFill>
-                  <a:srgbClr val="404040"/>
-                </a:solidFill>
-                <a:latin typeface="Calibri"/>
-              </a:rPr>
-              <a:t> </a:t>
-            </a:r>
-            <a:r>
-              <a:rPr sz="2100" dirty="0" err="1">
-                <a:solidFill>
-                  <a:srgbClr val="404040"/>
-                </a:solidFill>
-                <a:latin typeface="Calibri"/>
-              </a:rPr>
-              <a:t>ni</a:t>
-            </a:r>
-            <a:r>
-              <a:rPr sz="2100" dirty="0">
-                <a:solidFill>
-                  <a:srgbClr val="404040"/>
-                </a:solidFill>
-                <a:latin typeface="Calibri"/>
-              </a:rPr>
-              <a:t> </a:t>
-            </a:r>
-            <a:r>
-              <a:rPr sz="2100" dirty="0" err="1">
-                <a:solidFill>
-                  <a:srgbClr val="404040"/>
-                </a:solidFill>
-                <a:latin typeface="Calibri"/>
-              </a:rPr>
-              <a:t>écrire</a:t>
-            </a:r>
-            <a:r>
-              <a:rPr sz="2100" dirty="0">
-                <a:solidFill>
-                  <a:srgbClr val="404040"/>
-                </a:solidFill>
-                <a:latin typeface="Calibri"/>
-              </a:rPr>
-              <a:t> </a:t>
-            </a:r>
-            <a:r>
-              <a:rPr sz="2100" dirty="0" err="1">
-                <a:solidFill>
-                  <a:srgbClr val="404040"/>
-                </a:solidFill>
-                <a:latin typeface="Calibri"/>
-              </a:rPr>
-              <a:t>ni</a:t>
-            </a:r>
-            <a:r>
-              <a:rPr sz="2100" dirty="0">
-                <a:solidFill>
-                  <a:srgbClr val="404040"/>
-                </a:solidFill>
-                <a:latin typeface="Calibri"/>
-              </a:rPr>
-              <a:t> lire le brut</a:t>
-            </a:r>
-            <a:r>
-              <a:rPr lang="fr-FR" sz="2100" dirty="0">
-                <a:solidFill>
-                  <a:srgbClr val="404040"/>
-                </a:solidFill>
-                <a:latin typeface="Calibri"/>
-              </a:rPr>
-              <a:t> -&gt;</a:t>
-            </a:r>
-            <a:r>
-              <a:rPr sz="2100" dirty="0">
-                <a:solidFill>
-                  <a:srgbClr val="404040"/>
-                </a:solidFill>
-                <a:latin typeface="Calibri"/>
-              </a:rPr>
-              <a:t> TESTÉ</a:t>
+              <a:t>•  La lecture ne peut ni écrire ni lire le brut — TESTÉ</a:t>
             </a:r>
           </a:p>
           <a:p>
             <a:pPr>
               <a:spcAft>
-                <a:spcPts val="1000"/>
+                <a:spcPts val="800"/>
               </a:spcAft>
             </a:pPr>
             <a:r>
-              <a:rPr sz="2100" dirty="0">
+              <a:rPr sz="2100">
                 <a:solidFill>
                   <a:srgbClr val="404040"/>
                 </a:solidFill>
                 <a:latin typeface="Calibri"/>
               </a:rPr>
-              <a:t>•  Le métier </a:t>
-            </a:r>
-            <a:r>
-              <a:rPr sz="2100" dirty="0" err="1">
-                <a:solidFill>
-                  <a:srgbClr val="404040"/>
-                </a:solidFill>
-                <a:latin typeface="Calibri"/>
-              </a:rPr>
-              <a:t>consomme</a:t>
-            </a:r>
-            <a:r>
-              <a:rPr sz="2100" dirty="0">
-                <a:solidFill>
-                  <a:srgbClr val="404040"/>
-                </a:solidFill>
-                <a:latin typeface="Calibri"/>
-              </a:rPr>
-              <a:t> </a:t>
-            </a:r>
-            <a:r>
-              <a:rPr sz="2100" dirty="0" err="1">
-                <a:solidFill>
-                  <a:srgbClr val="404040"/>
-                </a:solidFill>
-                <a:latin typeface="Calibri"/>
-              </a:rPr>
-              <a:t>une</a:t>
-            </a:r>
-            <a:r>
-              <a:rPr sz="2100" dirty="0">
-                <a:solidFill>
-                  <a:srgbClr val="404040"/>
-                </a:solidFill>
-                <a:latin typeface="Calibri"/>
-              </a:rPr>
-              <a:t> </a:t>
-            </a:r>
-            <a:r>
-              <a:rPr sz="2100" dirty="0" err="1">
-                <a:solidFill>
-                  <a:srgbClr val="404040"/>
-                </a:solidFill>
-                <a:latin typeface="Calibri"/>
-              </a:rPr>
-              <a:t>vue</a:t>
-            </a:r>
-            <a:r>
-              <a:rPr sz="2100" dirty="0">
-                <a:solidFill>
-                  <a:srgbClr val="404040"/>
-                </a:solidFill>
-                <a:latin typeface="Calibri"/>
-              </a:rPr>
-              <a:t> déjà </a:t>
-            </a:r>
-            <a:r>
-              <a:rPr sz="2100" dirty="0" err="1">
-                <a:solidFill>
-                  <a:srgbClr val="404040"/>
-                </a:solidFill>
-                <a:latin typeface="Calibri"/>
-              </a:rPr>
-              <a:t>priorisée</a:t>
-            </a:r>
-            <a:endParaRPr sz="2100" dirty="0">
-              <a:solidFill>
-                <a:srgbClr val="404040"/>
-              </a:solidFill>
-              <a:latin typeface="Calibri"/>
-            </a:endParaRPr>
+              <a:t>•  Le métier consomme une vue déjà priorisée</a:t>
+            </a:r>
           </a:p>
         </p:txBody>
       </p:sp>
@@ -8599,7 +8363,7 @@
           <a:p>
             <a:pPr>
               <a:spcAft>
-                <a:spcPts val="1000"/>
+                <a:spcPts val="800"/>
               </a:spcAft>
             </a:pPr>
             <a:r>
@@ -8609,13 +8373,13 @@
                 </a:solidFill>
                 <a:latin typeface="Calibri"/>
               </a:rPr>
-              <a:t>•  Fil de l'eau (SQL) : typage, nettoyage, déduplication dans le moteur</a:t>
+              <a:t>•  Choix ELT : charger le brut, puis transformer (rejouabilité + au plus près)</a:t>
             </a:r>
           </a:p>
           <a:p>
             <a:pPr>
               <a:spcAft>
-                <a:spcPts val="1000"/>
+                <a:spcPts val="800"/>
               </a:spcAft>
             </a:pPr>
             <a:r>
@@ -8625,13 +8389,13 @@
                 </a:solidFill>
                 <a:latin typeface="Calibri"/>
               </a:rPr>
-              <a:t>•  Orchestration (Airflow) : enchaîne et fiabilise</a:t>
+              <a:t>•  Fil de l'eau (SQL) : typage, nettoyage, déduplication</a:t>
             </a:r>
           </a:p>
           <a:p>
             <a:pPr>
               <a:spcAft>
-                <a:spcPts val="1000"/>
+                <a:spcPts val="800"/>
               </a:spcAft>
             </a:pPr>
             <a:r>
@@ -8641,13 +8405,13 @@
                 </a:solidFill>
                 <a:latin typeface="Calibri"/>
               </a:rPr>
-              <a:t>•  Distribué (Spark) : absorbe le volume du rapprochement</a:t>
+              <a:t>•  Orchestration (Airflow) : enchaîne et fiabilise</a:t>
             </a:r>
           </a:p>
           <a:p>
             <a:pPr>
               <a:spcAft>
-                <a:spcPts val="1000"/>
+                <a:spcPts val="800"/>
               </a:spcAft>
             </a:pPr>
             <a:r>
@@ -8657,7 +8421,7 @@
                 </a:solidFill>
                 <a:latin typeface="Calibri"/>
               </a:rPr>
-              <a:t>•  Chaque méthode produit une donnée demandée</a:t>
+              <a:t>•  Distribué (Spark) : absorbe le volume du rapprochement</a:t>
             </a:r>
           </a:p>
         </p:txBody>
@@ -8786,7 +8550,7 @@
           <a:p>
             <a:pPr>
               <a:spcAft>
-                <a:spcPts val="1000"/>
+                <a:spcPts val="800"/>
               </a:spcAft>
             </a:pPr>
             <a:r>
@@ -8796,7 +8560,23 @@
                 </a:solidFill>
                 <a:latin typeface="Calibri"/>
               </a:rPr>
-              <a:t>•  4 tâches · retries · SLA · callbacks d'alerte · exécution réelle data.gouv</a:t>
+              <a:t>•  4 tâches : catalogue data.gouv → validation contrat → bronze → silver</a:t>
+            </a:r>
+          </a:p>
+          <a:p>
+            <a:pPr>
+              <a:spcAft>
+                <a:spcPts val="800"/>
+              </a:spcAft>
+            </a:pPr>
+            <a:r>
+              <a:rPr sz="1700">
+                <a:solidFill>
+                  <a:srgbClr val="404040"/>
+                </a:solidFill>
+                <a:latin typeface="Calibri"/>
+              </a:rPr>
+              <a:t>•  Retries · SLA · callbacks d'alerte · exécution réelle sur le fichier INSEE</a:t>
             </a:r>
           </a:p>
         </p:txBody>

--- a/soutenance/support_eckert.pptx
+++ b/soutenance/support_eckert.pptx
@@ -6159,7 +6159,7 @@
           <a:p>
             <a:pPr>
               <a:spcAft>
-                <a:spcPts val="1000"/>
+                <a:spcPts val="800"/>
               </a:spcAft>
             </a:pPr>
             <a:r>
@@ -6169,13 +6169,13 @@
                 </a:solidFill>
                 <a:latin typeface="Calibri"/>
               </a:rPr>
-              <a:t>•  Chaîne complète prouvée : ingestion → Spark → gold → restitution</a:t>
+              <a:t>•  Chaîne complète prouvée : ingestion → MinIO → Spark → gold → restitution</a:t>
             </a:r>
           </a:p>
           <a:p>
             <a:pPr>
               <a:spcAft>
-                <a:spcPts val="1000"/>
+                <a:spcPts val="800"/>
               </a:spcAft>
             </a:pPr>
             <a:r>
@@ -6191,7 +6191,7 @@
           <a:p>
             <a:pPr>
               <a:spcAft>
-                <a:spcPts val="1000"/>
+                <a:spcPts val="800"/>
               </a:spcAft>
             </a:pPr>
             <a:r>
@@ -6201,13 +6201,13 @@
                 </a:solidFill>
                 <a:latin typeface="Calibri"/>
               </a:rPr>
-              <a:t>•  Limites : Postgres unique · Spark lancé manuellement · pas de supervision infra</a:t>
+              <a:t>•  Limites : Postgres unique · Spark lancé manuellement · supervision applicative</a:t>
             </a:r>
           </a:p>
           <a:p>
             <a:pPr>
               <a:spcAft>
-                <a:spcPts val="1000"/>
+                <a:spcPts val="800"/>
               </a:spcAft>
             </a:pPr>
             <a:r>
@@ -6217,7 +6217,7 @@
                 </a:solidFill>
                 <a:latin typeface="Calibri"/>
               </a:rPr>
-              <a:t>•  À poursuivre : déclenchement Spark par Airflow, supervision d'infra</a:t>
+              <a:t>•  À poursuivre : Spark via Airflow · supervision infra (Prometheus/Grafana + exporteurs)</a:t>
             </a:r>
           </a:p>
         </p:txBody>
@@ -8373,7 +8373,7 @@
                 </a:solidFill>
                 <a:latin typeface="Calibri"/>
               </a:rPr>
-              <a:t>•  Choix ELT : charger le brut, puis transformer (rejouabilité + au plus près)</a:t>
+              <a:t>•  Choix ELT : le brut d'abord (fichiers → MinIO objet, lignes → Postgres), transfo ensuite</a:t>
             </a:r>
           </a:p>
           <a:p>
